--- a/assets/downloads/ron-carupano-master-deck.pptx
+++ b/assets/downloads/ron-carupano-master-deck.pptx
@@ -2,32 +2,36 @@
 <file path=ppt/presentation.xml><?xml version="1.0" encoding="utf-8"?>
 <p:presentation xmlns:p="http://schemas.openxmlformats.org/presentationml/2006/main">
   <p:sldMasterIdLst>
-    <p:sldMasterId xmlns:r="http://schemas.openxmlformats.org/officeDocument/2006/relationships" id="2147483648" r:id="R79ed406f3ab543d8"/>
+    <p:sldMasterId xmlns:r="http://schemas.openxmlformats.org/officeDocument/2006/relationships" id="2147483648" r:id="R348aab04caf14790"/>
   </p:sldMasterIdLst>
   <p:notesMasterIdLst>
-    <p:notesMasterId xmlns:r="http://schemas.openxmlformats.org/officeDocument/2006/relationships" r:id="Rd393c4d6ca3f4b8a"/>
+    <p:notesMasterId xmlns:r="http://schemas.openxmlformats.org/officeDocument/2006/relationships" r:id="Raaf29350863b43c6"/>
   </p:notesMasterIdLst>
   <p:sldIdLst>
-    <p:sldId xmlns:r="http://schemas.openxmlformats.org/officeDocument/2006/relationships" id="256" r:id="R53dd6eb0e9b14c21"/>
-    <p:sldId xmlns:r="http://schemas.openxmlformats.org/officeDocument/2006/relationships" id="257" r:id="R72a75392eabc4055"/>
-    <p:sldId xmlns:r="http://schemas.openxmlformats.org/officeDocument/2006/relationships" id="258" r:id="R469484c8e0b74542"/>
-    <p:sldId xmlns:r="http://schemas.openxmlformats.org/officeDocument/2006/relationships" id="259" r:id="R021724d87a034019"/>
-    <p:sldId xmlns:r="http://schemas.openxmlformats.org/officeDocument/2006/relationships" id="260" r:id="Ra81d345259024df4"/>
-    <p:sldId xmlns:r="http://schemas.openxmlformats.org/officeDocument/2006/relationships" id="261" r:id="R19acad7fbd3d4a44"/>
-    <p:sldId xmlns:r="http://schemas.openxmlformats.org/officeDocument/2006/relationships" id="262" r:id="Red43e12a600841eb"/>
-    <p:sldId xmlns:r="http://schemas.openxmlformats.org/officeDocument/2006/relationships" id="263" r:id="Rf7a8d94999084057"/>
-    <p:sldId xmlns:r="http://schemas.openxmlformats.org/officeDocument/2006/relationships" id="264" r:id="R7d9e1b66f7af44af"/>
-    <p:sldId xmlns:r="http://schemas.openxmlformats.org/officeDocument/2006/relationships" id="265" r:id="R02f08b518e0f4996"/>
-    <p:sldId xmlns:r="http://schemas.openxmlformats.org/officeDocument/2006/relationships" id="266" r:id="Rad9fae347ccc4d6c"/>
-    <p:sldId xmlns:r="http://schemas.openxmlformats.org/officeDocument/2006/relationships" id="267" r:id="R13d9d95c88af425e"/>
-    <p:sldId xmlns:r="http://schemas.openxmlformats.org/officeDocument/2006/relationships" id="268" r:id="R2537eb8624bb418b"/>
-    <p:sldId xmlns:r="http://schemas.openxmlformats.org/officeDocument/2006/relationships" id="269" r:id="R64fa851d6edd4da7"/>
-    <p:sldId xmlns:r="http://schemas.openxmlformats.org/officeDocument/2006/relationships" id="270" r:id="Rf4d006a1ea074ba5"/>
-    <p:sldId xmlns:r="http://schemas.openxmlformats.org/officeDocument/2006/relationships" id="271" r:id="Rf67244ea12a44716"/>
-    <p:sldId xmlns:r="http://schemas.openxmlformats.org/officeDocument/2006/relationships" id="272" r:id="Re750b969293e4f0f"/>
-    <p:sldId xmlns:r="http://schemas.openxmlformats.org/officeDocument/2006/relationships" id="273" r:id="R9154d36f15f5498f"/>
-    <p:sldId xmlns:r="http://schemas.openxmlformats.org/officeDocument/2006/relationships" id="274" r:id="R5a01cb83151f4476"/>
-    <p:sldId xmlns:r="http://schemas.openxmlformats.org/officeDocument/2006/relationships" id="275" r:id="R0ab15c6f5f264a04"/>
+    <p:sldId xmlns:r="http://schemas.openxmlformats.org/officeDocument/2006/relationships" id="256" r:id="R917d96c000d444d6"/>
+    <p:sldId xmlns:r="http://schemas.openxmlformats.org/officeDocument/2006/relationships" id="257" r:id="R10f7a7b27c7744bd"/>
+    <p:sldId xmlns:r="http://schemas.openxmlformats.org/officeDocument/2006/relationships" id="258" r:id="R1dee23fd9f02472c"/>
+    <p:sldId xmlns:r="http://schemas.openxmlformats.org/officeDocument/2006/relationships" id="259" r:id="R51da13e0ce5e410d"/>
+    <p:sldId xmlns:r="http://schemas.openxmlformats.org/officeDocument/2006/relationships" id="260" r:id="R1122febb3a3c4a1d"/>
+    <p:sldId xmlns:r="http://schemas.openxmlformats.org/officeDocument/2006/relationships" id="261" r:id="R57b663b8e7b247cc"/>
+    <p:sldId xmlns:r="http://schemas.openxmlformats.org/officeDocument/2006/relationships" id="262" r:id="Rbf4bbc07daed4244"/>
+    <p:sldId xmlns:r="http://schemas.openxmlformats.org/officeDocument/2006/relationships" id="263" r:id="R1c3245ff5d454959"/>
+    <p:sldId xmlns:r="http://schemas.openxmlformats.org/officeDocument/2006/relationships" id="264" r:id="R8fc478ccb3674254"/>
+    <p:sldId xmlns:r="http://schemas.openxmlformats.org/officeDocument/2006/relationships" id="265" r:id="R91a4f6d143004a0c"/>
+    <p:sldId xmlns:r="http://schemas.openxmlformats.org/officeDocument/2006/relationships" id="266" r:id="Ra9e9c998db184a1f"/>
+    <p:sldId xmlns:r="http://schemas.openxmlformats.org/officeDocument/2006/relationships" id="267" r:id="R21028ef9c2874823"/>
+    <p:sldId xmlns:r="http://schemas.openxmlformats.org/officeDocument/2006/relationships" id="268" r:id="Rb8b57d814ac64fe4"/>
+    <p:sldId xmlns:r="http://schemas.openxmlformats.org/officeDocument/2006/relationships" id="269" r:id="R4a54645694c74ad2"/>
+    <p:sldId xmlns:r="http://schemas.openxmlformats.org/officeDocument/2006/relationships" id="270" r:id="Rfa67293f9aca4bac"/>
+    <p:sldId xmlns:r="http://schemas.openxmlformats.org/officeDocument/2006/relationships" id="271" r:id="R76f6987831ac44dc"/>
+    <p:sldId xmlns:r="http://schemas.openxmlformats.org/officeDocument/2006/relationships" id="272" r:id="R80406036d43d412e"/>
+    <p:sldId xmlns:r="http://schemas.openxmlformats.org/officeDocument/2006/relationships" id="273" r:id="Reabec91fd33c4a9f"/>
+    <p:sldId xmlns:r="http://schemas.openxmlformats.org/officeDocument/2006/relationships" id="274" r:id="R519612ab4f514408"/>
+    <p:sldId xmlns:r="http://schemas.openxmlformats.org/officeDocument/2006/relationships" id="275" r:id="R87f52bd6fa1e4c66"/>
+    <p:sldId xmlns:r="http://schemas.openxmlformats.org/officeDocument/2006/relationships" id="276" r:id="Rc3f28e7b657649ae"/>
+    <p:sldId xmlns:r="http://schemas.openxmlformats.org/officeDocument/2006/relationships" id="277" r:id="R70d3b94b6e604948"/>
+    <p:sldId xmlns:r="http://schemas.openxmlformats.org/officeDocument/2006/relationships" id="278" r:id="Rcb1a2eadeeaa4816"/>
+    <p:sldId xmlns:r="http://schemas.openxmlformats.org/officeDocument/2006/relationships" id="279" r:id="R807c69a8d4f94e3e"/>
   </p:sldIdLst>
   <p:sldSz cx="12192000" cy="6858000"/>
   <p:notesSz cx="6858000" cy="9144000"/>
@@ -1374,6 +1378,270 @@
 </p:notes>
 </file>
 
+<file path=ppt/notesSlides/notesSlide21.xml><?xml version="1.0" encoding="utf-8"?>
+<p:notes xmlns:p="http://schemas.openxmlformats.org/presentationml/2006/main">
+  <p:cSld>
+    <p:spTree>
+      <p:nvGrpSpPr>
+        <p:cNvPr id="1" name=""/>
+        <p:cNvGrpSpPr/>
+        <p:nvPr/>
+      </p:nvGrpSpPr>
+      <p:grpSpPr>
+        <a:xfrm xmlns:a="http://schemas.openxmlformats.org/drawingml/2006/main"/>
+      </p:grpSpPr>
+      <p:sp>
+        <p:nvSpPr>
+          <p:cNvPr id="2" name="Slide Image Placeholder 1"/>
+          <p:cNvSpPr>
+            <a:spLocks xmlns:a="http://schemas.openxmlformats.org/drawingml/2006/main" noGrp="1"/>
+          </p:cNvSpPr>
+          <p:nvPr>
+            <p:ph type="sldImg" idx="0"/>
+          </p:nvPr>
+        </p:nvSpPr>
+        <p:spPr/>
+      </p:sp>
+      <p:sp>
+        <p:nvSpPr>
+          <p:cNvPr id="3" name="Notes Placeholder 2"/>
+          <p:cNvSpPr>
+            <a:spLocks xmlns:a="http://schemas.openxmlformats.org/drawingml/2006/main" noGrp="1"/>
+          </p:cNvSpPr>
+          <p:nvPr>
+            <p:ph type="body" idx="1"/>
+          </p:nvPr>
+        </p:nvSpPr>
+        <p:spPr/>
+        <p:txBody>
+          <a:bodyPr xmlns:a="http://schemas.openxmlformats.org/drawingml/2006/main"/>
+          <a:lstStyle xmlns:a="http://schemas.openxmlformats.org/drawingml/2006/main"/>
+          <a:p xmlns:a="http://schemas.openxmlformats.org/drawingml/2006/main"/>
+        </p:txBody>
+      </p:sp>
+      <p:sp>
+        <p:nvSpPr>
+          <p:cNvPr id="4" name="Slide Number Placeholder 3"/>
+          <p:cNvSpPr>
+            <a:spLocks xmlns:a="http://schemas.openxmlformats.org/drawingml/2006/main" noGrp="1"/>
+          </p:cNvSpPr>
+          <p:nvPr>
+            <p:ph type="sldNum" idx="5"/>
+          </p:nvPr>
+        </p:nvSpPr>
+        <p:spPr/>
+        <p:txBody>
+          <a:bodyPr xmlns:a="http://schemas.openxmlformats.org/drawingml/2006/main"/>
+          <a:lstStyle xmlns:a="http://schemas.openxmlformats.org/drawingml/2006/main"/>
+          <a:p xmlns:a="http://schemas.openxmlformats.org/drawingml/2006/main"/>
+        </p:txBody>
+      </p:sp>
+    </p:spTree>
+  </p:cSld>
+  <p:clrMapOvr>
+    <a:masterClrMapping xmlns:a="http://schemas.openxmlformats.org/drawingml/2006/main"/>
+  </p:clrMapOvr>
+</p:notes>
+</file>
+
+<file path=ppt/notesSlides/notesSlide22.xml><?xml version="1.0" encoding="utf-8"?>
+<p:notes xmlns:p="http://schemas.openxmlformats.org/presentationml/2006/main">
+  <p:cSld>
+    <p:spTree>
+      <p:nvGrpSpPr>
+        <p:cNvPr id="1" name=""/>
+        <p:cNvGrpSpPr/>
+        <p:nvPr/>
+      </p:nvGrpSpPr>
+      <p:grpSpPr>
+        <a:xfrm xmlns:a="http://schemas.openxmlformats.org/drawingml/2006/main"/>
+      </p:grpSpPr>
+      <p:sp>
+        <p:nvSpPr>
+          <p:cNvPr id="2" name="Slide Image Placeholder 1"/>
+          <p:cNvSpPr>
+            <a:spLocks xmlns:a="http://schemas.openxmlformats.org/drawingml/2006/main" noGrp="1"/>
+          </p:cNvSpPr>
+          <p:nvPr>
+            <p:ph type="sldImg" idx="0"/>
+          </p:nvPr>
+        </p:nvSpPr>
+        <p:spPr/>
+      </p:sp>
+      <p:sp>
+        <p:nvSpPr>
+          <p:cNvPr id="3" name="Notes Placeholder 2"/>
+          <p:cNvSpPr>
+            <a:spLocks xmlns:a="http://schemas.openxmlformats.org/drawingml/2006/main" noGrp="1"/>
+          </p:cNvSpPr>
+          <p:nvPr>
+            <p:ph type="body" idx="1"/>
+          </p:nvPr>
+        </p:nvSpPr>
+        <p:spPr/>
+        <p:txBody>
+          <a:bodyPr xmlns:a="http://schemas.openxmlformats.org/drawingml/2006/main"/>
+          <a:lstStyle xmlns:a="http://schemas.openxmlformats.org/drawingml/2006/main"/>
+          <a:p xmlns:a="http://schemas.openxmlformats.org/drawingml/2006/main"/>
+        </p:txBody>
+      </p:sp>
+      <p:sp>
+        <p:nvSpPr>
+          <p:cNvPr id="4" name="Slide Number Placeholder 3"/>
+          <p:cNvSpPr>
+            <a:spLocks xmlns:a="http://schemas.openxmlformats.org/drawingml/2006/main" noGrp="1"/>
+          </p:cNvSpPr>
+          <p:nvPr>
+            <p:ph type="sldNum" idx="5"/>
+          </p:nvPr>
+        </p:nvSpPr>
+        <p:spPr/>
+        <p:txBody>
+          <a:bodyPr xmlns:a="http://schemas.openxmlformats.org/drawingml/2006/main"/>
+          <a:lstStyle xmlns:a="http://schemas.openxmlformats.org/drawingml/2006/main"/>
+          <a:p xmlns:a="http://schemas.openxmlformats.org/drawingml/2006/main"/>
+        </p:txBody>
+      </p:sp>
+    </p:spTree>
+  </p:cSld>
+  <p:clrMapOvr>
+    <a:masterClrMapping xmlns:a="http://schemas.openxmlformats.org/drawingml/2006/main"/>
+  </p:clrMapOvr>
+</p:notes>
+</file>
+
+<file path=ppt/notesSlides/notesSlide23.xml><?xml version="1.0" encoding="utf-8"?>
+<p:notes xmlns:p="http://schemas.openxmlformats.org/presentationml/2006/main">
+  <p:cSld>
+    <p:spTree>
+      <p:nvGrpSpPr>
+        <p:cNvPr id="1" name=""/>
+        <p:cNvGrpSpPr/>
+        <p:nvPr/>
+      </p:nvGrpSpPr>
+      <p:grpSpPr>
+        <a:xfrm xmlns:a="http://schemas.openxmlformats.org/drawingml/2006/main"/>
+      </p:grpSpPr>
+      <p:sp>
+        <p:nvSpPr>
+          <p:cNvPr id="2" name="Slide Image Placeholder 1"/>
+          <p:cNvSpPr>
+            <a:spLocks xmlns:a="http://schemas.openxmlformats.org/drawingml/2006/main" noGrp="1"/>
+          </p:cNvSpPr>
+          <p:nvPr>
+            <p:ph type="sldImg" idx="0"/>
+          </p:nvPr>
+        </p:nvSpPr>
+        <p:spPr/>
+      </p:sp>
+      <p:sp>
+        <p:nvSpPr>
+          <p:cNvPr id="3" name="Notes Placeholder 2"/>
+          <p:cNvSpPr>
+            <a:spLocks xmlns:a="http://schemas.openxmlformats.org/drawingml/2006/main" noGrp="1"/>
+          </p:cNvSpPr>
+          <p:nvPr>
+            <p:ph type="body" idx="1"/>
+          </p:nvPr>
+        </p:nvSpPr>
+        <p:spPr/>
+        <p:txBody>
+          <a:bodyPr xmlns:a="http://schemas.openxmlformats.org/drawingml/2006/main"/>
+          <a:lstStyle xmlns:a="http://schemas.openxmlformats.org/drawingml/2006/main"/>
+          <a:p xmlns:a="http://schemas.openxmlformats.org/drawingml/2006/main"/>
+        </p:txBody>
+      </p:sp>
+      <p:sp>
+        <p:nvSpPr>
+          <p:cNvPr id="4" name="Slide Number Placeholder 3"/>
+          <p:cNvSpPr>
+            <a:spLocks xmlns:a="http://schemas.openxmlformats.org/drawingml/2006/main" noGrp="1"/>
+          </p:cNvSpPr>
+          <p:nvPr>
+            <p:ph type="sldNum" idx="5"/>
+          </p:nvPr>
+        </p:nvSpPr>
+        <p:spPr/>
+        <p:txBody>
+          <a:bodyPr xmlns:a="http://schemas.openxmlformats.org/drawingml/2006/main"/>
+          <a:lstStyle xmlns:a="http://schemas.openxmlformats.org/drawingml/2006/main"/>
+          <a:p xmlns:a="http://schemas.openxmlformats.org/drawingml/2006/main"/>
+        </p:txBody>
+      </p:sp>
+    </p:spTree>
+  </p:cSld>
+  <p:clrMapOvr>
+    <a:masterClrMapping xmlns:a="http://schemas.openxmlformats.org/drawingml/2006/main"/>
+  </p:clrMapOvr>
+</p:notes>
+</file>
+
+<file path=ppt/notesSlides/notesSlide24.xml><?xml version="1.0" encoding="utf-8"?>
+<p:notes xmlns:p="http://schemas.openxmlformats.org/presentationml/2006/main">
+  <p:cSld>
+    <p:spTree>
+      <p:nvGrpSpPr>
+        <p:cNvPr id="1" name=""/>
+        <p:cNvGrpSpPr/>
+        <p:nvPr/>
+      </p:nvGrpSpPr>
+      <p:grpSpPr>
+        <a:xfrm xmlns:a="http://schemas.openxmlformats.org/drawingml/2006/main"/>
+      </p:grpSpPr>
+      <p:sp>
+        <p:nvSpPr>
+          <p:cNvPr id="2" name="Slide Image Placeholder 1"/>
+          <p:cNvSpPr>
+            <a:spLocks xmlns:a="http://schemas.openxmlformats.org/drawingml/2006/main" noGrp="1"/>
+          </p:cNvSpPr>
+          <p:nvPr>
+            <p:ph type="sldImg" idx="0"/>
+          </p:nvPr>
+        </p:nvSpPr>
+        <p:spPr/>
+      </p:sp>
+      <p:sp>
+        <p:nvSpPr>
+          <p:cNvPr id="3" name="Notes Placeholder 2"/>
+          <p:cNvSpPr>
+            <a:spLocks xmlns:a="http://schemas.openxmlformats.org/drawingml/2006/main" noGrp="1"/>
+          </p:cNvSpPr>
+          <p:nvPr>
+            <p:ph type="body" idx="1"/>
+          </p:nvPr>
+        </p:nvSpPr>
+        <p:spPr/>
+        <p:txBody>
+          <a:bodyPr xmlns:a="http://schemas.openxmlformats.org/drawingml/2006/main"/>
+          <a:lstStyle xmlns:a="http://schemas.openxmlformats.org/drawingml/2006/main"/>
+          <a:p xmlns:a="http://schemas.openxmlformats.org/drawingml/2006/main"/>
+        </p:txBody>
+      </p:sp>
+      <p:sp>
+        <p:nvSpPr>
+          <p:cNvPr id="4" name="Slide Number Placeholder 3"/>
+          <p:cNvSpPr>
+            <a:spLocks xmlns:a="http://schemas.openxmlformats.org/drawingml/2006/main" noGrp="1"/>
+          </p:cNvSpPr>
+          <p:nvPr>
+            <p:ph type="sldNum" idx="5"/>
+          </p:nvPr>
+        </p:nvSpPr>
+        <p:spPr/>
+        <p:txBody>
+          <a:bodyPr xmlns:a="http://schemas.openxmlformats.org/drawingml/2006/main"/>
+          <a:lstStyle xmlns:a="http://schemas.openxmlformats.org/drawingml/2006/main"/>
+          <a:p xmlns:a="http://schemas.openxmlformats.org/drawingml/2006/main"/>
+        </p:txBody>
+      </p:sp>
+    </p:spTree>
+  </p:cSld>
+  <p:clrMapOvr>
+    <a:masterClrMapping xmlns:a="http://schemas.openxmlformats.org/drawingml/2006/main"/>
+  </p:clrMapOvr>
+</p:notes>
+</file>
+
 <file path=ppt/notesSlides/notesSlide3.xml><?xml version="1.0" encoding="utf-8"?>
 <p:notes xmlns:p="http://schemas.openxmlformats.org/presentationml/2006/main">
   <p:cSld>
@@ -1874,7 +2142,7 @@
   </p:cSld>
   <p:clrMap bg1="lt1" tx1="dk1" bg2="lt2" tx2="dk2" accent1="accent1" accent2="accent2" accent3="accent3" accent4="accent4" accent5="accent5" accent6="accent6" hlink="hlink" folHlink="folHlink"/>
   <p:sldLayoutIdLst>
-    <p:sldLayoutId xmlns:r="http://schemas.openxmlformats.org/officeDocument/2006/relationships" id="2147483649" r:id="R6f3c26b81ecc4bf7"/>
+    <p:sldLayoutId xmlns:r="http://schemas.openxmlformats.org/officeDocument/2006/relationships" id="2147483649" r:id="R57c303263f584758"/>
   </p:sldLayoutIdLst>
   <p:txStyles>
     <p:titleStyle>
@@ -2429,8 +2697,8 @@
           <p:nvPr/>
         </p:nvPicPr>
         <p:blipFill>
-          <a:blip xmlns:r="http://schemas.openxmlformats.org/officeDocument/2006/relationships" xmlns:a="http://schemas.openxmlformats.org/drawingml/2006/main" r:embed="R538b7ae15bfb4c7b"/>
-          <a:srcRect xmlns:a="http://schemas.openxmlformats.org/drawingml/2006/main" l="4636" t="0" r="4636" b="0"/>
+          <a:blip xmlns:r="http://schemas.openxmlformats.org/officeDocument/2006/relationships" xmlns:a="http://schemas.openxmlformats.org/drawingml/2006/main" r:embed="Rd84d94f630834e7d"/>
+          <a:srcRect xmlns:a="http://schemas.openxmlformats.org/drawingml/2006/main" l="4626" t="0" r="4626" b="0"/>
           <a:stretch xmlns:a="http://schemas.openxmlformats.org/drawingml/2006/main">
             <a:fillRect l="0" t="0" r="0" b="0"/>
           </a:stretch>
@@ -2450,7 +2718,7 @@
           <p:cNvPr id="2" name="veil">
             <a:extLst xmlns:a="http://schemas.openxmlformats.org/drawingml/2006/main">
               <a:ext uri="{FF2B5EF4-FFF2-40B4-BE49-F238E27FC236}">
-                <a16:creationId xmlns:a16="http://schemas.microsoft.com/office/drawing/2014/main" id="{19CA8FA6-BB86-476B-B81B-E0DA336B1403}"/>
+                <a16:creationId xmlns:a16="http://schemas.microsoft.com/office/drawing/2014/main" id="{1A3CBD85-D1C0-42DB-8B87-E19DC8BF847C}"/>
               </a:ext>
             </a:extLst>
           </p:cNvPr>
@@ -2483,7 +2751,7 @@
           <p:cNvPr id="3" name="eyebrow">
             <a:extLst xmlns:a="http://schemas.openxmlformats.org/drawingml/2006/main">
               <a:ext uri="{FF2B5EF4-FFF2-40B4-BE49-F238E27FC236}">
-                <a16:creationId xmlns:a16="http://schemas.microsoft.com/office/drawing/2014/main" id="{6CC1FB76-0F00-4C5E-A470-F5AA62280571}"/>
+                <a16:creationId xmlns:a16="http://schemas.microsoft.com/office/drawing/2014/main" id="{A629EAF9-4551-4FF3-90D2-EF1D63DCA716}"/>
               </a:ext>
             </a:extLst>
           </p:cNvPr>
@@ -2515,6 +2783,9 @@
                 <a:solidFill>
                   <a:srgbClr val="D5B879"/>
                 </a:solidFill>
+                <a:latin typeface="Inter"/>
+                <a:ea typeface="Inter"/>
+                <a:cs typeface="Inter"/>
               </a:defRPr>
             </a:pPr>
             <a:r>
@@ -2522,6 +2793,9 @@
                 <a:solidFill>
                   <a:srgbClr val="D5B879"/>
                 </a:solidFill>
+                <a:latin typeface="Inter"/>
+                <a:ea typeface="Inter"/>
+                <a:cs typeface="Inter"/>
               </a:rPr>
               <a:t>MASTER DECK CORPORATIVO</a:t>
             </a:r>
@@ -2533,7 +2807,7 @@
           <p:cNvPr id="4" name="title">
             <a:extLst xmlns:a="http://schemas.openxmlformats.org/drawingml/2006/main">
               <a:ext uri="{FF2B5EF4-FFF2-40B4-BE49-F238E27FC236}">
-                <a16:creationId xmlns:a16="http://schemas.microsoft.com/office/drawing/2014/main" id="{0159AD5A-241D-4057-8013-0878010CE94F}"/>
+                <a16:creationId xmlns:a16="http://schemas.microsoft.com/office/drawing/2014/main" id="{E22EC248-FA55-4F22-91BB-77931BC341C1}"/>
               </a:ext>
             </a:extLst>
           </p:cNvPr>
@@ -2565,6 +2839,9 @@
                 <a:solidFill>
                   <a:srgbClr val="F3EEE6"/>
                 </a:solidFill>
+                <a:latin typeface="Adobe Garamond Pro"/>
+                <a:ea typeface="Adobe Garamond Pro"/>
+                <a:cs typeface="Adobe Garamond Pro"/>
               </a:defRPr>
             </a:pPr>
             <a:r>
@@ -2572,6 +2849,9 @@
                 <a:solidFill>
                   <a:srgbClr val="F3EEE6"/>
                 </a:solidFill>
+                <a:latin typeface="Adobe Garamond Pro"/>
+                <a:ea typeface="Adobe Garamond Pro"/>
+                <a:cs typeface="Adobe Garamond Pro"/>
               </a:rPr>
               <a:t>El Caribe</a:t>
             </a:r>
@@ -2582,6 +2862,9 @@
                 <a:solidFill>
                   <a:srgbClr val="F3EEE6"/>
                 </a:solidFill>
+                <a:latin typeface="Adobe Garamond Pro"/>
+                <a:ea typeface="Adobe Garamond Pro"/>
+                <a:cs typeface="Adobe Garamond Pro"/>
               </a:defRPr>
             </a:pPr>
             <a:r>
@@ -2589,6 +2872,9 @@
                 <a:solidFill>
                   <a:srgbClr val="F3EEE6"/>
                 </a:solidFill>
+                <a:latin typeface="Adobe Garamond Pro"/>
+                <a:ea typeface="Adobe Garamond Pro"/>
+                <a:cs typeface="Adobe Garamond Pro"/>
               </a:rPr>
               <a:t>transforma</a:t>
             </a:r>
@@ -2599,6 +2885,9 @@
                 <a:solidFill>
                   <a:srgbClr val="F3EEE6"/>
                 </a:solidFill>
+                <a:latin typeface="Adobe Garamond Pro"/>
+                <a:ea typeface="Adobe Garamond Pro"/>
+                <a:cs typeface="Adobe Garamond Pro"/>
               </a:defRPr>
             </a:pPr>
             <a:r>
@@ -2606,6 +2895,9 @@
                 <a:solidFill>
                   <a:srgbClr val="F3EEE6"/>
                 </a:solidFill>
+                <a:latin typeface="Adobe Garamond Pro"/>
+                <a:ea typeface="Adobe Garamond Pro"/>
+                <a:cs typeface="Adobe Garamond Pro"/>
               </a:rPr>
               <a:t>el tiempo.</a:t>
             </a:r>
@@ -2617,7 +2909,7 @@
           <p:cNvPr id="5" name="subtitle">
             <a:extLst xmlns:a="http://schemas.openxmlformats.org/drawingml/2006/main">
               <a:ext uri="{FF2B5EF4-FFF2-40B4-BE49-F238E27FC236}">
-                <a16:creationId xmlns:a16="http://schemas.microsoft.com/office/drawing/2014/main" id="{35A584F6-195D-4AA1-A417-BFC6C8F50DB7}"/>
+                <a16:creationId xmlns:a16="http://schemas.microsoft.com/office/drawing/2014/main" id="{997B0B39-9ED9-4589-AAB0-B6206D29478B}"/>
               </a:ext>
             </a:extLst>
           </p:cNvPr>
@@ -2651,6 +2943,9 @@
                     <a:alpha val="69020"/>
                   </a:srgbClr>
                 </a:solidFill>
+                <a:latin typeface="Inter"/>
+                <a:ea typeface="Inter"/>
+                <a:cs typeface="Inter"/>
               </a:defRPr>
             </a:pPr>
             <a:r>
@@ -2660,6 +2955,9 @@
                     <a:alpha val="69020"/>
                   </a:srgbClr>
                 </a:solidFill>
+                <a:latin typeface="Inter"/>
+                <a:ea typeface="Inter"/>
+                <a:cs typeface="Inter"/>
               </a:rPr>
               <a:t>Sistema editable para estrategia, marca, producto y ejecución.</a:t>
             </a:r>
@@ -2671,7 +2969,7 @@
           <p:cNvPr id="6" name="rule">
             <a:extLst xmlns:a="http://schemas.openxmlformats.org/drawingml/2006/main">
               <a:ext uri="{FF2B5EF4-FFF2-40B4-BE49-F238E27FC236}">
-                <a16:creationId xmlns:a16="http://schemas.microsoft.com/office/drawing/2014/main" id="{74D93B88-BE9E-47C9-88AD-90F98B619B38}"/>
+                <a16:creationId xmlns:a16="http://schemas.microsoft.com/office/drawing/2014/main" id="{420C0116-5254-4D3F-8F8B-6F49F9A7E0CE}"/>
               </a:ext>
             </a:extLst>
           </p:cNvPr>
@@ -2702,7 +3000,7 @@
           <p:cNvPr id="7" name="edition">
             <a:extLst xmlns:a="http://schemas.openxmlformats.org/drawingml/2006/main">
               <a:ext uri="{FF2B5EF4-FFF2-40B4-BE49-F238E27FC236}">
-                <a16:creationId xmlns:a16="http://schemas.microsoft.com/office/drawing/2014/main" id="{128EA5F5-7DBF-4920-9B56-C89099AE8BF4}"/>
+                <a16:creationId xmlns:a16="http://schemas.microsoft.com/office/drawing/2014/main" id="{9ECBFE93-DB2B-4EB5-9570-14B3EED589D8}"/>
               </a:ext>
             </a:extLst>
           </p:cNvPr>
@@ -2734,6 +3032,9 @@
                 <a:solidFill>
                   <a:srgbClr val="D5B879"/>
                 </a:solidFill>
+                <a:latin typeface="Inter"/>
+                <a:ea typeface="Inter"/>
+                <a:cs typeface="Inter"/>
               </a:defRPr>
             </a:pPr>
             <a:r>
@@ -2741,6 +3042,9 @@
                 <a:solidFill>
                   <a:srgbClr val="D5B879"/>
                 </a:solidFill>
+                <a:latin typeface="Inter"/>
+                <a:ea typeface="Inter"/>
+                <a:cs typeface="Inter"/>
               </a:rPr>
               <a:t>V.02 · Adobe Garamond Pro + Inter</a:t>
             </a:r>
@@ -2750,7 +3054,7 @@
     </p:spTree>
     <p:extLst>
       <p:ext uri="{BB962C8B-B14F-4D97-AF65-F5344CB8AC3E}">
-        <p14:creationId xmlns:p14="http://schemas.microsoft.com/office/powerpoint/2010/main" val="1712597581"/>
+        <p14:creationId xmlns:p14="http://schemas.microsoft.com/office/powerpoint/2010/main" val="1731900506"/>
       </p:ext>
     </p:extLst>
   </p:cSld>
@@ -2781,7 +3085,7 @@
           <p:cNvPr id="16" name="brand">
             <a:extLst xmlns:a="http://schemas.openxmlformats.org/drawingml/2006/main">
               <a:ext uri="{FF2B5EF4-FFF2-40B4-BE49-F238E27FC236}">
-                <a16:creationId xmlns:a16="http://schemas.microsoft.com/office/drawing/2014/main" id="{B7EC1E57-11CF-4105-8CEB-7517999C9127}"/>
+                <a16:creationId xmlns:a16="http://schemas.microsoft.com/office/drawing/2014/main" id="{B158B324-C35C-4A1D-8A16-48246DBE798F}"/>
               </a:ext>
             </a:extLst>
           </p:cNvPr>
@@ -2813,6 +3117,9 @@
                 <a:solidFill>
                   <a:srgbClr val="A88650"/>
                 </a:solidFill>
+                <a:latin typeface="Inter"/>
+                <a:ea typeface="Inter"/>
+                <a:cs typeface="Inter"/>
               </a:defRPr>
             </a:pPr>
             <a:r>
@@ -2820,6 +3127,9 @@
                 <a:solidFill>
                   <a:srgbClr val="A88650"/>
                 </a:solidFill>
+                <a:latin typeface="Inter"/>
+                <a:ea typeface="Inter"/>
+                <a:cs typeface="Inter"/>
               </a:rPr>
               <a:t>RON CARÚPANO</a:t>
             </a:r>
@@ -2831,7 +3141,7 @@
           <p:cNvPr id="2" name="page">
             <a:extLst xmlns:a="http://schemas.openxmlformats.org/drawingml/2006/main">
               <a:ext uri="{FF2B5EF4-FFF2-40B4-BE49-F238E27FC236}">
-                <a16:creationId xmlns:a16="http://schemas.microsoft.com/office/drawing/2014/main" id="{2C3ADE14-94B0-496C-A0F2-91262D79AE09}"/>
+                <a16:creationId xmlns:a16="http://schemas.microsoft.com/office/drawing/2014/main" id="{B7C49AF5-FDE0-4291-B3D6-A22A59FDE63F}"/>
               </a:ext>
             </a:extLst>
           </p:cNvPr>
@@ -2863,6 +3173,9 @@
                 <a:solidFill>
                   <a:srgbClr val="706862"/>
                 </a:solidFill>
+                <a:latin typeface="Inter"/>
+                <a:ea typeface="Inter"/>
+                <a:cs typeface="Inter"/>
               </a:defRPr>
             </a:pPr>
             <a:r>
@@ -2870,6 +3183,9 @@
                 <a:solidFill>
                   <a:srgbClr val="706862"/>
                 </a:solidFill>
+                <a:latin typeface="Inter"/>
+                <a:ea typeface="Inter"/>
+                <a:cs typeface="Inter"/>
               </a:rPr>
               <a:t>10</a:t>
             </a:r>
@@ -2881,7 +3197,7 @@
           <p:cNvPr id="3" name="title">
             <a:extLst xmlns:a="http://schemas.openxmlformats.org/drawingml/2006/main">
               <a:ext uri="{FF2B5EF4-FFF2-40B4-BE49-F238E27FC236}">
-                <a16:creationId xmlns:a16="http://schemas.microsoft.com/office/drawing/2014/main" id="{E0DFB4C4-526D-42A8-8B35-97D187208F6E}"/>
+                <a16:creationId xmlns:a16="http://schemas.microsoft.com/office/drawing/2014/main" id="{33FFC23B-6387-4C90-BE01-E797580734C9}"/>
               </a:ext>
             </a:extLst>
           </p:cNvPr>
@@ -2913,6 +3229,9 @@
                 <a:solidFill>
                   <a:srgbClr val="100C0A"/>
                 </a:solidFill>
+                <a:latin typeface="Adobe Garamond Pro"/>
+                <a:ea typeface="Adobe Garamond Pro"/>
+                <a:cs typeface="Adobe Garamond Pro"/>
               </a:defRPr>
             </a:pPr>
             <a:r>
@@ -2920,6 +3239,9 @@
                 <a:solidFill>
                   <a:srgbClr val="100C0A"/>
                 </a:solidFill>
+                <a:latin typeface="Adobe Garamond Pro"/>
+                <a:ea typeface="Adobe Garamond Pro"/>
+                <a:cs typeface="Adobe Garamond Pro"/>
               </a:rPr>
               <a:t>Tres razones para creer.</a:t>
             </a:r>
@@ -2931,7 +3253,7 @@
           <p:cNvPr id="4" name="num0">
             <a:extLst xmlns:a="http://schemas.openxmlformats.org/drawingml/2006/main">
               <a:ext uri="{FF2B5EF4-FFF2-40B4-BE49-F238E27FC236}">
-                <a16:creationId xmlns:a16="http://schemas.microsoft.com/office/drawing/2014/main" id="{BAC4FC7E-ACCF-4AAB-86CA-6D1CCFAF2637}"/>
+                <a16:creationId xmlns:a16="http://schemas.microsoft.com/office/drawing/2014/main" id="{429C302B-064E-4A6C-8121-56101CAFE642}"/>
               </a:ext>
             </a:extLst>
           </p:cNvPr>
@@ -2963,6 +3285,9 @@
                 <a:solidFill>
                   <a:srgbClr val="A88650"/>
                 </a:solidFill>
+                <a:latin typeface="Inter"/>
+                <a:ea typeface="Inter"/>
+                <a:cs typeface="Inter"/>
               </a:defRPr>
             </a:pPr>
             <a:r>
@@ -2970,6 +3295,9 @@
                 <a:solidFill>
                   <a:srgbClr val="A88650"/>
                 </a:solidFill>
+                <a:latin typeface="Inter"/>
+                <a:ea typeface="Inter"/>
+                <a:cs typeface="Inter"/>
               </a:rPr>
               <a:t>01</a:t>
             </a:r>
@@ -2981,7 +3309,7 @@
           <p:cNvPr id="5" name="rule0">
             <a:extLst xmlns:a="http://schemas.openxmlformats.org/drawingml/2006/main">
               <a:ext uri="{FF2B5EF4-FFF2-40B4-BE49-F238E27FC236}">
-                <a16:creationId xmlns:a16="http://schemas.microsoft.com/office/drawing/2014/main" id="{43C9EC78-A284-4BEB-88ED-E3C41AC2B95B}"/>
+                <a16:creationId xmlns:a16="http://schemas.microsoft.com/office/drawing/2014/main" id="{463B9540-DD81-462F-AD07-D0E36E763E3C}"/>
               </a:ext>
             </a:extLst>
           </p:cNvPr>
@@ -3012,7 +3340,7 @@
           <p:cNvPr id="6" name="head0">
             <a:extLst xmlns:a="http://schemas.openxmlformats.org/drawingml/2006/main">
               <a:ext uri="{FF2B5EF4-FFF2-40B4-BE49-F238E27FC236}">
-                <a16:creationId xmlns:a16="http://schemas.microsoft.com/office/drawing/2014/main" id="{02BFB59D-3CB3-401D-88C4-57EC61A04C10}"/>
+                <a16:creationId xmlns:a16="http://schemas.microsoft.com/office/drawing/2014/main" id="{82C0DCCA-7847-4A2B-9ED7-8E2308D69676}"/>
               </a:ext>
             </a:extLst>
           </p:cNvPr>
@@ -3044,6 +3372,9 @@
                 <a:solidFill>
                   <a:srgbClr val="100C0A"/>
                 </a:solidFill>
+                <a:latin typeface="Adobe Garamond Pro"/>
+                <a:ea typeface="Adobe Garamond Pro"/>
+                <a:cs typeface="Adobe Garamond Pro"/>
               </a:defRPr>
             </a:pPr>
             <a:r>
@@ -3051,6 +3382,9 @@
                 <a:solidFill>
                   <a:srgbClr val="100C0A"/>
                 </a:solidFill>
+                <a:latin typeface="Adobe Garamond Pro"/>
+                <a:ea typeface="Adobe Garamond Pro"/>
+                <a:cs typeface="Adobe Garamond Pro"/>
               </a:rPr>
               <a:t>Origen vivo</a:t>
             </a:r>
@@ -3062,7 +3396,7 @@
           <p:cNvPr id="7" name="body0">
             <a:extLst xmlns:a="http://schemas.openxmlformats.org/drawingml/2006/main">
               <a:ext uri="{FF2B5EF4-FFF2-40B4-BE49-F238E27FC236}">
-                <a16:creationId xmlns:a16="http://schemas.microsoft.com/office/drawing/2014/main" id="{4D0F8273-BFB2-4E49-9360-882E8223CDEA}"/>
+                <a16:creationId xmlns:a16="http://schemas.microsoft.com/office/drawing/2014/main" id="{40790AB5-35E5-42F3-8E10-ACB29C9A7E3E}"/>
               </a:ext>
             </a:extLst>
           </p:cNvPr>
@@ -3094,6 +3428,9 @@
                 <a:solidFill>
                   <a:srgbClr val="706862"/>
                 </a:solidFill>
+                <a:latin typeface="Inter"/>
+                <a:ea typeface="Inter"/>
+                <a:cs typeface="Inter"/>
               </a:defRPr>
             </a:pPr>
             <a:r>
@@ -3101,6 +3438,9 @@
                 <a:solidFill>
                   <a:srgbClr val="706862"/>
                 </a:solidFill>
+                <a:latin typeface="Inter"/>
+                <a:ea typeface="Inter"/>
+                <a:cs typeface="Inter"/>
               </a:rPr>
               <a:t>Hacienda Altamira y una historia que comenzó en 1762.</a:t>
             </a:r>
@@ -3112,7 +3452,7 @@
           <p:cNvPr id="8" name="num1">
             <a:extLst xmlns:a="http://schemas.openxmlformats.org/drawingml/2006/main">
               <a:ext uri="{FF2B5EF4-FFF2-40B4-BE49-F238E27FC236}">
-                <a16:creationId xmlns:a16="http://schemas.microsoft.com/office/drawing/2014/main" id="{0FC26272-CA89-4226-A0E1-BB932B777AB3}"/>
+                <a16:creationId xmlns:a16="http://schemas.microsoft.com/office/drawing/2014/main" id="{23FD6903-E02E-49A6-B3DB-FA1C6239E87E}"/>
               </a:ext>
             </a:extLst>
           </p:cNvPr>
@@ -3144,6 +3484,9 @@
                 <a:solidFill>
                   <a:srgbClr val="A88650"/>
                 </a:solidFill>
+                <a:latin typeface="Inter"/>
+                <a:ea typeface="Inter"/>
+                <a:cs typeface="Inter"/>
               </a:defRPr>
             </a:pPr>
             <a:r>
@@ -3151,6 +3494,9 @@
                 <a:solidFill>
                   <a:srgbClr val="A88650"/>
                 </a:solidFill>
+                <a:latin typeface="Inter"/>
+                <a:ea typeface="Inter"/>
+                <a:cs typeface="Inter"/>
               </a:rPr>
               <a:t>02</a:t>
             </a:r>
@@ -3162,7 +3508,7 @@
           <p:cNvPr id="9" name="rule1">
             <a:extLst xmlns:a="http://schemas.openxmlformats.org/drawingml/2006/main">
               <a:ext uri="{FF2B5EF4-FFF2-40B4-BE49-F238E27FC236}">
-                <a16:creationId xmlns:a16="http://schemas.microsoft.com/office/drawing/2014/main" id="{1F9187FF-F667-42AA-AFBD-D9CE1376FDB6}"/>
+                <a16:creationId xmlns:a16="http://schemas.microsoft.com/office/drawing/2014/main" id="{90A26066-176B-4178-B214-E30E31B50C91}"/>
               </a:ext>
             </a:extLst>
           </p:cNvPr>
@@ -3193,7 +3539,7 @@
           <p:cNvPr id="10" name="head1">
             <a:extLst xmlns:a="http://schemas.openxmlformats.org/drawingml/2006/main">
               <a:ext uri="{FF2B5EF4-FFF2-40B4-BE49-F238E27FC236}">
-                <a16:creationId xmlns:a16="http://schemas.microsoft.com/office/drawing/2014/main" id="{E35587DE-464F-4C9B-8D9C-E6764D8FC738}"/>
+                <a16:creationId xmlns:a16="http://schemas.microsoft.com/office/drawing/2014/main" id="{58AE6CAA-9005-4068-9DAB-1713FD912ED6}"/>
               </a:ext>
             </a:extLst>
           </p:cNvPr>
@@ -3225,6 +3571,9 @@
                 <a:solidFill>
                   <a:srgbClr val="100C0A"/>
                 </a:solidFill>
+                <a:latin typeface="Adobe Garamond Pro"/>
+                <a:ea typeface="Adobe Garamond Pro"/>
+                <a:cs typeface="Adobe Garamond Pro"/>
               </a:defRPr>
             </a:pPr>
             <a:r>
@@ -3232,6 +3581,9 @@
                 <a:solidFill>
                   <a:srgbClr val="100C0A"/>
                 </a:solidFill>
+                <a:latin typeface="Adobe Garamond Pro"/>
+                <a:ea typeface="Adobe Garamond Pro"/>
+                <a:cs typeface="Adobe Garamond Pro"/>
               </a:rPr>
               <a:t>Clima que transforma</a:t>
             </a:r>
@@ -3243,7 +3595,7 @@
           <p:cNvPr id="11" name="body1">
             <a:extLst xmlns:a="http://schemas.openxmlformats.org/drawingml/2006/main">
               <a:ext uri="{FF2B5EF4-FFF2-40B4-BE49-F238E27FC236}">
-                <a16:creationId xmlns:a16="http://schemas.microsoft.com/office/drawing/2014/main" id="{E921638A-1A18-4235-BEA3-DBCC5071F17B}"/>
+                <a16:creationId xmlns:a16="http://schemas.microsoft.com/office/drawing/2014/main" id="{CDD61977-BA47-467E-8AA2-BB5CC83C0BF8}"/>
               </a:ext>
             </a:extLst>
           </p:cNvPr>
@@ -3275,6 +3627,9 @@
                 <a:solidFill>
                   <a:srgbClr val="706862"/>
                 </a:solidFill>
+                <a:latin typeface="Inter"/>
+                <a:ea typeface="Inter"/>
+                <a:cs typeface="Inter"/>
               </a:defRPr>
             </a:pPr>
             <a:r>
@@ -3282,6 +3637,9 @@
                 <a:solidFill>
                   <a:srgbClr val="706862"/>
                 </a:solidFill>
+                <a:latin typeface="Inter"/>
+                <a:ea typeface="Inter"/>
+                <a:cs typeface="Inter"/>
               </a:rPr>
               <a:t>Calor y humedad aceleran el diálogo entre ron y madera.</a:t>
             </a:r>
@@ -3293,7 +3651,7 @@
           <p:cNvPr id="12" name="num2">
             <a:extLst xmlns:a="http://schemas.openxmlformats.org/drawingml/2006/main">
               <a:ext uri="{FF2B5EF4-FFF2-40B4-BE49-F238E27FC236}">
-                <a16:creationId xmlns:a16="http://schemas.microsoft.com/office/drawing/2014/main" id="{29CC981A-730A-4EC4-9E8E-11C4F4AFE5D9}"/>
+                <a16:creationId xmlns:a16="http://schemas.microsoft.com/office/drawing/2014/main" id="{50FB39B0-48D2-4CD3-86F0-B30919EEB3A8}"/>
               </a:ext>
             </a:extLst>
           </p:cNvPr>
@@ -3325,6 +3683,9 @@
                 <a:solidFill>
                   <a:srgbClr val="A88650"/>
                 </a:solidFill>
+                <a:latin typeface="Inter"/>
+                <a:ea typeface="Inter"/>
+                <a:cs typeface="Inter"/>
               </a:defRPr>
             </a:pPr>
             <a:r>
@@ -3332,6 +3693,9 @@
                 <a:solidFill>
                   <a:srgbClr val="A88650"/>
                 </a:solidFill>
+                <a:latin typeface="Inter"/>
+                <a:ea typeface="Inter"/>
+                <a:cs typeface="Inter"/>
               </a:rPr>
               <a:t>03</a:t>
             </a:r>
@@ -3343,7 +3707,7 @@
           <p:cNvPr id="13" name="rule2">
             <a:extLst xmlns:a="http://schemas.openxmlformats.org/drawingml/2006/main">
               <a:ext uri="{FF2B5EF4-FFF2-40B4-BE49-F238E27FC236}">
-                <a16:creationId xmlns:a16="http://schemas.microsoft.com/office/drawing/2014/main" id="{BE0FBACC-69A7-4449-BE3B-3D2D7AA6F289}"/>
+                <a16:creationId xmlns:a16="http://schemas.microsoft.com/office/drawing/2014/main" id="{237D7C3E-8170-4FDC-881A-E4BB00F4863D}"/>
               </a:ext>
             </a:extLst>
           </p:cNvPr>
@@ -3374,7 +3738,7 @@
           <p:cNvPr id="14" name="head2">
             <a:extLst xmlns:a="http://schemas.openxmlformats.org/drawingml/2006/main">
               <a:ext uri="{FF2B5EF4-FFF2-40B4-BE49-F238E27FC236}">
-                <a16:creationId xmlns:a16="http://schemas.microsoft.com/office/drawing/2014/main" id="{179C854A-0801-4278-9C81-16DF65D3B3AB}"/>
+                <a16:creationId xmlns:a16="http://schemas.microsoft.com/office/drawing/2014/main" id="{3E45A559-5E5F-4327-BE38-C567B2272E48}"/>
               </a:ext>
             </a:extLst>
           </p:cNvPr>
@@ -3406,6 +3770,9 @@
                 <a:solidFill>
                   <a:srgbClr val="100C0A"/>
                 </a:solidFill>
+                <a:latin typeface="Adobe Garamond Pro"/>
+                <a:ea typeface="Adobe Garamond Pro"/>
+                <a:cs typeface="Adobe Garamond Pro"/>
               </a:defRPr>
             </a:pPr>
             <a:r>
@@ -3413,6 +3780,9 @@
                 <a:solidFill>
                   <a:srgbClr val="100C0A"/>
                 </a:solidFill>
+                <a:latin typeface="Adobe Garamond Pro"/>
+                <a:ea typeface="Adobe Garamond Pro"/>
+                <a:cs typeface="Adobe Garamond Pro"/>
               </a:rPr>
               <a:t>Maestría de mezcla</a:t>
             </a:r>
@@ -3424,7 +3794,7 @@
           <p:cNvPr id="15" name="body2">
             <a:extLst xmlns:a="http://schemas.openxmlformats.org/drawingml/2006/main">
               <a:ext uri="{FF2B5EF4-FFF2-40B4-BE49-F238E27FC236}">
-                <a16:creationId xmlns:a16="http://schemas.microsoft.com/office/drawing/2014/main" id="{0BFC935A-EEB2-4C3F-BC69-54A265D860E1}"/>
+                <a16:creationId xmlns:a16="http://schemas.microsoft.com/office/drawing/2014/main" id="{67C93197-7A36-4C8A-A6C4-0D0EC9048D85}"/>
               </a:ext>
             </a:extLst>
           </p:cNvPr>
@@ -3456,6 +3826,9 @@
                 <a:solidFill>
                   <a:srgbClr val="706862"/>
                 </a:solidFill>
+                <a:latin typeface="Inter"/>
+                <a:ea typeface="Inter"/>
+                <a:cs typeface="Inter"/>
               </a:defRPr>
             </a:pPr>
             <a:r>
@@ -3463,6 +3836,9 @@
                 <a:solidFill>
                   <a:srgbClr val="706862"/>
                 </a:solidFill>
+                <a:latin typeface="Inter"/>
+                <a:ea typeface="Inter"/>
+                <a:cs typeface="Inter"/>
               </a:rPr>
               <a:t>Selección y criterio convierten complejidad en equilibrio.</a:t>
             </a:r>
@@ -3472,7 +3848,7 @@
     </p:spTree>
     <p:extLst>
       <p:ext uri="{BB962C8B-B14F-4D97-AF65-F5344CB8AC3E}">
-        <p14:creationId xmlns:p14="http://schemas.microsoft.com/office/powerpoint/2010/main" val="546615728"/>
+        <p14:creationId xmlns:p14="http://schemas.microsoft.com/office/powerpoint/2010/main" val="751936129"/>
       </p:ext>
     </p:extLst>
   </p:cSld>
@@ -3503,7 +3879,7 @@
           <p:cNvPr id="8" name="brand">
             <a:extLst xmlns:a="http://schemas.openxmlformats.org/drawingml/2006/main">
               <a:ext uri="{FF2B5EF4-FFF2-40B4-BE49-F238E27FC236}">
-                <a16:creationId xmlns:a16="http://schemas.microsoft.com/office/drawing/2014/main" id="{B5CE1BB8-B47F-42F5-B19B-667E308BBB50}"/>
+                <a16:creationId xmlns:a16="http://schemas.microsoft.com/office/drawing/2014/main" id="{6A39A78C-5857-4A6A-9A79-FE0887AB2AA8}"/>
               </a:ext>
             </a:extLst>
           </p:cNvPr>
@@ -3535,6 +3911,9 @@
                 <a:solidFill>
                   <a:srgbClr val="A88650"/>
                 </a:solidFill>
+                <a:latin typeface="Inter"/>
+                <a:ea typeface="Inter"/>
+                <a:cs typeface="Inter"/>
               </a:defRPr>
             </a:pPr>
             <a:r>
@@ -3542,6 +3921,9 @@
                 <a:solidFill>
                   <a:srgbClr val="A88650"/>
                 </a:solidFill>
+                <a:latin typeface="Inter"/>
+                <a:ea typeface="Inter"/>
+                <a:cs typeface="Inter"/>
               </a:rPr>
               <a:t>RON CARÚPANO</a:t>
             </a:r>
@@ -3553,7 +3935,7 @@
           <p:cNvPr id="2" name="page">
             <a:extLst xmlns:a="http://schemas.openxmlformats.org/drawingml/2006/main">
               <a:ext uri="{FF2B5EF4-FFF2-40B4-BE49-F238E27FC236}">
-                <a16:creationId xmlns:a16="http://schemas.microsoft.com/office/drawing/2014/main" id="{B0A234AF-5048-4334-88A7-45A58E6B663E}"/>
+                <a16:creationId xmlns:a16="http://schemas.microsoft.com/office/drawing/2014/main" id="{2E6DB58C-5B0C-4C1F-9E70-10D699E3F4B1}"/>
               </a:ext>
             </a:extLst>
           </p:cNvPr>
@@ -3585,6 +3967,9 @@
                 <a:solidFill>
                   <a:srgbClr val="706862"/>
                 </a:solidFill>
+                <a:latin typeface="Inter"/>
+                <a:ea typeface="Inter"/>
+                <a:cs typeface="Inter"/>
               </a:defRPr>
             </a:pPr>
             <a:r>
@@ -3592,6 +3977,9 @@
                 <a:solidFill>
                   <a:srgbClr val="706862"/>
                 </a:solidFill>
+                <a:latin typeface="Inter"/>
+                <a:ea typeface="Inter"/>
+                <a:cs typeface="Inter"/>
               </a:rPr>
               <a:t>11</a:t>
             </a:r>
@@ -3607,8 +3995,8 @@
           <p:nvPr/>
         </p:nvPicPr>
         <p:blipFill>
-          <a:blip xmlns:r="http://schemas.openxmlformats.org/officeDocument/2006/relationships" xmlns:a="http://schemas.openxmlformats.org/drawingml/2006/main" r:embed="R2b0d0ca0884049cf"/>
-          <a:srcRect xmlns:a="http://schemas.openxmlformats.org/drawingml/2006/main" l="7265" t="0" r="7265" b="0"/>
+          <a:blip xmlns:r="http://schemas.openxmlformats.org/officeDocument/2006/relationships" xmlns:a="http://schemas.openxmlformats.org/drawingml/2006/main" r:embed="R29bb1b156ac744e4"/>
+          <a:srcRect xmlns:a="http://schemas.openxmlformats.org/drawingml/2006/main" l="0" t="4906" r="0" b="4906"/>
           <a:stretch xmlns:a="http://schemas.openxmlformats.org/drawingml/2006/main">
             <a:fillRect l="0" t="0" r="0" b="0"/>
           </a:stretch>
@@ -3628,7 +4016,7 @@
           <p:cNvPr id="4" name="quote">
             <a:extLst xmlns:a="http://schemas.openxmlformats.org/drawingml/2006/main">
               <a:ext uri="{FF2B5EF4-FFF2-40B4-BE49-F238E27FC236}">
-                <a16:creationId xmlns:a16="http://schemas.microsoft.com/office/drawing/2014/main" id="{CE41DAE8-9859-4359-950E-2423AF24C249}"/>
+                <a16:creationId xmlns:a16="http://schemas.microsoft.com/office/drawing/2014/main" id="{36D12D24-3878-483F-BDEB-7D3B2D0D5F23}"/>
               </a:ext>
             </a:extLst>
           </p:cNvPr>
@@ -3660,6 +4048,9 @@
                 <a:solidFill>
                   <a:srgbClr val="100C0A"/>
                 </a:solidFill>
+                <a:latin typeface="Adobe Garamond Pro"/>
+                <a:ea typeface="Adobe Garamond Pro"/>
+                <a:cs typeface="Adobe Garamond Pro"/>
               </a:defRPr>
             </a:pPr>
             <a:r>
@@ -3667,6 +4058,9 @@
                 <a:solidFill>
                   <a:srgbClr val="100C0A"/>
                 </a:solidFill>
+                <a:latin typeface="Adobe Garamond Pro"/>
+                <a:ea typeface="Adobe Garamond Pro"/>
+                <a:cs typeface="Adobe Garamond Pro"/>
               </a:rPr>
               <a:t>“La sofisticación se demuestra en el criterio, no en el exceso.”</a:t>
             </a:r>
@@ -3678,7 +4072,7 @@
           <p:cNvPr id="5" name="rule">
             <a:extLst xmlns:a="http://schemas.openxmlformats.org/drawingml/2006/main">
               <a:ext uri="{FF2B5EF4-FFF2-40B4-BE49-F238E27FC236}">
-                <a16:creationId xmlns:a16="http://schemas.microsoft.com/office/drawing/2014/main" id="{6EBE88BB-DEB3-4B7E-953A-1085AB570FB8}"/>
+                <a16:creationId xmlns:a16="http://schemas.microsoft.com/office/drawing/2014/main" id="{08CF0993-8C5E-4238-9EB6-AC1564E2DE47}"/>
               </a:ext>
             </a:extLst>
           </p:cNvPr>
@@ -3709,7 +4103,7 @@
           <p:cNvPr id="6" name="source">
             <a:extLst xmlns:a="http://schemas.openxmlformats.org/drawingml/2006/main">
               <a:ext uri="{FF2B5EF4-FFF2-40B4-BE49-F238E27FC236}">
-                <a16:creationId xmlns:a16="http://schemas.microsoft.com/office/drawing/2014/main" id="{45BB221F-A0A5-4069-9B19-7D6E5681BA28}"/>
+                <a16:creationId xmlns:a16="http://schemas.microsoft.com/office/drawing/2014/main" id="{81AA81AD-D43F-4022-A442-197E50EEB1BE}"/>
               </a:ext>
             </a:extLst>
           </p:cNvPr>
@@ -3741,6 +4135,9 @@
                 <a:solidFill>
                   <a:srgbClr val="A88650"/>
                 </a:solidFill>
+                <a:latin typeface="Inter"/>
+                <a:ea typeface="Inter"/>
+                <a:cs typeface="Inter"/>
               </a:defRPr>
             </a:pPr>
             <a:r>
@@ -3748,6 +4145,9 @@
                 <a:solidFill>
                   <a:srgbClr val="A88650"/>
                 </a:solidFill>
+                <a:latin typeface="Inter"/>
+                <a:ea typeface="Inter"/>
+                <a:cs typeface="Inter"/>
               </a:rPr>
               <a:t>PRINCIPIO DE COMUNICACIÓN</a:t>
             </a:r>
@@ -3759,7 +4159,7 @@
           <p:cNvPr id="7" name="usage">
             <a:extLst xmlns:a="http://schemas.openxmlformats.org/drawingml/2006/main">
               <a:ext uri="{FF2B5EF4-FFF2-40B4-BE49-F238E27FC236}">
-                <a16:creationId xmlns:a16="http://schemas.microsoft.com/office/drawing/2014/main" id="{ED55E32F-9606-43C0-82E9-6E4EC80FAD27}"/>
+                <a16:creationId xmlns:a16="http://schemas.microsoft.com/office/drawing/2014/main" id="{99AA3EF4-E673-4EF5-BFD1-147A48044C22}"/>
               </a:ext>
             </a:extLst>
           </p:cNvPr>
@@ -3791,6 +4191,9 @@
                 <a:solidFill>
                   <a:srgbClr val="706862"/>
                 </a:solidFill>
+                <a:latin typeface="Inter"/>
+                <a:ea typeface="Inter"/>
+                <a:cs typeface="Inter"/>
               </a:defRPr>
             </a:pPr>
             <a:r>
@@ -3798,6 +4201,9 @@
                 <a:solidFill>
                   <a:srgbClr val="706862"/>
                 </a:solidFill>
+                <a:latin typeface="Inter"/>
+                <a:ea typeface="Inter"/>
+                <a:cs typeface="Inter"/>
               </a:rPr>
               <a:t>Ideal para manifiestos, testimonios y citas que necesitan peso editorial.</a:t>
             </a:r>
@@ -3807,7 +4213,7 @@
     </p:spTree>
     <p:extLst>
       <p:ext uri="{BB962C8B-B14F-4D97-AF65-F5344CB8AC3E}">
-        <p14:creationId xmlns:p14="http://schemas.microsoft.com/office/powerpoint/2010/main" val="904762060"/>
+        <p14:creationId xmlns:p14="http://schemas.microsoft.com/office/powerpoint/2010/main" val="476346380"/>
       </p:ext>
     </p:extLst>
   </p:cSld>
@@ -3838,7 +4244,7 @@
           <p:cNvPr id="14" name="brand">
             <a:extLst xmlns:a="http://schemas.openxmlformats.org/drawingml/2006/main">
               <a:ext uri="{FF2B5EF4-FFF2-40B4-BE49-F238E27FC236}">
-                <a16:creationId xmlns:a16="http://schemas.microsoft.com/office/drawing/2014/main" id="{AEE531D7-BEE0-4E0C-B2F7-F929C663FB1B}"/>
+                <a16:creationId xmlns:a16="http://schemas.microsoft.com/office/drawing/2014/main" id="{00708A79-22CD-40BB-84C1-947BDC6C98E1}"/>
               </a:ext>
             </a:extLst>
           </p:cNvPr>
@@ -3870,6 +4276,9 @@
                 <a:solidFill>
                   <a:srgbClr val="D5B879"/>
                 </a:solidFill>
+                <a:latin typeface="Inter"/>
+                <a:ea typeface="Inter"/>
+                <a:cs typeface="Inter"/>
               </a:defRPr>
             </a:pPr>
             <a:r>
@@ -3877,6 +4286,9 @@
                 <a:solidFill>
                   <a:srgbClr val="D5B879"/>
                 </a:solidFill>
+                <a:latin typeface="Inter"/>
+                <a:ea typeface="Inter"/>
+                <a:cs typeface="Inter"/>
               </a:rPr>
               <a:t>RON CARÚPANO</a:t>
             </a:r>
@@ -3888,7 +4300,7 @@
           <p:cNvPr id="2" name="page">
             <a:extLst xmlns:a="http://schemas.openxmlformats.org/drawingml/2006/main">
               <a:ext uri="{FF2B5EF4-FFF2-40B4-BE49-F238E27FC236}">
-                <a16:creationId xmlns:a16="http://schemas.microsoft.com/office/drawing/2014/main" id="{E3233298-B140-4FC8-8438-BF6036440675}"/>
+                <a16:creationId xmlns:a16="http://schemas.microsoft.com/office/drawing/2014/main" id="{16635376-480A-443A-A69C-3A949C3F493F}"/>
               </a:ext>
             </a:extLst>
           </p:cNvPr>
@@ -3922,6 +4334,9 @@
                     <a:alpha val="43922"/>
                   </a:srgbClr>
                 </a:solidFill>
+                <a:latin typeface="Inter"/>
+                <a:ea typeface="Inter"/>
+                <a:cs typeface="Inter"/>
               </a:defRPr>
             </a:pPr>
             <a:r>
@@ -3931,6 +4346,9 @@
                     <a:alpha val="43922"/>
                   </a:srgbClr>
                 </a:solidFill>
+                <a:latin typeface="Inter"/>
+                <a:ea typeface="Inter"/>
+                <a:cs typeface="Inter"/>
               </a:rPr>
               <a:t>12</a:t>
             </a:r>
@@ -3942,7 +4360,7 @@
           <p:cNvPr id="3" name="eyebrow">
             <a:extLst xmlns:a="http://schemas.openxmlformats.org/drawingml/2006/main">
               <a:ext uri="{FF2B5EF4-FFF2-40B4-BE49-F238E27FC236}">
-                <a16:creationId xmlns:a16="http://schemas.microsoft.com/office/drawing/2014/main" id="{3ED6F9AC-6605-4BD6-B97E-EF498C4F7EFF}"/>
+                <a16:creationId xmlns:a16="http://schemas.microsoft.com/office/drawing/2014/main" id="{B6F74534-95C4-4B31-8679-0D46F1199D63}"/>
               </a:ext>
             </a:extLst>
           </p:cNvPr>
@@ -3974,6 +4392,9 @@
                 <a:solidFill>
                   <a:srgbClr val="D5B879"/>
                 </a:solidFill>
+                <a:latin typeface="Inter"/>
+                <a:ea typeface="Inter"/>
+                <a:cs typeface="Inter"/>
               </a:defRPr>
             </a:pPr>
             <a:r>
@@ -3981,6 +4402,9 @@
                 <a:solidFill>
                   <a:srgbClr val="D5B879"/>
                 </a:solidFill>
+                <a:latin typeface="Inter"/>
+                <a:ea typeface="Inter"/>
+                <a:cs typeface="Inter"/>
               </a:rPr>
               <a:t>RESULTADOS / INDICADORES</a:t>
             </a:r>
@@ -3992,7 +4416,7 @@
           <p:cNvPr id="4" name="title">
             <a:extLst xmlns:a="http://schemas.openxmlformats.org/drawingml/2006/main">
               <a:ext uri="{FF2B5EF4-FFF2-40B4-BE49-F238E27FC236}">
-                <a16:creationId xmlns:a16="http://schemas.microsoft.com/office/drawing/2014/main" id="{758EA185-B0BA-4631-956E-2846FC860D08}"/>
+                <a16:creationId xmlns:a16="http://schemas.microsoft.com/office/drawing/2014/main" id="{8233AE16-AF49-45CD-A9FE-810BBD1D31BE}"/>
               </a:ext>
             </a:extLst>
           </p:cNvPr>
@@ -4024,6 +4448,9 @@
                 <a:solidFill>
                   <a:srgbClr val="F3EEE6"/>
                 </a:solidFill>
+                <a:latin typeface="Adobe Garamond Pro"/>
+                <a:ea typeface="Adobe Garamond Pro"/>
+                <a:cs typeface="Adobe Garamond Pro"/>
               </a:defRPr>
             </a:pPr>
             <a:r>
@@ -4031,6 +4458,9 @@
                 <a:solidFill>
                   <a:srgbClr val="F3EEE6"/>
                 </a:solidFill>
+                <a:latin typeface="Adobe Garamond Pro"/>
+                <a:ea typeface="Adobe Garamond Pro"/>
+                <a:cs typeface="Adobe Garamond Pro"/>
               </a:rPr>
               <a:t>Los datos necesitan</a:t>
             </a:r>
@@ -4041,6 +4471,9 @@
                 <a:solidFill>
                   <a:srgbClr val="F3EEE6"/>
                 </a:solidFill>
+                <a:latin typeface="Adobe Garamond Pro"/>
+                <a:ea typeface="Adobe Garamond Pro"/>
+                <a:cs typeface="Adobe Garamond Pro"/>
               </a:defRPr>
             </a:pPr>
             <a:r>
@@ -4048,6 +4481,9 @@
                 <a:solidFill>
                   <a:srgbClr val="F3EEE6"/>
                 </a:solidFill>
+                <a:latin typeface="Adobe Garamond Pro"/>
+                <a:ea typeface="Adobe Garamond Pro"/>
+                <a:cs typeface="Adobe Garamond Pro"/>
               </a:rPr>
               <a:t>una lectura clara.</a:t>
             </a:r>
@@ -4059,7 +4495,7 @@
           <p:cNvPr id="5" name="v0">
             <a:extLst xmlns:a="http://schemas.openxmlformats.org/drawingml/2006/main">
               <a:ext uri="{FF2B5EF4-FFF2-40B4-BE49-F238E27FC236}">
-                <a16:creationId xmlns:a16="http://schemas.microsoft.com/office/drawing/2014/main" id="{311C898C-112E-44F3-8E0B-CD569B322C1C}"/>
+                <a16:creationId xmlns:a16="http://schemas.microsoft.com/office/drawing/2014/main" id="{E28D84AC-DB41-4BD2-B8B7-90477E987E5E}"/>
               </a:ext>
             </a:extLst>
           </p:cNvPr>
@@ -4091,6 +4527,9 @@
                 <a:solidFill>
                   <a:srgbClr val="F3EEE6"/>
                 </a:solidFill>
+                <a:latin typeface="Adobe Garamond Pro"/>
+                <a:ea typeface="Adobe Garamond Pro"/>
+                <a:cs typeface="Adobe Garamond Pro"/>
               </a:defRPr>
             </a:pPr>
             <a:r>
@@ -4098,6 +4537,9 @@
                 <a:solidFill>
                   <a:srgbClr val="F3EEE6"/>
                 </a:solidFill>
+                <a:latin typeface="Adobe Garamond Pro"/>
+                <a:ea typeface="Adobe Garamond Pro"/>
+                <a:cs typeface="Adobe Garamond Pro"/>
               </a:rPr>
               <a:t>01</a:t>
             </a:r>
@@ -4109,7 +4551,7 @@
           <p:cNvPr id="6" name="l0">
             <a:extLst xmlns:a="http://schemas.openxmlformats.org/drawingml/2006/main">
               <a:ext uri="{FF2B5EF4-FFF2-40B4-BE49-F238E27FC236}">
-                <a16:creationId xmlns:a16="http://schemas.microsoft.com/office/drawing/2014/main" id="{71A2EC73-1DC5-4A4A-9E81-73D09B672258}"/>
+                <a16:creationId xmlns:a16="http://schemas.microsoft.com/office/drawing/2014/main" id="{EF2A1714-4531-4995-B26F-2B6987342E94}"/>
               </a:ext>
             </a:extLst>
           </p:cNvPr>
@@ -4141,6 +4583,9 @@
                 <a:solidFill>
                   <a:srgbClr val="F3EEE6"/>
                 </a:solidFill>
+                <a:latin typeface="Inter"/>
+                <a:ea typeface="Inter"/>
+                <a:cs typeface="Inter"/>
               </a:defRPr>
             </a:pPr>
             <a:r>
@@ -4148,6 +4593,9 @@
                 <a:solidFill>
                   <a:srgbClr val="F3EEE6"/>
                 </a:solidFill>
+                <a:latin typeface="Inter"/>
+                <a:ea typeface="Inter"/>
+                <a:cs typeface="Inter"/>
               </a:rPr>
               <a:t>Indicador principal</a:t>
             </a:r>
@@ -4159,7 +4607,7 @@
           <p:cNvPr id="7" name="r0">
             <a:extLst xmlns:a="http://schemas.openxmlformats.org/drawingml/2006/main">
               <a:ext uri="{FF2B5EF4-FFF2-40B4-BE49-F238E27FC236}">
-                <a16:creationId xmlns:a16="http://schemas.microsoft.com/office/drawing/2014/main" id="{5AD4C543-258A-4480-A2D8-53AB8B022AF0}"/>
+                <a16:creationId xmlns:a16="http://schemas.microsoft.com/office/drawing/2014/main" id="{15AFC0B3-6A5F-4D40-9D41-68353DF929A1}"/>
               </a:ext>
             </a:extLst>
           </p:cNvPr>
@@ -4192,7 +4640,7 @@
           <p:cNvPr id="8" name="v1">
             <a:extLst xmlns:a="http://schemas.openxmlformats.org/drawingml/2006/main">
               <a:ext uri="{FF2B5EF4-FFF2-40B4-BE49-F238E27FC236}">
-                <a16:creationId xmlns:a16="http://schemas.microsoft.com/office/drawing/2014/main" id="{FABB9358-3463-4114-BEFF-A20055F5706C}"/>
+                <a16:creationId xmlns:a16="http://schemas.microsoft.com/office/drawing/2014/main" id="{A5AB0A78-5E9E-4DDE-A43F-DF7430DE08AB}"/>
               </a:ext>
             </a:extLst>
           </p:cNvPr>
@@ -4224,6 +4672,9 @@
                 <a:solidFill>
                   <a:srgbClr val="F3EEE6"/>
                 </a:solidFill>
+                <a:latin typeface="Adobe Garamond Pro"/>
+                <a:ea typeface="Adobe Garamond Pro"/>
+                <a:cs typeface="Adobe Garamond Pro"/>
               </a:defRPr>
             </a:pPr>
             <a:r>
@@ -4231,6 +4682,9 @@
                 <a:solidFill>
                   <a:srgbClr val="F3EEE6"/>
                 </a:solidFill>
+                <a:latin typeface="Adobe Garamond Pro"/>
+                <a:ea typeface="Adobe Garamond Pro"/>
+                <a:cs typeface="Adobe Garamond Pro"/>
               </a:rPr>
               <a:t>02</a:t>
             </a:r>
@@ -4242,7 +4696,7 @@
           <p:cNvPr id="9" name="l1">
             <a:extLst xmlns:a="http://schemas.openxmlformats.org/drawingml/2006/main">
               <a:ext uri="{FF2B5EF4-FFF2-40B4-BE49-F238E27FC236}">
-                <a16:creationId xmlns:a16="http://schemas.microsoft.com/office/drawing/2014/main" id="{E5D04741-D088-446C-9921-8EE7BA2129F6}"/>
+                <a16:creationId xmlns:a16="http://schemas.microsoft.com/office/drawing/2014/main" id="{0867E402-F80A-413D-BCDC-F4495799FF6B}"/>
               </a:ext>
             </a:extLst>
           </p:cNvPr>
@@ -4274,6 +4728,9 @@
                 <a:solidFill>
                   <a:srgbClr val="F3EEE6"/>
                 </a:solidFill>
+                <a:latin typeface="Inter"/>
+                <a:ea typeface="Inter"/>
+                <a:cs typeface="Inter"/>
               </a:defRPr>
             </a:pPr>
             <a:r>
@@ -4281,6 +4738,9 @@
                 <a:solidFill>
                   <a:srgbClr val="F3EEE6"/>
                 </a:solidFill>
+                <a:latin typeface="Inter"/>
+                <a:ea typeface="Inter"/>
+                <a:cs typeface="Inter"/>
               </a:rPr>
               <a:t>Indicador de apoyo</a:t>
             </a:r>
@@ -4292,7 +4752,7 @@
           <p:cNvPr id="10" name="r1">
             <a:extLst xmlns:a="http://schemas.openxmlformats.org/drawingml/2006/main">
               <a:ext uri="{FF2B5EF4-FFF2-40B4-BE49-F238E27FC236}">
-                <a16:creationId xmlns:a16="http://schemas.microsoft.com/office/drawing/2014/main" id="{49657BFC-B336-4921-9272-9B85C53D7791}"/>
+                <a16:creationId xmlns:a16="http://schemas.microsoft.com/office/drawing/2014/main" id="{2EF926F1-011B-40AC-BE6E-D489D2AAF017}"/>
               </a:ext>
             </a:extLst>
           </p:cNvPr>
@@ -4325,7 +4785,7 @@
           <p:cNvPr id="11" name="v2">
             <a:extLst xmlns:a="http://schemas.openxmlformats.org/drawingml/2006/main">
               <a:ext uri="{FF2B5EF4-FFF2-40B4-BE49-F238E27FC236}">
-                <a16:creationId xmlns:a16="http://schemas.microsoft.com/office/drawing/2014/main" id="{62FFE014-F884-44A2-8AB0-0224E8B92FD2}"/>
+                <a16:creationId xmlns:a16="http://schemas.microsoft.com/office/drawing/2014/main" id="{2BCE9394-5CC0-45F7-B7D8-CC81D7F3B80A}"/>
               </a:ext>
             </a:extLst>
           </p:cNvPr>
@@ -4357,6 +4817,9 @@
                 <a:solidFill>
                   <a:srgbClr val="F3EEE6"/>
                 </a:solidFill>
+                <a:latin typeface="Adobe Garamond Pro"/>
+                <a:ea typeface="Adobe Garamond Pro"/>
+                <a:cs typeface="Adobe Garamond Pro"/>
               </a:defRPr>
             </a:pPr>
             <a:r>
@@ -4364,6 +4827,9 @@
                 <a:solidFill>
                   <a:srgbClr val="F3EEE6"/>
                 </a:solidFill>
+                <a:latin typeface="Adobe Garamond Pro"/>
+                <a:ea typeface="Adobe Garamond Pro"/>
+                <a:cs typeface="Adobe Garamond Pro"/>
               </a:rPr>
               <a:t>03</a:t>
             </a:r>
@@ -4375,7 +4841,7 @@
           <p:cNvPr id="12" name="l2">
             <a:extLst xmlns:a="http://schemas.openxmlformats.org/drawingml/2006/main">
               <a:ext uri="{FF2B5EF4-FFF2-40B4-BE49-F238E27FC236}">
-                <a16:creationId xmlns:a16="http://schemas.microsoft.com/office/drawing/2014/main" id="{C81E8462-3CD0-4B22-918C-6E47AE41CEFB}"/>
+                <a16:creationId xmlns:a16="http://schemas.microsoft.com/office/drawing/2014/main" id="{6AD34B1B-9FDD-4D5A-AB83-31E028EAE409}"/>
               </a:ext>
             </a:extLst>
           </p:cNvPr>
@@ -4407,6 +4873,9 @@
                 <a:solidFill>
                   <a:srgbClr val="F3EEE6"/>
                 </a:solidFill>
+                <a:latin typeface="Inter"/>
+                <a:ea typeface="Inter"/>
+                <a:cs typeface="Inter"/>
               </a:defRPr>
             </a:pPr>
             <a:r>
@@ -4414,6 +4883,9 @@
                 <a:solidFill>
                   <a:srgbClr val="F3EEE6"/>
                 </a:solidFill>
+                <a:latin typeface="Inter"/>
+                <a:ea typeface="Inter"/>
+                <a:cs typeface="Inter"/>
               </a:rPr>
               <a:t>Señal de avance</a:t>
             </a:r>
@@ -4425,7 +4897,7 @@
           <p:cNvPr id="13" name="r2">
             <a:extLst xmlns:a="http://schemas.openxmlformats.org/drawingml/2006/main">
               <a:ext uri="{FF2B5EF4-FFF2-40B4-BE49-F238E27FC236}">
-                <a16:creationId xmlns:a16="http://schemas.microsoft.com/office/drawing/2014/main" id="{6D483E15-1120-4084-836E-0348E52FCF1C}"/>
+                <a16:creationId xmlns:a16="http://schemas.microsoft.com/office/drawing/2014/main" id="{23B18187-9FC5-4745-A039-F4170AAA7FAE}"/>
               </a:ext>
             </a:extLst>
           </p:cNvPr>
@@ -4456,7 +4928,7 @@
     </p:spTree>
     <p:extLst>
       <p:ext uri="{BB962C8B-B14F-4D97-AF65-F5344CB8AC3E}">
-        <p14:creationId xmlns:p14="http://schemas.microsoft.com/office/powerpoint/2010/main" val="859093580"/>
+        <p14:creationId xmlns:p14="http://schemas.microsoft.com/office/powerpoint/2010/main" val="266563198"/>
       </p:ext>
     </p:extLst>
   </p:cSld>
@@ -4487,7 +4959,7 @@
           <p:cNvPr id="25" name="brand">
             <a:extLst xmlns:a="http://schemas.openxmlformats.org/drawingml/2006/main">
               <a:ext uri="{FF2B5EF4-FFF2-40B4-BE49-F238E27FC236}">
-                <a16:creationId xmlns:a16="http://schemas.microsoft.com/office/drawing/2014/main" id="{4F765269-6D8E-4E54-A4A3-EE824ECCE58A}"/>
+                <a16:creationId xmlns:a16="http://schemas.microsoft.com/office/drawing/2014/main" id="{BD603300-318C-4033-850E-BBCDACF131E0}"/>
               </a:ext>
             </a:extLst>
           </p:cNvPr>
@@ -4519,6 +4991,9 @@
                 <a:solidFill>
                   <a:srgbClr val="A88650"/>
                 </a:solidFill>
+                <a:latin typeface="Inter"/>
+                <a:ea typeface="Inter"/>
+                <a:cs typeface="Inter"/>
               </a:defRPr>
             </a:pPr>
             <a:r>
@@ -4526,6 +5001,9 @@
                 <a:solidFill>
                   <a:srgbClr val="A88650"/>
                 </a:solidFill>
+                <a:latin typeface="Inter"/>
+                <a:ea typeface="Inter"/>
+                <a:cs typeface="Inter"/>
               </a:rPr>
               <a:t>RON CARÚPANO</a:t>
             </a:r>
@@ -4537,7 +5015,7 @@
           <p:cNvPr id="2" name="page">
             <a:extLst xmlns:a="http://schemas.openxmlformats.org/drawingml/2006/main">
               <a:ext uri="{FF2B5EF4-FFF2-40B4-BE49-F238E27FC236}">
-                <a16:creationId xmlns:a16="http://schemas.microsoft.com/office/drawing/2014/main" id="{6CF47B4C-EC0D-4818-B69F-531DF6F3FFFE}"/>
+                <a16:creationId xmlns:a16="http://schemas.microsoft.com/office/drawing/2014/main" id="{BEED356E-DB60-4B78-BCCB-7998DA85FAD7}"/>
               </a:ext>
             </a:extLst>
           </p:cNvPr>
@@ -4569,6 +5047,9 @@
                 <a:solidFill>
                   <a:srgbClr val="706862"/>
                 </a:solidFill>
+                <a:latin typeface="Inter"/>
+                <a:ea typeface="Inter"/>
+                <a:cs typeface="Inter"/>
               </a:defRPr>
             </a:pPr>
             <a:r>
@@ -4576,6 +5057,9 @@
                 <a:solidFill>
                   <a:srgbClr val="706862"/>
                 </a:solidFill>
+                <a:latin typeface="Inter"/>
+                <a:ea typeface="Inter"/>
+                <a:cs typeface="Inter"/>
               </a:rPr>
               <a:t>13</a:t>
             </a:r>
@@ -4587,7 +5071,7 @@
           <p:cNvPr id="3" name="eyebrow">
             <a:extLst xmlns:a="http://schemas.openxmlformats.org/drawingml/2006/main">
               <a:ext uri="{FF2B5EF4-FFF2-40B4-BE49-F238E27FC236}">
-                <a16:creationId xmlns:a16="http://schemas.microsoft.com/office/drawing/2014/main" id="{158B3D23-23D2-4C29-9749-207858525AF2}"/>
+                <a16:creationId xmlns:a16="http://schemas.microsoft.com/office/drawing/2014/main" id="{BDE049F0-0A3A-4E22-975C-A70EFE9749B3}"/>
               </a:ext>
             </a:extLst>
           </p:cNvPr>
@@ -4619,6 +5103,9 @@
                 <a:solidFill>
                   <a:srgbClr val="A88650"/>
                 </a:solidFill>
+                <a:latin typeface="Inter"/>
+                <a:ea typeface="Inter"/>
+                <a:cs typeface="Inter"/>
               </a:defRPr>
             </a:pPr>
             <a:r>
@@ -4626,6 +5113,9 @@
                 <a:solidFill>
                   <a:srgbClr val="A88650"/>
                 </a:solidFill>
+                <a:latin typeface="Inter"/>
+                <a:ea typeface="Inter"/>
+                <a:cs typeface="Inter"/>
               </a:rPr>
               <a:t>GRÁFICO EDITABLE</a:t>
             </a:r>
@@ -4637,7 +5127,7 @@
           <p:cNvPr id="4" name="title">
             <a:extLst xmlns:a="http://schemas.openxmlformats.org/drawingml/2006/main">
               <a:ext uri="{FF2B5EF4-FFF2-40B4-BE49-F238E27FC236}">
-                <a16:creationId xmlns:a16="http://schemas.microsoft.com/office/drawing/2014/main" id="{2FDC169B-A31C-4F31-AA59-8D3586915700}"/>
+                <a16:creationId xmlns:a16="http://schemas.microsoft.com/office/drawing/2014/main" id="{CB39B320-759B-4891-9887-C433DFFA7DC8}"/>
               </a:ext>
             </a:extLst>
           </p:cNvPr>
@@ -4669,6 +5159,9 @@
                 <a:solidFill>
                   <a:srgbClr val="100C0A"/>
                 </a:solidFill>
+                <a:latin typeface="Adobe Garamond Pro"/>
+                <a:ea typeface="Adobe Garamond Pro"/>
+                <a:cs typeface="Adobe Garamond Pro"/>
               </a:defRPr>
             </a:pPr>
             <a:r>
@@ -4676,6 +5169,9 @@
                 <a:solidFill>
                   <a:srgbClr val="100C0A"/>
                 </a:solidFill>
+                <a:latin typeface="Adobe Garamond Pro"/>
+                <a:ea typeface="Adobe Garamond Pro"/>
+                <a:cs typeface="Adobe Garamond Pro"/>
               </a:rPr>
               <a:t>La evolución se entiende</a:t>
             </a:r>
@@ -4686,6 +5182,9 @@
                 <a:solidFill>
                   <a:srgbClr val="100C0A"/>
                 </a:solidFill>
+                <a:latin typeface="Adobe Garamond Pro"/>
+                <a:ea typeface="Adobe Garamond Pro"/>
+                <a:cs typeface="Adobe Garamond Pro"/>
               </a:defRPr>
             </a:pPr>
             <a:r>
@@ -4693,6 +5192,9 @@
                 <a:solidFill>
                   <a:srgbClr val="100C0A"/>
                 </a:solidFill>
+                <a:latin typeface="Adobe Garamond Pro"/>
+                <a:ea typeface="Adobe Garamond Pro"/>
+                <a:cs typeface="Adobe Garamond Pro"/>
               </a:rPr>
               <a:t>de un vistazo.</a:t>
             </a:r>
@@ -4704,7 +5206,7 @@
           <p:cNvPr id="5" name="body">
             <a:extLst xmlns:a="http://schemas.openxmlformats.org/drawingml/2006/main">
               <a:ext uri="{FF2B5EF4-FFF2-40B4-BE49-F238E27FC236}">
-                <a16:creationId xmlns:a16="http://schemas.microsoft.com/office/drawing/2014/main" id="{6A29D1B1-E7CA-4CF4-BC89-E7C49BE61872}"/>
+                <a16:creationId xmlns:a16="http://schemas.microsoft.com/office/drawing/2014/main" id="{2F1E0EA3-72E9-4E09-804C-FCE58839C888}"/>
               </a:ext>
             </a:extLst>
           </p:cNvPr>
@@ -4736,6 +5238,9 @@
                 <a:solidFill>
                   <a:srgbClr val="706862"/>
                 </a:solidFill>
+                <a:latin typeface="Inter"/>
+                <a:ea typeface="Inter"/>
+                <a:cs typeface="Inter"/>
               </a:defRPr>
             </a:pPr>
             <a:r>
@@ -4743,6 +5248,9 @@
                 <a:solidFill>
                   <a:srgbClr val="706862"/>
                 </a:solidFill>
+                <a:latin typeface="Inter"/>
+                <a:ea typeface="Inter"/>
+                <a:cs typeface="Inter"/>
               </a:rPr>
               <a:t>Reemplace categorías y valores. Use el dorado para la señal principal y el gris para la referencia.</a:t>
             </a:r>
@@ -4754,7 +5262,7 @@
           <p:cNvPr id="6" name="axis">
             <a:extLst xmlns:a="http://schemas.openxmlformats.org/drawingml/2006/main">
               <a:ext uri="{FF2B5EF4-FFF2-40B4-BE49-F238E27FC236}">
-                <a16:creationId xmlns:a16="http://schemas.microsoft.com/office/drawing/2014/main" id="{CECEA9E5-B1D6-48DB-8450-0F9FA75F907A}"/>
+                <a16:creationId xmlns:a16="http://schemas.microsoft.com/office/drawing/2014/main" id="{91207B95-6DEF-4983-9F24-35EEA2E67BA4}"/>
               </a:ext>
             </a:extLst>
           </p:cNvPr>
@@ -4785,7 +5293,7 @@
           <p:cNvPr id="7" name="bar-a-0">
             <a:extLst xmlns:a="http://schemas.openxmlformats.org/drawingml/2006/main">
               <a:ext uri="{FF2B5EF4-FFF2-40B4-BE49-F238E27FC236}">
-                <a16:creationId xmlns:a16="http://schemas.microsoft.com/office/drawing/2014/main" id="{DF0F0392-FDF4-45C1-B0F2-E50918816DBA}"/>
+                <a16:creationId xmlns:a16="http://schemas.microsoft.com/office/drawing/2014/main" id="{07A1DBE4-8F67-4A5F-BF30-6C516230A685}"/>
               </a:ext>
             </a:extLst>
           </p:cNvPr>
@@ -4816,7 +5324,7 @@
           <p:cNvPr id="8" name="bar-b-0">
             <a:extLst xmlns:a="http://schemas.openxmlformats.org/drawingml/2006/main">
               <a:ext uri="{FF2B5EF4-FFF2-40B4-BE49-F238E27FC236}">
-                <a16:creationId xmlns:a16="http://schemas.microsoft.com/office/drawing/2014/main" id="{D2B90E9C-0B08-4948-BB6E-A88C79F690E6}"/>
+                <a16:creationId xmlns:a16="http://schemas.microsoft.com/office/drawing/2014/main" id="{F2E687CA-C52A-4584-BE46-D4F7458DF20B}"/>
               </a:ext>
             </a:extLst>
           </p:cNvPr>
@@ -4847,7 +5355,7 @@
           <p:cNvPr id="9" name="cat-0">
             <a:extLst xmlns:a="http://schemas.openxmlformats.org/drawingml/2006/main">
               <a:ext uri="{FF2B5EF4-FFF2-40B4-BE49-F238E27FC236}">
-                <a16:creationId xmlns:a16="http://schemas.microsoft.com/office/drawing/2014/main" id="{EED4A600-F44E-427A-87BE-AA6F7CB658FB}"/>
+                <a16:creationId xmlns:a16="http://schemas.microsoft.com/office/drawing/2014/main" id="{B6C9D8EC-2C8A-48BC-B8B2-A5FC004F3356}"/>
               </a:ext>
             </a:extLst>
           </p:cNvPr>
@@ -4879,6 +5387,9 @@
                 <a:solidFill>
                   <a:srgbClr val="706862"/>
                 </a:solidFill>
+                <a:latin typeface="Inter"/>
+                <a:ea typeface="Inter"/>
+                <a:cs typeface="Inter"/>
               </a:defRPr>
             </a:pPr>
             <a:r>
@@ -4886,6 +5397,9 @@
                 <a:solidFill>
                   <a:srgbClr val="706862"/>
                 </a:solidFill>
+                <a:latin typeface="Inter"/>
+                <a:ea typeface="Inter"/>
+                <a:cs typeface="Inter"/>
               </a:rPr>
               <a:t>T1</a:t>
             </a:r>
@@ -4897,7 +5411,7 @@
           <p:cNvPr id="10" name="val-0">
             <a:extLst xmlns:a="http://schemas.openxmlformats.org/drawingml/2006/main">
               <a:ext uri="{FF2B5EF4-FFF2-40B4-BE49-F238E27FC236}">
-                <a16:creationId xmlns:a16="http://schemas.microsoft.com/office/drawing/2014/main" id="{58AB27A6-4E25-4002-8825-DEE64E3012DA}"/>
+                <a16:creationId xmlns:a16="http://schemas.microsoft.com/office/drawing/2014/main" id="{8C2181F4-E65E-4B14-819D-26CE59F291AA}"/>
               </a:ext>
             </a:extLst>
           </p:cNvPr>
@@ -4929,6 +5443,9 @@
                 <a:solidFill>
                   <a:srgbClr val="A88650"/>
                 </a:solidFill>
+                <a:latin typeface="Inter"/>
+                <a:ea typeface="Inter"/>
+                <a:cs typeface="Inter"/>
               </a:defRPr>
             </a:pPr>
             <a:r>
@@ -4936,6 +5453,9 @@
                 <a:solidFill>
                   <a:srgbClr val="A88650"/>
                 </a:solidFill>
+                <a:latin typeface="Inter"/>
+                <a:ea typeface="Inter"/>
+                <a:cs typeface="Inter"/>
               </a:rPr>
               <a:t>42</a:t>
             </a:r>
@@ -4947,7 +5467,7 @@
           <p:cNvPr id="11" name="bar-a-1">
             <a:extLst xmlns:a="http://schemas.openxmlformats.org/drawingml/2006/main">
               <a:ext uri="{FF2B5EF4-FFF2-40B4-BE49-F238E27FC236}">
-                <a16:creationId xmlns:a16="http://schemas.microsoft.com/office/drawing/2014/main" id="{1A1D6EC1-0615-428D-93AB-CB562CDD697F}"/>
+                <a16:creationId xmlns:a16="http://schemas.microsoft.com/office/drawing/2014/main" id="{7A6894DB-0923-4727-927B-D18D8BFE35A2}"/>
               </a:ext>
             </a:extLst>
           </p:cNvPr>
@@ -4978,7 +5498,7 @@
           <p:cNvPr id="12" name="bar-b-1">
             <a:extLst xmlns:a="http://schemas.openxmlformats.org/drawingml/2006/main">
               <a:ext uri="{FF2B5EF4-FFF2-40B4-BE49-F238E27FC236}">
-                <a16:creationId xmlns:a16="http://schemas.microsoft.com/office/drawing/2014/main" id="{1377B315-5416-46C3-8B58-22CD2D511C0D}"/>
+                <a16:creationId xmlns:a16="http://schemas.microsoft.com/office/drawing/2014/main" id="{1BCE0827-3D22-4913-8051-893D04FC5F62}"/>
               </a:ext>
             </a:extLst>
           </p:cNvPr>
@@ -5009,7 +5529,7 @@
           <p:cNvPr id="13" name="cat-1">
             <a:extLst xmlns:a="http://schemas.openxmlformats.org/drawingml/2006/main">
               <a:ext uri="{FF2B5EF4-FFF2-40B4-BE49-F238E27FC236}">
-                <a16:creationId xmlns:a16="http://schemas.microsoft.com/office/drawing/2014/main" id="{889C41D3-B43F-4D50-B64B-D5DF6D9D394E}"/>
+                <a16:creationId xmlns:a16="http://schemas.microsoft.com/office/drawing/2014/main" id="{DA68C60F-F064-415C-ABBE-A627FF4C0871}"/>
               </a:ext>
             </a:extLst>
           </p:cNvPr>
@@ -5041,6 +5561,9 @@
                 <a:solidFill>
                   <a:srgbClr val="706862"/>
                 </a:solidFill>
+                <a:latin typeface="Inter"/>
+                <a:ea typeface="Inter"/>
+                <a:cs typeface="Inter"/>
               </a:defRPr>
             </a:pPr>
             <a:r>
@@ -5048,6 +5571,9 @@
                 <a:solidFill>
                   <a:srgbClr val="706862"/>
                 </a:solidFill>
+                <a:latin typeface="Inter"/>
+                <a:ea typeface="Inter"/>
+                <a:cs typeface="Inter"/>
               </a:rPr>
               <a:t>T2</a:t>
             </a:r>
@@ -5059,7 +5585,7 @@
           <p:cNvPr id="14" name="val-1">
             <a:extLst xmlns:a="http://schemas.openxmlformats.org/drawingml/2006/main">
               <a:ext uri="{FF2B5EF4-FFF2-40B4-BE49-F238E27FC236}">
-                <a16:creationId xmlns:a16="http://schemas.microsoft.com/office/drawing/2014/main" id="{5FF938F2-4366-409D-9DCF-268FFC0E1347}"/>
+                <a16:creationId xmlns:a16="http://schemas.microsoft.com/office/drawing/2014/main" id="{49D68293-5478-40FD-AE10-3752B37E5F4A}"/>
               </a:ext>
             </a:extLst>
           </p:cNvPr>
@@ -5091,6 +5617,9 @@
                 <a:solidFill>
                   <a:srgbClr val="A88650"/>
                 </a:solidFill>
+                <a:latin typeface="Inter"/>
+                <a:ea typeface="Inter"/>
+                <a:cs typeface="Inter"/>
               </a:defRPr>
             </a:pPr>
             <a:r>
@@ -5098,6 +5627,9 @@
                 <a:solidFill>
                   <a:srgbClr val="A88650"/>
                 </a:solidFill>
+                <a:latin typeface="Inter"/>
+                <a:ea typeface="Inter"/>
+                <a:cs typeface="Inter"/>
               </a:rPr>
               <a:t>55</a:t>
             </a:r>
@@ -5109,7 +5641,7 @@
           <p:cNvPr id="15" name="bar-a-2">
             <a:extLst xmlns:a="http://schemas.openxmlformats.org/drawingml/2006/main">
               <a:ext uri="{FF2B5EF4-FFF2-40B4-BE49-F238E27FC236}">
-                <a16:creationId xmlns:a16="http://schemas.microsoft.com/office/drawing/2014/main" id="{4F04FDC5-42C9-4A96-9100-CC822FB05AAF}"/>
+                <a16:creationId xmlns:a16="http://schemas.microsoft.com/office/drawing/2014/main" id="{FA16C703-D451-4863-9DC0-B3E9BF283714}"/>
               </a:ext>
             </a:extLst>
           </p:cNvPr>
@@ -5140,7 +5672,7 @@
           <p:cNvPr id="16" name="bar-b-2">
             <a:extLst xmlns:a="http://schemas.openxmlformats.org/drawingml/2006/main">
               <a:ext uri="{FF2B5EF4-FFF2-40B4-BE49-F238E27FC236}">
-                <a16:creationId xmlns:a16="http://schemas.microsoft.com/office/drawing/2014/main" id="{5588CD35-95E3-4D1A-B555-3C8AA07A75B5}"/>
+                <a16:creationId xmlns:a16="http://schemas.microsoft.com/office/drawing/2014/main" id="{4ECA56AC-8EDD-408C-B5B7-97785607E274}"/>
               </a:ext>
             </a:extLst>
           </p:cNvPr>
@@ -5171,7 +5703,7 @@
           <p:cNvPr id="17" name="cat-2">
             <a:extLst xmlns:a="http://schemas.openxmlformats.org/drawingml/2006/main">
               <a:ext uri="{FF2B5EF4-FFF2-40B4-BE49-F238E27FC236}">
-                <a16:creationId xmlns:a16="http://schemas.microsoft.com/office/drawing/2014/main" id="{A77D65B9-715C-491D-BC49-83EC05624BB9}"/>
+                <a16:creationId xmlns:a16="http://schemas.microsoft.com/office/drawing/2014/main" id="{1D7CD6E6-0D2B-4B8E-A23E-7C02E75CC2B0}"/>
               </a:ext>
             </a:extLst>
           </p:cNvPr>
@@ -5203,6 +5735,9 @@
                 <a:solidFill>
                   <a:srgbClr val="706862"/>
                 </a:solidFill>
+                <a:latin typeface="Inter"/>
+                <a:ea typeface="Inter"/>
+                <a:cs typeface="Inter"/>
               </a:defRPr>
             </a:pPr>
             <a:r>
@@ -5210,6 +5745,9 @@
                 <a:solidFill>
                   <a:srgbClr val="706862"/>
                 </a:solidFill>
+                <a:latin typeface="Inter"/>
+                <a:ea typeface="Inter"/>
+                <a:cs typeface="Inter"/>
               </a:rPr>
               <a:t>T3</a:t>
             </a:r>
@@ -5221,7 +5759,7 @@
           <p:cNvPr id="18" name="val-2">
             <a:extLst xmlns:a="http://schemas.openxmlformats.org/drawingml/2006/main">
               <a:ext uri="{FF2B5EF4-FFF2-40B4-BE49-F238E27FC236}">
-                <a16:creationId xmlns:a16="http://schemas.microsoft.com/office/drawing/2014/main" id="{FF5162F1-DCA2-4497-A171-E4A55DD8D604}"/>
+                <a16:creationId xmlns:a16="http://schemas.microsoft.com/office/drawing/2014/main" id="{84466510-9E74-4A16-903E-2D81E46D7D83}"/>
               </a:ext>
             </a:extLst>
           </p:cNvPr>
@@ -5253,6 +5791,9 @@
                 <a:solidFill>
                   <a:srgbClr val="A88650"/>
                 </a:solidFill>
+                <a:latin typeface="Inter"/>
+                <a:ea typeface="Inter"/>
+                <a:cs typeface="Inter"/>
               </a:defRPr>
             </a:pPr>
             <a:r>
@@ -5260,6 +5801,9 @@
                 <a:solidFill>
                   <a:srgbClr val="A88650"/>
                 </a:solidFill>
+                <a:latin typeface="Inter"/>
+                <a:ea typeface="Inter"/>
+                <a:cs typeface="Inter"/>
               </a:rPr>
               <a:t>66</a:t>
             </a:r>
@@ -5271,7 +5815,7 @@
           <p:cNvPr id="19" name="bar-a-3">
             <a:extLst xmlns:a="http://schemas.openxmlformats.org/drawingml/2006/main">
               <a:ext uri="{FF2B5EF4-FFF2-40B4-BE49-F238E27FC236}">
-                <a16:creationId xmlns:a16="http://schemas.microsoft.com/office/drawing/2014/main" id="{FA661FD4-A260-4B4F-B02C-3CEF9E799527}"/>
+                <a16:creationId xmlns:a16="http://schemas.microsoft.com/office/drawing/2014/main" id="{616C4FEE-CA03-4393-B48A-D7EBFA774D38}"/>
               </a:ext>
             </a:extLst>
           </p:cNvPr>
@@ -5302,7 +5846,7 @@
           <p:cNvPr id="20" name="bar-b-3">
             <a:extLst xmlns:a="http://schemas.openxmlformats.org/drawingml/2006/main">
               <a:ext uri="{FF2B5EF4-FFF2-40B4-BE49-F238E27FC236}">
-                <a16:creationId xmlns:a16="http://schemas.microsoft.com/office/drawing/2014/main" id="{E691009D-F476-498A-990E-9FDB4FC6277C}"/>
+                <a16:creationId xmlns:a16="http://schemas.microsoft.com/office/drawing/2014/main" id="{EBB79D88-88D3-4EA5-84EC-E633C651B8AA}"/>
               </a:ext>
             </a:extLst>
           </p:cNvPr>
@@ -5333,7 +5877,7 @@
           <p:cNvPr id="21" name="cat-3">
             <a:extLst xmlns:a="http://schemas.openxmlformats.org/drawingml/2006/main">
               <a:ext uri="{FF2B5EF4-FFF2-40B4-BE49-F238E27FC236}">
-                <a16:creationId xmlns:a16="http://schemas.microsoft.com/office/drawing/2014/main" id="{16807F24-CFD3-4B6A-BEDB-A47CB0854221}"/>
+                <a16:creationId xmlns:a16="http://schemas.microsoft.com/office/drawing/2014/main" id="{7502EC92-33C7-45C5-94DE-31904D789F04}"/>
               </a:ext>
             </a:extLst>
           </p:cNvPr>
@@ -5365,6 +5909,9 @@
                 <a:solidFill>
                   <a:srgbClr val="706862"/>
                 </a:solidFill>
+                <a:latin typeface="Inter"/>
+                <a:ea typeface="Inter"/>
+                <a:cs typeface="Inter"/>
               </a:defRPr>
             </a:pPr>
             <a:r>
@@ -5372,6 +5919,9 @@
                 <a:solidFill>
                   <a:srgbClr val="706862"/>
                 </a:solidFill>
+                <a:latin typeface="Inter"/>
+                <a:ea typeface="Inter"/>
+                <a:cs typeface="Inter"/>
               </a:rPr>
               <a:t>T4</a:t>
             </a:r>
@@ -5383,7 +5933,7 @@
           <p:cNvPr id="22" name="val-3">
             <a:extLst xmlns:a="http://schemas.openxmlformats.org/drawingml/2006/main">
               <a:ext uri="{FF2B5EF4-FFF2-40B4-BE49-F238E27FC236}">
-                <a16:creationId xmlns:a16="http://schemas.microsoft.com/office/drawing/2014/main" id="{504BCAA6-3A1C-4687-B03F-AA70ECC52C64}"/>
+                <a16:creationId xmlns:a16="http://schemas.microsoft.com/office/drawing/2014/main" id="{A2CC6F29-4442-42CB-9137-DF18DA7DB4A5}"/>
               </a:ext>
             </a:extLst>
           </p:cNvPr>
@@ -5415,6 +5965,9 @@
                 <a:solidFill>
                   <a:srgbClr val="A88650"/>
                 </a:solidFill>
+                <a:latin typeface="Inter"/>
+                <a:ea typeface="Inter"/>
+                <a:cs typeface="Inter"/>
               </a:defRPr>
             </a:pPr>
             <a:r>
@@ -5422,6 +5975,9 @@
                 <a:solidFill>
                   <a:srgbClr val="A88650"/>
                 </a:solidFill>
+                <a:latin typeface="Inter"/>
+                <a:ea typeface="Inter"/>
+                <a:cs typeface="Inter"/>
               </a:rPr>
               <a:t>82</a:t>
             </a:r>
@@ -5433,7 +5989,7 @@
           <p:cNvPr id="23" name="legend-a">
             <a:extLst xmlns:a="http://schemas.openxmlformats.org/drawingml/2006/main">
               <a:ext uri="{FF2B5EF4-FFF2-40B4-BE49-F238E27FC236}">
-                <a16:creationId xmlns:a16="http://schemas.microsoft.com/office/drawing/2014/main" id="{73D8E65C-63D6-4BAC-8AE6-2702D1ECEF23}"/>
+                <a16:creationId xmlns:a16="http://schemas.microsoft.com/office/drawing/2014/main" id="{9241F250-5BE6-41A1-8430-9FF5E54834EB}"/>
               </a:ext>
             </a:extLst>
           </p:cNvPr>
@@ -5465,6 +6021,9 @@
                 <a:solidFill>
                   <a:srgbClr val="A88650"/>
                 </a:solidFill>
+                <a:latin typeface="Inter"/>
+                <a:ea typeface="Inter"/>
+                <a:cs typeface="Inter"/>
               </a:defRPr>
             </a:pPr>
             <a:r>
@@ -5472,6 +6031,9 @@
                 <a:solidFill>
                   <a:srgbClr val="A88650"/>
                 </a:solidFill>
+                <a:latin typeface="Inter"/>
+                <a:ea typeface="Inter"/>
+                <a:cs typeface="Inter"/>
               </a:rPr>
               <a:t>MARCA</a:t>
             </a:r>
@@ -5483,7 +6045,7 @@
           <p:cNvPr id="24" name="legend-b">
             <a:extLst xmlns:a="http://schemas.openxmlformats.org/drawingml/2006/main">
               <a:ext uri="{FF2B5EF4-FFF2-40B4-BE49-F238E27FC236}">
-                <a16:creationId xmlns:a16="http://schemas.microsoft.com/office/drawing/2014/main" id="{03027FA1-B2CD-4D11-8154-7FEF64172954}"/>
+                <a16:creationId xmlns:a16="http://schemas.microsoft.com/office/drawing/2014/main" id="{1CD6A233-0159-4036-8BB8-D3C3D8B3BE49}"/>
               </a:ext>
             </a:extLst>
           </p:cNvPr>
@@ -5515,6 +6077,9 @@
                 <a:solidFill>
                   <a:srgbClr val="706862"/>
                 </a:solidFill>
+                <a:latin typeface="Inter"/>
+                <a:ea typeface="Inter"/>
+                <a:cs typeface="Inter"/>
               </a:defRPr>
             </a:pPr>
             <a:r>
@@ -5522,6 +6087,9 @@
                 <a:solidFill>
                   <a:srgbClr val="706862"/>
                 </a:solidFill>
+                <a:latin typeface="Inter"/>
+                <a:ea typeface="Inter"/>
+                <a:cs typeface="Inter"/>
               </a:rPr>
               <a:t>REFERENCIA</a:t>
             </a:r>
@@ -5531,7 +6099,7 @@
     </p:spTree>
     <p:extLst>
       <p:ext uri="{BB962C8B-B14F-4D97-AF65-F5344CB8AC3E}">
-        <p14:creationId xmlns:p14="http://schemas.microsoft.com/office/powerpoint/2010/main" val="1041925745"/>
+        <p14:creationId xmlns:p14="http://schemas.microsoft.com/office/powerpoint/2010/main" val="1688313069"/>
       </p:ext>
     </p:extLst>
   </p:cSld>
@@ -5562,7 +6130,7 @@
           <p:cNvPr id="12" name="brand">
             <a:extLst xmlns:a="http://schemas.openxmlformats.org/drawingml/2006/main">
               <a:ext uri="{FF2B5EF4-FFF2-40B4-BE49-F238E27FC236}">
-                <a16:creationId xmlns:a16="http://schemas.microsoft.com/office/drawing/2014/main" id="{4010F7E9-220F-4E90-B16F-625CD36E1626}"/>
+                <a16:creationId xmlns:a16="http://schemas.microsoft.com/office/drawing/2014/main" id="{D3D5BECD-2F31-472D-9398-A78E4F6EEBBB}"/>
               </a:ext>
             </a:extLst>
           </p:cNvPr>
@@ -5594,6 +6162,9 @@
                 <a:solidFill>
                   <a:srgbClr val="A88650"/>
                 </a:solidFill>
+                <a:latin typeface="Inter"/>
+                <a:ea typeface="Inter"/>
+                <a:cs typeface="Inter"/>
               </a:defRPr>
             </a:pPr>
             <a:r>
@@ -5601,6 +6172,9 @@
                 <a:solidFill>
                   <a:srgbClr val="A88650"/>
                 </a:solidFill>
+                <a:latin typeface="Inter"/>
+                <a:ea typeface="Inter"/>
+                <a:cs typeface="Inter"/>
               </a:rPr>
               <a:t>RON CARÚPANO</a:t>
             </a:r>
@@ -5612,7 +6186,7 @@
           <p:cNvPr id="2" name="page">
             <a:extLst xmlns:a="http://schemas.openxmlformats.org/drawingml/2006/main">
               <a:ext uri="{FF2B5EF4-FFF2-40B4-BE49-F238E27FC236}">
-                <a16:creationId xmlns:a16="http://schemas.microsoft.com/office/drawing/2014/main" id="{B18C06DE-5A6B-49C1-9F3A-39BA485CF628}"/>
+                <a16:creationId xmlns:a16="http://schemas.microsoft.com/office/drawing/2014/main" id="{A66279BB-AE44-415E-829B-AAAD138AA122}"/>
               </a:ext>
             </a:extLst>
           </p:cNvPr>
@@ -5644,6 +6218,9 @@
                 <a:solidFill>
                   <a:srgbClr val="706862"/>
                 </a:solidFill>
+                <a:latin typeface="Inter"/>
+                <a:ea typeface="Inter"/>
+                <a:cs typeface="Inter"/>
               </a:defRPr>
             </a:pPr>
             <a:r>
@@ -5651,6 +6228,9 @@
                 <a:solidFill>
                   <a:srgbClr val="706862"/>
                 </a:solidFill>
+                <a:latin typeface="Inter"/>
+                <a:ea typeface="Inter"/>
+                <a:cs typeface="Inter"/>
               </a:rPr>
               <a:t>14</a:t>
             </a:r>
@@ -5662,7 +6242,7 @@
           <p:cNvPr id="3" name="title">
             <a:extLst xmlns:a="http://schemas.openxmlformats.org/drawingml/2006/main">
               <a:ext uri="{FF2B5EF4-FFF2-40B4-BE49-F238E27FC236}">
-                <a16:creationId xmlns:a16="http://schemas.microsoft.com/office/drawing/2014/main" id="{50CEF0C8-FDE5-43DB-BA33-D230922D3685}"/>
+                <a16:creationId xmlns:a16="http://schemas.microsoft.com/office/drawing/2014/main" id="{F048E72E-A9DA-4F83-AD80-8B9663385F7D}"/>
               </a:ext>
             </a:extLst>
           </p:cNvPr>
@@ -5694,6 +6274,9 @@
                 <a:solidFill>
                   <a:srgbClr val="100C0A"/>
                 </a:solidFill>
+                <a:latin typeface="Adobe Garamond Pro"/>
+                <a:ea typeface="Adobe Garamond Pro"/>
+                <a:cs typeface="Adobe Garamond Pro"/>
               </a:defRPr>
             </a:pPr>
             <a:r>
@@ -5701,6 +6284,9 @@
                 <a:solidFill>
                   <a:srgbClr val="100C0A"/>
                 </a:solidFill>
+                <a:latin typeface="Adobe Garamond Pro"/>
+                <a:ea typeface="Adobe Garamond Pro"/>
+                <a:cs typeface="Adobe Garamond Pro"/>
               </a:rPr>
               <a:t>Dos caminos.</a:t>
             </a:r>
@@ -5711,6 +6297,9 @@
                 <a:solidFill>
                   <a:srgbClr val="100C0A"/>
                 </a:solidFill>
+                <a:latin typeface="Adobe Garamond Pro"/>
+                <a:ea typeface="Adobe Garamond Pro"/>
+                <a:cs typeface="Adobe Garamond Pro"/>
               </a:defRPr>
             </a:pPr>
             <a:r>
@@ -5718,6 +6307,9 @@
                 <a:solidFill>
                   <a:srgbClr val="100C0A"/>
                 </a:solidFill>
+                <a:latin typeface="Adobe Garamond Pro"/>
+                <a:ea typeface="Adobe Garamond Pro"/>
+                <a:cs typeface="Adobe Garamond Pro"/>
               </a:rPr>
               <a:t>Una decisión.</a:t>
             </a:r>
@@ -5729,7 +6321,7 @@
           <p:cNvPr id="4" name="col0">
             <a:extLst xmlns:a="http://schemas.openxmlformats.org/drawingml/2006/main">
               <a:ext uri="{FF2B5EF4-FFF2-40B4-BE49-F238E27FC236}">
-                <a16:creationId xmlns:a16="http://schemas.microsoft.com/office/drawing/2014/main" id="{CD8F017B-0565-4E33-BA64-A239A7171EC9}"/>
+                <a16:creationId xmlns:a16="http://schemas.microsoft.com/office/drawing/2014/main" id="{49C60352-D9D4-453D-9D35-5EBBF79FA7D3}"/>
               </a:ext>
             </a:extLst>
           </p:cNvPr>
@@ -5762,7 +6354,7 @@
           <p:cNvPr id="5" name="lab0">
             <a:extLst xmlns:a="http://schemas.openxmlformats.org/drawingml/2006/main">
               <a:ext uri="{FF2B5EF4-FFF2-40B4-BE49-F238E27FC236}">
-                <a16:creationId xmlns:a16="http://schemas.microsoft.com/office/drawing/2014/main" id="{BBF603A9-2642-4A6B-BADB-B52AD71A2834}"/>
+                <a16:creationId xmlns:a16="http://schemas.microsoft.com/office/drawing/2014/main" id="{90E8EE94-9412-436E-8F99-BA9995A0911F}"/>
               </a:ext>
             </a:extLst>
           </p:cNvPr>
@@ -5794,6 +6386,9 @@
                 <a:solidFill>
                   <a:srgbClr val="D5B879"/>
                 </a:solidFill>
+                <a:latin typeface="Inter"/>
+                <a:ea typeface="Inter"/>
+                <a:cs typeface="Inter"/>
               </a:defRPr>
             </a:pPr>
             <a:r>
@@ -5801,6 +6396,9 @@
                 <a:solidFill>
                   <a:srgbClr val="D5B879"/>
                 </a:solidFill>
+                <a:latin typeface="Inter"/>
+                <a:ea typeface="Inter"/>
+                <a:cs typeface="Inter"/>
               </a:rPr>
               <a:t>OPCIÓN A</a:t>
             </a:r>
@@ -5812,7 +6410,7 @@
           <p:cNvPr id="6" name="head0">
             <a:extLst xmlns:a="http://schemas.openxmlformats.org/drawingml/2006/main">
               <a:ext uri="{FF2B5EF4-FFF2-40B4-BE49-F238E27FC236}">
-                <a16:creationId xmlns:a16="http://schemas.microsoft.com/office/drawing/2014/main" id="{9702E458-F6B3-4AC5-9B9C-BA8147FE8E9C}"/>
+                <a16:creationId xmlns:a16="http://schemas.microsoft.com/office/drawing/2014/main" id="{C1C3499C-1599-486A-8567-7188DDD1C616}"/>
               </a:ext>
             </a:extLst>
           </p:cNvPr>
@@ -5844,6 +6442,9 @@
                 <a:solidFill>
                   <a:srgbClr val="F3EEE6"/>
                 </a:solidFill>
+                <a:latin typeface="Adobe Garamond Pro"/>
+                <a:ea typeface="Adobe Garamond Pro"/>
+                <a:cs typeface="Adobe Garamond Pro"/>
               </a:defRPr>
             </a:pPr>
             <a:r>
@@ -5851,6 +6452,9 @@
                 <a:solidFill>
                   <a:srgbClr val="F3EEE6"/>
                 </a:solidFill>
+                <a:latin typeface="Adobe Garamond Pro"/>
+                <a:ea typeface="Adobe Garamond Pro"/>
+                <a:cs typeface="Adobe Garamond Pro"/>
               </a:rPr>
               <a:t>Profundizar</a:t>
             </a:r>
@@ -5862,7 +6466,7 @@
           <p:cNvPr id="7" name="copy0">
             <a:extLst xmlns:a="http://schemas.openxmlformats.org/drawingml/2006/main">
               <a:ext uri="{FF2B5EF4-FFF2-40B4-BE49-F238E27FC236}">
-                <a16:creationId xmlns:a16="http://schemas.microsoft.com/office/drawing/2014/main" id="{C18C9295-168A-41A9-8BDE-673E2D1A0E7A}"/>
+                <a16:creationId xmlns:a16="http://schemas.microsoft.com/office/drawing/2014/main" id="{1E00B18E-332C-4549-B69F-5041F4670769}"/>
               </a:ext>
             </a:extLst>
           </p:cNvPr>
@@ -5896,6 +6500,9 @@
                     <a:alpha val="65882"/>
                   </a:srgbClr>
                 </a:solidFill>
+                <a:latin typeface="Inter"/>
+                <a:ea typeface="Inter"/>
+                <a:cs typeface="Inter"/>
               </a:defRPr>
             </a:pPr>
             <a:r>
@@ -5905,6 +6512,9 @@
                     <a:alpha val="65882"/>
                   </a:srgbClr>
                 </a:solidFill>
+                <a:latin typeface="Inter"/>
+                <a:ea typeface="Inter"/>
+                <a:cs typeface="Inter"/>
               </a:rPr>
               <a:t>Concentrar inversión en los territorios de mayor autoridad y valor percibido.</a:t>
             </a:r>
@@ -5916,7 +6526,7 @@
           <p:cNvPr id="8" name="col1">
             <a:extLst xmlns:a="http://schemas.openxmlformats.org/drawingml/2006/main">
               <a:ext uri="{FF2B5EF4-FFF2-40B4-BE49-F238E27FC236}">
-                <a16:creationId xmlns:a16="http://schemas.microsoft.com/office/drawing/2014/main" id="{836C586D-315F-4BBD-9010-ED2206EDE418}"/>
+                <a16:creationId xmlns:a16="http://schemas.microsoft.com/office/drawing/2014/main" id="{9C6BCBDD-B77B-483B-A74A-257ED52EA1FB}"/>
               </a:ext>
             </a:extLst>
           </p:cNvPr>
@@ -5949,7 +6559,7 @@
           <p:cNvPr id="9" name="lab1">
             <a:extLst xmlns:a="http://schemas.openxmlformats.org/drawingml/2006/main">
               <a:ext uri="{FF2B5EF4-FFF2-40B4-BE49-F238E27FC236}">
-                <a16:creationId xmlns:a16="http://schemas.microsoft.com/office/drawing/2014/main" id="{C938C9DB-78FD-4C64-99BA-011DFADB9F7E}"/>
+                <a16:creationId xmlns:a16="http://schemas.microsoft.com/office/drawing/2014/main" id="{76A436FC-BE93-4AD9-A993-04218F824785}"/>
               </a:ext>
             </a:extLst>
           </p:cNvPr>
@@ -5981,6 +6591,9 @@
                 <a:solidFill>
                   <a:srgbClr val="100C0A"/>
                 </a:solidFill>
+                <a:latin typeface="Inter"/>
+                <a:ea typeface="Inter"/>
+                <a:cs typeface="Inter"/>
               </a:defRPr>
             </a:pPr>
             <a:r>
@@ -5988,6 +6601,9 @@
                 <a:solidFill>
                   <a:srgbClr val="100C0A"/>
                 </a:solidFill>
+                <a:latin typeface="Inter"/>
+                <a:ea typeface="Inter"/>
+                <a:cs typeface="Inter"/>
               </a:rPr>
               <a:t>OPCIÓN B</a:t>
             </a:r>
@@ -5999,7 +6615,7 @@
           <p:cNvPr id="10" name="head1">
             <a:extLst xmlns:a="http://schemas.openxmlformats.org/drawingml/2006/main">
               <a:ext uri="{FF2B5EF4-FFF2-40B4-BE49-F238E27FC236}">
-                <a16:creationId xmlns:a16="http://schemas.microsoft.com/office/drawing/2014/main" id="{F66333A9-B513-446C-942A-37CB5DB34086}"/>
+                <a16:creationId xmlns:a16="http://schemas.microsoft.com/office/drawing/2014/main" id="{C76BF6A0-65EF-4BD9-837E-D2AC1DC8F332}"/>
               </a:ext>
             </a:extLst>
           </p:cNvPr>
@@ -6031,6 +6647,9 @@
                 <a:solidFill>
                   <a:srgbClr val="100C0A"/>
                 </a:solidFill>
+                <a:latin typeface="Adobe Garamond Pro"/>
+                <a:ea typeface="Adobe Garamond Pro"/>
+                <a:cs typeface="Adobe Garamond Pro"/>
               </a:defRPr>
             </a:pPr>
             <a:r>
@@ -6038,6 +6657,9 @@
                 <a:solidFill>
                   <a:srgbClr val="100C0A"/>
                 </a:solidFill>
+                <a:latin typeface="Adobe Garamond Pro"/>
+                <a:ea typeface="Adobe Garamond Pro"/>
+                <a:cs typeface="Adobe Garamond Pro"/>
               </a:rPr>
               <a:t>Expandir</a:t>
             </a:r>
@@ -6049,7 +6671,7 @@
           <p:cNvPr id="11" name="copy1">
             <a:extLst xmlns:a="http://schemas.openxmlformats.org/drawingml/2006/main">
               <a:ext uri="{FF2B5EF4-FFF2-40B4-BE49-F238E27FC236}">
-                <a16:creationId xmlns:a16="http://schemas.microsoft.com/office/drawing/2014/main" id="{A79A7C30-4E1E-4518-8AEF-12664DFF5090}"/>
+                <a16:creationId xmlns:a16="http://schemas.microsoft.com/office/drawing/2014/main" id="{89A2C670-1063-4D91-A98C-C7462E497D88}"/>
               </a:ext>
             </a:extLst>
           </p:cNvPr>
@@ -6083,6 +6705,9 @@
                     <a:alpha val="72157"/>
                   </a:srgbClr>
                 </a:solidFill>
+                <a:latin typeface="Inter"/>
+                <a:ea typeface="Inter"/>
+                <a:cs typeface="Inter"/>
               </a:defRPr>
             </a:pPr>
             <a:r>
@@ -6092,6 +6717,9 @@
                     <a:alpha val="72157"/>
                   </a:srgbClr>
                 </a:solidFill>
+                <a:latin typeface="Inter"/>
+                <a:ea typeface="Inter"/>
+                <a:cs typeface="Inter"/>
               </a:rPr>
               <a:t>Abrir nuevas ocasiones y audiencias manteniendo la coherencia del sistema.</a:t>
             </a:r>
@@ -6101,7 +6729,7 @@
     </p:spTree>
     <p:extLst>
       <p:ext uri="{BB962C8B-B14F-4D97-AF65-F5344CB8AC3E}">
-        <p14:creationId xmlns:p14="http://schemas.microsoft.com/office/powerpoint/2010/main" val="6487322"/>
+        <p14:creationId xmlns:p14="http://schemas.microsoft.com/office/powerpoint/2010/main" val="1574039916"/>
       </p:ext>
     </p:extLst>
   </p:cSld>
@@ -6132,7 +6760,7 @@
           <p:cNvPr id="21" name="brand">
             <a:extLst xmlns:a="http://schemas.openxmlformats.org/drawingml/2006/main">
               <a:ext uri="{FF2B5EF4-FFF2-40B4-BE49-F238E27FC236}">
-                <a16:creationId xmlns:a16="http://schemas.microsoft.com/office/drawing/2014/main" id="{28FF169A-AE56-484F-A7DD-4288D906838A}"/>
+                <a16:creationId xmlns:a16="http://schemas.microsoft.com/office/drawing/2014/main" id="{6DF2331D-6DF4-466E-80A0-3A24E8C55BBE}"/>
               </a:ext>
             </a:extLst>
           </p:cNvPr>
@@ -6164,6 +6792,9 @@
                 <a:solidFill>
                   <a:srgbClr val="A88650"/>
                 </a:solidFill>
+                <a:latin typeface="Inter"/>
+                <a:ea typeface="Inter"/>
+                <a:cs typeface="Inter"/>
               </a:defRPr>
             </a:pPr>
             <a:r>
@@ -6171,6 +6802,9 @@
                 <a:solidFill>
                   <a:srgbClr val="A88650"/>
                 </a:solidFill>
+                <a:latin typeface="Inter"/>
+                <a:ea typeface="Inter"/>
+                <a:cs typeface="Inter"/>
               </a:rPr>
               <a:t>RON CARÚPANO</a:t>
             </a:r>
@@ -6182,7 +6816,7 @@
           <p:cNvPr id="2" name="page">
             <a:extLst xmlns:a="http://schemas.openxmlformats.org/drawingml/2006/main">
               <a:ext uri="{FF2B5EF4-FFF2-40B4-BE49-F238E27FC236}">
-                <a16:creationId xmlns:a16="http://schemas.microsoft.com/office/drawing/2014/main" id="{6E011D39-4A88-4FB1-9E63-460C3198AD2A}"/>
+                <a16:creationId xmlns:a16="http://schemas.microsoft.com/office/drawing/2014/main" id="{A6C86C1B-79A5-469A-B731-089F886A6BB8}"/>
               </a:ext>
             </a:extLst>
           </p:cNvPr>
@@ -6214,6 +6848,9 @@
                 <a:solidFill>
                   <a:srgbClr val="706862"/>
                 </a:solidFill>
+                <a:latin typeface="Inter"/>
+                <a:ea typeface="Inter"/>
+                <a:cs typeface="Inter"/>
               </a:defRPr>
             </a:pPr>
             <a:r>
@@ -6221,6 +6858,9 @@
                 <a:solidFill>
                   <a:srgbClr val="706862"/>
                 </a:solidFill>
+                <a:latin typeface="Inter"/>
+                <a:ea typeface="Inter"/>
+                <a:cs typeface="Inter"/>
               </a:rPr>
               <a:t>15</a:t>
             </a:r>
@@ -6232,7 +6872,7 @@
           <p:cNvPr id="3" name="title">
             <a:extLst xmlns:a="http://schemas.openxmlformats.org/drawingml/2006/main">
               <a:ext uri="{FF2B5EF4-FFF2-40B4-BE49-F238E27FC236}">
-                <a16:creationId xmlns:a16="http://schemas.microsoft.com/office/drawing/2014/main" id="{2CD8A096-731B-4B7E-BB17-CDB601B5F805}"/>
+                <a16:creationId xmlns:a16="http://schemas.microsoft.com/office/drawing/2014/main" id="{27D90F05-EC62-4F61-8C12-A06DA6C36E8B}"/>
               </a:ext>
             </a:extLst>
           </p:cNvPr>
@@ -6264,6 +6904,9 @@
                 <a:solidFill>
                   <a:srgbClr val="100C0A"/>
                 </a:solidFill>
+                <a:latin typeface="Adobe Garamond Pro"/>
+                <a:ea typeface="Adobe Garamond Pro"/>
+                <a:cs typeface="Adobe Garamond Pro"/>
               </a:defRPr>
             </a:pPr>
             <a:r>
@@ -6271,6 +6914,9 @@
                 <a:solidFill>
                   <a:srgbClr val="100C0A"/>
                 </a:solidFill>
+                <a:latin typeface="Adobe Garamond Pro"/>
+                <a:ea typeface="Adobe Garamond Pro"/>
+                <a:cs typeface="Adobe Garamond Pro"/>
               </a:rPr>
               <a:t>De la reserva</a:t>
             </a:r>
@@ -6281,6 +6927,9 @@
                 <a:solidFill>
                   <a:srgbClr val="100C0A"/>
                 </a:solidFill>
+                <a:latin typeface="Adobe Garamond Pro"/>
+                <a:ea typeface="Adobe Garamond Pro"/>
+                <a:cs typeface="Adobe Garamond Pro"/>
               </a:defRPr>
             </a:pPr>
             <a:r>
@@ -6288,6 +6937,9 @@
                 <a:solidFill>
                   <a:srgbClr val="100C0A"/>
                 </a:solidFill>
+                <a:latin typeface="Adobe Garamond Pro"/>
+                <a:ea typeface="Adobe Garamond Pro"/>
+                <a:cs typeface="Adobe Garamond Pro"/>
               </a:rPr>
               <a:t>a la experiencia.</a:t>
             </a:r>
@@ -6299,7 +6951,7 @@
           <p:cNvPr id="4" name="timeline">
             <a:extLst xmlns:a="http://schemas.openxmlformats.org/drawingml/2006/main">
               <a:ext uri="{FF2B5EF4-FFF2-40B4-BE49-F238E27FC236}">
-                <a16:creationId xmlns:a16="http://schemas.microsoft.com/office/drawing/2014/main" id="{3639FE86-1458-43EC-B844-DDB9E1F2C79B}"/>
+                <a16:creationId xmlns:a16="http://schemas.microsoft.com/office/drawing/2014/main" id="{B8FBE447-43A2-4FD3-80CB-68474D35F33C}"/>
               </a:ext>
             </a:extLst>
           </p:cNvPr>
@@ -6330,7 +6982,7 @@
           <p:cNvPr id="5" name="dot0">
             <a:extLst xmlns:a="http://schemas.openxmlformats.org/drawingml/2006/main">
               <a:ext uri="{FF2B5EF4-FFF2-40B4-BE49-F238E27FC236}">
-                <a16:creationId xmlns:a16="http://schemas.microsoft.com/office/drawing/2014/main" id="{335DA998-B834-42F6-9525-F3F911832EDF}"/>
+                <a16:creationId xmlns:a16="http://schemas.microsoft.com/office/drawing/2014/main" id="{396D29B5-DB49-473F-8EE8-5D46BE9BA665}"/>
               </a:ext>
             </a:extLst>
           </p:cNvPr>
@@ -6363,7 +7015,7 @@
           <p:cNvPr id="6" name="n0">
             <a:extLst xmlns:a="http://schemas.openxmlformats.org/drawingml/2006/main">
               <a:ext uri="{FF2B5EF4-FFF2-40B4-BE49-F238E27FC236}">
-                <a16:creationId xmlns:a16="http://schemas.microsoft.com/office/drawing/2014/main" id="{4FA2714F-1BFF-4D5E-99B0-053A4D2F6C47}"/>
+                <a16:creationId xmlns:a16="http://schemas.microsoft.com/office/drawing/2014/main" id="{6BF3CB44-8DD4-4BC3-ACC3-35DCB4620341}"/>
               </a:ext>
             </a:extLst>
           </p:cNvPr>
@@ -6395,6 +7047,9 @@
                 <a:solidFill>
                   <a:srgbClr val="F3EEE6"/>
                 </a:solidFill>
+                <a:latin typeface="Inter"/>
+                <a:ea typeface="Inter"/>
+                <a:cs typeface="Inter"/>
               </a:defRPr>
             </a:pPr>
             <a:r>
@@ -6402,6 +7057,9 @@
                 <a:solidFill>
                   <a:srgbClr val="F3EEE6"/>
                 </a:solidFill>
+                <a:latin typeface="Inter"/>
+                <a:ea typeface="Inter"/>
+                <a:cs typeface="Inter"/>
               </a:rPr>
               <a:t>01</a:t>
             </a:r>
@@ -6413,7 +7071,7 @@
           <p:cNvPr id="7" name="h0">
             <a:extLst xmlns:a="http://schemas.openxmlformats.org/drawingml/2006/main">
               <a:ext uri="{FF2B5EF4-FFF2-40B4-BE49-F238E27FC236}">
-                <a16:creationId xmlns:a16="http://schemas.microsoft.com/office/drawing/2014/main" id="{B29F3FA6-1B3E-48C9-98DB-6217F03F5321}"/>
+                <a16:creationId xmlns:a16="http://schemas.microsoft.com/office/drawing/2014/main" id="{BC3DE9E6-3085-4F08-8B59-1E5252013975}"/>
               </a:ext>
             </a:extLst>
           </p:cNvPr>
@@ -6445,6 +7103,9 @@
                 <a:solidFill>
                   <a:srgbClr val="100C0A"/>
                 </a:solidFill>
+                <a:latin typeface="Inter"/>
+                <a:ea typeface="Inter"/>
+                <a:cs typeface="Inter"/>
               </a:defRPr>
             </a:pPr>
             <a:r>
@@ -6452,6 +7113,9 @@
                 <a:solidFill>
                   <a:srgbClr val="100C0A"/>
                 </a:solidFill>
+                <a:latin typeface="Inter"/>
+                <a:ea typeface="Inter"/>
+                <a:cs typeface="Inter"/>
               </a:rPr>
               <a:t>Seleccionar</a:t>
             </a:r>
@@ -6463,7 +7127,7 @@
           <p:cNvPr id="8" name="b0">
             <a:extLst xmlns:a="http://schemas.openxmlformats.org/drawingml/2006/main">
               <a:ext uri="{FF2B5EF4-FFF2-40B4-BE49-F238E27FC236}">
-                <a16:creationId xmlns:a16="http://schemas.microsoft.com/office/drawing/2014/main" id="{A5EF307B-B755-4DCA-9E64-4EB04A08719C}"/>
+                <a16:creationId xmlns:a16="http://schemas.microsoft.com/office/drawing/2014/main" id="{E42719A2-E25A-4164-8956-637D9D288AC3}"/>
               </a:ext>
             </a:extLst>
           </p:cNvPr>
@@ -6495,6 +7159,9 @@
                 <a:solidFill>
                   <a:srgbClr val="706862"/>
                 </a:solidFill>
+                <a:latin typeface="Inter"/>
+                <a:ea typeface="Inter"/>
+                <a:cs typeface="Inter"/>
               </a:defRPr>
             </a:pPr>
             <a:r>
@@ -6502,6 +7169,9 @@
                 <a:solidFill>
                   <a:srgbClr val="706862"/>
                 </a:solidFill>
+                <a:latin typeface="Inter"/>
+                <a:ea typeface="Inter"/>
+                <a:cs typeface="Inter"/>
               </a:rPr>
               <a:t>Una frase explica el momento y su valor.</a:t>
             </a:r>
@@ -6513,7 +7183,7 @@
           <p:cNvPr id="9" name="dot1">
             <a:extLst xmlns:a="http://schemas.openxmlformats.org/drawingml/2006/main">
               <a:ext uri="{FF2B5EF4-FFF2-40B4-BE49-F238E27FC236}">
-                <a16:creationId xmlns:a16="http://schemas.microsoft.com/office/drawing/2014/main" id="{6C949498-48E9-4E7E-9225-2C6A2C998D5F}"/>
+                <a16:creationId xmlns:a16="http://schemas.microsoft.com/office/drawing/2014/main" id="{E19B6C12-CD76-479C-84B5-001697CCEDD7}"/>
               </a:ext>
             </a:extLst>
           </p:cNvPr>
@@ -6546,7 +7216,7 @@
           <p:cNvPr id="10" name="n1">
             <a:extLst xmlns:a="http://schemas.openxmlformats.org/drawingml/2006/main">
               <a:ext uri="{FF2B5EF4-FFF2-40B4-BE49-F238E27FC236}">
-                <a16:creationId xmlns:a16="http://schemas.microsoft.com/office/drawing/2014/main" id="{5D8F83BE-0099-4080-82DD-DE7EB3B1D5C0}"/>
+                <a16:creationId xmlns:a16="http://schemas.microsoft.com/office/drawing/2014/main" id="{403731E1-FB1F-43FE-92E6-175BC0D3949A}"/>
               </a:ext>
             </a:extLst>
           </p:cNvPr>
@@ -6578,6 +7248,9 @@
                 <a:solidFill>
                   <a:srgbClr val="F3EEE6"/>
                 </a:solidFill>
+                <a:latin typeface="Inter"/>
+                <a:ea typeface="Inter"/>
+                <a:cs typeface="Inter"/>
               </a:defRPr>
             </a:pPr>
             <a:r>
@@ -6585,6 +7258,9 @@
                 <a:solidFill>
                   <a:srgbClr val="F3EEE6"/>
                 </a:solidFill>
+                <a:latin typeface="Inter"/>
+                <a:ea typeface="Inter"/>
+                <a:cs typeface="Inter"/>
               </a:rPr>
               <a:t>02</a:t>
             </a:r>
@@ -6596,7 +7272,7 @@
           <p:cNvPr id="11" name="h1">
             <a:extLst xmlns:a="http://schemas.openxmlformats.org/drawingml/2006/main">
               <a:ext uri="{FF2B5EF4-FFF2-40B4-BE49-F238E27FC236}">
-                <a16:creationId xmlns:a16="http://schemas.microsoft.com/office/drawing/2014/main" id="{EB42147E-C1BB-4139-B730-E4ACBE18C45C}"/>
+                <a16:creationId xmlns:a16="http://schemas.microsoft.com/office/drawing/2014/main" id="{2DD15B7B-8E1F-4761-B166-28C982FD39F7}"/>
               </a:ext>
             </a:extLst>
           </p:cNvPr>
@@ -6628,6 +7304,9 @@
                 <a:solidFill>
                   <a:srgbClr val="100C0A"/>
                 </a:solidFill>
+                <a:latin typeface="Inter"/>
+                <a:ea typeface="Inter"/>
+                <a:cs typeface="Inter"/>
               </a:defRPr>
             </a:pPr>
             <a:r>
@@ -6635,6 +7314,9 @@
                 <a:solidFill>
                   <a:srgbClr val="100C0A"/>
                 </a:solidFill>
+                <a:latin typeface="Inter"/>
+                <a:ea typeface="Inter"/>
+                <a:cs typeface="Inter"/>
               </a:rPr>
               <a:t>Mezclar</a:t>
             </a:r>
@@ -6646,7 +7328,7 @@
           <p:cNvPr id="12" name="b1">
             <a:extLst xmlns:a="http://schemas.openxmlformats.org/drawingml/2006/main">
               <a:ext uri="{FF2B5EF4-FFF2-40B4-BE49-F238E27FC236}">
-                <a16:creationId xmlns:a16="http://schemas.microsoft.com/office/drawing/2014/main" id="{B253F457-C134-46B2-A137-F3A1C17B981C}"/>
+                <a16:creationId xmlns:a16="http://schemas.microsoft.com/office/drawing/2014/main" id="{3B19112B-D33A-4183-97FB-B71E69CAD1F9}"/>
               </a:ext>
             </a:extLst>
           </p:cNvPr>
@@ -6678,6 +7360,9 @@
                 <a:solidFill>
                   <a:srgbClr val="706862"/>
                 </a:solidFill>
+                <a:latin typeface="Inter"/>
+                <a:ea typeface="Inter"/>
+                <a:cs typeface="Inter"/>
               </a:defRPr>
             </a:pPr>
             <a:r>
@@ -6685,6 +7370,9 @@
                 <a:solidFill>
                   <a:srgbClr val="706862"/>
                 </a:solidFill>
+                <a:latin typeface="Inter"/>
+                <a:ea typeface="Inter"/>
+                <a:cs typeface="Inter"/>
               </a:rPr>
               <a:t>Una frase explica el momento y su valor.</a:t>
             </a:r>
@@ -6696,7 +7384,7 @@
           <p:cNvPr id="13" name="dot2">
             <a:extLst xmlns:a="http://schemas.openxmlformats.org/drawingml/2006/main">
               <a:ext uri="{FF2B5EF4-FFF2-40B4-BE49-F238E27FC236}">
-                <a16:creationId xmlns:a16="http://schemas.microsoft.com/office/drawing/2014/main" id="{0CA9CF6B-1AF5-4BFE-8E66-FC83068CF6D6}"/>
+                <a16:creationId xmlns:a16="http://schemas.microsoft.com/office/drawing/2014/main" id="{F312BE4D-C264-427E-BE90-0C7226EDCAAC}"/>
               </a:ext>
             </a:extLst>
           </p:cNvPr>
@@ -6729,7 +7417,7 @@
           <p:cNvPr id="14" name="n2">
             <a:extLst xmlns:a="http://schemas.openxmlformats.org/drawingml/2006/main">
               <a:ext uri="{FF2B5EF4-FFF2-40B4-BE49-F238E27FC236}">
-                <a16:creationId xmlns:a16="http://schemas.microsoft.com/office/drawing/2014/main" id="{E96048FD-0C8D-40A2-8E25-58F23CFBC257}"/>
+                <a16:creationId xmlns:a16="http://schemas.microsoft.com/office/drawing/2014/main" id="{82E91924-5568-4CAD-BBC4-C7F8D6177A77}"/>
               </a:ext>
             </a:extLst>
           </p:cNvPr>
@@ -6761,6 +7449,9 @@
                 <a:solidFill>
                   <a:srgbClr val="F3EEE6"/>
                 </a:solidFill>
+                <a:latin typeface="Inter"/>
+                <a:ea typeface="Inter"/>
+                <a:cs typeface="Inter"/>
               </a:defRPr>
             </a:pPr>
             <a:r>
@@ -6768,6 +7459,9 @@
                 <a:solidFill>
                   <a:srgbClr val="F3EEE6"/>
                 </a:solidFill>
+                <a:latin typeface="Inter"/>
+                <a:ea typeface="Inter"/>
+                <a:cs typeface="Inter"/>
               </a:rPr>
               <a:t>03</a:t>
             </a:r>
@@ -6779,7 +7473,7 @@
           <p:cNvPr id="15" name="h2">
             <a:extLst xmlns:a="http://schemas.openxmlformats.org/drawingml/2006/main">
               <a:ext uri="{FF2B5EF4-FFF2-40B4-BE49-F238E27FC236}">
-                <a16:creationId xmlns:a16="http://schemas.microsoft.com/office/drawing/2014/main" id="{1CBCE9BA-8391-41D3-A21F-4991F0B5E060}"/>
+                <a16:creationId xmlns:a16="http://schemas.microsoft.com/office/drawing/2014/main" id="{FE1A1507-0981-419C-B63D-16513D8820C4}"/>
               </a:ext>
             </a:extLst>
           </p:cNvPr>
@@ -6811,6 +7505,9 @@
                 <a:solidFill>
                   <a:srgbClr val="100C0A"/>
                 </a:solidFill>
+                <a:latin typeface="Inter"/>
+                <a:ea typeface="Inter"/>
+                <a:cs typeface="Inter"/>
               </a:defRPr>
             </a:pPr>
             <a:r>
@@ -6818,6 +7515,9 @@
                 <a:solidFill>
                   <a:srgbClr val="100C0A"/>
                 </a:solidFill>
+                <a:latin typeface="Inter"/>
+                <a:ea typeface="Inter"/>
+                <a:cs typeface="Inter"/>
               </a:rPr>
               <a:t>Reposar</a:t>
             </a:r>
@@ -6829,7 +7529,7 @@
           <p:cNvPr id="16" name="b2">
             <a:extLst xmlns:a="http://schemas.openxmlformats.org/drawingml/2006/main">
               <a:ext uri="{FF2B5EF4-FFF2-40B4-BE49-F238E27FC236}">
-                <a16:creationId xmlns:a16="http://schemas.microsoft.com/office/drawing/2014/main" id="{B4886C19-D760-4BC7-95FE-FCB13080DFEC}"/>
+                <a16:creationId xmlns:a16="http://schemas.microsoft.com/office/drawing/2014/main" id="{BFB82EB5-3884-4911-B656-948ED5161FB1}"/>
               </a:ext>
             </a:extLst>
           </p:cNvPr>
@@ -6861,6 +7561,9 @@
                 <a:solidFill>
                   <a:srgbClr val="706862"/>
                 </a:solidFill>
+                <a:latin typeface="Inter"/>
+                <a:ea typeface="Inter"/>
+                <a:cs typeface="Inter"/>
               </a:defRPr>
             </a:pPr>
             <a:r>
@@ -6868,6 +7571,9 @@
                 <a:solidFill>
                   <a:srgbClr val="706862"/>
                 </a:solidFill>
+                <a:latin typeface="Inter"/>
+                <a:ea typeface="Inter"/>
+                <a:cs typeface="Inter"/>
               </a:rPr>
               <a:t>Una frase explica el momento y su valor.</a:t>
             </a:r>
@@ -6879,7 +7585,7 @@
           <p:cNvPr id="17" name="dot3">
             <a:extLst xmlns:a="http://schemas.openxmlformats.org/drawingml/2006/main">
               <a:ext uri="{FF2B5EF4-FFF2-40B4-BE49-F238E27FC236}">
-                <a16:creationId xmlns:a16="http://schemas.microsoft.com/office/drawing/2014/main" id="{546FEC62-33A0-49F7-B0EF-054131F8E690}"/>
+                <a16:creationId xmlns:a16="http://schemas.microsoft.com/office/drawing/2014/main" id="{670A0FC5-7C9F-4811-83D5-BF3B5EE2F9B2}"/>
               </a:ext>
             </a:extLst>
           </p:cNvPr>
@@ -6912,7 +7618,7 @@
           <p:cNvPr id="18" name="n3">
             <a:extLst xmlns:a="http://schemas.openxmlformats.org/drawingml/2006/main">
               <a:ext uri="{FF2B5EF4-FFF2-40B4-BE49-F238E27FC236}">
-                <a16:creationId xmlns:a16="http://schemas.microsoft.com/office/drawing/2014/main" id="{BB58FDD3-5197-48DD-92A8-A9902237C04B}"/>
+                <a16:creationId xmlns:a16="http://schemas.microsoft.com/office/drawing/2014/main" id="{F5159D84-4B53-48EA-82CD-70FF6B600B0A}"/>
               </a:ext>
             </a:extLst>
           </p:cNvPr>
@@ -6944,6 +7650,9 @@
                 <a:solidFill>
                   <a:srgbClr val="F3EEE6"/>
                 </a:solidFill>
+                <a:latin typeface="Inter"/>
+                <a:ea typeface="Inter"/>
+                <a:cs typeface="Inter"/>
               </a:defRPr>
             </a:pPr>
             <a:r>
@@ -6951,6 +7660,9 @@
                 <a:solidFill>
                   <a:srgbClr val="F3EEE6"/>
                 </a:solidFill>
+                <a:latin typeface="Inter"/>
+                <a:ea typeface="Inter"/>
+                <a:cs typeface="Inter"/>
               </a:rPr>
               <a:t>04</a:t>
             </a:r>
@@ -6962,7 +7674,7 @@
           <p:cNvPr id="19" name="h3">
             <a:extLst xmlns:a="http://schemas.openxmlformats.org/drawingml/2006/main">
               <a:ext uri="{FF2B5EF4-FFF2-40B4-BE49-F238E27FC236}">
-                <a16:creationId xmlns:a16="http://schemas.microsoft.com/office/drawing/2014/main" id="{55397416-9213-4CB6-8B98-435C8EC6DA63}"/>
+                <a16:creationId xmlns:a16="http://schemas.microsoft.com/office/drawing/2014/main" id="{D4AE2C9F-63E0-465E-AD45-94E1076D182A}"/>
               </a:ext>
             </a:extLst>
           </p:cNvPr>
@@ -6994,6 +7706,9 @@
                 <a:solidFill>
                   <a:srgbClr val="100C0A"/>
                 </a:solidFill>
+                <a:latin typeface="Inter"/>
+                <a:ea typeface="Inter"/>
+                <a:cs typeface="Inter"/>
               </a:defRPr>
             </a:pPr>
             <a:r>
@@ -7001,6 +7716,9 @@
                 <a:solidFill>
                   <a:srgbClr val="100C0A"/>
                 </a:solidFill>
+                <a:latin typeface="Inter"/>
+                <a:ea typeface="Inter"/>
+                <a:cs typeface="Inter"/>
               </a:rPr>
               <a:t>Servir</a:t>
             </a:r>
@@ -7012,7 +7730,7 @@
           <p:cNvPr id="20" name="b3">
             <a:extLst xmlns:a="http://schemas.openxmlformats.org/drawingml/2006/main">
               <a:ext uri="{FF2B5EF4-FFF2-40B4-BE49-F238E27FC236}">
-                <a16:creationId xmlns:a16="http://schemas.microsoft.com/office/drawing/2014/main" id="{CCF3C824-55E6-4C4F-A477-80417E01F31F}"/>
+                <a16:creationId xmlns:a16="http://schemas.microsoft.com/office/drawing/2014/main" id="{2BDFC7B9-9281-44A6-B41B-2CB2CC74018E}"/>
               </a:ext>
             </a:extLst>
           </p:cNvPr>
@@ -7044,6 +7762,9 @@
                 <a:solidFill>
                   <a:srgbClr val="706862"/>
                 </a:solidFill>
+                <a:latin typeface="Inter"/>
+                <a:ea typeface="Inter"/>
+                <a:cs typeface="Inter"/>
               </a:defRPr>
             </a:pPr>
             <a:r>
@@ -7051,6 +7772,9 @@
                 <a:solidFill>
                   <a:srgbClr val="706862"/>
                 </a:solidFill>
+                <a:latin typeface="Inter"/>
+                <a:ea typeface="Inter"/>
+                <a:cs typeface="Inter"/>
               </a:rPr>
               <a:t>Una frase explica el momento y su valor.</a:t>
             </a:r>
@@ -7060,7 +7784,7 @@
     </p:spTree>
     <p:extLst>
       <p:ext uri="{BB962C8B-B14F-4D97-AF65-F5344CB8AC3E}">
-        <p14:creationId xmlns:p14="http://schemas.microsoft.com/office/powerpoint/2010/main" val="894215189"/>
+        <p14:creationId xmlns:p14="http://schemas.microsoft.com/office/powerpoint/2010/main" val="827855119"/>
       </p:ext>
     </p:extLst>
   </p:cSld>
@@ -7088,8 +7812,8 @@
           <p:nvPr/>
         </p:nvPicPr>
         <p:blipFill>
-          <a:blip xmlns:r="http://schemas.openxmlformats.org/officeDocument/2006/relationships" xmlns:a="http://schemas.openxmlformats.org/drawingml/2006/main" r:embed="R7c54adcaaceb40b0"/>
-          <a:srcRect xmlns:a="http://schemas.openxmlformats.org/drawingml/2006/main" l="0" t="25625" r="0" b="25625"/>
+          <a:blip xmlns:r="http://schemas.openxmlformats.org/officeDocument/2006/relationships" xmlns:a="http://schemas.openxmlformats.org/drawingml/2006/main" r:embed="R820a3490b05040e0"/>
+          <a:srcRect xmlns:a="http://schemas.openxmlformats.org/drawingml/2006/main" l="0" t="31211" r="0" b="31211"/>
           <a:stretch xmlns:a="http://schemas.openxmlformats.org/drawingml/2006/main">
             <a:fillRect l="0" t="0" r="0" b="0"/>
           </a:stretch>
@@ -7109,7 +7833,7 @@
           <p:cNvPr id="2" name="veil">
             <a:extLst xmlns:a="http://schemas.openxmlformats.org/drawingml/2006/main">
               <a:ext uri="{FF2B5EF4-FFF2-40B4-BE49-F238E27FC236}">
-                <a16:creationId xmlns:a16="http://schemas.microsoft.com/office/drawing/2014/main" id="{9009A422-04F7-45D3-8329-652E61C6F2A1}"/>
+                <a16:creationId xmlns:a16="http://schemas.microsoft.com/office/drawing/2014/main" id="{C560E62C-D74D-4BA0-8A6E-C64AE1579967}"/>
               </a:ext>
             </a:extLst>
           </p:cNvPr>
@@ -7142,7 +7866,7 @@
           <p:cNvPr id="3" name="eyebrow">
             <a:extLst xmlns:a="http://schemas.openxmlformats.org/drawingml/2006/main">
               <a:ext uri="{FF2B5EF4-FFF2-40B4-BE49-F238E27FC236}">
-                <a16:creationId xmlns:a16="http://schemas.microsoft.com/office/drawing/2014/main" id="{6EB8B3C9-7AD4-4B80-9203-03E38871D172}"/>
+                <a16:creationId xmlns:a16="http://schemas.microsoft.com/office/drawing/2014/main" id="{1953BD0F-B14C-4553-B0E3-D511A9C68FF1}"/>
               </a:ext>
             </a:extLst>
           </p:cNvPr>
@@ -7174,6 +7898,9 @@
                 <a:solidFill>
                   <a:srgbClr val="D5B879"/>
                 </a:solidFill>
+                <a:latin typeface="Inter"/>
+                <a:ea typeface="Inter"/>
+                <a:cs typeface="Inter"/>
               </a:defRPr>
             </a:pPr>
             <a:r>
@@ -7181,6 +7908,9 @@
                 <a:solidFill>
                   <a:srgbClr val="D5B879"/>
                 </a:solidFill>
+                <a:latin typeface="Inter"/>
+                <a:ea typeface="Inter"/>
+                <a:cs typeface="Inter"/>
               </a:rPr>
               <a:t>KEY VISUAL DE OCASIÓN</a:t>
             </a:r>
@@ -7192,7 +7922,7 @@
           <p:cNvPr id="4" name="title">
             <a:extLst xmlns:a="http://schemas.openxmlformats.org/drawingml/2006/main">
               <a:ext uri="{FF2B5EF4-FFF2-40B4-BE49-F238E27FC236}">
-                <a16:creationId xmlns:a16="http://schemas.microsoft.com/office/drawing/2014/main" id="{1E5E2F0F-C123-4647-8CEB-56E0E67D05C2}"/>
+                <a16:creationId xmlns:a16="http://schemas.microsoft.com/office/drawing/2014/main" id="{BF94463A-42F1-40E5-99D1-048446F87560}"/>
               </a:ext>
             </a:extLst>
           </p:cNvPr>
@@ -7224,6 +7954,9 @@
                 <a:solidFill>
                   <a:srgbClr val="F3EEE6"/>
                 </a:solidFill>
+                <a:latin typeface="Adobe Garamond Pro"/>
+                <a:ea typeface="Adobe Garamond Pro"/>
+                <a:cs typeface="Adobe Garamond Pro"/>
               </a:defRPr>
             </a:pPr>
             <a:r>
@@ -7231,6 +7964,9 @@
                 <a:solidFill>
                   <a:srgbClr val="F3EEE6"/>
                 </a:solidFill>
+                <a:latin typeface="Adobe Garamond Pro"/>
+                <a:ea typeface="Adobe Garamond Pro"/>
+                <a:cs typeface="Adobe Garamond Pro"/>
               </a:rPr>
               <a:t>La noche también</a:t>
             </a:r>
@@ -7241,6 +7977,9 @@
                 <a:solidFill>
                   <a:srgbClr val="F3EEE6"/>
                 </a:solidFill>
+                <a:latin typeface="Adobe Garamond Pro"/>
+                <a:ea typeface="Adobe Garamond Pro"/>
+                <a:cs typeface="Adobe Garamond Pro"/>
               </a:defRPr>
             </a:pPr>
             <a:r>
@@ -7248,6 +7987,9 @@
                 <a:solidFill>
                   <a:srgbClr val="F3EEE6"/>
                 </a:solidFill>
+                <a:latin typeface="Adobe Garamond Pro"/>
+                <a:ea typeface="Adobe Garamond Pro"/>
+                <a:cs typeface="Adobe Garamond Pro"/>
               </a:rPr>
               <a:t>tiene profundidad.</a:t>
             </a:r>
@@ -7259,7 +8001,7 @@
           <p:cNvPr id="5" name="signature">
             <a:extLst xmlns:a="http://schemas.openxmlformats.org/drawingml/2006/main">
               <a:ext uri="{FF2B5EF4-FFF2-40B4-BE49-F238E27FC236}">
-                <a16:creationId xmlns:a16="http://schemas.microsoft.com/office/drawing/2014/main" id="{49BFEDA2-96E9-443F-953D-AC1AD1E7EFEF}"/>
+                <a16:creationId xmlns:a16="http://schemas.microsoft.com/office/drawing/2014/main" id="{8EEEBA85-690F-4393-A82E-97EC4029D946}"/>
               </a:ext>
             </a:extLst>
           </p:cNvPr>
@@ -7291,6 +8033,9 @@
                 <a:solidFill>
                   <a:srgbClr val="D5B879"/>
                 </a:solidFill>
+                <a:latin typeface="Inter"/>
+                <a:ea typeface="Inter"/>
+                <a:cs typeface="Inter"/>
               </a:defRPr>
             </a:pPr>
             <a:r>
@@ -7298,6 +8043,9 @@
                 <a:solidFill>
                   <a:srgbClr val="D5B879"/>
                 </a:solidFill>
+                <a:latin typeface="Inter"/>
+                <a:ea typeface="Inter"/>
+                <a:cs typeface="Inter"/>
               </a:rPr>
               <a:t>CARÚPANO 21 · COCTELERÍA DE AUTOR</a:t>
             </a:r>
@@ -7309,7 +8057,7 @@
           <p:cNvPr id="6" name="rule">
             <a:extLst xmlns:a="http://schemas.openxmlformats.org/drawingml/2006/main">
               <a:ext uri="{FF2B5EF4-FFF2-40B4-BE49-F238E27FC236}">
-                <a16:creationId xmlns:a16="http://schemas.microsoft.com/office/drawing/2014/main" id="{09C2F280-54AF-4AD5-85F4-0ECB0EA35D1C}"/>
+                <a16:creationId xmlns:a16="http://schemas.microsoft.com/office/drawing/2014/main" id="{AD2E133E-51F4-4E98-95D3-4E30C543AE29}"/>
               </a:ext>
             </a:extLst>
           </p:cNvPr>
@@ -7338,7 +8086,7 @@
     </p:spTree>
     <p:extLst>
       <p:ext uri="{BB962C8B-B14F-4D97-AF65-F5344CB8AC3E}">
-        <p14:creationId xmlns:p14="http://schemas.microsoft.com/office/powerpoint/2010/main" val="614674848"/>
+        <p14:creationId xmlns:p14="http://schemas.microsoft.com/office/powerpoint/2010/main" val="2017079408"/>
       </p:ext>
     </p:extLst>
   </p:cSld>
@@ -7369,7 +8117,7 @@
           <p:cNvPr id="19" name="brand">
             <a:extLst xmlns:a="http://schemas.openxmlformats.org/drawingml/2006/main">
               <a:ext uri="{FF2B5EF4-FFF2-40B4-BE49-F238E27FC236}">
-                <a16:creationId xmlns:a16="http://schemas.microsoft.com/office/drawing/2014/main" id="{22876064-9817-4502-8BDA-39F891D2516E}"/>
+                <a16:creationId xmlns:a16="http://schemas.microsoft.com/office/drawing/2014/main" id="{3F5E0139-7F6D-4B55-958A-BB01F2807A68}"/>
               </a:ext>
             </a:extLst>
           </p:cNvPr>
@@ -7401,6 +8149,9 @@
                 <a:solidFill>
                   <a:srgbClr val="D5B879"/>
                 </a:solidFill>
+                <a:latin typeface="Inter"/>
+                <a:ea typeface="Inter"/>
+                <a:cs typeface="Inter"/>
               </a:defRPr>
             </a:pPr>
             <a:r>
@@ -7408,6 +8159,9 @@
                 <a:solidFill>
                   <a:srgbClr val="D5B879"/>
                 </a:solidFill>
+                <a:latin typeface="Inter"/>
+                <a:ea typeface="Inter"/>
+                <a:cs typeface="Inter"/>
               </a:rPr>
               <a:t>RON CARÚPANO</a:t>
             </a:r>
@@ -7419,7 +8173,7 @@
           <p:cNvPr id="2" name="page">
             <a:extLst xmlns:a="http://schemas.openxmlformats.org/drawingml/2006/main">
               <a:ext uri="{FF2B5EF4-FFF2-40B4-BE49-F238E27FC236}">
-                <a16:creationId xmlns:a16="http://schemas.microsoft.com/office/drawing/2014/main" id="{AE8AA704-72B3-4F39-BD7F-877C3AE1A47B}"/>
+                <a16:creationId xmlns:a16="http://schemas.microsoft.com/office/drawing/2014/main" id="{DE36F1B1-A327-47CF-A18D-6F8D3FF0E591}"/>
               </a:ext>
             </a:extLst>
           </p:cNvPr>
@@ -7453,6 +8207,9 @@
                     <a:alpha val="43922"/>
                   </a:srgbClr>
                 </a:solidFill>
+                <a:latin typeface="Inter"/>
+                <a:ea typeface="Inter"/>
+                <a:cs typeface="Inter"/>
               </a:defRPr>
             </a:pPr>
             <a:r>
@@ -7462,6 +8219,9 @@
                     <a:alpha val="43922"/>
                   </a:srgbClr>
                 </a:solidFill>
+                <a:latin typeface="Inter"/>
+                <a:ea typeface="Inter"/>
+                <a:cs typeface="Inter"/>
               </a:rPr>
               <a:t>17</a:t>
             </a:r>
@@ -7473,7 +8233,7 @@
           <p:cNvPr id="3" name="eyebrow">
             <a:extLst xmlns:a="http://schemas.openxmlformats.org/drawingml/2006/main">
               <a:ext uri="{FF2B5EF4-FFF2-40B4-BE49-F238E27FC236}">
-                <a16:creationId xmlns:a16="http://schemas.microsoft.com/office/drawing/2014/main" id="{23904CDD-B386-4607-AE11-19C0E66DF71B}"/>
+                <a16:creationId xmlns:a16="http://schemas.microsoft.com/office/drawing/2014/main" id="{92A4E868-6205-414B-8232-ED3523B6A104}"/>
               </a:ext>
             </a:extLst>
           </p:cNvPr>
@@ -7505,6 +8265,9 @@
                 <a:solidFill>
                   <a:srgbClr val="D5B879"/>
                 </a:solidFill>
+                <a:latin typeface="Inter"/>
+                <a:ea typeface="Inter"/>
+                <a:cs typeface="Inter"/>
               </a:defRPr>
             </a:pPr>
             <a:r>
@@ -7512,6 +8275,9 @@
                 <a:solidFill>
                   <a:srgbClr val="D5B879"/>
                 </a:solidFill>
+                <a:latin typeface="Inter"/>
+                <a:ea typeface="Inter"/>
+                <a:cs typeface="Inter"/>
               </a:rPr>
               <a:t>SISTEMA SOCIAL</a:t>
             </a:r>
@@ -7523,7 +8289,7 @@
           <p:cNvPr id="4" name="title">
             <a:extLst xmlns:a="http://schemas.openxmlformats.org/drawingml/2006/main">
               <a:ext uri="{FF2B5EF4-FFF2-40B4-BE49-F238E27FC236}">
-                <a16:creationId xmlns:a16="http://schemas.microsoft.com/office/drawing/2014/main" id="{2BE5D307-FFF7-456E-9622-EF5586CA9C4A}"/>
+                <a16:creationId xmlns:a16="http://schemas.microsoft.com/office/drawing/2014/main" id="{8CF52A28-EB4F-470C-A6D2-668260425326}"/>
               </a:ext>
             </a:extLst>
           </p:cNvPr>
@@ -7555,6 +8321,9 @@
                 <a:solidFill>
                   <a:srgbClr val="F3EEE6"/>
                 </a:solidFill>
+                <a:latin typeface="Adobe Garamond Pro"/>
+                <a:ea typeface="Adobe Garamond Pro"/>
+                <a:cs typeface="Adobe Garamond Pro"/>
               </a:defRPr>
             </a:pPr>
             <a:r>
@@ -7562,6 +8331,9 @@
                 <a:solidFill>
                   <a:srgbClr val="F3EEE6"/>
                 </a:solidFill>
+                <a:latin typeface="Adobe Garamond Pro"/>
+                <a:ea typeface="Adobe Garamond Pro"/>
+                <a:cs typeface="Adobe Garamond Pro"/>
               </a:rPr>
               <a:t>Una grilla con ritmo,</a:t>
             </a:r>
@@ -7572,6 +8344,9 @@
                 <a:solidFill>
                   <a:srgbClr val="F3EEE6"/>
                 </a:solidFill>
+                <a:latin typeface="Adobe Garamond Pro"/>
+                <a:ea typeface="Adobe Garamond Pro"/>
+                <a:cs typeface="Adobe Garamond Pro"/>
               </a:defRPr>
             </a:pPr>
             <a:r>
@@ -7579,6 +8354,9 @@
                 <a:solidFill>
                   <a:srgbClr val="F3EEE6"/>
                 </a:solidFill>
+                <a:latin typeface="Adobe Garamond Pro"/>
+                <a:ea typeface="Adobe Garamond Pro"/>
+                <a:cs typeface="Adobe Garamond Pro"/>
               </a:rPr>
               <a:t>no piezas aisladas.</a:t>
             </a:r>
@@ -7590,7 +8368,7 @@
           <p:cNvPr id="5" name="c0">
             <a:extLst xmlns:a="http://schemas.openxmlformats.org/drawingml/2006/main">
               <a:ext uri="{FF2B5EF4-FFF2-40B4-BE49-F238E27FC236}">
-                <a16:creationId xmlns:a16="http://schemas.microsoft.com/office/drawing/2014/main" id="{1AC0C93E-69A7-4D5F-8476-13E40C9B70A9}"/>
+                <a16:creationId xmlns:a16="http://schemas.microsoft.com/office/drawing/2014/main" id="{03839E28-5D0C-4A4A-B542-973F7B010A2A}"/>
               </a:ext>
             </a:extLst>
           </p:cNvPr>
@@ -7621,7 +8399,7 @@
           <p:cNvPr id="6" name="t0">
             <a:extLst xmlns:a="http://schemas.openxmlformats.org/drawingml/2006/main">
               <a:ext uri="{FF2B5EF4-FFF2-40B4-BE49-F238E27FC236}">
-                <a16:creationId xmlns:a16="http://schemas.microsoft.com/office/drawing/2014/main" id="{0F2341E9-6D11-40F3-B108-5EFA07698272}"/>
+                <a16:creationId xmlns:a16="http://schemas.microsoft.com/office/drawing/2014/main" id="{73B359B3-2927-4965-9234-EBFF7B6D1A5A}"/>
               </a:ext>
             </a:extLst>
           </p:cNvPr>
@@ -7653,6 +8431,9 @@
                 <a:solidFill>
                   <a:srgbClr val="D5B879"/>
                 </a:solidFill>
+                <a:latin typeface="Inter"/>
+                <a:ea typeface="Inter"/>
+                <a:cs typeface="Inter"/>
               </a:defRPr>
             </a:pPr>
             <a:r>
@@ -7660,6 +8441,9 @@
                 <a:solidFill>
                   <a:srgbClr val="D5B879"/>
                 </a:solidFill>
+                <a:latin typeface="Inter"/>
+                <a:ea typeface="Inter"/>
+                <a:cs typeface="Inter"/>
               </a:rPr>
               <a:t>PRODUCTO</a:t>
             </a:r>
@@ -7671,7 +8455,7 @@
           <p:cNvPr id="7" name="h0">
             <a:extLst xmlns:a="http://schemas.openxmlformats.org/drawingml/2006/main">
               <a:ext uri="{FF2B5EF4-FFF2-40B4-BE49-F238E27FC236}">
-                <a16:creationId xmlns:a16="http://schemas.microsoft.com/office/drawing/2014/main" id="{409DB1C2-48A0-4CAF-9A5E-D5DE3782D57B}"/>
+                <a16:creationId xmlns:a16="http://schemas.microsoft.com/office/drawing/2014/main" id="{9D22510E-14E2-49B8-9520-2B5466D5867B}"/>
               </a:ext>
             </a:extLst>
           </p:cNvPr>
@@ -7703,6 +8487,9 @@
                 <a:solidFill>
                   <a:srgbClr val="100C0A"/>
                 </a:solidFill>
+                <a:latin typeface="Adobe Garamond Pro"/>
+                <a:ea typeface="Adobe Garamond Pro"/>
+                <a:cs typeface="Adobe Garamond Pro"/>
               </a:defRPr>
             </a:pPr>
             <a:r>
@@ -7710,6 +8497,9 @@
                 <a:solidFill>
                   <a:srgbClr val="100C0A"/>
                 </a:solidFill>
+                <a:latin typeface="Adobe Garamond Pro"/>
+                <a:ea typeface="Adobe Garamond Pro"/>
+                <a:cs typeface="Adobe Garamond Pro"/>
               </a:rPr>
               <a:t>21 años de</a:t>
             </a:r>
@@ -7720,6 +8510,9 @@
                 <a:solidFill>
                   <a:srgbClr val="100C0A"/>
                 </a:solidFill>
+                <a:latin typeface="Adobe Garamond Pro"/>
+                <a:ea typeface="Adobe Garamond Pro"/>
+                <a:cs typeface="Adobe Garamond Pro"/>
               </a:defRPr>
             </a:pPr>
             <a:r>
@@ -7727,6 +8520,9 @@
                 <a:solidFill>
                   <a:srgbClr val="100C0A"/>
                 </a:solidFill>
+                <a:latin typeface="Adobe Garamond Pro"/>
+                <a:ea typeface="Adobe Garamond Pro"/>
+                <a:cs typeface="Adobe Garamond Pro"/>
               </a:rPr>
               <a:t>profundidad.</a:t>
             </a:r>
@@ -7738,7 +8534,7 @@
           <p:cNvPr id="8" name="c1">
             <a:extLst xmlns:a="http://schemas.openxmlformats.org/drawingml/2006/main">
               <a:ext uri="{FF2B5EF4-FFF2-40B4-BE49-F238E27FC236}">
-                <a16:creationId xmlns:a16="http://schemas.microsoft.com/office/drawing/2014/main" id="{3C88F4C4-35AA-44DA-A847-4517A396946C}"/>
+                <a16:creationId xmlns:a16="http://schemas.microsoft.com/office/drawing/2014/main" id="{205283B4-0E41-42A8-A9D1-7EDAC9EAB088}"/>
               </a:ext>
             </a:extLst>
           </p:cNvPr>
@@ -7769,7 +8565,7 @@
           <p:cNvPr id="9" name="t1">
             <a:extLst xmlns:a="http://schemas.openxmlformats.org/drawingml/2006/main">
               <a:ext uri="{FF2B5EF4-FFF2-40B4-BE49-F238E27FC236}">
-                <a16:creationId xmlns:a16="http://schemas.microsoft.com/office/drawing/2014/main" id="{101DE9AF-A873-4CA9-9153-F335C34058CC}"/>
+                <a16:creationId xmlns:a16="http://schemas.microsoft.com/office/drawing/2014/main" id="{A2E3E45A-BF48-4959-A9DD-32686480F392}"/>
               </a:ext>
             </a:extLst>
           </p:cNvPr>
@@ -7801,6 +8597,9 @@
                 <a:solidFill>
                   <a:srgbClr val="A64B24"/>
                 </a:solidFill>
+                <a:latin typeface="Inter"/>
+                <a:ea typeface="Inter"/>
+                <a:cs typeface="Inter"/>
               </a:defRPr>
             </a:pPr>
             <a:r>
@@ -7808,6 +8607,9 @@
                 <a:solidFill>
                   <a:srgbClr val="A64B24"/>
                 </a:solidFill>
+                <a:latin typeface="Inter"/>
+                <a:ea typeface="Inter"/>
+                <a:cs typeface="Inter"/>
               </a:rPr>
               <a:t>CULTURA</a:t>
             </a:r>
@@ -7819,7 +8621,7 @@
           <p:cNvPr id="10" name="h1">
             <a:extLst xmlns:a="http://schemas.openxmlformats.org/drawingml/2006/main">
               <a:ext uri="{FF2B5EF4-FFF2-40B4-BE49-F238E27FC236}">
-                <a16:creationId xmlns:a16="http://schemas.microsoft.com/office/drawing/2014/main" id="{189260EA-9524-49DB-BB83-8E19B6006FFD}"/>
+                <a16:creationId xmlns:a16="http://schemas.microsoft.com/office/drawing/2014/main" id="{6CF127BA-38CA-4892-877F-00E6DB157965}"/>
               </a:ext>
             </a:extLst>
           </p:cNvPr>
@@ -7851,6 +8653,9 @@
                 <a:solidFill>
                   <a:srgbClr val="100C0A"/>
                 </a:solidFill>
+                <a:latin typeface="Adobe Garamond Pro"/>
+                <a:ea typeface="Adobe Garamond Pro"/>
+                <a:cs typeface="Adobe Garamond Pro"/>
               </a:defRPr>
             </a:pPr>
             <a:r>
@@ -7858,6 +8663,9 @@
                 <a:solidFill>
                   <a:srgbClr val="100C0A"/>
                 </a:solidFill>
+                <a:latin typeface="Adobe Garamond Pro"/>
+                <a:ea typeface="Adobe Garamond Pro"/>
+                <a:cs typeface="Adobe Garamond Pro"/>
               </a:rPr>
               <a:t>El clima también</a:t>
             </a:r>
@@ -7868,6 +8676,9 @@
                 <a:solidFill>
                   <a:srgbClr val="100C0A"/>
                 </a:solidFill>
+                <a:latin typeface="Adobe Garamond Pro"/>
+                <a:ea typeface="Adobe Garamond Pro"/>
+                <a:cs typeface="Adobe Garamond Pro"/>
               </a:defRPr>
             </a:pPr>
             <a:r>
@@ -7875,6 +8686,9 @@
                 <a:solidFill>
                   <a:srgbClr val="100C0A"/>
                 </a:solidFill>
+                <a:latin typeface="Adobe Garamond Pro"/>
+                <a:ea typeface="Adobe Garamond Pro"/>
+                <a:cs typeface="Adobe Garamond Pro"/>
               </a:rPr>
               <a:t>destila carácter.</a:t>
             </a:r>
@@ -7886,7 +8700,7 @@
           <p:cNvPr id="11" name="c2">
             <a:extLst xmlns:a="http://schemas.openxmlformats.org/drawingml/2006/main">
               <a:ext uri="{FF2B5EF4-FFF2-40B4-BE49-F238E27FC236}">
-                <a16:creationId xmlns:a16="http://schemas.microsoft.com/office/drawing/2014/main" id="{E8E9E900-408A-4370-B9C3-076C770B2F39}"/>
+                <a16:creationId xmlns:a16="http://schemas.microsoft.com/office/drawing/2014/main" id="{1A685AB0-B4BF-48BE-8A0A-29C042729054}"/>
               </a:ext>
             </a:extLst>
           </p:cNvPr>
@@ -7917,7 +8731,7 @@
           <p:cNvPr id="12" name="t2">
             <a:extLst xmlns:a="http://schemas.openxmlformats.org/drawingml/2006/main">
               <a:ext uri="{FF2B5EF4-FFF2-40B4-BE49-F238E27FC236}">
-                <a16:creationId xmlns:a16="http://schemas.microsoft.com/office/drawing/2014/main" id="{8B8CFFE5-3FD4-4475-9C41-ECA00A35D1FE}"/>
+                <a16:creationId xmlns:a16="http://schemas.microsoft.com/office/drawing/2014/main" id="{7B427520-DBD9-47ED-8C5C-C8C1A69922E9}"/>
               </a:ext>
             </a:extLst>
           </p:cNvPr>
@@ -7949,6 +8763,9 @@
                 <a:solidFill>
                   <a:srgbClr val="D5B879"/>
                 </a:solidFill>
+                <a:latin typeface="Inter"/>
+                <a:ea typeface="Inter"/>
+                <a:cs typeface="Inter"/>
               </a:defRPr>
             </a:pPr>
             <a:r>
@@ -7956,6 +8773,9 @@
                 <a:solidFill>
                   <a:srgbClr val="D5B879"/>
                 </a:solidFill>
+                <a:latin typeface="Inter"/>
+                <a:ea typeface="Inter"/>
+                <a:cs typeface="Inter"/>
               </a:rPr>
               <a:t>OCASIÓN</a:t>
             </a:r>
@@ -7967,7 +8787,7 @@
           <p:cNvPr id="13" name="h2">
             <a:extLst xmlns:a="http://schemas.openxmlformats.org/drawingml/2006/main">
               <a:ext uri="{FF2B5EF4-FFF2-40B4-BE49-F238E27FC236}">
-                <a16:creationId xmlns:a16="http://schemas.microsoft.com/office/drawing/2014/main" id="{32F8AA20-416C-4CC6-8751-6859127061DB}"/>
+                <a16:creationId xmlns:a16="http://schemas.microsoft.com/office/drawing/2014/main" id="{1B6A6727-B7BB-4E64-AE3D-4D8B18A47014}"/>
               </a:ext>
             </a:extLst>
           </p:cNvPr>
@@ -7999,6 +8819,9 @@
                 <a:solidFill>
                   <a:srgbClr val="F3EEE6"/>
                 </a:solidFill>
+                <a:latin typeface="Adobe Garamond Pro"/>
+                <a:ea typeface="Adobe Garamond Pro"/>
+                <a:cs typeface="Adobe Garamond Pro"/>
               </a:defRPr>
             </a:pPr>
             <a:r>
@@ -8006,6 +8829,9 @@
                 <a:solidFill>
                   <a:srgbClr val="F3EEE6"/>
                 </a:solidFill>
+                <a:latin typeface="Adobe Garamond Pro"/>
+                <a:ea typeface="Adobe Garamond Pro"/>
+                <a:cs typeface="Adobe Garamond Pro"/>
               </a:rPr>
               <a:t>La noche tiene</a:t>
             </a:r>
@@ -8016,6 +8842,9 @@
                 <a:solidFill>
                   <a:srgbClr val="F3EEE6"/>
                 </a:solidFill>
+                <a:latin typeface="Adobe Garamond Pro"/>
+                <a:ea typeface="Adobe Garamond Pro"/>
+                <a:cs typeface="Adobe Garamond Pro"/>
               </a:defRPr>
             </a:pPr>
             <a:r>
@@ -8023,6 +8852,9 @@
                 <a:solidFill>
                   <a:srgbClr val="F3EEE6"/>
                 </a:solidFill>
+                <a:latin typeface="Adobe Garamond Pro"/>
+                <a:ea typeface="Adobe Garamond Pro"/>
+                <a:cs typeface="Adobe Garamond Pro"/>
               </a:rPr>
               <a:t>otra dimensión.</a:t>
             </a:r>
@@ -8034,7 +8866,7 @@
           <p:cNvPr id="14" name="c3">
             <a:extLst xmlns:a="http://schemas.openxmlformats.org/drawingml/2006/main">
               <a:ext uri="{FF2B5EF4-FFF2-40B4-BE49-F238E27FC236}">
-                <a16:creationId xmlns:a16="http://schemas.microsoft.com/office/drawing/2014/main" id="{23A1D807-6212-4A74-98B9-7406CECB9A91}"/>
+                <a16:creationId xmlns:a16="http://schemas.microsoft.com/office/drawing/2014/main" id="{57E735D5-D54C-4187-8C4A-1594DBC8FC99}"/>
               </a:ext>
             </a:extLst>
           </p:cNvPr>
@@ -8065,7 +8897,7 @@
           <p:cNvPr id="15" name="t3">
             <a:extLst xmlns:a="http://schemas.openxmlformats.org/drawingml/2006/main">
               <a:ext uri="{FF2B5EF4-FFF2-40B4-BE49-F238E27FC236}">
-                <a16:creationId xmlns:a16="http://schemas.microsoft.com/office/drawing/2014/main" id="{E36A7A6A-3BE8-41F9-AFE1-5FF09B64E3A0}"/>
+                <a16:creationId xmlns:a16="http://schemas.microsoft.com/office/drawing/2014/main" id="{43513543-76AA-4B34-ABBB-4D71E17190BD}"/>
               </a:ext>
             </a:extLst>
           </p:cNvPr>
@@ -8097,6 +8929,9 @@
                 <a:solidFill>
                   <a:srgbClr val="D5B879"/>
                 </a:solidFill>
+                <a:latin typeface="Inter"/>
+                <a:ea typeface="Inter"/>
+                <a:cs typeface="Inter"/>
               </a:defRPr>
             </a:pPr>
             <a:r>
@@ -8104,6 +8939,9 @@
                 <a:solidFill>
                   <a:srgbClr val="D5B879"/>
                 </a:solidFill>
+                <a:latin typeface="Inter"/>
+                <a:ea typeface="Inter"/>
+                <a:cs typeface="Inter"/>
               </a:rPr>
               <a:t>RITUAL</a:t>
             </a:r>
@@ -8115,7 +8953,7 @@
           <p:cNvPr id="16" name="h3">
             <a:extLst xmlns:a="http://schemas.openxmlformats.org/drawingml/2006/main">
               <a:ext uri="{FF2B5EF4-FFF2-40B4-BE49-F238E27FC236}">
-                <a16:creationId xmlns:a16="http://schemas.microsoft.com/office/drawing/2014/main" id="{930E3995-4473-4D63-98F6-EB55CF56BF2E}"/>
+                <a16:creationId xmlns:a16="http://schemas.microsoft.com/office/drawing/2014/main" id="{EBFD1BBD-206A-4E65-AD32-E68A208AB484}"/>
               </a:ext>
             </a:extLst>
           </p:cNvPr>
@@ -8147,6 +8985,9 @@
                 <a:solidFill>
                   <a:srgbClr val="F3EEE6"/>
                 </a:solidFill>
+                <a:latin typeface="Adobe Garamond Pro"/>
+                <a:ea typeface="Adobe Garamond Pro"/>
+                <a:cs typeface="Adobe Garamond Pro"/>
               </a:defRPr>
             </a:pPr>
             <a:r>
@@ -8154,6 +8995,9 @@
                 <a:solidFill>
                   <a:srgbClr val="F3EEE6"/>
                 </a:solidFill>
+                <a:latin typeface="Adobe Garamond Pro"/>
+                <a:ea typeface="Adobe Garamond Pro"/>
+                <a:cs typeface="Adobe Garamond Pro"/>
               </a:rPr>
               <a:t>El tiempo</a:t>
             </a:r>
@@ -8164,6 +9008,9 @@
                 <a:solidFill>
                   <a:srgbClr val="F3EEE6"/>
                 </a:solidFill>
+                <a:latin typeface="Adobe Garamond Pro"/>
+                <a:ea typeface="Adobe Garamond Pro"/>
+                <a:cs typeface="Adobe Garamond Pro"/>
               </a:defRPr>
             </a:pPr>
             <a:r>
@@ -8171,6 +9018,9 @@
                 <a:solidFill>
                   <a:srgbClr val="F3EEE6"/>
                 </a:solidFill>
+                <a:latin typeface="Adobe Garamond Pro"/>
+                <a:ea typeface="Adobe Garamond Pro"/>
+                <a:cs typeface="Adobe Garamond Pro"/>
               </a:rPr>
               <a:t>se sirve.</a:t>
             </a:r>
@@ -8182,7 +9032,7 @@
           <p:cNvPr id="17" name="body">
             <a:extLst xmlns:a="http://schemas.openxmlformats.org/drawingml/2006/main">
               <a:ext uri="{FF2B5EF4-FFF2-40B4-BE49-F238E27FC236}">
-                <a16:creationId xmlns:a16="http://schemas.microsoft.com/office/drawing/2014/main" id="{89E13076-60F3-459D-A488-9F9A866E5B85}"/>
+                <a16:creationId xmlns:a16="http://schemas.microsoft.com/office/drawing/2014/main" id="{D9A744B8-D912-4329-8F43-55C838150D0B}"/>
               </a:ext>
             </a:extLst>
           </p:cNvPr>
@@ -8216,6 +9066,9 @@
                     <a:alpha val="62745"/>
                   </a:srgbClr>
                 </a:solidFill>
+                <a:latin typeface="Inter"/>
+                <a:ea typeface="Inter"/>
+                <a:cs typeface="Inter"/>
               </a:defRPr>
             </a:pPr>
             <a:r>
@@ -8225,6 +9078,9 @@
                     <a:alpha val="62745"/>
                   </a:srgbClr>
                 </a:solidFill>
+                <a:latin typeface="Inter"/>
+                <a:ea typeface="Inter"/>
+                <a:cs typeface="Inter"/>
               </a:rPr>
               <a:t>Combine producto, cultura, ocasión y ritual. Mantenga una firma estable y cambie la intensidad visual.</a:t>
             </a:r>
@@ -8236,7 +9092,7 @@
           <p:cNvPr id="18" name="ratio">
             <a:extLst xmlns:a="http://schemas.openxmlformats.org/drawingml/2006/main">
               <a:ext uri="{FF2B5EF4-FFF2-40B4-BE49-F238E27FC236}">
-                <a16:creationId xmlns:a16="http://schemas.microsoft.com/office/drawing/2014/main" id="{BC0C36B5-B5E6-44B9-B958-638FF0CC67D3}"/>
+                <a16:creationId xmlns:a16="http://schemas.microsoft.com/office/drawing/2014/main" id="{074E6CC5-8322-4616-A991-65885358C1EE}"/>
               </a:ext>
             </a:extLst>
           </p:cNvPr>
@@ -8268,6 +9124,9 @@
                 <a:solidFill>
                   <a:srgbClr val="D5B879"/>
                 </a:solidFill>
+                <a:latin typeface="Inter"/>
+                <a:ea typeface="Inter"/>
+                <a:cs typeface="Inter"/>
               </a:defRPr>
             </a:pPr>
             <a:r>
@@ -8275,6 +9134,9 @@
                 <a:solidFill>
                   <a:srgbClr val="D5B879"/>
                 </a:solidFill>
+                <a:latin typeface="Inter"/>
+                <a:ea typeface="Inter"/>
+                <a:cs typeface="Inter"/>
               </a:rPr>
               <a:t>40% producto  ·  20% cultura  ·  20% ocasión  ·  20% ritual</a:t>
             </a:r>
@@ -8284,7 +9146,7 @@
     </p:spTree>
     <p:extLst>
       <p:ext uri="{BB962C8B-B14F-4D97-AF65-F5344CB8AC3E}">
-        <p14:creationId xmlns:p14="http://schemas.microsoft.com/office/powerpoint/2010/main" val="729936039"/>
+        <p14:creationId xmlns:p14="http://schemas.microsoft.com/office/powerpoint/2010/main" val="1949770990"/>
       </p:ext>
     </p:extLst>
   </p:cSld>
@@ -8315,7 +9177,7 @@
           <p:cNvPr id="28" name="brand">
             <a:extLst xmlns:a="http://schemas.openxmlformats.org/drawingml/2006/main">
               <a:ext uri="{FF2B5EF4-FFF2-40B4-BE49-F238E27FC236}">
-                <a16:creationId xmlns:a16="http://schemas.microsoft.com/office/drawing/2014/main" id="{E19588AA-76EC-4CA3-8A66-89BBFC7939C2}"/>
+                <a16:creationId xmlns:a16="http://schemas.microsoft.com/office/drawing/2014/main" id="{B24FB3FC-3910-4020-8C8E-4D2B097542E6}"/>
               </a:ext>
             </a:extLst>
           </p:cNvPr>
@@ -8347,6 +9209,9 @@
                 <a:solidFill>
                   <a:srgbClr val="A88650"/>
                 </a:solidFill>
+                <a:latin typeface="Inter"/>
+                <a:ea typeface="Inter"/>
+                <a:cs typeface="Inter"/>
               </a:defRPr>
             </a:pPr>
             <a:r>
@@ -8354,6 +9219,9 @@
                 <a:solidFill>
                   <a:srgbClr val="A88650"/>
                 </a:solidFill>
+                <a:latin typeface="Inter"/>
+                <a:ea typeface="Inter"/>
+                <a:cs typeface="Inter"/>
               </a:rPr>
               <a:t>RON CARÚPANO</a:t>
             </a:r>
@@ -8365,7 +9233,7 @@
           <p:cNvPr id="2" name="page">
             <a:extLst xmlns:a="http://schemas.openxmlformats.org/drawingml/2006/main">
               <a:ext uri="{FF2B5EF4-FFF2-40B4-BE49-F238E27FC236}">
-                <a16:creationId xmlns:a16="http://schemas.microsoft.com/office/drawing/2014/main" id="{1F4EDCE3-3464-44D2-9216-3FC8C9BF2651}"/>
+                <a16:creationId xmlns:a16="http://schemas.microsoft.com/office/drawing/2014/main" id="{8D7E94F8-7D00-4D7C-8D29-79B0D883BC79}"/>
               </a:ext>
             </a:extLst>
           </p:cNvPr>
@@ -8397,6 +9265,9 @@
                 <a:solidFill>
                   <a:srgbClr val="706862"/>
                 </a:solidFill>
+                <a:latin typeface="Inter"/>
+                <a:ea typeface="Inter"/>
+                <a:cs typeface="Inter"/>
               </a:defRPr>
             </a:pPr>
             <a:r>
@@ -8404,6 +9275,9 @@
                 <a:solidFill>
                   <a:srgbClr val="706862"/>
                 </a:solidFill>
+                <a:latin typeface="Inter"/>
+                <a:ea typeface="Inter"/>
+                <a:cs typeface="Inter"/>
               </a:rPr>
               <a:t>18</a:t>
             </a:r>
@@ -8415,7 +9289,7 @@
           <p:cNvPr id="3" name="eyebrow">
             <a:extLst xmlns:a="http://schemas.openxmlformats.org/drawingml/2006/main">
               <a:ext uri="{FF2B5EF4-FFF2-40B4-BE49-F238E27FC236}">
-                <a16:creationId xmlns:a16="http://schemas.microsoft.com/office/drawing/2014/main" id="{5826EDD9-3ABB-4A7E-AE76-80C6B2A5A723}"/>
+                <a16:creationId xmlns:a16="http://schemas.microsoft.com/office/drawing/2014/main" id="{D4FB62A9-37B1-4CE6-889F-E312582AEABE}"/>
               </a:ext>
             </a:extLst>
           </p:cNvPr>
@@ -8447,6 +9321,9 @@
                 <a:solidFill>
                   <a:srgbClr val="A88650"/>
                 </a:solidFill>
+                <a:latin typeface="Inter"/>
+                <a:ea typeface="Inter"/>
+                <a:cs typeface="Inter"/>
               </a:defRPr>
             </a:pPr>
             <a:r>
@@ -8454,6 +9331,9 @@
                 <a:solidFill>
                   <a:srgbClr val="A88650"/>
                 </a:solidFill>
+                <a:latin typeface="Inter"/>
+                <a:ea typeface="Inter"/>
+                <a:cs typeface="Inter"/>
               </a:rPr>
               <a:t>PLAN / RESPONSABLES</a:t>
             </a:r>
@@ -8465,7 +9345,7 @@
           <p:cNvPr id="4" name="title">
             <a:extLst xmlns:a="http://schemas.openxmlformats.org/drawingml/2006/main">
               <a:ext uri="{FF2B5EF4-FFF2-40B4-BE49-F238E27FC236}">
-                <a16:creationId xmlns:a16="http://schemas.microsoft.com/office/drawing/2014/main" id="{976580D2-BFC7-48A3-9644-BA52FD97CD26}"/>
+                <a16:creationId xmlns:a16="http://schemas.microsoft.com/office/drawing/2014/main" id="{6575362E-AB4A-4A0B-B014-314C942F515E}"/>
               </a:ext>
             </a:extLst>
           </p:cNvPr>
@@ -8497,6 +9377,9 @@
                 <a:solidFill>
                   <a:srgbClr val="100C0A"/>
                 </a:solidFill>
+                <a:latin typeface="Adobe Garamond Pro"/>
+                <a:ea typeface="Adobe Garamond Pro"/>
+                <a:cs typeface="Adobe Garamond Pro"/>
               </a:defRPr>
             </a:pPr>
             <a:r>
@@ -8504,6 +9387,9 @@
                 <a:solidFill>
                   <a:srgbClr val="100C0A"/>
                 </a:solidFill>
+                <a:latin typeface="Adobe Garamond Pro"/>
+                <a:ea typeface="Adobe Garamond Pro"/>
+                <a:cs typeface="Adobe Garamond Pro"/>
               </a:rPr>
               <a:t>El siguiente paso debe</a:t>
             </a:r>
@@ -8514,6 +9400,9 @@
                 <a:solidFill>
                   <a:srgbClr val="100C0A"/>
                 </a:solidFill>
+                <a:latin typeface="Adobe Garamond Pro"/>
+                <a:ea typeface="Adobe Garamond Pro"/>
+                <a:cs typeface="Adobe Garamond Pro"/>
               </a:defRPr>
             </a:pPr>
             <a:r>
@@ -8521,6 +9410,9 @@
                 <a:solidFill>
                   <a:srgbClr val="100C0A"/>
                 </a:solidFill>
+                <a:latin typeface="Adobe Garamond Pro"/>
+                <a:ea typeface="Adobe Garamond Pro"/>
+                <a:cs typeface="Adobe Garamond Pro"/>
               </a:rPr>
               <a:t>quedar inequívoco.</a:t>
             </a:r>
@@ -8532,7 +9424,7 @@
           <p:cNvPr id="5" name="table-head">
             <a:extLst xmlns:a="http://schemas.openxmlformats.org/drawingml/2006/main">
               <a:ext uri="{FF2B5EF4-FFF2-40B4-BE49-F238E27FC236}">
-                <a16:creationId xmlns:a16="http://schemas.microsoft.com/office/drawing/2014/main" id="{574A5CE9-6167-41BC-94C0-4E07F615F686}"/>
+                <a16:creationId xmlns:a16="http://schemas.microsoft.com/office/drawing/2014/main" id="{ED8BF30F-A30A-42A9-8861-95F99A92B136}"/>
               </a:ext>
             </a:extLst>
           </p:cNvPr>
@@ -8563,7 +9455,7 @@
           <p:cNvPr id="6" name="cell-0-0">
             <a:extLst xmlns:a="http://schemas.openxmlformats.org/drawingml/2006/main">
               <a:ext uri="{FF2B5EF4-FFF2-40B4-BE49-F238E27FC236}">
-                <a16:creationId xmlns:a16="http://schemas.microsoft.com/office/drawing/2014/main" id="{E869F27A-40D9-46FE-ADD0-ED104CE254C4}"/>
+                <a16:creationId xmlns:a16="http://schemas.microsoft.com/office/drawing/2014/main" id="{1810075F-81CA-4603-A3E7-88E1D217CF1F}"/>
               </a:ext>
             </a:extLst>
           </p:cNvPr>
@@ -8595,6 +9487,9 @@
                 <a:solidFill>
                   <a:srgbClr val="F3EEE6"/>
                 </a:solidFill>
+                <a:latin typeface="Inter"/>
+                <a:ea typeface="Inter"/>
+                <a:cs typeface="Inter"/>
               </a:defRPr>
             </a:pPr>
             <a:r>
@@ -8602,6 +9497,9 @@
                 <a:solidFill>
                   <a:srgbClr val="F3EEE6"/>
                 </a:solidFill>
+                <a:latin typeface="Inter"/>
+                <a:ea typeface="Inter"/>
+                <a:cs typeface="Inter"/>
               </a:rPr>
               <a:t>PRIORIDAD</a:t>
             </a:r>
@@ -8613,7 +9511,7 @@
           <p:cNvPr id="7" name="cell-0-1">
             <a:extLst xmlns:a="http://schemas.openxmlformats.org/drawingml/2006/main">
               <a:ext uri="{FF2B5EF4-FFF2-40B4-BE49-F238E27FC236}">
-                <a16:creationId xmlns:a16="http://schemas.microsoft.com/office/drawing/2014/main" id="{C423BE61-6A10-46C0-A781-91D276FFAE6A}"/>
+                <a16:creationId xmlns:a16="http://schemas.microsoft.com/office/drawing/2014/main" id="{A329341C-8FFB-405B-8BC4-D259D714841D}"/>
               </a:ext>
             </a:extLst>
           </p:cNvPr>
@@ -8645,6 +9543,9 @@
                 <a:solidFill>
                   <a:srgbClr val="F3EEE6"/>
                 </a:solidFill>
+                <a:latin typeface="Inter"/>
+                <a:ea typeface="Inter"/>
+                <a:cs typeface="Inter"/>
               </a:defRPr>
             </a:pPr>
             <a:r>
@@ -8652,6 +9553,9 @@
                 <a:solidFill>
                   <a:srgbClr val="F3EEE6"/>
                 </a:solidFill>
+                <a:latin typeface="Inter"/>
+                <a:ea typeface="Inter"/>
+                <a:cs typeface="Inter"/>
               </a:rPr>
               <a:t>RESPONSABLE</a:t>
             </a:r>
@@ -8663,7 +9567,7 @@
           <p:cNvPr id="8" name="cell-0-2">
             <a:extLst xmlns:a="http://schemas.openxmlformats.org/drawingml/2006/main">
               <a:ext uri="{FF2B5EF4-FFF2-40B4-BE49-F238E27FC236}">
-                <a16:creationId xmlns:a16="http://schemas.microsoft.com/office/drawing/2014/main" id="{838B2092-FCA2-486F-9E59-FABC06D3CFBE}"/>
+                <a16:creationId xmlns:a16="http://schemas.microsoft.com/office/drawing/2014/main" id="{F06C0307-873C-43BF-87E6-8C195E3A7364}"/>
               </a:ext>
             </a:extLst>
           </p:cNvPr>
@@ -8695,6 +9599,9 @@
                 <a:solidFill>
                   <a:srgbClr val="F3EEE6"/>
                 </a:solidFill>
+                <a:latin typeface="Inter"/>
+                <a:ea typeface="Inter"/>
+                <a:cs typeface="Inter"/>
               </a:defRPr>
             </a:pPr>
             <a:r>
@@ -8702,6 +9609,9 @@
                 <a:solidFill>
                   <a:srgbClr val="F3EEE6"/>
                 </a:solidFill>
+                <a:latin typeface="Inter"/>
+                <a:ea typeface="Inter"/>
+                <a:cs typeface="Inter"/>
               </a:rPr>
               <a:t>FECHA</a:t>
             </a:r>
@@ -8713,7 +9623,7 @@
           <p:cNvPr id="9" name="cell-0-3">
             <a:extLst xmlns:a="http://schemas.openxmlformats.org/drawingml/2006/main">
               <a:ext uri="{FF2B5EF4-FFF2-40B4-BE49-F238E27FC236}">
-                <a16:creationId xmlns:a16="http://schemas.microsoft.com/office/drawing/2014/main" id="{A6C795ED-01AC-4241-9C38-19790C75ED26}"/>
+                <a16:creationId xmlns:a16="http://schemas.microsoft.com/office/drawing/2014/main" id="{758C34C5-3A21-414C-ABEC-1F0E6EFE1A25}"/>
               </a:ext>
             </a:extLst>
           </p:cNvPr>
@@ -8745,6 +9655,9 @@
                 <a:solidFill>
                   <a:srgbClr val="F3EEE6"/>
                 </a:solidFill>
+                <a:latin typeface="Inter"/>
+                <a:ea typeface="Inter"/>
+                <a:cs typeface="Inter"/>
               </a:defRPr>
             </a:pPr>
             <a:r>
@@ -8752,6 +9665,9 @@
                 <a:solidFill>
                   <a:srgbClr val="F3EEE6"/>
                 </a:solidFill>
+                <a:latin typeface="Inter"/>
+                <a:ea typeface="Inter"/>
+                <a:cs typeface="Inter"/>
               </a:rPr>
               <a:t>ESTADO</a:t>
             </a:r>
@@ -8763,7 +9679,7 @@
           <p:cNvPr id="10" name="row-bg-1">
             <a:extLst xmlns:a="http://schemas.openxmlformats.org/drawingml/2006/main">
               <a:ext uri="{FF2B5EF4-FFF2-40B4-BE49-F238E27FC236}">
-                <a16:creationId xmlns:a16="http://schemas.microsoft.com/office/drawing/2014/main" id="{15F1C125-9477-484A-8571-E0316840605D}"/>
+                <a16:creationId xmlns:a16="http://schemas.microsoft.com/office/drawing/2014/main" id="{8C8EC84D-6D27-40EA-B65F-2AE8D50088EF}"/>
               </a:ext>
             </a:extLst>
           </p:cNvPr>
@@ -8794,7 +9710,7 @@
           <p:cNvPr id="11" name="cell-1-0">
             <a:extLst xmlns:a="http://schemas.openxmlformats.org/drawingml/2006/main">
               <a:ext uri="{FF2B5EF4-FFF2-40B4-BE49-F238E27FC236}">
-                <a16:creationId xmlns:a16="http://schemas.microsoft.com/office/drawing/2014/main" id="{8872A523-8FFC-43C9-88E2-EB39E5BD8331}"/>
+                <a16:creationId xmlns:a16="http://schemas.microsoft.com/office/drawing/2014/main" id="{C5D22900-1B4E-4207-BF5D-C4A213A5A640}"/>
               </a:ext>
             </a:extLst>
           </p:cNvPr>
@@ -8826,6 +9742,9 @@
                 <a:solidFill>
                   <a:srgbClr val="100C0A"/>
                 </a:solidFill>
+                <a:latin typeface="Inter"/>
+                <a:ea typeface="Inter"/>
+                <a:cs typeface="Inter"/>
               </a:defRPr>
             </a:pPr>
             <a:r>
@@ -8833,6 +9752,9 @@
                 <a:solidFill>
                   <a:srgbClr val="100C0A"/>
                 </a:solidFill>
+                <a:latin typeface="Inter"/>
+                <a:ea typeface="Inter"/>
+                <a:cs typeface="Inter"/>
               </a:rPr>
               <a:t>Definir alcance</a:t>
             </a:r>
@@ -8844,7 +9766,7 @@
           <p:cNvPr id="12" name="cell-1-1">
             <a:extLst xmlns:a="http://schemas.openxmlformats.org/drawingml/2006/main">
               <a:ext uri="{FF2B5EF4-FFF2-40B4-BE49-F238E27FC236}">
-                <a16:creationId xmlns:a16="http://schemas.microsoft.com/office/drawing/2014/main" id="{5D6C2A5B-D025-4EA3-B32D-69BA602A9F93}"/>
+                <a16:creationId xmlns:a16="http://schemas.microsoft.com/office/drawing/2014/main" id="{B09C156A-D7BF-40D3-8814-F3BE9F6A5D72}"/>
               </a:ext>
             </a:extLst>
           </p:cNvPr>
@@ -8876,6 +9798,9 @@
                 <a:solidFill>
                   <a:srgbClr val="100C0A"/>
                 </a:solidFill>
+                <a:latin typeface="Inter"/>
+                <a:ea typeface="Inter"/>
+                <a:cs typeface="Inter"/>
               </a:defRPr>
             </a:pPr>
             <a:r>
@@ -8883,6 +9808,9 @@
                 <a:solidFill>
                   <a:srgbClr val="100C0A"/>
                 </a:solidFill>
+                <a:latin typeface="Inter"/>
+                <a:ea typeface="Inter"/>
+                <a:cs typeface="Inter"/>
               </a:rPr>
               <a:t>Nombre / área</a:t>
             </a:r>
@@ -8894,7 +9822,7 @@
           <p:cNvPr id="13" name="cell-1-2">
             <a:extLst xmlns:a="http://schemas.openxmlformats.org/drawingml/2006/main">
               <a:ext uri="{FF2B5EF4-FFF2-40B4-BE49-F238E27FC236}">
-                <a16:creationId xmlns:a16="http://schemas.microsoft.com/office/drawing/2014/main" id="{ED0DC4B1-1B75-4976-8AE1-45BB8FFE6756}"/>
+                <a16:creationId xmlns:a16="http://schemas.microsoft.com/office/drawing/2014/main" id="{E1424AF0-F35B-4104-83C1-FB819BB05D6D}"/>
               </a:ext>
             </a:extLst>
           </p:cNvPr>
@@ -8926,6 +9854,9 @@
                 <a:solidFill>
                   <a:srgbClr val="100C0A"/>
                 </a:solidFill>
+                <a:latin typeface="Inter"/>
+                <a:ea typeface="Inter"/>
+                <a:cs typeface="Inter"/>
               </a:defRPr>
             </a:pPr>
             <a:r>
@@ -8933,6 +9864,9 @@
                 <a:solidFill>
                   <a:srgbClr val="100C0A"/>
                 </a:solidFill>
+                <a:latin typeface="Inter"/>
+                <a:ea typeface="Inter"/>
+                <a:cs typeface="Inter"/>
               </a:rPr>
               <a:t>00.00.00</a:t>
             </a:r>
@@ -8944,7 +9878,7 @@
           <p:cNvPr id="14" name="cell-1-3">
             <a:extLst xmlns:a="http://schemas.openxmlformats.org/drawingml/2006/main">
               <a:ext uri="{FF2B5EF4-FFF2-40B4-BE49-F238E27FC236}">
-                <a16:creationId xmlns:a16="http://schemas.microsoft.com/office/drawing/2014/main" id="{75E06D83-255C-403E-8203-087FF48161B2}"/>
+                <a16:creationId xmlns:a16="http://schemas.microsoft.com/office/drawing/2014/main" id="{E3A4F7DA-6AB3-486E-8F1B-50C1337D3C23}"/>
               </a:ext>
             </a:extLst>
           </p:cNvPr>
@@ -8976,6 +9910,9 @@
                 <a:solidFill>
                   <a:srgbClr val="100C0A"/>
                 </a:solidFill>
+                <a:latin typeface="Inter"/>
+                <a:ea typeface="Inter"/>
+                <a:cs typeface="Inter"/>
               </a:defRPr>
             </a:pPr>
             <a:r>
@@ -8983,6 +9920,9 @@
                 <a:solidFill>
                   <a:srgbClr val="100C0A"/>
                 </a:solidFill>
+                <a:latin typeface="Inter"/>
+                <a:ea typeface="Inter"/>
+                <a:cs typeface="Inter"/>
               </a:rPr>
               <a:t>Por iniciar</a:t>
             </a:r>
@@ -8994,7 +9934,7 @@
           <p:cNvPr id="15" name="row-line-1">
             <a:extLst xmlns:a="http://schemas.openxmlformats.org/drawingml/2006/main">
               <a:ext uri="{FF2B5EF4-FFF2-40B4-BE49-F238E27FC236}">
-                <a16:creationId xmlns:a16="http://schemas.microsoft.com/office/drawing/2014/main" id="{36EE1F4C-D7E4-4B92-9B6F-F7ED8353C10E}"/>
+                <a16:creationId xmlns:a16="http://schemas.microsoft.com/office/drawing/2014/main" id="{0D2E96A0-DB0A-4A16-9563-436B7F28A1C3}"/>
               </a:ext>
             </a:extLst>
           </p:cNvPr>
@@ -9025,7 +9965,7 @@
           <p:cNvPr id="16" name="row-bg-2">
             <a:extLst xmlns:a="http://schemas.openxmlformats.org/drawingml/2006/main">
               <a:ext uri="{FF2B5EF4-FFF2-40B4-BE49-F238E27FC236}">
-                <a16:creationId xmlns:a16="http://schemas.microsoft.com/office/drawing/2014/main" id="{45E8AD7F-2C0C-444B-B3C7-151B1DE8116D}"/>
+                <a16:creationId xmlns:a16="http://schemas.microsoft.com/office/drawing/2014/main" id="{A8A78C96-280C-4A5F-AED7-10AA7FDDF0C5}"/>
               </a:ext>
             </a:extLst>
           </p:cNvPr>
@@ -9056,7 +9996,7 @@
           <p:cNvPr id="17" name="cell-2-0">
             <a:extLst xmlns:a="http://schemas.openxmlformats.org/drawingml/2006/main">
               <a:ext uri="{FF2B5EF4-FFF2-40B4-BE49-F238E27FC236}">
-                <a16:creationId xmlns:a16="http://schemas.microsoft.com/office/drawing/2014/main" id="{7BBAAC1C-DD2D-45E3-9C35-8901432589CB}"/>
+                <a16:creationId xmlns:a16="http://schemas.microsoft.com/office/drawing/2014/main" id="{28555DBA-7EA5-47CD-922E-FBF13D2BB468}"/>
               </a:ext>
             </a:extLst>
           </p:cNvPr>
@@ -9088,6 +10028,9 @@
                 <a:solidFill>
                   <a:srgbClr val="100C0A"/>
                 </a:solidFill>
+                <a:latin typeface="Inter"/>
+                <a:ea typeface="Inter"/>
+                <a:cs typeface="Inter"/>
               </a:defRPr>
             </a:pPr>
             <a:r>
@@ -9095,6 +10038,9 @@
                 <a:solidFill>
                   <a:srgbClr val="100C0A"/>
                 </a:solidFill>
+                <a:latin typeface="Inter"/>
+                <a:ea typeface="Inter"/>
+                <a:cs typeface="Inter"/>
               </a:rPr>
               <a:t>Validar propuesta</a:t>
             </a:r>
@@ -9106,7 +10052,7 @@
           <p:cNvPr id="18" name="cell-2-1">
             <a:extLst xmlns:a="http://schemas.openxmlformats.org/drawingml/2006/main">
               <a:ext uri="{FF2B5EF4-FFF2-40B4-BE49-F238E27FC236}">
-                <a16:creationId xmlns:a16="http://schemas.microsoft.com/office/drawing/2014/main" id="{F7523539-6B0E-493E-BC43-723747C6A47C}"/>
+                <a16:creationId xmlns:a16="http://schemas.microsoft.com/office/drawing/2014/main" id="{554B82DB-E10A-428E-8EFF-3C780A32290B}"/>
               </a:ext>
             </a:extLst>
           </p:cNvPr>
@@ -9138,6 +10084,9 @@
                 <a:solidFill>
                   <a:srgbClr val="100C0A"/>
                 </a:solidFill>
+                <a:latin typeface="Inter"/>
+                <a:ea typeface="Inter"/>
+                <a:cs typeface="Inter"/>
               </a:defRPr>
             </a:pPr>
             <a:r>
@@ -9145,6 +10094,9 @@
                 <a:solidFill>
                   <a:srgbClr val="100C0A"/>
                 </a:solidFill>
+                <a:latin typeface="Inter"/>
+                <a:ea typeface="Inter"/>
+                <a:cs typeface="Inter"/>
               </a:rPr>
               <a:t>Nombre / área</a:t>
             </a:r>
@@ -9156,7 +10108,7 @@
           <p:cNvPr id="19" name="cell-2-2">
             <a:extLst xmlns:a="http://schemas.openxmlformats.org/drawingml/2006/main">
               <a:ext uri="{FF2B5EF4-FFF2-40B4-BE49-F238E27FC236}">
-                <a16:creationId xmlns:a16="http://schemas.microsoft.com/office/drawing/2014/main" id="{4EB08C83-C772-488A-9D81-4772783020E4}"/>
+                <a16:creationId xmlns:a16="http://schemas.microsoft.com/office/drawing/2014/main" id="{B6272D42-2D29-486D-B33E-B945243FB002}"/>
               </a:ext>
             </a:extLst>
           </p:cNvPr>
@@ -9188,6 +10140,9 @@
                 <a:solidFill>
                   <a:srgbClr val="100C0A"/>
                 </a:solidFill>
+                <a:latin typeface="Inter"/>
+                <a:ea typeface="Inter"/>
+                <a:cs typeface="Inter"/>
               </a:defRPr>
             </a:pPr>
             <a:r>
@@ -9195,6 +10150,9 @@
                 <a:solidFill>
                   <a:srgbClr val="100C0A"/>
                 </a:solidFill>
+                <a:latin typeface="Inter"/>
+                <a:ea typeface="Inter"/>
+                <a:cs typeface="Inter"/>
               </a:rPr>
               <a:t>00.00.00</a:t>
             </a:r>
@@ -9206,7 +10164,7 @@
           <p:cNvPr id="20" name="cell-2-3">
             <a:extLst xmlns:a="http://schemas.openxmlformats.org/drawingml/2006/main">
               <a:ext uri="{FF2B5EF4-FFF2-40B4-BE49-F238E27FC236}">
-                <a16:creationId xmlns:a16="http://schemas.microsoft.com/office/drawing/2014/main" id="{A5BDC8F5-961A-49EB-AA9B-0783ACE6C854}"/>
+                <a16:creationId xmlns:a16="http://schemas.microsoft.com/office/drawing/2014/main" id="{BB87F4FB-BB2E-43BF-AE1C-42224FDB73CF}"/>
               </a:ext>
             </a:extLst>
           </p:cNvPr>
@@ -9238,6 +10196,9 @@
                 <a:solidFill>
                   <a:srgbClr val="100C0A"/>
                 </a:solidFill>
+                <a:latin typeface="Inter"/>
+                <a:ea typeface="Inter"/>
+                <a:cs typeface="Inter"/>
               </a:defRPr>
             </a:pPr>
             <a:r>
@@ -9245,6 +10206,9 @@
                 <a:solidFill>
                   <a:srgbClr val="100C0A"/>
                 </a:solidFill>
+                <a:latin typeface="Inter"/>
+                <a:ea typeface="Inter"/>
+                <a:cs typeface="Inter"/>
               </a:rPr>
               <a:t>En curso</a:t>
             </a:r>
@@ -9256,7 +10220,7 @@
           <p:cNvPr id="21" name="row-line-2">
             <a:extLst xmlns:a="http://schemas.openxmlformats.org/drawingml/2006/main">
               <a:ext uri="{FF2B5EF4-FFF2-40B4-BE49-F238E27FC236}">
-                <a16:creationId xmlns:a16="http://schemas.microsoft.com/office/drawing/2014/main" id="{B6D2FF37-7E32-4D8D-A652-238A08408654}"/>
+                <a16:creationId xmlns:a16="http://schemas.microsoft.com/office/drawing/2014/main" id="{AF36E034-369F-4D63-AC9C-C61E9C4911CF}"/>
               </a:ext>
             </a:extLst>
           </p:cNvPr>
@@ -9287,7 +10251,7 @@
           <p:cNvPr id="22" name="row-bg-3">
             <a:extLst xmlns:a="http://schemas.openxmlformats.org/drawingml/2006/main">
               <a:ext uri="{FF2B5EF4-FFF2-40B4-BE49-F238E27FC236}">
-                <a16:creationId xmlns:a16="http://schemas.microsoft.com/office/drawing/2014/main" id="{26EC6B96-3530-4B33-8AD2-806163B6D000}"/>
+                <a16:creationId xmlns:a16="http://schemas.microsoft.com/office/drawing/2014/main" id="{69EE9FB8-4AAA-4DA7-B4AD-4CBDB4034881}"/>
               </a:ext>
             </a:extLst>
           </p:cNvPr>
@@ -9318,7 +10282,7 @@
           <p:cNvPr id="23" name="cell-3-0">
             <a:extLst xmlns:a="http://schemas.openxmlformats.org/drawingml/2006/main">
               <a:ext uri="{FF2B5EF4-FFF2-40B4-BE49-F238E27FC236}">
-                <a16:creationId xmlns:a16="http://schemas.microsoft.com/office/drawing/2014/main" id="{91018ABA-812B-4D05-9933-DFF47899EC3C}"/>
+                <a16:creationId xmlns:a16="http://schemas.microsoft.com/office/drawing/2014/main" id="{5BCB1AD7-E1CB-43A8-918B-C8886438A658}"/>
               </a:ext>
             </a:extLst>
           </p:cNvPr>
@@ -9350,6 +10314,9 @@
                 <a:solidFill>
                   <a:srgbClr val="100C0A"/>
                 </a:solidFill>
+                <a:latin typeface="Inter"/>
+                <a:ea typeface="Inter"/>
+                <a:cs typeface="Inter"/>
               </a:defRPr>
             </a:pPr>
             <a:r>
@@ -9357,6 +10324,9 @@
                 <a:solidFill>
                   <a:srgbClr val="100C0A"/>
                 </a:solidFill>
+                <a:latin typeface="Inter"/>
+                <a:ea typeface="Inter"/>
+                <a:cs typeface="Inter"/>
               </a:rPr>
               <a:t>Activar ejecución</a:t>
             </a:r>
@@ -9368,7 +10338,7 @@
           <p:cNvPr id="24" name="cell-3-1">
             <a:extLst xmlns:a="http://schemas.openxmlformats.org/drawingml/2006/main">
               <a:ext uri="{FF2B5EF4-FFF2-40B4-BE49-F238E27FC236}">
-                <a16:creationId xmlns:a16="http://schemas.microsoft.com/office/drawing/2014/main" id="{FCC6D660-5E13-4432-BF61-4E8C475F0B14}"/>
+                <a16:creationId xmlns:a16="http://schemas.microsoft.com/office/drawing/2014/main" id="{746DA56D-3094-4351-83F7-7AE3F8F977FB}"/>
               </a:ext>
             </a:extLst>
           </p:cNvPr>
@@ -9400,6 +10370,9 @@
                 <a:solidFill>
                   <a:srgbClr val="100C0A"/>
                 </a:solidFill>
+                <a:latin typeface="Inter"/>
+                <a:ea typeface="Inter"/>
+                <a:cs typeface="Inter"/>
               </a:defRPr>
             </a:pPr>
             <a:r>
@@ -9407,6 +10380,9 @@
                 <a:solidFill>
                   <a:srgbClr val="100C0A"/>
                 </a:solidFill>
+                <a:latin typeface="Inter"/>
+                <a:ea typeface="Inter"/>
+                <a:cs typeface="Inter"/>
               </a:rPr>
               <a:t>Nombre / área</a:t>
             </a:r>
@@ -9418,7 +10394,7 @@
           <p:cNvPr id="25" name="cell-3-2">
             <a:extLst xmlns:a="http://schemas.openxmlformats.org/drawingml/2006/main">
               <a:ext uri="{FF2B5EF4-FFF2-40B4-BE49-F238E27FC236}">
-                <a16:creationId xmlns:a16="http://schemas.microsoft.com/office/drawing/2014/main" id="{850C2692-A808-4372-8CF5-0C88A96458D2}"/>
+                <a16:creationId xmlns:a16="http://schemas.microsoft.com/office/drawing/2014/main" id="{954A4CE1-2015-4964-A11C-6DA3E6E9A5CE}"/>
               </a:ext>
             </a:extLst>
           </p:cNvPr>
@@ -9450,6 +10426,9 @@
                 <a:solidFill>
                   <a:srgbClr val="100C0A"/>
                 </a:solidFill>
+                <a:latin typeface="Inter"/>
+                <a:ea typeface="Inter"/>
+                <a:cs typeface="Inter"/>
               </a:defRPr>
             </a:pPr>
             <a:r>
@@ -9457,6 +10436,9 @@
                 <a:solidFill>
                   <a:srgbClr val="100C0A"/>
                 </a:solidFill>
+                <a:latin typeface="Inter"/>
+                <a:ea typeface="Inter"/>
+                <a:cs typeface="Inter"/>
               </a:rPr>
               <a:t>00.00.00</a:t>
             </a:r>
@@ -9468,7 +10450,7 @@
           <p:cNvPr id="26" name="cell-3-3">
             <a:extLst xmlns:a="http://schemas.openxmlformats.org/drawingml/2006/main">
               <a:ext uri="{FF2B5EF4-FFF2-40B4-BE49-F238E27FC236}">
-                <a16:creationId xmlns:a16="http://schemas.microsoft.com/office/drawing/2014/main" id="{29CE041B-D7AD-4CF5-BD96-B826BF29C6A7}"/>
+                <a16:creationId xmlns:a16="http://schemas.microsoft.com/office/drawing/2014/main" id="{566C7773-9C5F-4BA1-86B5-B0F66572C7A1}"/>
               </a:ext>
             </a:extLst>
           </p:cNvPr>
@@ -9500,6 +10482,9 @@
                 <a:solidFill>
                   <a:srgbClr val="100C0A"/>
                 </a:solidFill>
+                <a:latin typeface="Inter"/>
+                <a:ea typeface="Inter"/>
+                <a:cs typeface="Inter"/>
               </a:defRPr>
             </a:pPr>
             <a:r>
@@ -9507,6 +10492,9 @@
                 <a:solidFill>
                   <a:srgbClr val="100C0A"/>
                 </a:solidFill>
+                <a:latin typeface="Inter"/>
+                <a:ea typeface="Inter"/>
+                <a:cs typeface="Inter"/>
               </a:rPr>
               <a:t>Próximo</a:t>
             </a:r>
@@ -9518,7 +10506,7 @@
           <p:cNvPr id="27" name="row-line-3">
             <a:extLst xmlns:a="http://schemas.openxmlformats.org/drawingml/2006/main">
               <a:ext uri="{FF2B5EF4-FFF2-40B4-BE49-F238E27FC236}">
-                <a16:creationId xmlns:a16="http://schemas.microsoft.com/office/drawing/2014/main" id="{4171D788-4882-4701-AD12-57B2FC90D6B5}"/>
+                <a16:creationId xmlns:a16="http://schemas.microsoft.com/office/drawing/2014/main" id="{3701DC07-8A12-46E3-9F16-1ABA50DE1C7D}"/>
               </a:ext>
             </a:extLst>
           </p:cNvPr>
@@ -9547,7 +10535,7 @@
     </p:spTree>
     <p:extLst>
       <p:ext uri="{BB962C8B-B14F-4D97-AF65-F5344CB8AC3E}">
-        <p14:creationId xmlns:p14="http://schemas.microsoft.com/office/powerpoint/2010/main" val="2136933343"/>
+        <p14:creationId xmlns:p14="http://schemas.microsoft.com/office/powerpoint/2010/main" val="1091467417"/>
       </p:ext>
     </p:extLst>
   </p:cSld>
@@ -9578,7 +10566,7 @@
           <p:cNvPr id="16" name="brand">
             <a:extLst xmlns:a="http://schemas.openxmlformats.org/drawingml/2006/main">
               <a:ext uri="{FF2B5EF4-FFF2-40B4-BE49-F238E27FC236}">
-                <a16:creationId xmlns:a16="http://schemas.microsoft.com/office/drawing/2014/main" id="{6277A811-7EEF-4E6C-B0CD-F1311E9B5C2F}"/>
+                <a16:creationId xmlns:a16="http://schemas.microsoft.com/office/drawing/2014/main" id="{CDEE47CB-88BD-49E0-8AFB-85B22646746B}"/>
               </a:ext>
             </a:extLst>
           </p:cNvPr>
@@ -9610,6 +10598,9 @@
                 <a:solidFill>
                   <a:srgbClr val="A88650"/>
                 </a:solidFill>
+                <a:latin typeface="Inter"/>
+                <a:ea typeface="Inter"/>
+                <a:cs typeface="Inter"/>
               </a:defRPr>
             </a:pPr>
             <a:r>
@@ -9617,6 +10608,9 @@
                 <a:solidFill>
                   <a:srgbClr val="A88650"/>
                 </a:solidFill>
+                <a:latin typeface="Inter"/>
+                <a:ea typeface="Inter"/>
+                <a:cs typeface="Inter"/>
               </a:rPr>
               <a:t>RON CARÚPANO</a:t>
             </a:r>
@@ -9628,7 +10622,7 @@
           <p:cNvPr id="2" name="page">
             <a:extLst xmlns:a="http://schemas.openxmlformats.org/drawingml/2006/main">
               <a:ext uri="{FF2B5EF4-FFF2-40B4-BE49-F238E27FC236}">
-                <a16:creationId xmlns:a16="http://schemas.microsoft.com/office/drawing/2014/main" id="{A546CF4F-9925-4681-998F-F5AFA72E6AF5}"/>
+                <a16:creationId xmlns:a16="http://schemas.microsoft.com/office/drawing/2014/main" id="{4F0D86E3-904B-432E-9CC5-1E3BBC564F74}"/>
               </a:ext>
             </a:extLst>
           </p:cNvPr>
@@ -9660,6 +10654,9 @@
                 <a:solidFill>
                   <a:srgbClr val="706862"/>
                 </a:solidFill>
+                <a:latin typeface="Inter"/>
+                <a:ea typeface="Inter"/>
+                <a:cs typeface="Inter"/>
               </a:defRPr>
             </a:pPr>
             <a:r>
@@ -9667,6 +10664,9 @@
                 <a:solidFill>
                   <a:srgbClr val="706862"/>
                 </a:solidFill>
+                <a:latin typeface="Inter"/>
+                <a:ea typeface="Inter"/>
+                <a:cs typeface="Inter"/>
               </a:rPr>
               <a:t>19</a:t>
             </a:r>
@@ -9678,7 +10678,7 @@
           <p:cNvPr id="3" name="title">
             <a:extLst xmlns:a="http://schemas.openxmlformats.org/drawingml/2006/main">
               <a:ext uri="{FF2B5EF4-FFF2-40B4-BE49-F238E27FC236}">
-                <a16:creationId xmlns:a16="http://schemas.microsoft.com/office/drawing/2014/main" id="{F858BC8B-7D76-470E-B537-15F0C62A097B}"/>
+                <a16:creationId xmlns:a16="http://schemas.microsoft.com/office/drawing/2014/main" id="{427A3886-9512-4E0D-91FE-584D3B5BE1B5}"/>
               </a:ext>
             </a:extLst>
           </p:cNvPr>
@@ -9710,6 +10710,9 @@
                 <a:solidFill>
                   <a:srgbClr val="100C0A"/>
                 </a:solidFill>
+                <a:latin typeface="Adobe Garamond Pro"/>
+                <a:ea typeface="Adobe Garamond Pro"/>
+                <a:cs typeface="Adobe Garamond Pro"/>
               </a:defRPr>
             </a:pPr>
             <a:r>
@@ -9717,6 +10720,9 @@
                 <a:solidFill>
                   <a:srgbClr val="100C0A"/>
                 </a:solidFill>
+                <a:latin typeface="Adobe Garamond Pro"/>
+                <a:ea typeface="Adobe Garamond Pro"/>
+                <a:cs typeface="Adobe Garamond Pro"/>
               </a:rPr>
               <a:t>Tres horizontes</a:t>
             </a:r>
@@ -9727,6 +10733,9 @@
                 <a:solidFill>
                   <a:srgbClr val="100C0A"/>
                 </a:solidFill>
+                <a:latin typeface="Adobe Garamond Pro"/>
+                <a:ea typeface="Adobe Garamond Pro"/>
+                <a:cs typeface="Adobe Garamond Pro"/>
               </a:defRPr>
             </a:pPr>
             <a:r>
@@ -9734,6 +10743,9 @@
                 <a:solidFill>
                   <a:srgbClr val="100C0A"/>
                 </a:solidFill>
+                <a:latin typeface="Adobe Garamond Pro"/>
+                <a:ea typeface="Adobe Garamond Pro"/>
+                <a:cs typeface="Adobe Garamond Pro"/>
               </a:rPr>
               <a:t>para avanzar.</a:t>
             </a:r>
@@ -9745,7 +10757,7 @@
           <p:cNvPr id="4" name="tag0">
             <a:extLst xmlns:a="http://schemas.openxmlformats.org/drawingml/2006/main">
               <a:ext uri="{FF2B5EF4-FFF2-40B4-BE49-F238E27FC236}">
-                <a16:creationId xmlns:a16="http://schemas.microsoft.com/office/drawing/2014/main" id="{CAD5F733-AE89-4660-A1F8-6B03649F4893}"/>
+                <a16:creationId xmlns:a16="http://schemas.microsoft.com/office/drawing/2014/main" id="{D13A732F-AC31-498F-AACF-AABE6FB9579E}"/>
               </a:ext>
             </a:extLst>
           </p:cNvPr>
@@ -9777,6 +10789,9 @@
                 <a:solidFill>
                   <a:srgbClr val="A88650"/>
                 </a:solidFill>
+                <a:latin typeface="Inter"/>
+                <a:ea typeface="Inter"/>
+                <a:cs typeface="Inter"/>
               </a:defRPr>
             </a:pPr>
             <a:r>
@@ -9784,6 +10799,9 @@
                 <a:solidFill>
                   <a:srgbClr val="A88650"/>
                 </a:solidFill>
+                <a:latin typeface="Inter"/>
+                <a:ea typeface="Inter"/>
+                <a:cs typeface="Inter"/>
               </a:rPr>
               <a:t>AHORA</a:t>
             </a:r>
@@ -9795,7 +10813,7 @@
           <p:cNvPr id="5" name="head0">
             <a:extLst xmlns:a="http://schemas.openxmlformats.org/drawingml/2006/main">
               <a:ext uri="{FF2B5EF4-FFF2-40B4-BE49-F238E27FC236}">
-                <a16:creationId xmlns:a16="http://schemas.microsoft.com/office/drawing/2014/main" id="{1B1CA866-B35C-45F4-962A-49CFCF2E3C2C}"/>
+                <a16:creationId xmlns:a16="http://schemas.microsoft.com/office/drawing/2014/main" id="{C0D51ED6-3AB7-402A-B6D2-1B8B1ADD435E}"/>
               </a:ext>
             </a:extLst>
           </p:cNvPr>
@@ -9827,6 +10845,9 @@
                 <a:solidFill>
                   <a:srgbClr val="100C0A"/>
                 </a:solidFill>
+                <a:latin typeface="Adobe Garamond Pro"/>
+                <a:ea typeface="Adobe Garamond Pro"/>
+                <a:cs typeface="Adobe Garamond Pro"/>
               </a:defRPr>
             </a:pPr>
             <a:r>
@@ -9834,6 +10855,9 @@
                 <a:solidFill>
                   <a:srgbClr val="100C0A"/>
                 </a:solidFill>
+                <a:latin typeface="Adobe Garamond Pro"/>
+                <a:ea typeface="Adobe Garamond Pro"/>
+                <a:cs typeface="Adobe Garamond Pro"/>
               </a:rPr>
               <a:t>Alinear</a:t>
             </a:r>
@@ -9845,7 +10869,7 @@
           <p:cNvPr id="6" name="copy0">
             <a:extLst xmlns:a="http://schemas.openxmlformats.org/drawingml/2006/main">
               <a:ext uri="{FF2B5EF4-FFF2-40B4-BE49-F238E27FC236}">
-                <a16:creationId xmlns:a16="http://schemas.microsoft.com/office/drawing/2014/main" id="{2DFE1E7E-8C2A-4708-A6AA-974BF2EAE027}"/>
+                <a16:creationId xmlns:a16="http://schemas.microsoft.com/office/drawing/2014/main" id="{933DE455-14AC-4769-9A0D-90C9E8400659}"/>
               </a:ext>
             </a:extLst>
           </p:cNvPr>
@@ -9877,6 +10901,9 @@
                 <a:solidFill>
                   <a:srgbClr val="706862"/>
                 </a:solidFill>
+                <a:latin typeface="Inter"/>
+                <a:ea typeface="Inter"/>
+                <a:cs typeface="Inter"/>
               </a:defRPr>
             </a:pPr>
             <a:r>
@@ -9884,6 +10911,9 @@
                 <a:solidFill>
                   <a:srgbClr val="706862"/>
                 </a:solidFill>
+                <a:latin typeface="Inter"/>
+                <a:ea typeface="Inter"/>
+                <a:cs typeface="Inter"/>
               </a:rPr>
               <a:t>Decisiones que desbloquean el trabajo.</a:t>
             </a:r>
@@ -9895,7 +10925,7 @@
           <p:cNvPr id="7" name="line0">
             <a:extLst xmlns:a="http://schemas.openxmlformats.org/drawingml/2006/main">
               <a:ext uri="{FF2B5EF4-FFF2-40B4-BE49-F238E27FC236}">
-                <a16:creationId xmlns:a16="http://schemas.microsoft.com/office/drawing/2014/main" id="{BD0C2F54-E369-42E3-BAA4-DB78B8519408}"/>
+                <a16:creationId xmlns:a16="http://schemas.microsoft.com/office/drawing/2014/main" id="{8D13D267-1992-445D-9816-1CE92D150284}"/>
               </a:ext>
             </a:extLst>
           </p:cNvPr>
@@ -9926,7 +10956,7 @@
           <p:cNvPr id="8" name="tag1">
             <a:extLst xmlns:a="http://schemas.openxmlformats.org/drawingml/2006/main">
               <a:ext uri="{FF2B5EF4-FFF2-40B4-BE49-F238E27FC236}">
-                <a16:creationId xmlns:a16="http://schemas.microsoft.com/office/drawing/2014/main" id="{17BEBC1C-0157-4110-87B6-90A8B0D82B4A}"/>
+                <a16:creationId xmlns:a16="http://schemas.microsoft.com/office/drawing/2014/main" id="{7754E2AF-D654-41B0-859A-037EB59D89A1}"/>
               </a:ext>
             </a:extLst>
           </p:cNvPr>
@@ -9958,6 +10988,9 @@
                 <a:solidFill>
                   <a:srgbClr val="A88650"/>
                 </a:solidFill>
+                <a:latin typeface="Inter"/>
+                <a:ea typeface="Inter"/>
+                <a:cs typeface="Inter"/>
               </a:defRPr>
             </a:pPr>
             <a:r>
@@ -9965,6 +10998,9 @@
                 <a:solidFill>
                   <a:srgbClr val="A88650"/>
                 </a:solidFill>
+                <a:latin typeface="Inter"/>
+                <a:ea typeface="Inter"/>
+                <a:cs typeface="Inter"/>
               </a:rPr>
               <a:t>DESPUÉS</a:t>
             </a:r>
@@ -9976,7 +11012,7 @@
           <p:cNvPr id="9" name="head1">
             <a:extLst xmlns:a="http://schemas.openxmlformats.org/drawingml/2006/main">
               <a:ext uri="{FF2B5EF4-FFF2-40B4-BE49-F238E27FC236}">
-                <a16:creationId xmlns:a16="http://schemas.microsoft.com/office/drawing/2014/main" id="{3F5230AC-EDA9-4962-8514-AA4D680F01C8}"/>
+                <a16:creationId xmlns:a16="http://schemas.microsoft.com/office/drawing/2014/main" id="{EFCDABB5-9FC5-4EF1-8277-5AFB63FB62C1}"/>
               </a:ext>
             </a:extLst>
           </p:cNvPr>
@@ -10008,6 +11044,9 @@
                 <a:solidFill>
                   <a:srgbClr val="100C0A"/>
                 </a:solidFill>
+                <a:latin typeface="Adobe Garamond Pro"/>
+                <a:ea typeface="Adobe Garamond Pro"/>
+                <a:cs typeface="Adobe Garamond Pro"/>
               </a:defRPr>
             </a:pPr>
             <a:r>
@@ -10015,6 +11054,9 @@
                 <a:solidFill>
                   <a:srgbClr val="100C0A"/>
                 </a:solidFill>
+                <a:latin typeface="Adobe Garamond Pro"/>
+                <a:ea typeface="Adobe Garamond Pro"/>
+                <a:cs typeface="Adobe Garamond Pro"/>
               </a:rPr>
               <a:t>Activar</a:t>
             </a:r>
@@ -10026,7 +11068,7 @@
           <p:cNvPr id="10" name="copy1">
             <a:extLst xmlns:a="http://schemas.openxmlformats.org/drawingml/2006/main">
               <a:ext uri="{FF2B5EF4-FFF2-40B4-BE49-F238E27FC236}">
-                <a16:creationId xmlns:a16="http://schemas.microsoft.com/office/drawing/2014/main" id="{D4D78908-BEDA-4E45-A166-FC029198D082}"/>
+                <a16:creationId xmlns:a16="http://schemas.microsoft.com/office/drawing/2014/main" id="{913D16A9-B595-45DC-9429-DDA6FA03995E}"/>
               </a:ext>
             </a:extLst>
           </p:cNvPr>
@@ -10058,6 +11100,9 @@
                 <a:solidFill>
                   <a:srgbClr val="706862"/>
                 </a:solidFill>
+                <a:latin typeface="Inter"/>
+                <a:ea typeface="Inter"/>
+                <a:cs typeface="Inter"/>
               </a:defRPr>
             </a:pPr>
             <a:r>
@@ -10065,6 +11110,9 @@
                 <a:solidFill>
                   <a:srgbClr val="706862"/>
                 </a:solidFill>
+                <a:latin typeface="Inter"/>
+                <a:ea typeface="Inter"/>
+                <a:cs typeface="Inter"/>
               </a:rPr>
               <a:t>Acciones que ponen la estrategia en movimiento.</a:t>
             </a:r>
@@ -10076,7 +11124,7 @@
           <p:cNvPr id="11" name="line1">
             <a:extLst xmlns:a="http://schemas.openxmlformats.org/drawingml/2006/main">
               <a:ext uri="{FF2B5EF4-FFF2-40B4-BE49-F238E27FC236}">
-                <a16:creationId xmlns:a16="http://schemas.microsoft.com/office/drawing/2014/main" id="{EA9000E4-A4AA-4395-BEB3-2D3DB5C7ABCE}"/>
+                <a16:creationId xmlns:a16="http://schemas.microsoft.com/office/drawing/2014/main" id="{22A4EF83-2005-472D-8617-1D8D8CDFB209}"/>
               </a:ext>
             </a:extLst>
           </p:cNvPr>
@@ -10107,7 +11155,7 @@
           <p:cNvPr id="12" name="tag2">
             <a:extLst xmlns:a="http://schemas.openxmlformats.org/drawingml/2006/main">
               <a:ext uri="{FF2B5EF4-FFF2-40B4-BE49-F238E27FC236}">
-                <a16:creationId xmlns:a16="http://schemas.microsoft.com/office/drawing/2014/main" id="{0536A6E5-72D4-4241-9200-48B44C430424}"/>
+                <a16:creationId xmlns:a16="http://schemas.microsoft.com/office/drawing/2014/main" id="{D6A8726B-8DA6-4E42-B9F4-7A30A62568A8}"/>
               </a:ext>
             </a:extLst>
           </p:cNvPr>
@@ -10139,6 +11187,9 @@
                 <a:solidFill>
                   <a:srgbClr val="A88650"/>
                 </a:solidFill>
+                <a:latin typeface="Inter"/>
+                <a:ea typeface="Inter"/>
+                <a:cs typeface="Inter"/>
               </a:defRPr>
             </a:pPr>
             <a:r>
@@ -10146,6 +11197,9 @@
                 <a:solidFill>
                   <a:srgbClr val="A88650"/>
                 </a:solidFill>
+                <a:latin typeface="Inter"/>
+                <a:ea typeface="Inter"/>
+                <a:cs typeface="Inter"/>
               </a:rPr>
               <a:t>LUEGO</a:t>
             </a:r>
@@ -10157,7 +11211,7 @@
           <p:cNvPr id="13" name="head2">
             <a:extLst xmlns:a="http://schemas.openxmlformats.org/drawingml/2006/main">
               <a:ext uri="{FF2B5EF4-FFF2-40B4-BE49-F238E27FC236}">
-                <a16:creationId xmlns:a16="http://schemas.microsoft.com/office/drawing/2014/main" id="{536E9DEB-4040-4DB7-96F1-BC7BD5CB966D}"/>
+                <a16:creationId xmlns:a16="http://schemas.microsoft.com/office/drawing/2014/main" id="{A9509A27-62CE-49FC-BC32-2F9B56B66F93}"/>
               </a:ext>
             </a:extLst>
           </p:cNvPr>
@@ -10189,6 +11243,9 @@
                 <a:solidFill>
                   <a:srgbClr val="100C0A"/>
                 </a:solidFill>
+                <a:latin typeface="Adobe Garamond Pro"/>
+                <a:ea typeface="Adobe Garamond Pro"/>
+                <a:cs typeface="Adobe Garamond Pro"/>
               </a:defRPr>
             </a:pPr>
             <a:r>
@@ -10196,6 +11253,9 @@
                 <a:solidFill>
                   <a:srgbClr val="100C0A"/>
                 </a:solidFill>
+                <a:latin typeface="Adobe Garamond Pro"/>
+                <a:ea typeface="Adobe Garamond Pro"/>
+                <a:cs typeface="Adobe Garamond Pro"/>
               </a:rPr>
               <a:t>Escalar</a:t>
             </a:r>
@@ -10207,7 +11267,7 @@
           <p:cNvPr id="14" name="copy2">
             <a:extLst xmlns:a="http://schemas.openxmlformats.org/drawingml/2006/main">
               <a:ext uri="{FF2B5EF4-FFF2-40B4-BE49-F238E27FC236}">
-                <a16:creationId xmlns:a16="http://schemas.microsoft.com/office/drawing/2014/main" id="{A337B529-20ED-42AB-86FA-468A35386114}"/>
+                <a16:creationId xmlns:a16="http://schemas.microsoft.com/office/drawing/2014/main" id="{D1569434-2BE3-4015-98D8-AA9295D813AA}"/>
               </a:ext>
             </a:extLst>
           </p:cNvPr>
@@ -10239,6 +11299,9 @@
                 <a:solidFill>
                   <a:srgbClr val="706862"/>
                 </a:solidFill>
+                <a:latin typeface="Inter"/>
+                <a:ea typeface="Inter"/>
+                <a:cs typeface="Inter"/>
               </a:defRPr>
             </a:pPr>
             <a:r>
@@ -10246,6 +11309,9 @@
                 <a:solidFill>
                   <a:srgbClr val="706862"/>
                 </a:solidFill>
+                <a:latin typeface="Inter"/>
+                <a:ea typeface="Inter"/>
+                <a:cs typeface="Inter"/>
               </a:rPr>
               <a:t>Capacidades que sostienen el crecimiento.</a:t>
             </a:r>
@@ -10257,7 +11323,7 @@
           <p:cNvPr id="15" name="line2">
             <a:extLst xmlns:a="http://schemas.openxmlformats.org/drawingml/2006/main">
               <a:ext uri="{FF2B5EF4-FFF2-40B4-BE49-F238E27FC236}">
-                <a16:creationId xmlns:a16="http://schemas.microsoft.com/office/drawing/2014/main" id="{D6E2E7C8-CB47-454A-A1EB-FD72E268486E}"/>
+                <a16:creationId xmlns:a16="http://schemas.microsoft.com/office/drawing/2014/main" id="{879F0524-227D-4EAB-AEAE-52F5E31DE45B}"/>
               </a:ext>
             </a:extLst>
           </p:cNvPr>
@@ -10286,7 +11352,7 @@
     </p:spTree>
     <p:extLst>
       <p:ext uri="{BB962C8B-B14F-4D97-AF65-F5344CB8AC3E}">
-        <p14:creationId xmlns:p14="http://schemas.microsoft.com/office/powerpoint/2010/main" val="424382874"/>
+        <p14:creationId xmlns:p14="http://schemas.microsoft.com/office/powerpoint/2010/main" val="1197909732"/>
       </p:ext>
     </p:extLst>
   </p:cSld>
@@ -10317,7 +11383,7 @@
           <p:cNvPr id="18" name="brand">
             <a:extLst xmlns:a="http://schemas.openxmlformats.org/drawingml/2006/main">
               <a:ext uri="{FF2B5EF4-FFF2-40B4-BE49-F238E27FC236}">
-                <a16:creationId xmlns:a16="http://schemas.microsoft.com/office/drawing/2014/main" id="{A78CE86F-46C3-4EC5-B9A6-04E46CFE1DC3}"/>
+                <a16:creationId xmlns:a16="http://schemas.microsoft.com/office/drawing/2014/main" id="{D65E9732-3973-4A74-A7D8-3DAB51A89BAF}"/>
               </a:ext>
             </a:extLst>
           </p:cNvPr>
@@ -10349,6 +11415,9 @@
                 <a:solidFill>
                   <a:srgbClr val="A88650"/>
                 </a:solidFill>
+                <a:latin typeface="Inter"/>
+                <a:ea typeface="Inter"/>
+                <a:cs typeface="Inter"/>
               </a:defRPr>
             </a:pPr>
             <a:r>
@@ -10356,6 +11425,9 @@
                 <a:solidFill>
                   <a:srgbClr val="A88650"/>
                 </a:solidFill>
+                <a:latin typeface="Inter"/>
+                <a:ea typeface="Inter"/>
+                <a:cs typeface="Inter"/>
               </a:rPr>
               <a:t>RON CARÚPANO</a:t>
             </a:r>
@@ -10367,7 +11439,7 @@
           <p:cNvPr id="2" name="page">
             <a:extLst xmlns:a="http://schemas.openxmlformats.org/drawingml/2006/main">
               <a:ext uri="{FF2B5EF4-FFF2-40B4-BE49-F238E27FC236}">
-                <a16:creationId xmlns:a16="http://schemas.microsoft.com/office/drawing/2014/main" id="{70DDAE11-815B-43C3-8DAB-F48077B133FE}"/>
+                <a16:creationId xmlns:a16="http://schemas.microsoft.com/office/drawing/2014/main" id="{249FB41D-2BEC-4163-AA12-5A7B997F271B}"/>
               </a:ext>
             </a:extLst>
           </p:cNvPr>
@@ -10399,6 +11471,9 @@
                 <a:solidFill>
                   <a:srgbClr val="706862"/>
                 </a:solidFill>
+                <a:latin typeface="Inter"/>
+                <a:ea typeface="Inter"/>
+                <a:cs typeface="Inter"/>
               </a:defRPr>
             </a:pPr>
             <a:r>
@@ -10406,6 +11481,9 @@
                 <a:solidFill>
                   <a:srgbClr val="706862"/>
                 </a:solidFill>
+                <a:latin typeface="Inter"/>
+                <a:ea typeface="Inter"/>
+                <a:cs typeface="Inter"/>
               </a:rPr>
               <a:t>02</a:t>
             </a:r>
@@ -10417,7 +11495,7 @@
           <p:cNvPr id="3" name="eyebrow">
             <a:extLst xmlns:a="http://schemas.openxmlformats.org/drawingml/2006/main">
               <a:ext uri="{FF2B5EF4-FFF2-40B4-BE49-F238E27FC236}">
-                <a16:creationId xmlns:a16="http://schemas.microsoft.com/office/drawing/2014/main" id="{B65AB49C-1971-478A-8325-0E275A14A92D}"/>
+                <a16:creationId xmlns:a16="http://schemas.microsoft.com/office/drawing/2014/main" id="{7ADBA84E-01E9-4836-B5A7-D4B1501EA365}"/>
               </a:ext>
             </a:extLst>
           </p:cNvPr>
@@ -10449,6 +11527,9 @@
                 <a:solidFill>
                   <a:srgbClr val="A88650"/>
                 </a:solidFill>
+                <a:latin typeface="Inter"/>
+                <a:ea typeface="Inter"/>
+                <a:cs typeface="Inter"/>
               </a:defRPr>
             </a:pPr>
             <a:r>
@@ -10456,6 +11537,9 @@
                 <a:solidFill>
                   <a:srgbClr val="A88650"/>
                 </a:solidFill>
+                <a:latin typeface="Inter"/>
+                <a:ea typeface="Inter"/>
+                <a:cs typeface="Inter"/>
               </a:rPr>
               <a:t>CÓMO USAR ESTE MASTER</a:t>
             </a:r>
@@ -10467,7 +11551,7 @@
           <p:cNvPr id="4" name="title">
             <a:extLst xmlns:a="http://schemas.openxmlformats.org/drawingml/2006/main">
               <a:ext uri="{FF2B5EF4-FFF2-40B4-BE49-F238E27FC236}">
-                <a16:creationId xmlns:a16="http://schemas.microsoft.com/office/drawing/2014/main" id="{FCCD7F1C-EC04-4573-89D6-BF8081EAEAC8}"/>
+                <a16:creationId xmlns:a16="http://schemas.microsoft.com/office/drawing/2014/main" id="{FF90C5B1-79E4-472E-B470-ECA832834557}"/>
               </a:ext>
             </a:extLst>
           </p:cNvPr>
@@ -10499,6 +11583,9 @@
                 <a:solidFill>
                   <a:srgbClr val="100C0A"/>
                 </a:solidFill>
+                <a:latin typeface="Adobe Garamond Pro"/>
+                <a:ea typeface="Adobe Garamond Pro"/>
+                <a:cs typeface="Adobe Garamond Pro"/>
               </a:defRPr>
             </a:pPr>
             <a:r>
@@ -10506,6 +11593,9 @@
                 <a:solidFill>
                   <a:srgbClr val="100C0A"/>
                 </a:solidFill>
+                <a:latin typeface="Adobe Garamond Pro"/>
+                <a:ea typeface="Adobe Garamond Pro"/>
+                <a:cs typeface="Adobe Garamond Pro"/>
               </a:rPr>
               <a:t>Una estructura consistente</a:t>
             </a:r>
@@ -10516,6 +11606,9 @@
                 <a:solidFill>
                   <a:srgbClr val="100C0A"/>
                 </a:solidFill>
+                <a:latin typeface="Adobe Garamond Pro"/>
+                <a:ea typeface="Adobe Garamond Pro"/>
+                <a:cs typeface="Adobe Garamond Pro"/>
               </a:defRPr>
             </a:pPr>
             <a:r>
@@ -10523,6 +11616,9 @@
                 <a:solidFill>
                   <a:srgbClr val="100C0A"/>
                 </a:solidFill>
+                <a:latin typeface="Adobe Garamond Pro"/>
+                <a:ea typeface="Adobe Garamond Pro"/>
+                <a:cs typeface="Adobe Garamond Pro"/>
               </a:rPr>
               <a:t>sin limitar las ideas.</a:t>
             </a:r>
@@ -10534,7 +11630,7 @@
           <p:cNvPr id="5" name="intro">
             <a:extLst xmlns:a="http://schemas.openxmlformats.org/drawingml/2006/main">
               <a:ext uri="{FF2B5EF4-FFF2-40B4-BE49-F238E27FC236}">
-                <a16:creationId xmlns:a16="http://schemas.microsoft.com/office/drawing/2014/main" id="{2E47A2D2-264E-4F3C-9BD3-AE266BC11605}"/>
+                <a16:creationId xmlns:a16="http://schemas.microsoft.com/office/drawing/2014/main" id="{479E03C9-A6AE-4269-B1F0-9E0C38B5A0AF}"/>
               </a:ext>
             </a:extLst>
           </p:cNvPr>
@@ -10566,6 +11662,9 @@
                 <a:solidFill>
                   <a:srgbClr val="706862"/>
                 </a:solidFill>
+                <a:latin typeface="Inter"/>
+                <a:ea typeface="Inter"/>
+                <a:cs typeface="Inter"/>
               </a:defRPr>
             </a:pPr>
             <a:r>
@@ -10573,6 +11672,9 @@
                 <a:solidFill>
                   <a:srgbClr val="706862"/>
                 </a:solidFill>
+                <a:latin typeface="Inter"/>
+                <a:ea typeface="Inter"/>
+                <a:cs typeface="Inter"/>
               </a:rPr>
               <a:t>Elija el layout según el trabajo de la slide. Mantenga una idea dominante, una jerarquía clara y suficiente respiración.</a:t>
             </a:r>
@@ -10584,7 +11686,7 @@
           <p:cNvPr id="6" name="n0">
             <a:extLst xmlns:a="http://schemas.openxmlformats.org/drawingml/2006/main">
               <a:ext uri="{FF2B5EF4-FFF2-40B4-BE49-F238E27FC236}">
-                <a16:creationId xmlns:a16="http://schemas.microsoft.com/office/drawing/2014/main" id="{BFC82E03-960E-46C8-A789-7D15A36100E1}"/>
+                <a16:creationId xmlns:a16="http://schemas.microsoft.com/office/drawing/2014/main" id="{D5D214C2-A7BF-49A8-B12E-8B37ED20680E}"/>
               </a:ext>
             </a:extLst>
           </p:cNvPr>
@@ -10616,6 +11718,9 @@
                 <a:solidFill>
                   <a:srgbClr val="A88650"/>
                 </a:solidFill>
+                <a:latin typeface="Inter"/>
+                <a:ea typeface="Inter"/>
+                <a:cs typeface="Inter"/>
               </a:defRPr>
             </a:pPr>
             <a:r>
@@ -10623,6 +11728,9 @@
                 <a:solidFill>
                   <a:srgbClr val="A88650"/>
                 </a:solidFill>
+                <a:latin typeface="Inter"/>
+                <a:ea typeface="Inter"/>
+                <a:cs typeface="Inter"/>
               </a:rPr>
               <a:t>01</a:t>
             </a:r>
@@ -10634,7 +11742,7 @@
           <p:cNvPr id="7" name="h0">
             <a:extLst xmlns:a="http://schemas.openxmlformats.org/drawingml/2006/main">
               <a:ext uri="{FF2B5EF4-FFF2-40B4-BE49-F238E27FC236}">
-                <a16:creationId xmlns:a16="http://schemas.microsoft.com/office/drawing/2014/main" id="{D70BC77E-09DF-4E6B-84D3-F4B42337C892}"/>
+                <a16:creationId xmlns:a16="http://schemas.microsoft.com/office/drawing/2014/main" id="{A9E55DEA-AADC-442A-BECA-DC3C6F894646}"/>
               </a:ext>
             </a:extLst>
           </p:cNvPr>
@@ -10666,6 +11774,9 @@
                 <a:solidFill>
                   <a:srgbClr val="100C0A"/>
                 </a:solidFill>
+                <a:latin typeface="Inter"/>
+                <a:ea typeface="Inter"/>
+                <a:cs typeface="Inter"/>
               </a:defRPr>
             </a:pPr>
             <a:r>
@@ -10673,6 +11784,9 @@
                 <a:solidFill>
                   <a:srgbClr val="100C0A"/>
                 </a:solidFill>
+                <a:latin typeface="Inter"/>
+                <a:ea typeface="Inter"/>
+                <a:cs typeface="Inter"/>
               </a:rPr>
               <a:t>Adobe Garamond Pro</a:t>
             </a:r>
@@ -10684,7 +11798,7 @@
           <p:cNvPr id="8" name="b0">
             <a:extLst xmlns:a="http://schemas.openxmlformats.org/drawingml/2006/main">
               <a:ext uri="{FF2B5EF4-FFF2-40B4-BE49-F238E27FC236}">
-                <a16:creationId xmlns:a16="http://schemas.microsoft.com/office/drawing/2014/main" id="{6F80D1A1-7959-4BF2-A1AC-9DB2DEF65DCE}"/>
+                <a16:creationId xmlns:a16="http://schemas.microsoft.com/office/drawing/2014/main" id="{781F6B95-8195-45E5-AA25-83ACBC1F9BB7}"/>
               </a:ext>
             </a:extLst>
           </p:cNvPr>
@@ -10716,6 +11830,9 @@
                 <a:solidFill>
                   <a:srgbClr val="706862"/>
                 </a:solidFill>
+                <a:latin typeface="Inter"/>
+                <a:ea typeface="Inter"/>
+                <a:cs typeface="Inter"/>
               </a:defRPr>
             </a:pPr>
             <a:r>
@@ -10723,6 +11840,9 @@
                 <a:solidFill>
                   <a:srgbClr val="706862"/>
                 </a:solidFill>
+                <a:latin typeface="Inter"/>
+                <a:ea typeface="Inter"/>
+                <a:cs typeface="Inter"/>
               </a:rPr>
               <a:t>Titulares, citas y momentos de expresión.</a:t>
             </a:r>
@@ -10734,7 +11854,7 @@
           <p:cNvPr id="9" name="l0">
             <a:extLst xmlns:a="http://schemas.openxmlformats.org/drawingml/2006/main">
               <a:ext uri="{FF2B5EF4-FFF2-40B4-BE49-F238E27FC236}">
-                <a16:creationId xmlns:a16="http://schemas.microsoft.com/office/drawing/2014/main" id="{66326CFD-4346-4D79-B2DC-E75D4F1CC55D}"/>
+                <a16:creationId xmlns:a16="http://schemas.microsoft.com/office/drawing/2014/main" id="{E188FA8F-DBF0-478D-9E34-AF937244AE47}"/>
               </a:ext>
             </a:extLst>
           </p:cNvPr>
@@ -10765,7 +11885,7 @@
           <p:cNvPr id="10" name="n1">
             <a:extLst xmlns:a="http://schemas.openxmlformats.org/drawingml/2006/main">
               <a:ext uri="{FF2B5EF4-FFF2-40B4-BE49-F238E27FC236}">
-                <a16:creationId xmlns:a16="http://schemas.microsoft.com/office/drawing/2014/main" id="{DDD33BBF-08C9-4FEB-811C-BD584C9CBD19}"/>
+                <a16:creationId xmlns:a16="http://schemas.microsoft.com/office/drawing/2014/main" id="{AE1EFDF8-8F27-492F-8F6C-5D575CCC788A}"/>
               </a:ext>
             </a:extLst>
           </p:cNvPr>
@@ -10797,6 +11917,9 @@
                 <a:solidFill>
                   <a:srgbClr val="A88650"/>
                 </a:solidFill>
+                <a:latin typeface="Inter"/>
+                <a:ea typeface="Inter"/>
+                <a:cs typeface="Inter"/>
               </a:defRPr>
             </a:pPr>
             <a:r>
@@ -10804,6 +11927,9 @@
                 <a:solidFill>
                   <a:srgbClr val="A88650"/>
                 </a:solidFill>
+                <a:latin typeface="Inter"/>
+                <a:ea typeface="Inter"/>
+                <a:cs typeface="Inter"/>
               </a:rPr>
               <a:t>02</a:t>
             </a:r>
@@ -10815,7 +11941,7 @@
           <p:cNvPr id="11" name="h1">
             <a:extLst xmlns:a="http://schemas.openxmlformats.org/drawingml/2006/main">
               <a:ext uri="{FF2B5EF4-FFF2-40B4-BE49-F238E27FC236}">
-                <a16:creationId xmlns:a16="http://schemas.microsoft.com/office/drawing/2014/main" id="{3F720AB6-32E7-4CF5-BCC7-2E70EC33F5A5}"/>
+                <a16:creationId xmlns:a16="http://schemas.microsoft.com/office/drawing/2014/main" id="{9A302DED-89BD-4BFE-91E1-83C0B74E611D}"/>
               </a:ext>
             </a:extLst>
           </p:cNvPr>
@@ -10847,6 +11973,9 @@
                 <a:solidFill>
                   <a:srgbClr val="100C0A"/>
                 </a:solidFill>
+                <a:latin typeface="Inter"/>
+                <a:ea typeface="Inter"/>
+                <a:cs typeface="Inter"/>
               </a:defRPr>
             </a:pPr>
             <a:r>
@@ -10854,6 +11983,9 @@
                 <a:solidFill>
                   <a:srgbClr val="100C0A"/>
                 </a:solidFill>
+                <a:latin typeface="Inter"/>
+                <a:ea typeface="Inter"/>
+                <a:cs typeface="Inter"/>
               </a:rPr>
               <a:t>Inter</a:t>
             </a:r>
@@ -10865,7 +11997,7 @@
           <p:cNvPr id="12" name="b1">
             <a:extLst xmlns:a="http://schemas.openxmlformats.org/drawingml/2006/main">
               <a:ext uri="{FF2B5EF4-FFF2-40B4-BE49-F238E27FC236}">
-                <a16:creationId xmlns:a16="http://schemas.microsoft.com/office/drawing/2014/main" id="{6F7C88B4-1974-4356-9EC3-9EF0B3759C9D}"/>
+                <a16:creationId xmlns:a16="http://schemas.microsoft.com/office/drawing/2014/main" id="{80FDC79C-734A-4AF4-9CE2-83EC034E2A05}"/>
               </a:ext>
             </a:extLst>
           </p:cNvPr>
@@ -10897,6 +12029,9 @@
                 <a:solidFill>
                   <a:srgbClr val="706862"/>
                 </a:solidFill>
+                <a:latin typeface="Inter"/>
+                <a:ea typeface="Inter"/>
+                <a:cs typeface="Inter"/>
               </a:defRPr>
             </a:pPr>
             <a:r>
@@ -10904,6 +12039,9 @@
                 <a:solidFill>
                   <a:srgbClr val="706862"/>
                 </a:solidFill>
+                <a:latin typeface="Inter"/>
+                <a:ea typeface="Inter"/>
+                <a:cs typeface="Inter"/>
               </a:rPr>
               <a:t>Contenido, datos, tablas y navegación.</a:t>
             </a:r>
@@ -10915,7 +12053,7 @@
           <p:cNvPr id="13" name="l1">
             <a:extLst xmlns:a="http://schemas.openxmlformats.org/drawingml/2006/main">
               <a:ext uri="{FF2B5EF4-FFF2-40B4-BE49-F238E27FC236}">
-                <a16:creationId xmlns:a16="http://schemas.microsoft.com/office/drawing/2014/main" id="{BD6BAE7F-3A90-4802-9774-12DA78952C8D}"/>
+                <a16:creationId xmlns:a16="http://schemas.microsoft.com/office/drawing/2014/main" id="{3D9C5590-6C00-4B2D-BBD4-6382ABC02396}"/>
               </a:ext>
             </a:extLst>
           </p:cNvPr>
@@ -10946,7 +12084,7 @@
           <p:cNvPr id="14" name="n2">
             <a:extLst xmlns:a="http://schemas.openxmlformats.org/drawingml/2006/main">
               <a:ext uri="{FF2B5EF4-FFF2-40B4-BE49-F238E27FC236}">
-                <a16:creationId xmlns:a16="http://schemas.microsoft.com/office/drawing/2014/main" id="{CB44DC35-9CC6-41FE-8E5B-09888DB11FB5}"/>
+                <a16:creationId xmlns:a16="http://schemas.microsoft.com/office/drawing/2014/main" id="{B9968505-7B84-4E03-B3D2-C417D5B24095}"/>
               </a:ext>
             </a:extLst>
           </p:cNvPr>
@@ -10978,6 +12116,9 @@
                 <a:solidFill>
                   <a:srgbClr val="A88650"/>
                 </a:solidFill>
+                <a:latin typeface="Inter"/>
+                <a:ea typeface="Inter"/>
+                <a:cs typeface="Inter"/>
               </a:defRPr>
             </a:pPr>
             <a:r>
@@ -10985,6 +12126,9 @@
                 <a:solidFill>
                   <a:srgbClr val="A88650"/>
                 </a:solidFill>
+                <a:latin typeface="Inter"/>
+                <a:ea typeface="Inter"/>
+                <a:cs typeface="Inter"/>
               </a:rPr>
               <a:t>03</a:t>
             </a:r>
@@ -10996,7 +12140,7 @@
           <p:cNvPr id="15" name="h2">
             <a:extLst xmlns:a="http://schemas.openxmlformats.org/drawingml/2006/main">
               <a:ext uri="{FF2B5EF4-FFF2-40B4-BE49-F238E27FC236}">
-                <a16:creationId xmlns:a16="http://schemas.microsoft.com/office/drawing/2014/main" id="{0A196152-47BF-4247-83E2-666FD8DB50E3}"/>
+                <a16:creationId xmlns:a16="http://schemas.microsoft.com/office/drawing/2014/main" id="{30134B48-47F9-4640-BF75-7349E2288C20}"/>
               </a:ext>
             </a:extLst>
           </p:cNvPr>
@@ -11028,6 +12172,9 @@
                 <a:solidFill>
                   <a:srgbClr val="100C0A"/>
                 </a:solidFill>
+                <a:latin typeface="Inter"/>
+                <a:ea typeface="Inter"/>
+                <a:cs typeface="Inter"/>
               </a:defRPr>
             </a:pPr>
             <a:r>
@@ -11035,6 +12182,9 @@
                 <a:solidFill>
                   <a:srgbClr val="100C0A"/>
                 </a:solidFill>
+                <a:latin typeface="Inter"/>
+                <a:ea typeface="Inter"/>
+                <a:cs typeface="Inter"/>
               </a:rPr>
               <a:t>Una idea por slide</a:t>
             </a:r>
@@ -11046,7 +12196,7 @@
           <p:cNvPr id="16" name="b2">
             <a:extLst xmlns:a="http://schemas.openxmlformats.org/drawingml/2006/main">
               <a:ext uri="{FF2B5EF4-FFF2-40B4-BE49-F238E27FC236}">
-                <a16:creationId xmlns:a16="http://schemas.microsoft.com/office/drawing/2014/main" id="{6E785575-04BB-422E-AED8-0642B856EA67}"/>
+                <a16:creationId xmlns:a16="http://schemas.microsoft.com/office/drawing/2014/main" id="{84D3136D-9BE9-4D11-96EC-E0F222FFBE09}"/>
               </a:ext>
             </a:extLst>
           </p:cNvPr>
@@ -11078,6 +12228,9 @@
                 <a:solidFill>
                   <a:srgbClr val="706862"/>
                 </a:solidFill>
+                <a:latin typeface="Inter"/>
+                <a:ea typeface="Inter"/>
+                <a:cs typeface="Inter"/>
               </a:defRPr>
             </a:pPr>
             <a:r>
@@ -11085,6 +12238,9 @@
                 <a:solidFill>
                   <a:srgbClr val="706862"/>
                 </a:solidFill>
+                <a:latin typeface="Inter"/>
+                <a:ea typeface="Inter"/>
+                <a:cs typeface="Inter"/>
               </a:rPr>
               <a:t>Edite, duplique o elimine sin mezclar estructuras.</a:t>
             </a:r>
@@ -11096,7 +12252,7 @@
           <p:cNvPr id="17" name="l2">
             <a:extLst xmlns:a="http://schemas.openxmlformats.org/drawingml/2006/main">
               <a:ext uri="{FF2B5EF4-FFF2-40B4-BE49-F238E27FC236}">
-                <a16:creationId xmlns:a16="http://schemas.microsoft.com/office/drawing/2014/main" id="{604170AC-7CF8-4870-9630-06E3C7B16F18}"/>
+                <a16:creationId xmlns:a16="http://schemas.microsoft.com/office/drawing/2014/main" id="{C849B0F5-BC49-4831-9FB0-19B7BEAF052B}"/>
               </a:ext>
             </a:extLst>
           </p:cNvPr>
@@ -11125,7 +12281,7 @@
     </p:spTree>
     <p:extLst>
       <p:ext uri="{BB962C8B-B14F-4D97-AF65-F5344CB8AC3E}">
-        <p14:creationId xmlns:p14="http://schemas.microsoft.com/office/powerpoint/2010/main" val="2059314891"/>
+        <p14:creationId xmlns:p14="http://schemas.microsoft.com/office/powerpoint/2010/main" val="1904663258"/>
       </p:ext>
     </p:extLst>
   </p:cSld>
@@ -11133,6 +12289,705 @@
 </file>
 
 <file path=ppt/slides/slide20.xml><?xml version="1.0" encoding="utf-8"?>
+<p:sld xmlns:p="http://schemas.openxmlformats.org/presentationml/2006/main">
+  <p:cSld>
+    <p:bg>
+      <p:bgPr>
+        <a:solidFill xmlns:a="http://schemas.openxmlformats.org/drawingml/2006/main">
+          <a:srgbClr val="FBF8F3"/>
+        </a:solidFill>
+      </p:bgPr>
+    </p:bg>
+    <p:spTree>
+      <p:nvGrpSpPr>
+        <p:cNvPr id="1" name=""/>
+        <p:cNvGrpSpPr/>
+        <p:nvPr/>
+      </p:nvGrpSpPr>
+      <p:grpSpPr>
+        <a:xfrm xmlns:a="http://schemas.openxmlformats.org/drawingml/2006/main"/>
+      </p:grpSpPr>
+      <p:sp>
+        <p:nvSpPr>
+          <p:cNvPr id="13" name="brand">
+            <a:extLst xmlns:a="http://schemas.openxmlformats.org/drawingml/2006/main">
+              <a:ext uri="{FF2B5EF4-FFF2-40B4-BE49-F238E27FC236}">
+                <a16:creationId xmlns:a16="http://schemas.microsoft.com/office/drawing/2014/main" id="{654CF98B-2DBB-48B6-B35C-FB8A5B019986}"/>
+              </a:ext>
+            </a:extLst>
+          </p:cNvPr>
+          <p:cNvSpPr>
+            <a:spLocks xmlns:a="http://schemas.openxmlformats.org/drawingml/2006/main" noGrp="1"/>
+          </p:cNvSpPr>
+          <p:nvPr/>
+        </p:nvSpPr>
+        <p:spPr>
+          <a:xfrm xmlns:a="http://schemas.openxmlformats.org/drawingml/2006/main">
+            <a:off x="685800" y="266700"/>
+            <a:ext cx="2857500" cy="228600"/>
+          </a:xfrm>
+          <a:prstGeom xmlns:a="http://schemas.openxmlformats.org/drawingml/2006/main" prst="rect">
+            <a:avLst/>
+          </a:prstGeom>
+          <a:noFill xmlns:a="http://schemas.openxmlformats.org/drawingml/2006/main"/>
+          <a:ln xmlns:a="http://schemas.openxmlformats.org/drawingml/2006/main" w="0">
+            <a:noFill/>
+            <a:prstDash val="solid"/>
+          </a:ln>
+        </p:spPr>
+        <p:txBody>
+          <a:bodyPr xmlns:a="http://schemas.openxmlformats.org/drawingml/2006/main" anchor="ctr"/>
+          <a:lstStyle xmlns:a="http://schemas.openxmlformats.org/drawingml/2006/main"/>
+          <a:p xmlns:a="http://schemas.openxmlformats.org/drawingml/2006/main">
+            <a:pPr algn="l">
+              <a:defRPr sz="825" b="1" i="0">
+                <a:solidFill>
+                  <a:srgbClr val="A88650"/>
+                </a:solidFill>
+                <a:latin typeface="Inter"/>
+                <a:ea typeface="Inter"/>
+                <a:cs typeface="Inter"/>
+              </a:defRPr>
+            </a:pPr>
+            <a:r>
+              <a:rPr sz="825" b="1" i="0">
+                <a:solidFill>
+                  <a:srgbClr val="A88650"/>
+                </a:solidFill>
+                <a:latin typeface="Inter"/>
+                <a:ea typeface="Inter"/>
+                <a:cs typeface="Inter"/>
+              </a:rPr>
+              <a:t>RON CARÚPANO</a:t>
+            </a:r>
+          </a:p>
+        </p:txBody>
+      </p:sp>
+      <p:sp>
+        <p:nvSpPr>
+          <p:cNvPr id="2" name="page">
+            <a:extLst xmlns:a="http://schemas.openxmlformats.org/drawingml/2006/main">
+              <a:ext uri="{FF2B5EF4-FFF2-40B4-BE49-F238E27FC236}">
+                <a16:creationId xmlns:a16="http://schemas.microsoft.com/office/drawing/2014/main" id="{D149376D-04BB-495E-BFA0-347178F412A4}"/>
+              </a:ext>
+            </a:extLst>
+          </p:cNvPr>
+          <p:cNvSpPr>
+            <a:spLocks xmlns:a="http://schemas.openxmlformats.org/drawingml/2006/main" noGrp="1"/>
+          </p:cNvSpPr>
+          <p:nvPr/>
+        </p:nvSpPr>
+        <p:spPr>
+          <a:xfrm xmlns:a="http://schemas.openxmlformats.org/drawingml/2006/main">
+            <a:off x="11049000" y="266700"/>
+            <a:ext cx="457200" cy="228600"/>
+          </a:xfrm>
+          <a:prstGeom xmlns:a="http://schemas.openxmlformats.org/drawingml/2006/main" prst="rect">
+            <a:avLst/>
+          </a:prstGeom>
+          <a:noFill xmlns:a="http://schemas.openxmlformats.org/drawingml/2006/main"/>
+          <a:ln xmlns:a="http://schemas.openxmlformats.org/drawingml/2006/main" w="0">
+            <a:noFill/>
+            <a:prstDash val="solid"/>
+          </a:ln>
+        </p:spPr>
+        <p:txBody>
+          <a:bodyPr xmlns:a="http://schemas.openxmlformats.org/drawingml/2006/main" anchor="ctr"/>
+          <a:lstStyle xmlns:a="http://schemas.openxmlformats.org/drawingml/2006/main"/>
+          <a:p xmlns:a="http://schemas.openxmlformats.org/drawingml/2006/main">
+            <a:pPr algn="r">
+              <a:defRPr sz="750" b="0" i="0">
+                <a:solidFill>
+                  <a:srgbClr val="706862"/>
+                </a:solidFill>
+                <a:latin typeface="Inter"/>
+                <a:ea typeface="Inter"/>
+                <a:cs typeface="Inter"/>
+              </a:defRPr>
+            </a:pPr>
+            <a:r>
+              <a:rPr sz="750" b="0" i="0">
+                <a:solidFill>
+                  <a:srgbClr val="706862"/>
+                </a:solidFill>
+                <a:latin typeface="Inter"/>
+                <a:ea typeface="Inter"/>
+                <a:cs typeface="Inter"/>
+              </a:rPr>
+              <a:t>20</a:t>
+            </a:r>
+          </a:p>
+        </p:txBody>
+      </p:sp>
+      <p:sp>
+        <p:nvSpPr>
+          <p:cNvPr id="3" name="eyebrow">
+            <a:extLst xmlns:a="http://schemas.openxmlformats.org/drawingml/2006/main">
+              <a:ext uri="{FF2B5EF4-FFF2-40B4-BE49-F238E27FC236}">
+                <a16:creationId xmlns:a16="http://schemas.microsoft.com/office/drawing/2014/main" id="{2A934B29-9D2A-4F54-BA76-BF6C55918726}"/>
+              </a:ext>
+            </a:extLst>
+          </p:cNvPr>
+          <p:cNvSpPr>
+            <a:spLocks xmlns:a="http://schemas.openxmlformats.org/drawingml/2006/main" noGrp="1"/>
+          </p:cNvSpPr>
+          <p:nvPr/>
+        </p:nvSpPr>
+        <p:spPr>
+          <a:xfrm xmlns:a="http://schemas.openxmlformats.org/drawingml/2006/main">
+            <a:off x="685800" y="781050"/>
+            <a:ext cx="4000500" cy="228600"/>
+          </a:xfrm>
+          <a:prstGeom xmlns:a="http://schemas.openxmlformats.org/drawingml/2006/main" prst="rect">
+            <a:avLst/>
+          </a:prstGeom>
+          <a:noFill xmlns:a="http://schemas.openxmlformats.org/drawingml/2006/main"/>
+          <a:ln xmlns:a="http://schemas.openxmlformats.org/drawingml/2006/main" w="0">
+            <a:noFill/>
+            <a:prstDash val="solid"/>
+          </a:ln>
+        </p:spPr>
+        <p:txBody>
+          <a:bodyPr xmlns:a="http://schemas.openxmlformats.org/drawingml/2006/main" anchor="ctr"/>
+          <a:lstStyle xmlns:a="http://schemas.openxmlformats.org/drawingml/2006/main"/>
+          <a:p xmlns:a="http://schemas.openxmlformats.org/drawingml/2006/main">
+            <a:pPr algn="l">
+              <a:defRPr sz="825" b="1" i="0">
+                <a:solidFill>
+                  <a:srgbClr val="A88650"/>
+                </a:solidFill>
+                <a:latin typeface="Inter"/>
+                <a:ea typeface="Inter"/>
+                <a:cs typeface="Inter"/>
+              </a:defRPr>
+            </a:pPr>
+            <a:r>
+              <a:rPr sz="825" b="1" i="0">
+                <a:solidFill>
+                  <a:srgbClr val="A88650"/>
+                </a:solidFill>
+                <a:latin typeface="Inter"/>
+                <a:ea typeface="Inter"/>
+                <a:cs typeface="Inter"/>
+              </a:rPr>
+              <a:t>SISTEMA TIPOGRÁFICO</a:t>
+            </a:r>
+          </a:p>
+        </p:txBody>
+      </p:sp>
+      <p:sp>
+        <p:nvSpPr>
+          <p:cNvPr id="4" name="title">
+            <a:extLst xmlns:a="http://schemas.openxmlformats.org/drawingml/2006/main">
+              <a:ext uri="{FF2B5EF4-FFF2-40B4-BE49-F238E27FC236}">
+                <a16:creationId xmlns:a16="http://schemas.microsoft.com/office/drawing/2014/main" id="{2821150D-8EB4-4A60-885C-934AF64AA76D}"/>
+              </a:ext>
+            </a:extLst>
+          </p:cNvPr>
+          <p:cNvSpPr>
+            <a:spLocks xmlns:a="http://schemas.openxmlformats.org/drawingml/2006/main" noGrp="1"/>
+          </p:cNvSpPr>
+          <p:nvPr/>
+        </p:nvSpPr>
+        <p:spPr>
+          <a:xfrm xmlns:a="http://schemas.openxmlformats.org/drawingml/2006/main">
+            <a:off x="685800" y="990600"/>
+            <a:ext cx="5334000" cy="1047750"/>
+          </a:xfrm>
+          <a:prstGeom xmlns:a="http://schemas.openxmlformats.org/drawingml/2006/main" prst="rect">
+            <a:avLst/>
+          </a:prstGeom>
+          <a:noFill xmlns:a="http://schemas.openxmlformats.org/drawingml/2006/main"/>
+          <a:ln xmlns:a="http://schemas.openxmlformats.org/drawingml/2006/main" w="0">
+            <a:noFill/>
+            <a:prstDash val="solid"/>
+          </a:ln>
+        </p:spPr>
+        <p:txBody>
+          <a:bodyPr xmlns:a="http://schemas.openxmlformats.org/drawingml/2006/main" anchor="ctr"/>
+          <a:lstStyle xmlns:a="http://schemas.openxmlformats.org/drawingml/2006/main"/>
+          <a:p xmlns:a="http://schemas.openxmlformats.org/drawingml/2006/main">
+            <a:pPr algn="l">
+              <a:defRPr sz="3750" b="1" i="0">
+                <a:solidFill>
+                  <a:srgbClr val="100C0A"/>
+                </a:solidFill>
+                <a:latin typeface="Adobe Garamond Pro"/>
+                <a:ea typeface="Adobe Garamond Pro"/>
+                <a:cs typeface="Adobe Garamond Pro"/>
+              </a:defRPr>
+            </a:pPr>
+            <a:r>
+              <a:rPr sz="3750" b="1" i="0">
+                <a:solidFill>
+                  <a:srgbClr val="100C0A"/>
+                </a:solidFill>
+                <a:latin typeface="Adobe Garamond Pro"/>
+                <a:ea typeface="Adobe Garamond Pro"/>
+                <a:cs typeface="Adobe Garamond Pro"/>
+              </a:rPr>
+              <a:t>Dos voces.</a:t>
+            </a:r>
+          </a:p>
+          <a:p xmlns:a="http://schemas.openxmlformats.org/drawingml/2006/main">
+            <a:pPr algn="l">
+              <a:defRPr sz="3750" b="1" i="0">
+                <a:solidFill>
+                  <a:srgbClr val="100C0A"/>
+                </a:solidFill>
+                <a:latin typeface="Adobe Garamond Pro"/>
+                <a:ea typeface="Adobe Garamond Pro"/>
+                <a:cs typeface="Adobe Garamond Pro"/>
+              </a:defRPr>
+            </a:pPr>
+            <a:r>
+              <a:rPr sz="3750" b="1" i="0">
+                <a:solidFill>
+                  <a:srgbClr val="100C0A"/>
+                </a:solidFill>
+                <a:latin typeface="Adobe Garamond Pro"/>
+                <a:ea typeface="Adobe Garamond Pro"/>
+                <a:cs typeface="Adobe Garamond Pro"/>
+              </a:rPr>
+              <a:t>Un solo carácter.</a:t>
+            </a:r>
+          </a:p>
+        </p:txBody>
+      </p:sp>
+      <p:sp>
+        <p:nvSpPr>
+          <p:cNvPr id="5" name="garamond">
+            <a:extLst xmlns:a="http://schemas.openxmlformats.org/drawingml/2006/main">
+              <a:ext uri="{FF2B5EF4-FFF2-40B4-BE49-F238E27FC236}">
+                <a16:creationId xmlns:a16="http://schemas.microsoft.com/office/drawing/2014/main" id="{9BB9918C-930D-43E0-A220-D6CCBA7554F8}"/>
+              </a:ext>
+            </a:extLst>
+          </p:cNvPr>
+          <p:cNvSpPr>
+            <a:spLocks xmlns:a="http://schemas.openxmlformats.org/drawingml/2006/main" noGrp="1"/>
+          </p:cNvSpPr>
+          <p:nvPr/>
+        </p:nvSpPr>
+        <p:spPr>
+          <a:xfrm xmlns:a="http://schemas.openxmlformats.org/drawingml/2006/main">
+            <a:off x="685800" y="2476500"/>
+            <a:ext cx="4476750" cy="428625"/>
+          </a:xfrm>
+          <a:prstGeom xmlns:a="http://schemas.openxmlformats.org/drawingml/2006/main" prst="rect">
+            <a:avLst/>
+          </a:prstGeom>
+          <a:noFill xmlns:a="http://schemas.openxmlformats.org/drawingml/2006/main"/>
+          <a:ln xmlns:a="http://schemas.openxmlformats.org/drawingml/2006/main" w="0">
+            <a:noFill/>
+            <a:prstDash val="solid"/>
+          </a:ln>
+        </p:spPr>
+        <p:txBody>
+          <a:bodyPr xmlns:a="http://schemas.openxmlformats.org/drawingml/2006/main" anchor="ctr"/>
+          <a:lstStyle xmlns:a="http://schemas.openxmlformats.org/drawingml/2006/main"/>
+          <a:p xmlns:a="http://schemas.openxmlformats.org/drawingml/2006/main">
+            <a:pPr algn="l">
+              <a:defRPr sz="1350" b="1" i="0">
+                <a:solidFill>
+                  <a:srgbClr val="A88650"/>
+                </a:solidFill>
+                <a:latin typeface="Inter"/>
+                <a:ea typeface="Inter"/>
+                <a:cs typeface="Inter"/>
+              </a:defRPr>
+            </a:pPr>
+            <a:r>
+              <a:rPr sz="1350" b="1" i="0">
+                <a:solidFill>
+                  <a:srgbClr val="A88650"/>
+                </a:solidFill>
+                <a:latin typeface="Inter"/>
+                <a:ea typeface="Inter"/>
+                <a:cs typeface="Inter"/>
+              </a:rPr>
+              <a:t>Adobe Garamond Pro</a:t>
+            </a:r>
+          </a:p>
+        </p:txBody>
+      </p:sp>
+      <p:sp>
+        <p:nvSpPr>
+          <p:cNvPr id="6" name="garamond-sample">
+            <a:extLst xmlns:a="http://schemas.openxmlformats.org/drawingml/2006/main">
+              <a:ext uri="{FF2B5EF4-FFF2-40B4-BE49-F238E27FC236}">
+                <a16:creationId xmlns:a16="http://schemas.microsoft.com/office/drawing/2014/main" id="{1FA665B5-AE3E-47AC-93F7-2DAD3E84392E}"/>
+              </a:ext>
+            </a:extLst>
+          </p:cNvPr>
+          <p:cNvSpPr>
+            <a:spLocks xmlns:a="http://schemas.openxmlformats.org/drawingml/2006/main" noGrp="1"/>
+          </p:cNvSpPr>
+          <p:nvPr/>
+        </p:nvSpPr>
+        <p:spPr>
+          <a:xfrm xmlns:a="http://schemas.openxmlformats.org/drawingml/2006/main">
+            <a:off x="685800" y="2914650"/>
+            <a:ext cx="4953000" cy="1047750"/>
+          </a:xfrm>
+          <a:prstGeom xmlns:a="http://schemas.openxmlformats.org/drawingml/2006/main" prst="rect">
+            <a:avLst/>
+          </a:prstGeom>
+          <a:noFill xmlns:a="http://schemas.openxmlformats.org/drawingml/2006/main"/>
+          <a:ln xmlns:a="http://schemas.openxmlformats.org/drawingml/2006/main" w="0">
+            <a:noFill/>
+            <a:prstDash val="solid"/>
+          </a:ln>
+        </p:spPr>
+        <p:txBody>
+          <a:bodyPr xmlns:a="http://schemas.openxmlformats.org/drawingml/2006/main" anchor="ctr"/>
+          <a:lstStyle xmlns:a="http://schemas.openxmlformats.org/drawingml/2006/main"/>
+          <a:p xmlns:a="http://schemas.openxmlformats.org/drawingml/2006/main">
+            <a:pPr algn="l">
+              <a:defRPr sz="3600" b="1" i="0">
+                <a:solidFill>
+                  <a:srgbClr val="100C0A"/>
+                </a:solidFill>
+                <a:latin typeface="Adobe Garamond Pro"/>
+                <a:ea typeface="Adobe Garamond Pro"/>
+                <a:cs typeface="Adobe Garamond Pro"/>
+              </a:defRPr>
+            </a:pPr>
+            <a:r>
+              <a:rPr sz="3600" b="1" i="0">
+                <a:solidFill>
+                  <a:srgbClr val="100C0A"/>
+                </a:solidFill>
+                <a:latin typeface="Adobe Garamond Pro"/>
+                <a:ea typeface="Adobe Garamond Pro"/>
+                <a:cs typeface="Adobe Garamond Pro"/>
+              </a:rPr>
+              <a:t>El tiempo deja carácter.</a:t>
+            </a:r>
+          </a:p>
+        </p:txBody>
+      </p:sp>
+      <p:sp>
+        <p:nvSpPr>
+          <p:cNvPr id="7" name="garamond-use">
+            <a:extLst xmlns:a="http://schemas.openxmlformats.org/drawingml/2006/main">
+              <a:ext uri="{FF2B5EF4-FFF2-40B4-BE49-F238E27FC236}">
+                <a16:creationId xmlns:a16="http://schemas.microsoft.com/office/drawing/2014/main" id="{3C4A3DFF-2145-4B2D-9A48-A1423D3621FE}"/>
+              </a:ext>
+            </a:extLst>
+          </p:cNvPr>
+          <p:cNvSpPr>
+            <a:spLocks xmlns:a="http://schemas.openxmlformats.org/drawingml/2006/main" noGrp="1"/>
+          </p:cNvSpPr>
+          <p:nvPr/>
+        </p:nvSpPr>
+        <p:spPr>
+          <a:xfrm xmlns:a="http://schemas.openxmlformats.org/drawingml/2006/main">
+            <a:off x="685800" y="4095750"/>
+            <a:ext cx="4667250" cy="304800"/>
+          </a:xfrm>
+          <a:prstGeom xmlns:a="http://schemas.openxmlformats.org/drawingml/2006/main" prst="rect">
+            <a:avLst/>
+          </a:prstGeom>
+          <a:noFill xmlns:a="http://schemas.openxmlformats.org/drawingml/2006/main"/>
+          <a:ln xmlns:a="http://schemas.openxmlformats.org/drawingml/2006/main" w="0">
+            <a:noFill/>
+            <a:prstDash val="solid"/>
+          </a:ln>
+        </p:spPr>
+        <p:txBody>
+          <a:bodyPr xmlns:a="http://schemas.openxmlformats.org/drawingml/2006/main" anchor="ctr"/>
+          <a:lstStyle xmlns:a="http://schemas.openxmlformats.org/drawingml/2006/main"/>
+          <a:p xmlns:a="http://schemas.openxmlformats.org/drawingml/2006/main">
+            <a:pPr algn="l">
+              <a:defRPr sz="1050" b="0" i="0">
+                <a:solidFill>
+                  <a:srgbClr val="706862"/>
+                </a:solidFill>
+                <a:latin typeface="Inter"/>
+                <a:ea typeface="Inter"/>
+                <a:cs typeface="Inter"/>
+              </a:defRPr>
+            </a:pPr>
+            <a:r>
+              <a:rPr sz="1050" b="0" i="0">
+                <a:solidFill>
+                  <a:srgbClr val="706862"/>
+                </a:solidFill>
+                <a:latin typeface="Inter"/>
+                <a:ea typeface="Inter"/>
+                <a:cs typeface="Inter"/>
+              </a:rPr>
+              <a:t>Portadas · titulares · citas · campañas</a:t>
+            </a:r>
+          </a:p>
+        </p:txBody>
+      </p:sp>
+      <p:sp>
+        <p:nvSpPr>
+          <p:cNvPr id="8" name="divider">
+            <a:extLst xmlns:a="http://schemas.openxmlformats.org/drawingml/2006/main">
+              <a:ext uri="{FF2B5EF4-FFF2-40B4-BE49-F238E27FC236}">
+                <a16:creationId xmlns:a16="http://schemas.microsoft.com/office/drawing/2014/main" id="{365EF083-105E-4A7D-B902-E4561978B421}"/>
+              </a:ext>
+            </a:extLst>
+          </p:cNvPr>
+          <p:cNvSpPr>
+            <a:spLocks xmlns:a="http://schemas.openxmlformats.org/drawingml/2006/main" noGrp="1"/>
+          </p:cNvSpPr>
+          <p:nvPr/>
+        </p:nvSpPr>
+        <p:spPr>
+          <a:xfrm xmlns:a="http://schemas.openxmlformats.org/drawingml/2006/main">
+            <a:off x="5905500" y="1123950"/>
+            <a:ext cx="19050" cy="4572000"/>
+          </a:xfrm>
+          <a:prstGeom xmlns:a="http://schemas.openxmlformats.org/drawingml/2006/main" prst="rect">
+            <a:avLst/>
+          </a:prstGeom>
+          <a:solidFill xmlns:a="http://schemas.openxmlformats.org/drawingml/2006/main">
+            <a:srgbClr val="D8CEC3"/>
+          </a:solidFill>
+          <a:ln xmlns:a="http://schemas.openxmlformats.org/drawingml/2006/main" w="0">
+            <a:noFill/>
+            <a:prstDash val="solid"/>
+          </a:ln>
+        </p:spPr>
+      </p:sp>
+      <p:sp>
+        <p:nvSpPr>
+          <p:cNvPr id="9" name="inter">
+            <a:extLst xmlns:a="http://schemas.openxmlformats.org/drawingml/2006/main">
+              <a:ext uri="{FF2B5EF4-FFF2-40B4-BE49-F238E27FC236}">
+                <a16:creationId xmlns:a16="http://schemas.microsoft.com/office/drawing/2014/main" id="{38A10A06-1EEF-4329-B9B5-15A7DADAD0F3}"/>
+              </a:ext>
+            </a:extLst>
+          </p:cNvPr>
+          <p:cNvSpPr>
+            <a:spLocks xmlns:a="http://schemas.openxmlformats.org/drawingml/2006/main" noGrp="1"/>
+          </p:cNvSpPr>
+          <p:nvPr/>
+        </p:nvSpPr>
+        <p:spPr>
+          <a:xfrm xmlns:a="http://schemas.openxmlformats.org/drawingml/2006/main">
+            <a:off x="6572250" y="2476500"/>
+            <a:ext cx="4095750" cy="428625"/>
+          </a:xfrm>
+          <a:prstGeom xmlns:a="http://schemas.openxmlformats.org/drawingml/2006/main" prst="rect">
+            <a:avLst/>
+          </a:prstGeom>
+          <a:noFill xmlns:a="http://schemas.openxmlformats.org/drawingml/2006/main"/>
+          <a:ln xmlns:a="http://schemas.openxmlformats.org/drawingml/2006/main" w="0">
+            <a:noFill/>
+            <a:prstDash val="solid"/>
+          </a:ln>
+        </p:spPr>
+        <p:txBody>
+          <a:bodyPr xmlns:a="http://schemas.openxmlformats.org/drawingml/2006/main" anchor="ctr"/>
+          <a:lstStyle xmlns:a="http://schemas.openxmlformats.org/drawingml/2006/main"/>
+          <a:p xmlns:a="http://schemas.openxmlformats.org/drawingml/2006/main">
+            <a:pPr algn="l">
+              <a:defRPr sz="1350" b="1" i="0">
+                <a:solidFill>
+                  <a:srgbClr val="A88650"/>
+                </a:solidFill>
+                <a:latin typeface="Inter"/>
+                <a:ea typeface="Inter"/>
+                <a:cs typeface="Inter"/>
+              </a:defRPr>
+            </a:pPr>
+            <a:r>
+              <a:rPr sz="1350" b="1" i="0">
+                <a:solidFill>
+                  <a:srgbClr val="A88650"/>
+                </a:solidFill>
+                <a:latin typeface="Inter"/>
+                <a:ea typeface="Inter"/>
+                <a:cs typeface="Inter"/>
+              </a:rPr>
+              <a:t>Inter</a:t>
+            </a:r>
+          </a:p>
+        </p:txBody>
+      </p:sp>
+      <p:sp>
+        <p:nvSpPr>
+          <p:cNvPr id="10" name="inter-sample">
+            <a:extLst xmlns:a="http://schemas.openxmlformats.org/drawingml/2006/main">
+              <a:ext uri="{FF2B5EF4-FFF2-40B4-BE49-F238E27FC236}">
+                <a16:creationId xmlns:a16="http://schemas.microsoft.com/office/drawing/2014/main" id="{15FB5E15-6005-44EB-89FF-755090493CCB}"/>
+              </a:ext>
+            </a:extLst>
+          </p:cNvPr>
+          <p:cNvSpPr>
+            <a:spLocks xmlns:a="http://schemas.openxmlformats.org/drawingml/2006/main" noGrp="1"/>
+          </p:cNvSpPr>
+          <p:nvPr/>
+        </p:nvSpPr>
+        <p:spPr>
+          <a:xfrm xmlns:a="http://schemas.openxmlformats.org/drawingml/2006/main">
+            <a:off x="6572250" y="2914650"/>
+            <a:ext cx="4191000" cy="952500"/>
+          </a:xfrm>
+          <a:prstGeom xmlns:a="http://schemas.openxmlformats.org/drawingml/2006/main" prst="rect">
+            <a:avLst/>
+          </a:prstGeom>
+          <a:noFill xmlns:a="http://schemas.openxmlformats.org/drawingml/2006/main"/>
+          <a:ln xmlns:a="http://schemas.openxmlformats.org/drawingml/2006/main" w="0">
+            <a:noFill/>
+            <a:prstDash val="solid"/>
+          </a:ln>
+        </p:spPr>
+        <p:txBody>
+          <a:bodyPr xmlns:a="http://schemas.openxmlformats.org/drawingml/2006/main" anchor="ctr"/>
+          <a:lstStyle xmlns:a="http://schemas.openxmlformats.org/drawingml/2006/main"/>
+          <a:p xmlns:a="http://schemas.openxmlformats.org/drawingml/2006/main">
+            <a:pPr algn="l">
+              <a:defRPr sz="2550" b="1" i="0">
+                <a:solidFill>
+                  <a:srgbClr val="100C0A"/>
+                </a:solidFill>
+                <a:latin typeface="Inter"/>
+                <a:ea typeface="Inter"/>
+                <a:cs typeface="Inter"/>
+              </a:defRPr>
+            </a:pPr>
+            <a:r>
+              <a:rPr sz="2550" b="1" i="0">
+                <a:solidFill>
+                  <a:srgbClr val="100C0A"/>
+                </a:solidFill>
+                <a:latin typeface="Inter"/>
+                <a:ea typeface="Inter"/>
+                <a:cs typeface="Inter"/>
+              </a:rPr>
+              <a:t>Claridad en cada punto de contacto.</a:t>
+            </a:r>
+          </a:p>
+        </p:txBody>
+      </p:sp>
+      <p:sp>
+        <p:nvSpPr>
+          <p:cNvPr id="11" name="inter-use">
+            <a:extLst xmlns:a="http://schemas.openxmlformats.org/drawingml/2006/main">
+              <a:ext uri="{FF2B5EF4-FFF2-40B4-BE49-F238E27FC236}">
+                <a16:creationId xmlns:a16="http://schemas.microsoft.com/office/drawing/2014/main" id="{E221C92F-C997-43E3-AD0F-5481EC71FAD2}"/>
+              </a:ext>
+            </a:extLst>
+          </p:cNvPr>
+          <p:cNvSpPr>
+            <a:spLocks xmlns:a="http://schemas.openxmlformats.org/drawingml/2006/main" noGrp="1"/>
+          </p:cNvSpPr>
+          <p:nvPr/>
+        </p:nvSpPr>
+        <p:spPr>
+          <a:xfrm xmlns:a="http://schemas.openxmlformats.org/drawingml/2006/main">
+            <a:off x="6572250" y="4095750"/>
+            <a:ext cx="4286250" cy="476250"/>
+          </a:xfrm>
+          <a:prstGeom xmlns:a="http://schemas.openxmlformats.org/drawingml/2006/main" prst="rect">
+            <a:avLst/>
+          </a:prstGeom>
+          <a:noFill xmlns:a="http://schemas.openxmlformats.org/drawingml/2006/main"/>
+          <a:ln xmlns:a="http://schemas.openxmlformats.org/drawingml/2006/main" w="0">
+            <a:noFill/>
+            <a:prstDash val="solid"/>
+          </a:ln>
+        </p:spPr>
+        <p:txBody>
+          <a:bodyPr xmlns:a="http://schemas.openxmlformats.org/drawingml/2006/main" anchor="ctr"/>
+          <a:lstStyle xmlns:a="http://schemas.openxmlformats.org/drawingml/2006/main"/>
+          <a:p xmlns:a="http://schemas.openxmlformats.org/drawingml/2006/main">
+            <a:pPr algn="l">
+              <a:defRPr sz="1050" b="0" i="0">
+                <a:solidFill>
+                  <a:srgbClr val="706862"/>
+                </a:solidFill>
+                <a:latin typeface="Inter"/>
+                <a:ea typeface="Inter"/>
+                <a:cs typeface="Inter"/>
+              </a:defRPr>
+            </a:pPr>
+            <a:r>
+              <a:rPr sz="1050" b="0" i="0">
+                <a:solidFill>
+                  <a:srgbClr val="706862"/>
+                </a:solidFill>
+                <a:latin typeface="Inter"/>
+                <a:ea typeface="Inter"/>
+                <a:cs typeface="Inter"/>
+              </a:rPr>
+              <a:t>Cuerpo · navegación · tablas · datos · documentos</a:t>
+            </a:r>
+          </a:p>
+        </p:txBody>
+      </p:sp>
+      <p:sp>
+        <p:nvSpPr>
+          <p:cNvPr id="12" name="rule">
+            <a:extLst xmlns:a="http://schemas.openxmlformats.org/drawingml/2006/main">
+              <a:ext uri="{FF2B5EF4-FFF2-40B4-BE49-F238E27FC236}">
+                <a16:creationId xmlns:a16="http://schemas.microsoft.com/office/drawing/2014/main" id="{D4428E5A-12D7-4E92-ABF7-E03A861A2C54}"/>
+              </a:ext>
+            </a:extLst>
+          </p:cNvPr>
+          <p:cNvSpPr>
+            <a:spLocks xmlns:a="http://schemas.openxmlformats.org/drawingml/2006/main" noGrp="1"/>
+          </p:cNvSpPr>
+          <p:nvPr/>
+        </p:nvSpPr>
+        <p:spPr>
+          <a:xfrm xmlns:a="http://schemas.openxmlformats.org/drawingml/2006/main">
+            <a:off x="6572250" y="4953000"/>
+            <a:ext cx="4286250" cy="438150"/>
+          </a:xfrm>
+          <a:prstGeom xmlns:a="http://schemas.openxmlformats.org/drawingml/2006/main" prst="rect">
+            <a:avLst/>
+          </a:prstGeom>
+          <a:noFill xmlns:a="http://schemas.openxmlformats.org/drawingml/2006/main"/>
+          <a:ln xmlns:a="http://schemas.openxmlformats.org/drawingml/2006/main" w="0">
+            <a:noFill/>
+            <a:prstDash val="solid"/>
+          </a:ln>
+        </p:spPr>
+        <p:txBody>
+          <a:bodyPr xmlns:a="http://schemas.openxmlformats.org/drawingml/2006/main" anchor="ctr"/>
+          <a:lstStyle xmlns:a="http://schemas.openxmlformats.org/drawingml/2006/main"/>
+          <a:p xmlns:a="http://schemas.openxmlformats.org/drawingml/2006/main">
+            <a:pPr algn="l">
+              <a:defRPr sz="1125" b="1" i="0">
+                <a:solidFill>
+                  <a:srgbClr val="A64B24"/>
+                </a:solidFill>
+                <a:latin typeface="Inter"/>
+                <a:ea typeface="Inter"/>
+                <a:cs typeface="Inter"/>
+              </a:defRPr>
+            </a:pPr>
+            <a:r>
+              <a:rPr sz="1125" b="1" i="0">
+                <a:solidFill>
+                  <a:srgbClr val="A64B24"/>
+                </a:solidFill>
+                <a:latin typeface="Inter"/>
+                <a:ea typeface="Inter"/>
+                <a:cs typeface="Inter"/>
+              </a:rPr>
+              <a:t>No sustituir por Calibri. No mezclar familias adicionales.</a:t>
+            </a:r>
+          </a:p>
+        </p:txBody>
+      </p:sp>
+    </p:spTree>
+    <p:extLst>
+      <p:ext uri="{BB962C8B-B14F-4D97-AF65-F5344CB8AC3E}">
+        <p14:creationId xmlns:p14="http://schemas.microsoft.com/office/powerpoint/2010/main" val="620926278"/>
+      </p:ext>
+    </p:extLst>
+  </p:cSld>
+</p:sld>
+</file>
+
+<file path=ppt/slides/slide21.xml><?xml version="1.0" encoding="utf-8"?>
 <p:sld xmlns:p="http://schemas.openxmlformats.org/presentationml/2006/main">
   <p:cSld>
     <p:bg>
@@ -11153,10 +13008,2378 @@
       </p:grpSpPr>
       <p:sp>
         <p:nvSpPr>
+          <p:cNvPr id="9" name="brand">
+            <a:extLst xmlns:a="http://schemas.openxmlformats.org/drawingml/2006/main">
+              <a:ext uri="{FF2B5EF4-FFF2-40B4-BE49-F238E27FC236}">
+                <a16:creationId xmlns:a16="http://schemas.microsoft.com/office/drawing/2014/main" id="{2EC254F8-8D1B-4B8E-85D1-DBDABD019F49}"/>
+              </a:ext>
+            </a:extLst>
+          </p:cNvPr>
+          <p:cNvSpPr>
+            <a:spLocks xmlns:a="http://schemas.openxmlformats.org/drawingml/2006/main" noGrp="1"/>
+          </p:cNvSpPr>
+          <p:nvPr/>
+        </p:nvSpPr>
+        <p:spPr>
+          <a:xfrm xmlns:a="http://schemas.openxmlformats.org/drawingml/2006/main">
+            <a:off x="685800" y="266700"/>
+            <a:ext cx="2857500" cy="228600"/>
+          </a:xfrm>
+          <a:prstGeom xmlns:a="http://schemas.openxmlformats.org/drawingml/2006/main" prst="rect">
+            <a:avLst/>
+          </a:prstGeom>
+          <a:noFill xmlns:a="http://schemas.openxmlformats.org/drawingml/2006/main"/>
+          <a:ln xmlns:a="http://schemas.openxmlformats.org/drawingml/2006/main" w="0">
+            <a:noFill/>
+            <a:prstDash val="solid"/>
+          </a:ln>
+        </p:spPr>
+        <p:txBody>
+          <a:bodyPr xmlns:a="http://schemas.openxmlformats.org/drawingml/2006/main" anchor="ctr"/>
+          <a:lstStyle xmlns:a="http://schemas.openxmlformats.org/drawingml/2006/main"/>
+          <a:p xmlns:a="http://schemas.openxmlformats.org/drawingml/2006/main">
+            <a:pPr algn="l">
+              <a:defRPr sz="825" b="1" i="0">
+                <a:solidFill>
+                  <a:srgbClr val="D5B879"/>
+                </a:solidFill>
+                <a:latin typeface="Inter"/>
+                <a:ea typeface="Inter"/>
+                <a:cs typeface="Inter"/>
+              </a:defRPr>
+            </a:pPr>
+            <a:r>
+              <a:rPr sz="825" b="1" i="0">
+                <a:solidFill>
+                  <a:srgbClr val="D5B879"/>
+                </a:solidFill>
+                <a:latin typeface="Inter"/>
+                <a:ea typeface="Inter"/>
+                <a:cs typeface="Inter"/>
+              </a:rPr>
+              <a:t>RON CARÚPANO</a:t>
+            </a:r>
+          </a:p>
+        </p:txBody>
+      </p:sp>
+      <p:sp>
+        <p:nvSpPr>
+          <p:cNvPr id="2" name="page">
+            <a:extLst xmlns:a="http://schemas.openxmlformats.org/drawingml/2006/main">
+              <a:ext uri="{FF2B5EF4-FFF2-40B4-BE49-F238E27FC236}">
+                <a16:creationId xmlns:a16="http://schemas.microsoft.com/office/drawing/2014/main" id="{F2E01F5A-56BF-4DC6-A4BB-EA386C113257}"/>
+              </a:ext>
+            </a:extLst>
+          </p:cNvPr>
+          <p:cNvSpPr>
+            <a:spLocks xmlns:a="http://schemas.openxmlformats.org/drawingml/2006/main" noGrp="1"/>
+          </p:cNvSpPr>
+          <p:nvPr/>
+        </p:nvSpPr>
+        <p:spPr>
+          <a:xfrm xmlns:a="http://schemas.openxmlformats.org/drawingml/2006/main">
+            <a:off x="11049000" y="266700"/>
+            <a:ext cx="457200" cy="228600"/>
+          </a:xfrm>
+          <a:prstGeom xmlns:a="http://schemas.openxmlformats.org/drawingml/2006/main" prst="rect">
+            <a:avLst/>
+          </a:prstGeom>
+          <a:noFill xmlns:a="http://schemas.openxmlformats.org/drawingml/2006/main"/>
+          <a:ln xmlns:a="http://schemas.openxmlformats.org/drawingml/2006/main" w="0">
+            <a:noFill/>
+            <a:prstDash val="solid"/>
+          </a:ln>
+        </p:spPr>
+        <p:txBody>
+          <a:bodyPr xmlns:a="http://schemas.openxmlformats.org/drawingml/2006/main" anchor="ctr"/>
+          <a:lstStyle xmlns:a="http://schemas.openxmlformats.org/drawingml/2006/main"/>
+          <a:p xmlns:a="http://schemas.openxmlformats.org/drawingml/2006/main">
+            <a:pPr algn="r">
+              <a:defRPr sz="750" b="0" i="0">
+                <a:solidFill>
+                  <a:srgbClr val="FFFFFF">
+                    <a:alpha val="43922"/>
+                  </a:srgbClr>
+                </a:solidFill>
+                <a:latin typeface="Inter"/>
+                <a:ea typeface="Inter"/>
+                <a:cs typeface="Inter"/>
+              </a:defRPr>
+            </a:pPr>
+            <a:r>
+              <a:rPr sz="750" b="0" i="0">
+                <a:solidFill>
+                  <a:srgbClr val="FFFFFF">
+                    <a:alpha val="43922"/>
+                  </a:srgbClr>
+                </a:solidFill>
+                <a:latin typeface="Inter"/>
+                <a:ea typeface="Inter"/>
+                <a:cs typeface="Inter"/>
+              </a:rPr>
+              <a:t>21</a:t>
+            </a:r>
+          </a:p>
+        </p:txBody>
+      </p:sp>
+      <p:sp>
+        <p:nvSpPr>
+          <p:cNvPr id="3" name="eyebrow">
+            <a:extLst xmlns:a="http://schemas.openxmlformats.org/drawingml/2006/main">
+              <a:ext uri="{FF2B5EF4-FFF2-40B4-BE49-F238E27FC236}">
+                <a16:creationId xmlns:a16="http://schemas.microsoft.com/office/drawing/2014/main" id="{885EABC5-C33F-420C-AEE9-DE1C235B09B5}"/>
+              </a:ext>
+            </a:extLst>
+          </p:cNvPr>
+          <p:cNvSpPr>
+            <a:spLocks xmlns:a="http://schemas.openxmlformats.org/drawingml/2006/main" noGrp="1"/>
+          </p:cNvSpPr>
+          <p:nvPr/>
+        </p:nvSpPr>
+        <p:spPr>
+          <a:xfrm xmlns:a="http://schemas.openxmlformats.org/drawingml/2006/main">
+            <a:off x="685800" y="685800"/>
+            <a:ext cx="4000500" cy="228600"/>
+          </a:xfrm>
+          <a:prstGeom xmlns:a="http://schemas.openxmlformats.org/drawingml/2006/main" prst="rect">
+            <a:avLst/>
+          </a:prstGeom>
+          <a:noFill xmlns:a="http://schemas.openxmlformats.org/drawingml/2006/main"/>
+          <a:ln xmlns:a="http://schemas.openxmlformats.org/drawingml/2006/main" w="0">
+            <a:noFill/>
+            <a:prstDash val="solid"/>
+          </a:ln>
+        </p:spPr>
+        <p:txBody>
+          <a:bodyPr xmlns:a="http://schemas.openxmlformats.org/drawingml/2006/main" anchor="ctr"/>
+          <a:lstStyle xmlns:a="http://schemas.openxmlformats.org/drawingml/2006/main"/>
+          <a:p xmlns:a="http://schemas.openxmlformats.org/drawingml/2006/main">
+            <a:pPr algn="l">
+              <a:defRPr sz="825" b="1" i="0">
+                <a:solidFill>
+                  <a:srgbClr val="D5B879"/>
+                </a:solidFill>
+                <a:latin typeface="Inter"/>
+                <a:ea typeface="Inter"/>
+                <a:cs typeface="Inter"/>
+              </a:defRPr>
+            </a:pPr>
+            <a:r>
+              <a:rPr sz="825" b="1" i="0">
+                <a:solidFill>
+                  <a:srgbClr val="D5B879"/>
+                </a:solidFill>
+                <a:latin typeface="Inter"/>
+                <a:ea typeface="Inter"/>
+                <a:cs typeface="Inter"/>
+              </a:rPr>
+              <a:t>DIRECCIÓN DE ARTE</a:t>
+            </a:r>
+          </a:p>
+        </p:txBody>
+      </p:sp>
+      <p:sp>
+        <p:nvSpPr>
+          <p:cNvPr id="4" name="title">
+            <a:extLst xmlns:a="http://schemas.openxmlformats.org/drawingml/2006/main">
+              <a:ext uri="{FF2B5EF4-FFF2-40B4-BE49-F238E27FC236}">
+                <a16:creationId xmlns:a16="http://schemas.microsoft.com/office/drawing/2014/main" id="{7B05BCBB-92B1-466D-B387-76B0EC4724DD}"/>
+              </a:ext>
+            </a:extLst>
+          </p:cNvPr>
+          <p:cNvSpPr>
+            <a:spLocks xmlns:a="http://schemas.openxmlformats.org/drawingml/2006/main" noGrp="1"/>
+          </p:cNvSpPr>
+          <p:nvPr/>
+        </p:nvSpPr>
+        <p:spPr>
+          <a:xfrm xmlns:a="http://schemas.openxmlformats.org/drawingml/2006/main">
+            <a:off x="685800" y="1123950"/>
+            <a:ext cx="5905500" cy="1047750"/>
+          </a:xfrm>
+          <a:prstGeom xmlns:a="http://schemas.openxmlformats.org/drawingml/2006/main" prst="rect">
+            <a:avLst/>
+          </a:prstGeom>
+          <a:noFill xmlns:a="http://schemas.openxmlformats.org/drawingml/2006/main"/>
+          <a:ln xmlns:a="http://schemas.openxmlformats.org/drawingml/2006/main" w="0">
+            <a:noFill/>
+            <a:prstDash val="solid"/>
+          </a:ln>
+        </p:spPr>
+        <p:txBody>
+          <a:bodyPr xmlns:a="http://schemas.openxmlformats.org/drawingml/2006/main" anchor="ctr"/>
+          <a:lstStyle xmlns:a="http://schemas.openxmlformats.org/drawingml/2006/main"/>
+          <a:p xmlns:a="http://schemas.openxmlformats.org/drawingml/2006/main">
+            <a:pPr algn="l">
+              <a:defRPr sz="3600" b="1" i="0">
+                <a:solidFill>
+                  <a:srgbClr val="F3EEE6"/>
+                </a:solidFill>
+                <a:latin typeface="Adobe Garamond Pro"/>
+                <a:ea typeface="Adobe Garamond Pro"/>
+                <a:cs typeface="Adobe Garamond Pro"/>
+              </a:defRPr>
+            </a:pPr>
+            <a:r>
+              <a:rPr sz="3600" b="1" i="0">
+                <a:solidFill>
+                  <a:srgbClr val="F3EEE6"/>
+                </a:solidFill>
+                <a:latin typeface="Adobe Garamond Pro"/>
+                <a:ea typeface="Adobe Garamond Pro"/>
+                <a:cs typeface="Adobe Garamond Pro"/>
+              </a:rPr>
+              <a:t>La imagen debe revelar</a:t>
+            </a:r>
+          </a:p>
+          <a:p xmlns:a="http://schemas.openxmlformats.org/drawingml/2006/main">
+            <a:pPr algn="l">
+              <a:defRPr sz="3600" b="1" i="0">
+                <a:solidFill>
+                  <a:srgbClr val="F3EEE6"/>
+                </a:solidFill>
+                <a:latin typeface="Adobe Garamond Pro"/>
+                <a:ea typeface="Adobe Garamond Pro"/>
+                <a:cs typeface="Adobe Garamond Pro"/>
+              </a:defRPr>
+            </a:pPr>
+            <a:r>
+              <a:rPr sz="3600" b="1" i="0">
+                <a:solidFill>
+                  <a:srgbClr val="F3EEE6"/>
+                </a:solidFill>
+                <a:latin typeface="Adobe Garamond Pro"/>
+                <a:ea typeface="Adobe Garamond Pro"/>
+                <a:cs typeface="Adobe Garamond Pro"/>
+              </a:rPr>
+              <a:t>una verdad de producto.</a:t>
+            </a:r>
+          </a:p>
+        </p:txBody>
+      </p:sp>
+      <p:pic>
+        <p:nvPicPr>
+          <p:cNvPr id="13" name=""/>
+          <p:cNvPicPr>
+            <a:picLocks xmlns:a="http://schemas.openxmlformats.org/drawingml/2006/main" noChangeAspect="1"/>
+          </p:cNvPicPr>
+          <p:nvPr/>
+        </p:nvPicPr>
+        <p:blipFill>
+          <a:blip xmlns:r="http://schemas.openxmlformats.org/officeDocument/2006/relationships" xmlns:a="http://schemas.openxmlformats.org/drawingml/2006/main" r:embed="R89d0de6e3e1b4b41"/>
+          <a:srcRect xmlns:a="http://schemas.openxmlformats.org/drawingml/2006/main" l="0" t="20113" r="0" b="20113"/>
+          <a:stretch xmlns:a="http://schemas.openxmlformats.org/drawingml/2006/main">
+            <a:fillRect l="0" t="0" r="0" b="0"/>
+          </a:stretch>
+        </p:blipFill>
+        <p:spPr>
+          <a:xfrm xmlns:a="http://schemas.openxmlformats.org/drawingml/2006/main">
+            <a:off x="685800" y="2781300"/>
+            <a:ext cx="3619500" cy="3238500"/>
+          </a:xfrm>
+          <a:prstGeom xmlns:a="http://schemas.openxmlformats.org/drawingml/2006/main" prst="rect">
+            <a:avLst/>
+          </a:prstGeom>
+        </p:spPr>
+      </p:pic>
+      <p:pic>
+        <p:nvPicPr>
+          <p:cNvPr id="14" name=""/>
+          <p:cNvPicPr>
+            <a:picLocks xmlns:a="http://schemas.openxmlformats.org/drawingml/2006/main" noChangeAspect="1"/>
+          </p:cNvPicPr>
+          <p:nvPr/>
+        </p:nvPicPr>
+        <p:blipFill>
+          <a:blip xmlns:r="http://schemas.openxmlformats.org/officeDocument/2006/relationships" xmlns:a="http://schemas.openxmlformats.org/drawingml/2006/main" r:embed="R46aa25e99f4a4e79"/>
+          <a:srcRect xmlns:a="http://schemas.openxmlformats.org/drawingml/2006/main" l="0" t="12144" r="0" b="12144"/>
+          <a:stretch xmlns:a="http://schemas.openxmlformats.org/drawingml/2006/main">
+            <a:fillRect l="0" t="0" r="0" b="0"/>
+          </a:stretch>
+        </p:blipFill>
+        <p:spPr>
+          <a:xfrm xmlns:a="http://schemas.openxmlformats.org/drawingml/2006/main">
+            <a:off x="4476750" y="2781300"/>
+            <a:ext cx="2857500" cy="3238500"/>
+          </a:xfrm>
+          <a:prstGeom xmlns:a="http://schemas.openxmlformats.org/drawingml/2006/main" prst="rect">
+            <a:avLst/>
+          </a:prstGeom>
+        </p:spPr>
+      </p:pic>
+      <p:pic>
+        <p:nvPicPr>
+          <p:cNvPr id="15" name=""/>
+          <p:cNvPicPr>
+            <a:picLocks xmlns:a="http://schemas.openxmlformats.org/drawingml/2006/main" noChangeAspect="1"/>
+          </p:cNvPicPr>
+          <p:nvPr/>
+        </p:nvPicPr>
+        <p:blipFill>
+          <a:blip xmlns:r="http://schemas.openxmlformats.org/officeDocument/2006/relationships" xmlns:a="http://schemas.openxmlformats.org/drawingml/2006/main" r:embed="Rcc5975c0dd704a4d"/>
+          <a:srcRect xmlns:a="http://schemas.openxmlformats.org/drawingml/2006/main" l="0" t="10731" r="0" b="10731"/>
+          <a:stretch xmlns:a="http://schemas.openxmlformats.org/drawingml/2006/main">
+            <a:fillRect l="0" t="0" r="0" b="0"/>
+          </a:stretch>
+        </p:blipFill>
+        <p:spPr>
+          <a:xfrm xmlns:a="http://schemas.openxmlformats.org/drawingml/2006/main">
+            <a:off x="7505700" y="1428750"/>
+            <a:ext cx="3905250" cy="4591050"/>
+          </a:xfrm>
+          <a:prstGeom xmlns:a="http://schemas.openxmlformats.org/drawingml/2006/main" prst="rect">
+            <a:avLst/>
+          </a:prstGeom>
+        </p:spPr>
+      </p:pic>
+      <p:sp>
+        <p:nvSpPr>
+          <p:cNvPr id="8" name="caption">
+            <a:extLst xmlns:a="http://schemas.openxmlformats.org/drawingml/2006/main">
+              <a:ext uri="{FF2B5EF4-FFF2-40B4-BE49-F238E27FC236}">
+                <a16:creationId xmlns:a16="http://schemas.microsoft.com/office/drawing/2014/main" id="{3A488F33-C3B5-4ED6-B1DA-C8923CFBB5C8}"/>
+              </a:ext>
+            </a:extLst>
+          </p:cNvPr>
+          <p:cNvSpPr>
+            <a:spLocks xmlns:a="http://schemas.openxmlformats.org/drawingml/2006/main" noGrp="1"/>
+          </p:cNvSpPr>
+          <p:nvPr/>
+        </p:nvSpPr>
+        <p:spPr>
+          <a:xfrm xmlns:a="http://schemas.openxmlformats.org/drawingml/2006/main">
+            <a:off x="7505700" y="6153150"/>
+            <a:ext cx="3905250" cy="228600"/>
+          </a:xfrm>
+          <a:prstGeom xmlns:a="http://schemas.openxmlformats.org/drawingml/2006/main" prst="rect">
+            <a:avLst/>
+          </a:prstGeom>
+          <a:noFill xmlns:a="http://schemas.openxmlformats.org/drawingml/2006/main"/>
+          <a:ln xmlns:a="http://schemas.openxmlformats.org/drawingml/2006/main" w="0">
+            <a:noFill/>
+            <a:prstDash val="solid"/>
+          </a:ln>
+        </p:spPr>
+        <p:txBody>
+          <a:bodyPr xmlns:a="http://schemas.openxmlformats.org/drawingml/2006/main" anchor="ctr"/>
+          <a:lstStyle xmlns:a="http://schemas.openxmlformats.org/drawingml/2006/main"/>
+          <a:p xmlns:a="http://schemas.openxmlformats.org/drawingml/2006/main">
+            <a:pPr algn="r">
+              <a:defRPr sz="825" b="1" i="0">
+                <a:solidFill>
+                  <a:srgbClr val="D5B879"/>
+                </a:solidFill>
+                <a:latin typeface="Inter"/>
+                <a:ea typeface="Inter"/>
+                <a:cs typeface="Inter"/>
+              </a:defRPr>
+            </a:pPr>
+            <a:r>
+              <a:rPr sz="825" b="1" i="0">
+                <a:solidFill>
+                  <a:srgbClr val="D5B879"/>
+                </a:solidFill>
+                <a:latin typeface="Inter"/>
+                <a:ea typeface="Inter"/>
+                <a:cs typeface="Inter"/>
+              </a:rPr>
+              <a:t>ORIGEN · PRODUCTO · RITUAL</a:t>
+            </a:r>
+          </a:p>
+        </p:txBody>
+      </p:sp>
+    </p:spTree>
+    <p:extLst>
+      <p:ext uri="{BB962C8B-B14F-4D97-AF65-F5344CB8AC3E}">
+        <p14:creationId xmlns:p14="http://schemas.microsoft.com/office/powerpoint/2010/main" val="1606606458"/>
+      </p:ext>
+    </p:extLst>
+  </p:cSld>
+</p:sld>
+</file>
+
+<file path=ppt/slides/slide22.xml><?xml version="1.0" encoding="utf-8"?>
+<p:sld xmlns:p="http://schemas.openxmlformats.org/presentationml/2006/main">
+  <p:cSld>
+    <p:bg>
+      <p:bgPr>
+        <a:solidFill xmlns:a="http://schemas.openxmlformats.org/drawingml/2006/main">
+          <a:srgbClr val="F3EEE6"/>
+        </a:solidFill>
+      </p:bgPr>
+    </p:bg>
+    <p:spTree>
+      <p:nvGrpSpPr>
+        <p:cNvPr id="1" name=""/>
+        <p:cNvGrpSpPr/>
+        <p:nvPr/>
+      </p:nvGrpSpPr>
+      <p:grpSpPr>
+        <a:xfrm xmlns:a="http://schemas.openxmlformats.org/drawingml/2006/main"/>
+      </p:grpSpPr>
+      <p:sp>
+        <p:nvSpPr>
+          <p:cNvPr id="17" name="brand">
+            <a:extLst xmlns:a="http://schemas.openxmlformats.org/drawingml/2006/main">
+              <a:ext uri="{FF2B5EF4-FFF2-40B4-BE49-F238E27FC236}">
+                <a16:creationId xmlns:a16="http://schemas.microsoft.com/office/drawing/2014/main" id="{C902735F-A45E-46B4-9A1D-2F1A21BFDA5D}"/>
+              </a:ext>
+            </a:extLst>
+          </p:cNvPr>
+          <p:cNvSpPr>
+            <a:spLocks xmlns:a="http://schemas.openxmlformats.org/drawingml/2006/main" noGrp="1"/>
+          </p:cNvSpPr>
+          <p:nvPr/>
+        </p:nvSpPr>
+        <p:spPr>
+          <a:xfrm xmlns:a="http://schemas.openxmlformats.org/drawingml/2006/main">
+            <a:off x="685800" y="266700"/>
+            <a:ext cx="2857500" cy="228600"/>
+          </a:xfrm>
+          <a:prstGeom xmlns:a="http://schemas.openxmlformats.org/drawingml/2006/main" prst="rect">
+            <a:avLst/>
+          </a:prstGeom>
+          <a:noFill xmlns:a="http://schemas.openxmlformats.org/drawingml/2006/main"/>
+          <a:ln xmlns:a="http://schemas.openxmlformats.org/drawingml/2006/main" w="0">
+            <a:noFill/>
+            <a:prstDash val="solid"/>
+          </a:ln>
+        </p:spPr>
+        <p:txBody>
+          <a:bodyPr xmlns:a="http://schemas.openxmlformats.org/drawingml/2006/main" anchor="ctr"/>
+          <a:lstStyle xmlns:a="http://schemas.openxmlformats.org/drawingml/2006/main"/>
+          <a:p xmlns:a="http://schemas.openxmlformats.org/drawingml/2006/main">
+            <a:pPr algn="l">
+              <a:defRPr sz="825" b="1" i="0">
+                <a:solidFill>
+                  <a:srgbClr val="A88650"/>
+                </a:solidFill>
+                <a:latin typeface="Inter"/>
+                <a:ea typeface="Inter"/>
+                <a:cs typeface="Inter"/>
+              </a:defRPr>
+            </a:pPr>
+            <a:r>
+              <a:rPr sz="825" b="1" i="0">
+                <a:solidFill>
+                  <a:srgbClr val="A88650"/>
+                </a:solidFill>
+                <a:latin typeface="Inter"/>
+                <a:ea typeface="Inter"/>
+                <a:cs typeface="Inter"/>
+              </a:rPr>
+              <a:t>RON CARÚPANO</a:t>
+            </a:r>
+          </a:p>
+        </p:txBody>
+      </p:sp>
+      <p:sp>
+        <p:nvSpPr>
+          <p:cNvPr id="2" name="page">
+            <a:extLst xmlns:a="http://schemas.openxmlformats.org/drawingml/2006/main">
+              <a:ext uri="{FF2B5EF4-FFF2-40B4-BE49-F238E27FC236}">
+                <a16:creationId xmlns:a16="http://schemas.microsoft.com/office/drawing/2014/main" id="{7C977CA3-1069-49DC-897D-6DF6094ABC42}"/>
+              </a:ext>
+            </a:extLst>
+          </p:cNvPr>
+          <p:cNvSpPr>
+            <a:spLocks xmlns:a="http://schemas.openxmlformats.org/drawingml/2006/main" noGrp="1"/>
+          </p:cNvSpPr>
+          <p:nvPr/>
+        </p:nvSpPr>
+        <p:spPr>
+          <a:xfrm xmlns:a="http://schemas.openxmlformats.org/drawingml/2006/main">
+            <a:off x="11049000" y="266700"/>
+            <a:ext cx="457200" cy="228600"/>
+          </a:xfrm>
+          <a:prstGeom xmlns:a="http://schemas.openxmlformats.org/drawingml/2006/main" prst="rect">
+            <a:avLst/>
+          </a:prstGeom>
+          <a:noFill xmlns:a="http://schemas.openxmlformats.org/drawingml/2006/main"/>
+          <a:ln xmlns:a="http://schemas.openxmlformats.org/drawingml/2006/main" w="0">
+            <a:noFill/>
+            <a:prstDash val="solid"/>
+          </a:ln>
+        </p:spPr>
+        <p:txBody>
+          <a:bodyPr xmlns:a="http://schemas.openxmlformats.org/drawingml/2006/main" anchor="ctr"/>
+          <a:lstStyle xmlns:a="http://schemas.openxmlformats.org/drawingml/2006/main"/>
+          <a:p xmlns:a="http://schemas.openxmlformats.org/drawingml/2006/main">
+            <a:pPr algn="r">
+              <a:defRPr sz="750" b="0" i="0">
+                <a:solidFill>
+                  <a:srgbClr val="706862"/>
+                </a:solidFill>
+                <a:latin typeface="Inter"/>
+                <a:ea typeface="Inter"/>
+                <a:cs typeface="Inter"/>
+              </a:defRPr>
+            </a:pPr>
+            <a:r>
+              <a:rPr sz="750" b="0" i="0">
+                <a:solidFill>
+                  <a:srgbClr val="706862"/>
+                </a:solidFill>
+                <a:latin typeface="Inter"/>
+                <a:ea typeface="Inter"/>
+                <a:cs typeface="Inter"/>
+              </a:rPr>
+              <a:t>22</a:t>
+            </a:r>
+          </a:p>
+        </p:txBody>
+      </p:sp>
+      <p:sp>
+        <p:nvSpPr>
+          <p:cNvPr id="3" name="eyebrow">
+            <a:extLst xmlns:a="http://schemas.openxmlformats.org/drawingml/2006/main">
+              <a:ext uri="{FF2B5EF4-FFF2-40B4-BE49-F238E27FC236}">
+                <a16:creationId xmlns:a16="http://schemas.microsoft.com/office/drawing/2014/main" id="{EF8119A3-B350-4654-9A7F-B1AC53FBFC78}"/>
+              </a:ext>
+            </a:extLst>
+          </p:cNvPr>
+          <p:cNvSpPr>
+            <a:spLocks xmlns:a="http://schemas.openxmlformats.org/drawingml/2006/main" noGrp="1"/>
+          </p:cNvSpPr>
+          <p:nvPr/>
+        </p:nvSpPr>
+        <p:spPr>
+          <a:xfrm xmlns:a="http://schemas.openxmlformats.org/drawingml/2006/main">
+            <a:off x="685800" y="781050"/>
+            <a:ext cx="4000500" cy="228600"/>
+          </a:xfrm>
+          <a:prstGeom xmlns:a="http://schemas.openxmlformats.org/drawingml/2006/main" prst="rect">
+            <a:avLst/>
+          </a:prstGeom>
+          <a:noFill xmlns:a="http://schemas.openxmlformats.org/drawingml/2006/main"/>
+          <a:ln xmlns:a="http://schemas.openxmlformats.org/drawingml/2006/main" w="0">
+            <a:noFill/>
+            <a:prstDash val="solid"/>
+          </a:ln>
+        </p:spPr>
+        <p:txBody>
+          <a:bodyPr xmlns:a="http://schemas.openxmlformats.org/drawingml/2006/main" anchor="ctr"/>
+          <a:lstStyle xmlns:a="http://schemas.openxmlformats.org/drawingml/2006/main"/>
+          <a:p xmlns:a="http://schemas.openxmlformats.org/drawingml/2006/main">
+            <a:pPr algn="l">
+              <a:defRPr sz="825" b="1" i="0">
+                <a:solidFill>
+                  <a:srgbClr val="A88650"/>
+                </a:solidFill>
+                <a:latin typeface="Inter"/>
+                <a:ea typeface="Inter"/>
+                <a:cs typeface="Inter"/>
+              </a:defRPr>
+            </a:pPr>
+            <a:r>
+              <a:rPr sz="825" b="1" i="0">
+                <a:solidFill>
+                  <a:srgbClr val="A88650"/>
+                </a:solidFill>
+                <a:latin typeface="Inter"/>
+                <a:ea typeface="Inter"/>
+                <a:cs typeface="Inter"/>
+              </a:rPr>
+              <a:t>AGENDA</a:t>
+            </a:r>
+          </a:p>
+        </p:txBody>
+      </p:sp>
+      <p:sp>
+        <p:nvSpPr>
+          <p:cNvPr id="4" name="title">
+            <a:extLst xmlns:a="http://schemas.openxmlformats.org/drawingml/2006/main">
+              <a:ext uri="{FF2B5EF4-FFF2-40B4-BE49-F238E27FC236}">
+                <a16:creationId xmlns:a16="http://schemas.microsoft.com/office/drawing/2014/main" id="{704321A2-9996-4AD1-A904-DAAA85C183E2}"/>
+              </a:ext>
+            </a:extLst>
+          </p:cNvPr>
+          <p:cNvSpPr>
+            <a:spLocks xmlns:a="http://schemas.openxmlformats.org/drawingml/2006/main" noGrp="1"/>
+          </p:cNvSpPr>
+          <p:nvPr/>
+        </p:nvSpPr>
+        <p:spPr>
+          <a:xfrm xmlns:a="http://schemas.openxmlformats.org/drawingml/2006/main">
+            <a:off x="685800" y="1028700"/>
+            <a:ext cx="5715000" cy="1047750"/>
+          </a:xfrm>
+          <a:prstGeom xmlns:a="http://schemas.openxmlformats.org/drawingml/2006/main" prst="rect">
+            <a:avLst/>
+          </a:prstGeom>
+          <a:noFill xmlns:a="http://schemas.openxmlformats.org/drawingml/2006/main"/>
+          <a:ln xmlns:a="http://schemas.openxmlformats.org/drawingml/2006/main" w="0">
+            <a:noFill/>
+            <a:prstDash val="solid"/>
+          </a:ln>
+        </p:spPr>
+        <p:txBody>
+          <a:bodyPr xmlns:a="http://schemas.openxmlformats.org/drawingml/2006/main" anchor="ctr"/>
+          <a:lstStyle xmlns:a="http://schemas.openxmlformats.org/drawingml/2006/main"/>
+          <a:p xmlns:a="http://schemas.openxmlformats.org/drawingml/2006/main">
+            <a:pPr algn="l">
+              <a:defRPr sz="3600" b="1" i="0">
+                <a:solidFill>
+                  <a:srgbClr val="100C0A"/>
+                </a:solidFill>
+                <a:latin typeface="Adobe Garamond Pro"/>
+                <a:ea typeface="Adobe Garamond Pro"/>
+                <a:cs typeface="Adobe Garamond Pro"/>
+              </a:defRPr>
+            </a:pPr>
+            <a:r>
+              <a:rPr sz="3600" b="1" i="0">
+                <a:solidFill>
+                  <a:srgbClr val="100C0A"/>
+                </a:solidFill>
+                <a:latin typeface="Adobe Garamond Pro"/>
+                <a:ea typeface="Adobe Garamond Pro"/>
+                <a:cs typeface="Adobe Garamond Pro"/>
+              </a:rPr>
+              <a:t>Lo que necesitamos</a:t>
+            </a:r>
+          </a:p>
+          <a:p xmlns:a="http://schemas.openxmlformats.org/drawingml/2006/main">
+            <a:pPr algn="l">
+              <a:defRPr sz="3600" b="1" i="0">
+                <a:solidFill>
+                  <a:srgbClr val="100C0A"/>
+                </a:solidFill>
+                <a:latin typeface="Adobe Garamond Pro"/>
+                <a:ea typeface="Adobe Garamond Pro"/>
+                <a:cs typeface="Adobe Garamond Pro"/>
+              </a:defRPr>
+            </a:pPr>
+            <a:r>
+              <a:rPr sz="3600" b="1" i="0">
+                <a:solidFill>
+                  <a:srgbClr val="100C0A"/>
+                </a:solidFill>
+                <a:latin typeface="Adobe Garamond Pro"/>
+                <a:ea typeface="Adobe Garamond Pro"/>
+                <a:cs typeface="Adobe Garamond Pro"/>
+              </a:rPr>
+              <a:t>resolver hoy.</a:t>
+            </a:r>
+          </a:p>
+        </p:txBody>
+      </p:sp>
+      <p:sp>
+        <p:nvSpPr>
+          <p:cNvPr id="5" name="a-n-0">
+            <a:extLst xmlns:a="http://schemas.openxmlformats.org/drawingml/2006/main">
+              <a:ext uri="{FF2B5EF4-FFF2-40B4-BE49-F238E27FC236}">
+                <a16:creationId xmlns:a16="http://schemas.microsoft.com/office/drawing/2014/main" id="{1813E1D0-CDC6-4D09-90C9-A8B71515667C}"/>
+              </a:ext>
+            </a:extLst>
+          </p:cNvPr>
+          <p:cNvSpPr>
+            <a:spLocks xmlns:a="http://schemas.openxmlformats.org/drawingml/2006/main" noGrp="1"/>
+          </p:cNvSpPr>
+          <p:nvPr/>
+        </p:nvSpPr>
+        <p:spPr>
+          <a:xfrm xmlns:a="http://schemas.openxmlformats.org/drawingml/2006/main">
+            <a:off x="685800" y="2667000"/>
+            <a:ext cx="571500" cy="400050"/>
+          </a:xfrm>
+          <a:prstGeom xmlns:a="http://schemas.openxmlformats.org/drawingml/2006/main" prst="rect">
+            <a:avLst/>
+          </a:prstGeom>
+          <a:noFill xmlns:a="http://schemas.openxmlformats.org/drawingml/2006/main"/>
+          <a:ln xmlns:a="http://schemas.openxmlformats.org/drawingml/2006/main" w="0">
+            <a:noFill/>
+            <a:prstDash val="solid"/>
+          </a:ln>
+        </p:spPr>
+        <p:txBody>
+          <a:bodyPr xmlns:a="http://schemas.openxmlformats.org/drawingml/2006/main" anchor="ctr"/>
+          <a:lstStyle xmlns:a="http://schemas.openxmlformats.org/drawingml/2006/main"/>
+          <a:p xmlns:a="http://schemas.openxmlformats.org/drawingml/2006/main">
+            <a:pPr algn="l">
+              <a:defRPr sz="1350" b="1" i="0">
+                <a:solidFill>
+                  <a:srgbClr val="A88650"/>
+                </a:solidFill>
+                <a:latin typeface="Inter"/>
+                <a:ea typeface="Inter"/>
+                <a:cs typeface="Inter"/>
+              </a:defRPr>
+            </a:pPr>
+            <a:r>
+              <a:rPr sz="1350" b="1" i="0">
+                <a:solidFill>
+                  <a:srgbClr val="A88650"/>
+                </a:solidFill>
+                <a:latin typeface="Inter"/>
+                <a:ea typeface="Inter"/>
+                <a:cs typeface="Inter"/>
+              </a:rPr>
+              <a:t>01</a:t>
+            </a:r>
+          </a:p>
+        </p:txBody>
+      </p:sp>
+      <p:sp>
+        <p:nvSpPr>
+          <p:cNvPr id="6" name="a-h-0">
+            <a:extLst xmlns:a="http://schemas.openxmlformats.org/drawingml/2006/main">
+              <a:ext uri="{FF2B5EF4-FFF2-40B4-BE49-F238E27FC236}">
+                <a16:creationId xmlns:a16="http://schemas.microsoft.com/office/drawing/2014/main" id="{28628058-E56A-4774-A301-CB759AABC317}"/>
+              </a:ext>
+            </a:extLst>
+          </p:cNvPr>
+          <p:cNvSpPr>
+            <a:spLocks xmlns:a="http://schemas.openxmlformats.org/drawingml/2006/main" noGrp="1"/>
+          </p:cNvSpPr>
+          <p:nvPr/>
+        </p:nvSpPr>
+        <p:spPr>
+          <a:xfrm xmlns:a="http://schemas.openxmlformats.org/drawingml/2006/main">
+            <a:off x="1466850" y="2667000"/>
+            <a:ext cx="2095500" cy="400050"/>
+          </a:xfrm>
+          <a:prstGeom xmlns:a="http://schemas.openxmlformats.org/drawingml/2006/main" prst="rect">
+            <a:avLst/>
+          </a:prstGeom>
+          <a:noFill xmlns:a="http://schemas.openxmlformats.org/drawingml/2006/main"/>
+          <a:ln xmlns:a="http://schemas.openxmlformats.org/drawingml/2006/main" w="0">
+            <a:noFill/>
+            <a:prstDash val="solid"/>
+          </a:ln>
+        </p:spPr>
+        <p:txBody>
+          <a:bodyPr xmlns:a="http://schemas.openxmlformats.org/drawingml/2006/main" anchor="ctr"/>
+          <a:lstStyle xmlns:a="http://schemas.openxmlformats.org/drawingml/2006/main"/>
+          <a:p xmlns:a="http://schemas.openxmlformats.org/drawingml/2006/main">
+            <a:pPr algn="l">
+              <a:defRPr sz="1800" b="1" i="0">
+                <a:solidFill>
+                  <a:srgbClr val="100C0A"/>
+                </a:solidFill>
+                <a:latin typeface="Adobe Garamond Pro"/>
+                <a:ea typeface="Adobe Garamond Pro"/>
+                <a:cs typeface="Adobe Garamond Pro"/>
+              </a:defRPr>
+            </a:pPr>
+            <a:r>
+              <a:rPr sz="1800" b="1" i="0">
+                <a:solidFill>
+                  <a:srgbClr val="100C0A"/>
+                </a:solidFill>
+                <a:latin typeface="Adobe Garamond Pro"/>
+                <a:ea typeface="Adobe Garamond Pro"/>
+                <a:cs typeface="Adobe Garamond Pro"/>
+              </a:rPr>
+              <a:t>Contexto</a:t>
+            </a:r>
+          </a:p>
+        </p:txBody>
+      </p:sp>
+      <p:sp>
+        <p:nvSpPr>
+          <p:cNvPr id="7" name="a-b-0">
+            <a:extLst xmlns:a="http://schemas.openxmlformats.org/drawingml/2006/main">
+              <a:ext uri="{FF2B5EF4-FFF2-40B4-BE49-F238E27FC236}">
+                <a16:creationId xmlns:a16="http://schemas.microsoft.com/office/drawing/2014/main" id="{F441C718-FC05-4DD3-9A4E-6037B6296872}"/>
+              </a:ext>
+            </a:extLst>
+          </p:cNvPr>
+          <p:cNvSpPr>
+            <a:spLocks xmlns:a="http://schemas.openxmlformats.org/drawingml/2006/main" noGrp="1"/>
+          </p:cNvSpPr>
+          <p:nvPr/>
+        </p:nvSpPr>
+        <p:spPr>
+          <a:xfrm xmlns:a="http://schemas.openxmlformats.org/drawingml/2006/main">
+            <a:off x="3905250" y="2667000"/>
+            <a:ext cx="5905500" cy="400050"/>
+          </a:xfrm>
+          <a:prstGeom xmlns:a="http://schemas.openxmlformats.org/drawingml/2006/main" prst="rect">
+            <a:avLst/>
+          </a:prstGeom>
+          <a:noFill xmlns:a="http://schemas.openxmlformats.org/drawingml/2006/main"/>
+          <a:ln xmlns:a="http://schemas.openxmlformats.org/drawingml/2006/main" w="0">
+            <a:noFill/>
+            <a:prstDash val="solid"/>
+          </a:ln>
+        </p:spPr>
+        <p:txBody>
+          <a:bodyPr xmlns:a="http://schemas.openxmlformats.org/drawingml/2006/main" anchor="ctr"/>
+          <a:lstStyle xmlns:a="http://schemas.openxmlformats.org/drawingml/2006/main"/>
+          <a:p xmlns:a="http://schemas.openxmlformats.org/drawingml/2006/main">
+            <a:pPr algn="l">
+              <a:defRPr sz="1275" b="0" i="0">
+                <a:solidFill>
+                  <a:srgbClr val="706862"/>
+                </a:solidFill>
+                <a:latin typeface="Inter"/>
+                <a:ea typeface="Inter"/>
+                <a:cs typeface="Inter"/>
+              </a:defRPr>
+            </a:pPr>
+            <a:r>
+              <a:rPr sz="1275" b="0" i="0">
+                <a:solidFill>
+                  <a:srgbClr val="706862"/>
+                </a:solidFill>
+                <a:latin typeface="Inter"/>
+                <a:ea typeface="Inter"/>
+                <a:cs typeface="Inter"/>
+              </a:rPr>
+              <a:t>Qué cambió y por qué importa</a:t>
+            </a:r>
+          </a:p>
+        </p:txBody>
+      </p:sp>
+      <p:sp>
+        <p:nvSpPr>
+          <p:cNvPr id="8" name="a-l-0">
+            <a:extLst xmlns:a="http://schemas.openxmlformats.org/drawingml/2006/main">
+              <a:ext uri="{FF2B5EF4-FFF2-40B4-BE49-F238E27FC236}">
+                <a16:creationId xmlns:a16="http://schemas.microsoft.com/office/drawing/2014/main" id="{E7862CFE-11E0-4011-80B4-3F0A8D65B049}"/>
+              </a:ext>
+            </a:extLst>
+          </p:cNvPr>
+          <p:cNvSpPr>
+            <a:spLocks xmlns:a="http://schemas.openxmlformats.org/drawingml/2006/main" noGrp="1"/>
+          </p:cNvSpPr>
+          <p:nvPr/>
+        </p:nvSpPr>
+        <p:spPr>
+          <a:xfrm xmlns:a="http://schemas.openxmlformats.org/drawingml/2006/main">
+            <a:off x="685800" y="3257550"/>
+            <a:ext cx="9810750" cy="9525"/>
+          </a:xfrm>
+          <a:prstGeom xmlns:a="http://schemas.openxmlformats.org/drawingml/2006/main" prst="rect">
+            <a:avLst/>
+          </a:prstGeom>
+          <a:solidFill xmlns:a="http://schemas.openxmlformats.org/drawingml/2006/main">
+            <a:srgbClr val="D8CEC3"/>
+          </a:solidFill>
+          <a:ln xmlns:a="http://schemas.openxmlformats.org/drawingml/2006/main" w="0">
+            <a:noFill/>
+            <a:prstDash val="solid"/>
+          </a:ln>
+        </p:spPr>
+      </p:sp>
+      <p:sp>
+        <p:nvSpPr>
+          <p:cNvPr id="9" name="a-n-1">
+            <a:extLst xmlns:a="http://schemas.openxmlformats.org/drawingml/2006/main">
+              <a:ext uri="{FF2B5EF4-FFF2-40B4-BE49-F238E27FC236}">
+                <a16:creationId xmlns:a16="http://schemas.microsoft.com/office/drawing/2014/main" id="{9EF86B22-C204-4B94-8364-B2F95C6F36F1}"/>
+              </a:ext>
+            </a:extLst>
+          </p:cNvPr>
+          <p:cNvSpPr>
+            <a:spLocks xmlns:a="http://schemas.openxmlformats.org/drawingml/2006/main" noGrp="1"/>
+          </p:cNvSpPr>
+          <p:nvPr/>
+        </p:nvSpPr>
+        <p:spPr>
+          <a:xfrm xmlns:a="http://schemas.openxmlformats.org/drawingml/2006/main">
+            <a:off x="685800" y="3667125"/>
+            <a:ext cx="571500" cy="400050"/>
+          </a:xfrm>
+          <a:prstGeom xmlns:a="http://schemas.openxmlformats.org/drawingml/2006/main" prst="rect">
+            <a:avLst/>
+          </a:prstGeom>
+          <a:noFill xmlns:a="http://schemas.openxmlformats.org/drawingml/2006/main"/>
+          <a:ln xmlns:a="http://schemas.openxmlformats.org/drawingml/2006/main" w="0">
+            <a:noFill/>
+            <a:prstDash val="solid"/>
+          </a:ln>
+        </p:spPr>
+        <p:txBody>
+          <a:bodyPr xmlns:a="http://schemas.openxmlformats.org/drawingml/2006/main" anchor="ctr"/>
+          <a:lstStyle xmlns:a="http://schemas.openxmlformats.org/drawingml/2006/main"/>
+          <a:p xmlns:a="http://schemas.openxmlformats.org/drawingml/2006/main">
+            <a:pPr algn="l">
+              <a:defRPr sz="1350" b="1" i="0">
+                <a:solidFill>
+                  <a:srgbClr val="A88650"/>
+                </a:solidFill>
+                <a:latin typeface="Inter"/>
+                <a:ea typeface="Inter"/>
+                <a:cs typeface="Inter"/>
+              </a:defRPr>
+            </a:pPr>
+            <a:r>
+              <a:rPr sz="1350" b="1" i="0">
+                <a:solidFill>
+                  <a:srgbClr val="A88650"/>
+                </a:solidFill>
+                <a:latin typeface="Inter"/>
+                <a:ea typeface="Inter"/>
+                <a:cs typeface="Inter"/>
+              </a:rPr>
+              <a:t>02</a:t>
+            </a:r>
+          </a:p>
+        </p:txBody>
+      </p:sp>
+      <p:sp>
+        <p:nvSpPr>
+          <p:cNvPr id="10" name="a-h-1">
+            <a:extLst xmlns:a="http://schemas.openxmlformats.org/drawingml/2006/main">
+              <a:ext uri="{FF2B5EF4-FFF2-40B4-BE49-F238E27FC236}">
+                <a16:creationId xmlns:a16="http://schemas.microsoft.com/office/drawing/2014/main" id="{1AC6DC72-B128-4F8C-A32F-4EDE7EFDE46B}"/>
+              </a:ext>
+            </a:extLst>
+          </p:cNvPr>
+          <p:cNvSpPr>
+            <a:spLocks xmlns:a="http://schemas.openxmlformats.org/drawingml/2006/main" noGrp="1"/>
+          </p:cNvSpPr>
+          <p:nvPr/>
+        </p:nvSpPr>
+        <p:spPr>
+          <a:xfrm xmlns:a="http://schemas.openxmlformats.org/drawingml/2006/main">
+            <a:off x="1466850" y="3667125"/>
+            <a:ext cx="2095500" cy="400050"/>
+          </a:xfrm>
+          <a:prstGeom xmlns:a="http://schemas.openxmlformats.org/drawingml/2006/main" prst="rect">
+            <a:avLst/>
+          </a:prstGeom>
+          <a:noFill xmlns:a="http://schemas.openxmlformats.org/drawingml/2006/main"/>
+          <a:ln xmlns:a="http://schemas.openxmlformats.org/drawingml/2006/main" w="0">
+            <a:noFill/>
+            <a:prstDash val="solid"/>
+          </a:ln>
+        </p:spPr>
+        <p:txBody>
+          <a:bodyPr xmlns:a="http://schemas.openxmlformats.org/drawingml/2006/main" anchor="ctr"/>
+          <a:lstStyle xmlns:a="http://schemas.openxmlformats.org/drawingml/2006/main"/>
+          <a:p xmlns:a="http://schemas.openxmlformats.org/drawingml/2006/main">
+            <a:pPr algn="l">
+              <a:defRPr sz="1800" b="1" i="0">
+                <a:solidFill>
+                  <a:srgbClr val="100C0A"/>
+                </a:solidFill>
+                <a:latin typeface="Adobe Garamond Pro"/>
+                <a:ea typeface="Adobe Garamond Pro"/>
+                <a:cs typeface="Adobe Garamond Pro"/>
+              </a:defRPr>
+            </a:pPr>
+            <a:r>
+              <a:rPr sz="1800" b="1" i="0">
+                <a:solidFill>
+                  <a:srgbClr val="100C0A"/>
+                </a:solidFill>
+                <a:latin typeface="Adobe Garamond Pro"/>
+                <a:ea typeface="Adobe Garamond Pro"/>
+                <a:cs typeface="Adobe Garamond Pro"/>
+              </a:rPr>
+              <a:t>Decisión</a:t>
+            </a:r>
+          </a:p>
+        </p:txBody>
+      </p:sp>
+      <p:sp>
+        <p:nvSpPr>
+          <p:cNvPr id="11" name="a-b-1">
+            <a:extLst xmlns:a="http://schemas.openxmlformats.org/drawingml/2006/main">
+              <a:ext uri="{FF2B5EF4-FFF2-40B4-BE49-F238E27FC236}">
+                <a16:creationId xmlns:a16="http://schemas.microsoft.com/office/drawing/2014/main" id="{A41C0B7A-EF09-4D02-86C3-9A17729B2F4F}"/>
+              </a:ext>
+            </a:extLst>
+          </p:cNvPr>
+          <p:cNvSpPr>
+            <a:spLocks xmlns:a="http://schemas.openxmlformats.org/drawingml/2006/main" noGrp="1"/>
+          </p:cNvSpPr>
+          <p:nvPr/>
+        </p:nvSpPr>
+        <p:spPr>
+          <a:xfrm xmlns:a="http://schemas.openxmlformats.org/drawingml/2006/main">
+            <a:off x="3905250" y="3667125"/>
+            <a:ext cx="5905500" cy="400050"/>
+          </a:xfrm>
+          <a:prstGeom xmlns:a="http://schemas.openxmlformats.org/drawingml/2006/main" prst="rect">
+            <a:avLst/>
+          </a:prstGeom>
+          <a:noFill xmlns:a="http://schemas.openxmlformats.org/drawingml/2006/main"/>
+          <a:ln xmlns:a="http://schemas.openxmlformats.org/drawingml/2006/main" w="0">
+            <a:noFill/>
+            <a:prstDash val="solid"/>
+          </a:ln>
+        </p:spPr>
+        <p:txBody>
+          <a:bodyPr xmlns:a="http://schemas.openxmlformats.org/drawingml/2006/main" anchor="ctr"/>
+          <a:lstStyle xmlns:a="http://schemas.openxmlformats.org/drawingml/2006/main"/>
+          <a:p xmlns:a="http://schemas.openxmlformats.org/drawingml/2006/main">
+            <a:pPr algn="l">
+              <a:defRPr sz="1275" b="0" i="0">
+                <a:solidFill>
+                  <a:srgbClr val="706862"/>
+                </a:solidFill>
+                <a:latin typeface="Inter"/>
+                <a:ea typeface="Inter"/>
+                <a:cs typeface="Inter"/>
+              </a:defRPr>
+            </a:pPr>
+            <a:r>
+              <a:rPr sz="1275" b="0" i="0">
+                <a:solidFill>
+                  <a:srgbClr val="706862"/>
+                </a:solidFill>
+                <a:latin typeface="Inter"/>
+                <a:ea typeface="Inter"/>
+                <a:cs typeface="Inter"/>
+              </a:rPr>
+              <a:t>Qué debemos elegir o aprobar</a:t>
+            </a:r>
+          </a:p>
+        </p:txBody>
+      </p:sp>
+      <p:sp>
+        <p:nvSpPr>
+          <p:cNvPr id="12" name="a-l-1">
+            <a:extLst xmlns:a="http://schemas.openxmlformats.org/drawingml/2006/main">
+              <a:ext uri="{FF2B5EF4-FFF2-40B4-BE49-F238E27FC236}">
+                <a16:creationId xmlns:a16="http://schemas.microsoft.com/office/drawing/2014/main" id="{C9AF1F87-5160-4358-AFDC-858F106E4812}"/>
+              </a:ext>
+            </a:extLst>
+          </p:cNvPr>
+          <p:cNvSpPr>
+            <a:spLocks xmlns:a="http://schemas.openxmlformats.org/drawingml/2006/main" noGrp="1"/>
+          </p:cNvSpPr>
+          <p:nvPr/>
+        </p:nvSpPr>
+        <p:spPr>
+          <a:xfrm xmlns:a="http://schemas.openxmlformats.org/drawingml/2006/main">
+            <a:off x="685800" y="4257675"/>
+            <a:ext cx="9810750" cy="9525"/>
+          </a:xfrm>
+          <a:prstGeom xmlns:a="http://schemas.openxmlformats.org/drawingml/2006/main" prst="rect">
+            <a:avLst/>
+          </a:prstGeom>
+          <a:solidFill xmlns:a="http://schemas.openxmlformats.org/drawingml/2006/main">
+            <a:srgbClr val="D8CEC3"/>
+          </a:solidFill>
+          <a:ln xmlns:a="http://schemas.openxmlformats.org/drawingml/2006/main" w="0">
+            <a:noFill/>
+            <a:prstDash val="solid"/>
+          </a:ln>
+        </p:spPr>
+      </p:sp>
+      <p:sp>
+        <p:nvSpPr>
+          <p:cNvPr id="13" name="a-n-2">
+            <a:extLst xmlns:a="http://schemas.openxmlformats.org/drawingml/2006/main">
+              <a:ext uri="{FF2B5EF4-FFF2-40B4-BE49-F238E27FC236}">
+                <a16:creationId xmlns:a16="http://schemas.microsoft.com/office/drawing/2014/main" id="{85EFB6DB-2F58-434F-B89B-1D70849BE276}"/>
+              </a:ext>
+            </a:extLst>
+          </p:cNvPr>
+          <p:cNvSpPr>
+            <a:spLocks xmlns:a="http://schemas.openxmlformats.org/drawingml/2006/main" noGrp="1"/>
+          </p:cNvSpPr>
+          <p:nvPr/>
+        </p:nvSpPr>
+        <p:spPr>
+          <a:xfrm xmlns:a="http://schemas.openxmlformats.org/drawingml/2006/main">
+            <a:off x="685800" y="4667250"/>
+            <a:ext cx="571500" cy="400050"/>
+          </a:xfrm>
+          <a:prstGeom xmlns:a="http://schemas.openxmlformats.org/drawingml/2006/main" prst="rect">
+            <a:avLst/>
+          </a:prstGeom>
+          <a:noFill xmlns:a="http://schemas.openxmlformats.org/drawingml/2006/main"/>
+          <a:ln xmlns:a="http://schemas.openxmlformats.org/drawingml/2006/main" w="0">
+            <a:noFill/>
+            <a:prstDash val="solid"/>
+          </a:ln>
+        </p:spPr>
+        <p:txBody>
+          <a:bodyPr xmlns:a="http://schemas.openxmlformats.org/drawingml/2006/main" anchor="ctr"/>
+          <a:lstStyle xmlns:a="http://schemas.openxmlformats.org/drawingml/2006/main"/>
+          <a:p xmlns:a="http://schemas.openxmlformats.org/drawingml/2006/main">
+            <a:pPr algn="l">
+              <a:defRPr sz="1350" b="1" i="0">
+                <a:solidFill>
+                  <a:srgbClr val="A88650"/>
+                </a:solidFill>
+                <a:latin typeface="Inter"/>
+                <a:ea typeface="Inter"/>
+                <a:cs typeface="Inter"/>
+              </a:defRPr>
+            </a:pPr>
+            <a:r>
+              <a:rPr sz="1350" b="1" i="0">
+                <a:solidFill>
+                  <a:srgbClr val="A88650"/>
+                </a:solidFill>
+                <a:latin typeface="Inter"/>
+                <a:ea typeface="Inter"/>
+                <a:cs typeface="Inter"/>
+              </a:rPr>
+              <a:t>03</a:t>
+            </a:r>
+          </a:p>
+        </p:txBody>
+      </p:sp>
+      <p:sp>
+        <p:nvSpPr>
+          <p:cNvPr id="14" name="a-h-2">
+            <a:extLst xmlns:a="http://schemas.openxmlformats.org/drawingml/2006/main">
+              <a:ext uri="{FF2B5EF4-FFF2-40B4-BE49-F238E27FC236}">
+                <a16:creationId xmlns:a16="http://schemas.microsoft.com/office/drawing/2014/main" id="{14821A81-D4A8-4F2B-9E62-792DABDD715F}"/>
+              </a:ext>
+            </a:extLst>
+          </p:cNvPr>
+          <p:cNvSpPr>
+            <a:spLocks xmlns:a="http://schemas.openxmlformats.org/drawingml/2006/main" noGrp="1"/>
+          </p:cNvSpPr>
+          <p:nvPr/>
+        </p:nvSpPr>
+        <p:spPr>
+          <a:xfrm xmlns:a="http://schemas.openxmlformats.org/drawingml/2006/main">
+            <a:off x="1466850" y="4667250"/>
+            <a:ext cx="2095500" cy="400050"/>
+          </a:xfrm>
+          <a:prstGeom xmlns:a="http://schemas.openxmlformats.org/drawingml/2006/main" prst="rect">
+            <a:avLst/>
+          </a:prstGeom>
+          <a:noFill xmlns:a="http://schemas.openxmlformats.org/drawingml/2006/main"/>
+          <a:ln xmlns:a="http://schemas.openxmlformats.org/drawingml/2006/main" w="0">
+            <a:noFill/>
+            <a:prstDash val="solid"/>
+          </a:ln>
+        </p:spPr>
+        <p:txBody>
+          <a:bodyPr xmlns:a="http://schemas.openxmlformats.org/drawingml/2006/main" anchor="ctr"/>
+          <a:lstStyle xmlns:a="http://schemas.openxmlformats.org/drawingml/2006/main"/>
+          <a:p xmlns:a="http://schemas.openxmlformats.org/drawingml/2006/main">
+            <a:pPr algn="l">
+              <a:defRPr sz="1800" b="1" i="0">
+                <a:solidFill>
+                  <a:srgbClr val="100C0A"/>
+                </a:solidFill>
+                <a:latin typeface="Adobe Garamond Pro"/>
+                <a:ea typeface="Adobe Garamond Pro"/>
+                <a:cs typeface="Adobe Garamond Pro"/>
+              </a:defRPr>
+            </a:pPr>
+            <a:r>
+              <a:rPr sz="1800" b="1" i="0">
+                <a:solidFill>
+                  <a:srgbClr val="100C0A"/>
+                </a:solidFill>
+                <a:latin typeface="Adobe Garamond Pro"/>
+                <a:ea typeface="Adobe Garamond Pro"/>
+                <a:cs typeface="Adobe Garamond Pro"/>
+              </a:rPr>
+              <a:t>Activación</a:t>
+            </a:r>
+          </a:p>
+        </p:txBody>
+      </p:sp>
+      <p:sp>
+        <p:nvSpPr>
+          <p:cNvPr id="15" name="a-b-2">
+            <a:extLst xmlns:a="http://schemas.openxmlformats.org/drawingml/2006/main">
+              <a:ext uri="{FF2B5EF4-FFF2-40B4-BE49-F238E27FC236}">
+                <a16:creationId xmlns:a16="http://schemas.microsoft.com/office/drawing/2014/main" id="{548A5FC4-6B92-45EB-A7E9-E01C567B4CEC}"/>
+              </a:ext>
+            </a:extLst>
+          </p:cNvPr>
+          <p:cNvSpPr>
+            <a:spLocks xmlns:a="http://schemas.openxmlformats.org/drawingml/2006/main" noGrp="1"/>
+          </p:cNvSpPr>
+          <p:nvPr/>
+        </p:nvSpPr>
+        <p:spPr>
+          <a:xfrm xmlns:a="http://schemas.openxmlformats.org/drawingml/2006/main">
+            <a:off x="3905250" y="4667250"/>
+            <a:ext cx="5905500" cy="400050"/>
+          </a:xfrm>
+          <a:prstGeom xmlns:a="http://schemas.openxmlformats.org/drawingml/2006/main" prst="rect">
+            <a:avLst/>
+          </a:prstGeom>
+          <a:noFill xmlns:a="http://schemas.openxmlformats.org/drawingml/2006/main"/>
+          <a:ln xmlns:a="http://schemas.openxmlformats.org/drawingml/2006/main" w="0">
+            <a:noFill/>
+            <a:prstDash val="solid"/>
+          </a:ln>
+        </p:spPr>
+        <p:txBody>
+          <a:bodyPr xmlns:a="http://schemas.openxmlformats.org/drawingml/2006/main" anchor="ctr"/>
+          <a:lstStyle xmlns:a="http://schemas.openxmlformats.org/drawingml/2006/main"/>
+          <a:p xmlns:a="http://schemas.openxmlformats.org/drawingml/2006/main">
+            <a:pPr algn="l">
+              <a:defRPr sz="1275" b="0" i="0">
+                <a:solidFill>
+                  <a:srgbClr val="706862"/>
+                </a:solidFill>
+                <a:latin typeface="Inter"/>
+                <a:ea typeface="Inter"/>
+                <a:cs typeface="Inter"/>
+              </a:defRPr>
+            </a:pPr>
+            <a:r>
+              <a:rPr sz="1275" b="0" i="0">
+                <a:solidFill>
+                  <a:srgbClr val="706862"/>
+                </a:solidFill>
+                <a:latin typeface="Inter"/>
+                <a:ea typeface="Inter"/>
+                <a:cs typeface="Inter"/>
+              </a:rPr>
+              <a:t>Quién hace qué y cuándo</a:t>
+            </a:r>
+          </a:p>
+        </p:txBody>
+      </p:sp>
+      <p:sp>
+        <p:nvSpPr>
+          <p:cNvPr id="16" name="a-l-2">
+            <a:extLst xmlns:a="http://schemas.openxmlformats.org/drawingml/2006/main">
+              <a:ext uri="{FF2B5EF4-FFF2-40B4-BE49-F238E27FC236}">
+                <a16:creationId xmlns:a16="http://schemas.microsoft.com/office/drawing/2014/main" id="{704D0BB3-9601-47B7-9092-39AECD35870A}"/>
+              </a:ext>
+            </a:extLst>
+          </p:cNvPr>
+          <p:cNvSpPr>
+            <a:spLocks xmlns:a="http://schemas.openxmlformats.org/drawingml/2006/main" noGrp="1"/>
+          </p:cNvSpPr>
+          <p:nvPr/>
+        </p:nvSpPr>
+        <p:spPr>
+          <a:xfrm xmlns:a="http://schemas.openxmlformats.org/drawingml/2006/main">
+            <a:off x="685800" y="5257800"/>
+            <a:ext cx="9810750" cy="9525"/>
+          </a:xfrm>
+          <a:prstGeom xmlns:a="http://schemas.openxmlformats.org/drawingml/2006/main" prst="rect">
+            <a:avLst/>
+          </a:prstGeom>
+          <a:solidFill xmlns:a="http://schemas.openxmlformats.org/drawingml/2006/main">
+            <a:srgbClr val="D8CEC3"/>
+          </a:solidFill>
+          <a:ln xmlns:a="http://schemas.openxmlformats.org/drawingml/2006/main" w="0">
+            <a:noFill/>
+            <a:prstDash val="solid"/>
+          </a:ln>
+        </p:spPr>
+      </p:sp>
+    </p:spTree>
+    <p:extLst>
+      <p:ext uri="{BB962C8B-B14F-4D97-AF65-F5344CB8AC3E}">
+        <p14:creationId xmlns:p14="http://schemas.microsoft.com/office/powerpoint/2010/main" val="232016878"/>
+      </p:ext>
+    </p:extLst>
+  </p:cSld>
+</p:sld>
+</file>
+
+<file path=ppt/slides/slide23.xml><?xml version="1.0" encoding="utf-8"?>
+<p:sld xmlns:p="http://schemas.openxmlformats.org/presentationml/2006/main">
+  <p:cSld>
+    <p:bg>
+      <p:bgPr>
+        <a:solidFill xmlns:a="http://schemas.openxmlformats.org/drawingml/2006/main">
+          <a:srgbClr val="FBF8F3"/>
+        </a:solidFill>
+      </p:bgPr>
+    </p:bg>
+    <p:spTree>
+      <p:nvGrpSpPr>
+        <p:cNvPr id="1" name=""/>
+        <p:cNvGrpSpPr/>
+        <p:nvPr/>
+      </p:nvGrpSpPr>
+      <p:grpSpPr>
+        <a:xfrm xmlns:a="http://schemas.openxmlformats.org/drawingml/2006/main"/>
+      </p:grpSpPr>
+      <p:sp>
+        <p:nvSpPr>
+          <p:cNvPr id="21" name="brand">
+            <a:extLst xmlns:a="http://schemas.openxmlformats.org/drawingml/2006/main">
+              <a:ext uri="{FF2B5EF4-FFF2-40B4-BE49-F238E27FC236}">
+                <a16:creationId xmlns:a16="http://schemas.microsoft.com/office/drawing/2014/main" id="{DAAAD9D3-6DA5-4A06-B10A-E998ADF128E6}"/>
+              </a:ext>
+            </a:extLst>
+          </p:cNvPr>
+          <p:cNvSpPr>
+            <a:spLocks xmlns:a="http://schemas.openxmlformats.org/drawingml/2006/main" noGrp="1"/>
+          </p:cNvSpPr>
+          <p:nvPr/>
+        </p:nvSpPr>
+        <p:spPr>
+          <a:xfrm xmlns:a="http://schemas.openxmlformats.org/drawingml/2006/main">
+            <a:off x="685800" y="266700"/>
+            <a:ext cx="2857500" cy="228600"/>
+          </a:xfrm>
+          <a:prstGeom xmlns:a="http://schemas.openxmlformats.org/drawingml/2006/main" prst="rect">
+            <a:avLst/>
+          </a:prstGeom>
+          <a:noFill xmlns:a="http://schemas.openxmlformats.org/drawingml/2006/main"/>
+          <a:ln xmlns:a="http://schemas.openxmlformats.org/drawingml/2006/main" w="0">
+            <a:noFill/>
+            <a:prstDash val="solid"/>
+          </a:ln>
+        </p:spPr>
+        <p:txBody>
+          <a:bodyPr xmlns:a="http://schemas.openxmlformats.org/drawingml/2006/main" anchor="ctr"/>
+          <a:lstStyle xmlns:a="http://schemas.openxmlformats.org/drawingml/2006/main"/>
+          <a:p xmlns:a="http://schemas.openxmlformats.org/drawingml/2006/main">
+            <a:pPr algn="l">
+              <a:defRPr sz="825" b="1" i="0">
+                <a:solidFill>
+                  <a:srgbClr val="A88650"/>
+                </a:solidFill>
+                <a:latin typeface="Inter"/>
+                <a:ea typeface="Inter"/>
+                <a:cs typeface="Inter"/>
+              </a:defRPr>
+            </a:pPr>
+            <a:r>
+              <a:rPr sz="825" b="1" i="0">
+                <a:solidFill>
+                  <a:srgbClr val="A88650"/>
+                </a:solidFill>
+                <a:latin typeface="Inter"/>
+                <a:ea typeface="Inter"/>
+                <a:cs typeface="Inter"/>
+              </a:rPr>
+              <a:t>RON CARÚPANO</a:t>
+            </a:r>
+          </a:p>
+        </p:txBody>
+      </p:sp>
+      <p:sp>
+        <p:nvSpPr>
+          <p:cNvPr id="2" name="page">
+            <a:extLst xmlns:a="http://schemas.openxmlformats.org/drawingml/2006/main">
+              <a:ext uri="{FF2B5EF4-FFF2-40B4-BE49-F238E27FC236}">
+                <a16:creationId xmlns:a16="http://schemas.microsoft.com/office/drawing/2014/main" id="{F05438F3-88EC-4DAC-A91E-40EA201C8438}"/>
+              </a:ext>
+            </a:extLst>
+          </p:cNvPr>
+          <p:cNvSpPr>
+            <a:spLocks xmlns:a="http://schemas.openxmlformats.org/drawingml/2006/main" noGrp="1"/>
+          </p:cNvSpPr>
+          <p:nvPr/>
+        </p:nvSpPr>
+        <p:spPr>
+          <a:xfrm xmlns:a="http://schemas.openxmlformats.org/drawingml/2006/main">
+            <a:off x="11049000" y="266700"/>
+            <a:ext cx="457200" cy="228600"/>
+          </a:xfrm>
+          <a:prstGeom xmlns:a="http://schemas.openxmlformats.org/drawingml/2006/main" prst="rect">
+            <a:avLst/>
+          </a:prstGeom>
+          <a:noFill xmlns:a="http://schemas.openxmlformats.org/drawingml/2006/main"/>
+          <a:ln xmlns:a="http://schemas.openxmlformats.org/drawingml/2006/main" w="0">
+            <a:noFill/>
+            <a:prstDash val="solid"/>
+          </a:ln>
+        </p:spPr>
+        <p:txBody>
+          <a:bodyPr xmlns:a="http://schemas.openxmlformats.org/drawingml/2006/main" anchor="ctr"/>
+          <a:lstStyle xmlns:a="http://schemas.openxmlformats.org/drawingml/2006/main"/>
+          <a:p xmlns:a="http://schemas.openxmlformats.org/drawingml/2006/main">
+            <a:pPr algn="r">
+              <a:defRPr sz="750" b="0" i="0">
+                <a:solidFill>
+                  <a:srgbClr val="706862"/>
+                </a:solidFill>
+                <a:latin typeface="Inter"/>
+                <a:ea typeface="Inter"/>
+                <a:cs typeface="Inter"/>
+              </a:defRPr>
+            </a:pPr>
+            <a:r>
+              <a:rPr sz="750" b="0" i="0">
+                <a:solidFill>
+                  <a:srgbClr val="706862"/>
+                </a:solidFill>
+                <a:latin typeface="Inter"/>
+                <a:ea typeface="Inter"/>
+                <a:cs typeface="Inter"/>
+              </a:rPr>
+              <a:t>23</a:t>
+            </a:r>
+          </a:p>
+        </p:txBody>
+      </p:sp>
+      <p:sp>
+        <p:nvSpPr>
+          <p:cNvPr id="3" name="eyebrow">
+            <a:extLst xmlns:a="http://schemas.openxmlformats.org/drawingml/2006/main">
+              <a:ext uri="{FF2B5EF4-FFF2-40B4-BE49-F238E27FC236}">
+                <a16:creationId xmlns:a16="http://schemas.microsoft.com/office/drawing/2014/main" id="{ED9B81DF-4371-4839-8303-390185B2053F}"/>
+              </a:ext>
+            </a:extLst>
+          </p:cNvPr>
+          <p:cNvSpPr>
+            <a:spLocks xmlns:a="http://schemas.openxmlformats.org/drawingml/2006/main" noGrp="1"/>
+          </p:cNvSpPr>
+          <p:nvPr/>
+        </p:nvSpPr>
+        <p:spPr>
+          <a:xfrm xmlns:a="http://schemas.openxmlformats.org/drawingml/2006/main">
+            <a:off x="685800" y="781050"/>
+            <a:ext cx="4000500" cy="228600"/>
+          </a:xfrm>
+          <a:prstGeom xmlns:a="http://schemas.openxmlformats.org/drawingml/2006/main" prst="rect">
+            <a:avLst/>
+          </a:prstGeom>
+          <a:noFill xmlns:a="http://schemas.openxmlformats.org/drawingml/2006/main"/>
+          <a:ln xmlns:a="http://schemas.openxmlformats.org/drawingml/2006/main" w="0">
+            <a:noFill/>
+            <a:prstDash val="solid"/>
+          </a:ln>
+        </p:spPr>
+        <p:txBody>
+          <a:bodyPr xmlns:a="http://schemas.openxmlformats.org/drawingml/2006/main" anchor="ctr"/>
+          <a:lstStyle xmlns:a="http://schemas.openxmlformats.org/drawingml/2006/main"/>
+          <a:p xmlns:a="http://schemas.openxmlformats.org/drawingml/2006/main">
+            <a:pPr algn="l">
+              <a:defRPr sz="825" b="1" i="0">
+                <a:solidFill>
+                  <a:srgbClr val="A88650"/>
+                </a:solidFill>
+                <a:latin typeface="Inter"/>
+                <a:ea typeface="Inter"/>
+                <a:cs typeface="Inter"/>
+              </a:defRPr>
+            </a:pPr>
+            <a:r>
+              <a:rPr sz="825" b="1" i="0">
+                <a:solidFill>
+                  <a:srgbClr val="A88650"/>
+                </a:solidFill>
+                <a:latin typeface="Inter"/>
+                <a:ea typeface="Inter"/>
+                <a:cs typeface="Inter"/>
+              </a:rPr>
+              <a:t>EQUIPO / GOBERNANZA</a:t>
+            </a:r>
+          </a:p>
+        </p:txBody>
+      </p:sp>
+      <p:sp>
+        <p:nvSpPr>
+          <p:cNvPr id="4" name="title">
+            <a:extLst xmlns:a="http://schemas.openxmlformats.org/drawingml/2006/main">
+              <a:ext uri="{FF2B5EF4-FFF2-40B4-BE49-F238E27FC236}">
+                <a16:creationId xmlns:a16="http://schemas.microsoft.com/office/drawing/2014/main" id="{D30B25AB-48ED-4C72-8CCC-649CA6D25510}"/>
+              </a:ext>
+            </a:extLst>
+          </p:cNvPr>
+          <p:cNvSpPr>
+            <a:spLocks xmlns:a="http://schemas.openxmlformats.org/drawingml/2006/main" noGrp="1"/>
+          </p:cNvSpPr>
+          <p:nvPr/>
+        </p:nvSpPr>
+        <p:spPr>
+          <a:xfrm xmlns:a="http://schemas.openxmlformats.org/drawingml/2006/main">
+            <a:off x="685800" y="1009650"/>
+            <a:ext cx="6953250" cy="1047750"/>
+          </a:xfrm>
+          <a:prstGeom xmlns:a="http://schemas.openxmlformats.org/drawingml/2006/main" prst="rect">
+            <a:avLst/>
+          </a:prstGeom>
+          <a:noFill xmlns:a="http://schemas.openxmlformats.org/drawingml/2006/main"/>
+          <a:ln xmlns:a="http://schemas.openxmlformats.org/drawingml/2006/main" w="0">
+            <a:noFill/>
+            <a:prstDash val="solid"/>
+          </a:ln>
+        </p:spPr>
+        <p:txBody>
+          <a:bodyPr xmlns:a="http://schemas.openxmlformats.org/drawingml/2006/main" anchor="ctr"/>
+          <a:lstStyle xmlns:a="http://schemas.openxmlformats.org/drawingml/2006/main"/>
+          <a:p xmlns:a="http://schemas.openxmlformats.org/drawingml/2006/main">
+            <a:pPr algn="l">
+              <a:defRPr sz="3600" b="1" i="0">
+                <a:solidFill>
+                  <a:srgbClr val="100C0A"/>
+                </a:solidFill>
+                <a:latin typeface="Adobe Garamond Pro"/>
+                <a:ea typeface="Adobe Garamond Pro"/>
+                <a:cs typeface="Adobe Garamond Pro"/>
+              </a:defRPr>
+            </a:pPr>
+            <a:r>
+              <a:rPr sz="3600" b="1" i="0">
+                <a:solidFill>
+                  <a:srgbClr val="100C0A"/>
+                </a:solidFill>
+                <a:latin typeface="Adobe Garamond Pro"/>
+                <a:ea typeface="Adobe Garamond Pro"/>
+                <a:cs typeface="Adobe Garamond Pro"/>
+              </a:rPr>
+              <a:t>Una marca consistente</a:t>
+            </a:r>
+          </a:p>
+          <a:p xmlns:a="http://schemas.openxmlformats.org/drawingml/2006/main">
+            <a:pPr algn="l">
+              <a:defRPr sz="3600" b="1" i="0">
+                <a:solidFill>
+                  <a:srgbClr val="100C0A"/>
+                </a:solidFill>
+                <a:latin typeface="Adobe Garamond Pro"/>
+                <a:ea typeface="Adobe Garamond Pro"/>
+                <a:cs typeface="Adobe Garamond Pro"/>
+              </a:defRPr>
+            </a:pPr>
+            <a:r>
+              <a:rPr sz="3600" b="1" i="0">
+                <a:solidFill>
+                  <a:srgbClr val="100C0A"/>
+                </a:solidFill>
+                <a:latin typeface="Adobe Garamond Pro"/>
+                <a:ea typeface="Adobe Garamond Pro"/>
+                <a:cs typeface="Adobe Garamond Pro"/>
+              </a:rPr>
+              <a:t>necesita propietarios claros.</a:t>
+            </a:r>
+          </a:p>
+        </p:txBody>
+      </p:sp>
+      <p:sp>
+        <p:nvSpPr>
+          <p:cNvPr id="5" name="role-0">
+            <a:extLst xmlns:a="http://schemas.openxmlformats.org/drawingml/2006/main">
+              <a:ext uri="{FF2B5EF4-FFF2-40B4-BE49-F238E27FC236}">
+                <a16:creationId xmlns:a16="http://schemas.microsoft.com/office/drawing/2014/main" id="{F9713E5B-9497-4D12-AB61-E5DC862FACA8}"/>
+              </a:ext>
+            </a:extLst>
+          </p:cNvPr>
+          <p:cNvSpPr>
+            <a:spLocks xmlns:a="http://schemas.openxmlformats.org/drawingml/2006/main" noGrp="1"/>
+          </p:cNvSpPr>
+          <p:nvPr/>
+        </p:nvSpPr>
+        <p:spPr>
+          <a:xfrm xmlns:a="http://schemas.openxmlformats.org/drawingml/2006/main">
+            <a:off x="685800" y="2857500"/>
+            <a:ext cx="2381250" cy="2381250"/>
+          </a:xfrm>
+          <a:prstGeom xmlns:a="http://schemas.openxmlformats.org/drawingml/2006/main" prst="rect">
+            <a:avLst/>
+          </a:prstGeom>
+          <a:solidFill xmlns:a="http://schemas.openxmlformats.org/drawingml/2006/main">
+            <a:srgbClr val="100C0A"/>
+          </a:solidFill>
+          <a:ln xmlns:a="http://schemas.openxmlformats.org/drawingml/2006/main" w="0">
+            <a:noFill/>
+            <a:prstDash val="solid"/>
+          </a:ln>
+        </p:spPr>
+      </p:sp>
+      <p:sp>
+        <p:nvSpPr>
+          <p:cNvPr id="6" name="role-tag-0">
+            <a:extLst xmlns:a="http://schemas.openxmlformats.org/drawingml/2006/main">
+              <a:ext uri="{FF2B5EF4-FFF2-40B4-BE49-F238E27FC236}">
+                <a16:creationId xmlns:a16="http://schemas.microsoft.com/office/drawing/2014/main" id="{95A8C192-1841-4705-98E1-4F7096863711}"/>
+              </a:ext>
+            </a:extLst>
+          </p:cNvPr>
+          <p:cNvSpPr>
+            <a:spLocks xmlns:a="http://schemas.openxmlformats.org/drawingml/2006/main" noGrp="1"/>
+          </p:cNvSpPr>
+          <p:nvPr/>
+        </p:nvSpPr>
+        <p:spPr>
+          <a:xfrm xmlns:a="http://schemas.openxmlformats.org/drawingml/2006/main">
+            <a:off x="914400" y="3086100"/>
+            <a:ext cx="1905000" cy="266700"/>
+          </a:xfrm>
+          <a:prstGeom xmlns:a="http://schemas.openxmlformats.org/drawingml/2006/main" prst="rect">
+            <a:avLst/>
+          </a:prstGeom>
+          <a:noFill xmlns:a="http://schemas.openxmlformats.org/drawingml/2006/main"/>
+          <a:ln xmlns:a="http://schemas.openxmlformats.org/drawingml/2006/main" w="0">
+            <a:noFill/>
+            <a:prstDash val="solid"/>
+          </a:ln>
+        </p:spPr>
+        <p:txBody>
+          <a:bodyPr xmlns:a="http://schemas.openxmlformats.org/drawingml/2006/main" anchor="ctr"/>
+          <a:lstStyle xmlns:a="http://schemas.openxmlformats.org/drawingml/2006/main"/>
+          <a:p xmlns:a="http://schemas.openxmlformats.org/drawingml/2006/main">
+            <a:pPr algn="l">
+              <a:defRPr sz="825" b="1" i="0">
+                <a:solidFill>
+                  <a:srgbClr val="D5B879"/>
+                </a:solidFill>
+                <a:latin typeface="Inter"/>
+                <a:ea typeface="Inter"/>
+                <a:cs typeface="Inter"/>
+              </a:defRPr>
+            </a:pPr>
+            <a:r>
+              <a:rPr sz="825" b="1" i="0">
+                <a:solidFill>
+                  <a:srgbClr val="D5B879"/>
+                </a:solidFill>
+                <a:latin typeface="Inter"/>
+                <a:ea typeface="Inter"/>
+                <a:cs typeface="Inter"/>
+              </a:rPr>
+              <a:t>DIRECCIÓN</a:t>
+            </a:r>
+          </a:p>
+        </p:txBody>
+      </p:sp>
+      <p:sp>
+        <p:nvSpPr>
+          <p:cNvPr id="7" name="role-name-0">
+            <a:extLst xmlns:a="http://schemas.openxmlformats.org/drawingml/2006/main">
+              <a:ext uri="{FF2B5EF4-FFF2-40B4-BE49-F238E27FC236}">
+                <a16:creationId xmlns:a16="http://schemas.microsoft.com/office/drawing/2014/main" id="{59AD8753-D1E8-4951-BA66-00471A0A7F88}"/>
+              </a:ext>
+            </a:extLst>
+          </p:cNvPr>
+          <p:cNvSpPr>
+            <a:spLocks xmlns:a="http://schemas.openxmlformats.org/drawingml/2006/main" noGrp="1"/>
+          </p:cNvSpPr>
+          <p:nvPr/>
+        </p:nvSpPr>
+        <p:spPr>
+          <a:xfrm xmlns:a="http://schemas.openxmlformats.org/drawingml/2006/main">
+            <a:off x="914400" y="3638550"/>
+            <a:ext cx="1905000" cy="495300"/>
+          </a:xfrm>
+          <a:prstGeom xmlns:a="http://schemas.openxmlformats.org/drawingml/2006/main" prst="rect">
+            <a:avLst/>
+          </a:prstGeom>
+          <a:noFill xmlns:a="http://schemas.openxmlformats.org/drawingml/2006/main"/>
+          <a:ln xmlns:a="http://schemas.openxmlformats.org/drawingml/2006/main" w="0">
+            <a:noFill/>
+            <a:prstDash val="solid"/>
+          </a:ln>
+        </p:spPr>
+        <p:txBody>
+          <a:bodyPr xmlns:a="http://schemas.openxmlformats.org/drawingml/2006/main" anchor="ctr"/>
+          <a:lstStyle xmlns:a="http://schemas.openxmlformats.org/drawingml/2006/main"/>
+          <a:p xmlns:a="http://schemas.openxmlformats.org/drawingml/2006/main">
+            <a:pPr algn="l">
+              <a:defRPr sz="1800" b="1" i="0">
+                <a:solidFill>
+                  <a:srgbClr val="F3EEE6"/>
+                </a:solidFill>
+                <a:latin typeface="Adobe Garamond Pro"/>
+                <a:ea typeface="Adobe Garamond Pro"/>
+                <a:cs typeface="Adobe Garamond Pro"/>
+              </a:defRPr>
+            </a:pPr>
+            <a:r>
+              <a:rPr sz="1800" b="1" i="0">
+                <a:solidFill>
+                  <a:srgbClr val="F3EEE6"/>
+                </a:solidFill>
+                <a:latin typeface="Adobe Garamond Pro"/>
+                <a:ea typeface="Adobe Garamond Pro"/>
+                <a:cs typeface="Adobe Garamond Pro"/>
+              </a:rPr>
+              <a:t>Nombre / rol</a:t>
+            </a:r>
+          </a:p>
+        </p:txBody>
+      </p:sp>
+      <p:sp>
+        <p:nvSpPr>
+          <p:cNvPr id="8" name="role-job-0">
+            <a:extLst xmlns:a="http://schemas.openxmlformats.org/drawingml/2006/main">
+              <a:ext uri="{FF2B5EF4-FFF2-40B4-BE49-F238E27FC236}">
+                <a16:creationId xmlns:a16="http://schemas.microsoft.com/office/drawing/2014/main" id="{A36B4A3D-F54C-4DC9-ABC7-40E5564F6820}"/>
+              </a:ext>
+            </a:extLst>
+          </p:cNvPr>
+          <p:cNvSpPr>
+            <a:spLocks xmlns:a="http://schemas.openxmlformats.org/drawingml/2006/main" noGrp="1"/>
+          </p:cNvSpPr>
+          <p:nvPr/>
+        </p:nvSpPr>
+        <p:spPr>
+          <a:xfrm xmlns:a="http://schemas.openxmlformats.org/drawingml/2006/main">
+            <a:off x="914400" y="4400550"/>
+            <a:ext cx="1905000" cy="514350"/>
+          </a:xfrm>
+          <a:prstGeom xmlns:a="http://schemas.openxmlformats.org/drawingml/2006/main" prst="rect">
+            <a:avLst/>
+          </a:prstGeom>
+          <a:noFill xmlns:a="http://schemas.openxmlformats.org/drawingml/2006/main"/>
+          <a:ln xmlns:a="http://schemas.openxmlformats.org/drawingml/2006/main" w="0">
+            <a:noFill/>
+            <a:prstDash val="solid"/>
+          </a:ln>
+        </p:spPr>
+        <p:txBody>
+          <a:bodyPr xmlns:a="http://schemas.openxmlformats.org/drawingml/2006/main" anchor="ctr"/>
+          <a:lstStyle xmlns:a="http://schemas.openxmlformats.org/drawingml/2006/main"/>
+          <a:p xmlns:a="http://schemas.openxmlformats.org/drawingml/2006/main">
+            <a:pPr algn="l">
+              <a:defRPr sz="1125" b="0" i="0">
+                <a:solidFill>
+                  <a:srgbClr val="FFFFFF">
+                    <a:alpha val="60000"/>
+                  </a:srgbClr>
+                </a:solidFill>
+                <a:latin typeface="Inter"/>
+                <a:ea typeface="Inter"/>
+                <a:cs typeface="Inter"/>
+              </a:defRPr>
+            </a:pPr>
+            <a:r>
+              <a:rPr sz="1125" b="0" i="0">
+                <a:solidFill>
+                  <a:srgbClr val="FFFFFF">
+                    <a:alpha val="60000"/>
+                  </a:srgbClr>
+                </a:solidFill>
+                <a:latin typeface="Inter"/>
+                <a:ea typeface="Inter"/>
+                <a:cs typeface="Inter"/>
+              </a:rPr>
+              <a:t>Define la decisión</a:t>
+            </a:r>
+          </a:p>
+        </p:txBody>
+      </p:sp>
+      <p:sp>
+        <p:nvSpPr>
+          <p:cNvPr id="9" name="role-1">
+            <a:extLst xmlns:a="http://schemas.openxmlformats.org/drawingml/2006/main">
+              <a:ext uri="{FF2B5EF4-FFF2-40B4-BE49-F238E27FC236}">
+                <a16:creationId xmlns:a16="http://schemas.microsoft.com/office/drawing/2014/main" id="{6D3EA23C-4744-4F8C-B6ED-5A8CA213ECD3}"/>
+              </a:ext>
+            </a:extLst>
+          </p:cNvPr>
+          <p:cNvSpPr>
+            <a:spLocks xmlns:a="http://schemas.openxmlformats.org/drawingml/2006/main" noGrp="1"/>
+          </p:cNvSpPr>
+          <p:nvPr/>
+        </p:nvSpPr>
+        <p:spPr>
+          <a:xfrm xmlns:a="http://schemas.openxmlformats.org/drawingml/2006/main">
+            <a:off x="3352800" y="2857500"/>
+            <a:ext cx="2381250" cy="2381250"/>
+          </a:xfrm>
+          <a:prstGeom xmlns:a="http://schemas.openxmlformats.org/drawingml/2006/main" prst="rect">
+            <a:avLst/>
+          </a:prstGeom>
+          <a:solidFill xmlns:a="http://schemas.openxmlformats.org/drawingml/2006/main">
+            <a:srgbClr val="183653"/>
+          </a:solidFill>
+          <a:ln xmlns:a="http://schemas.openxmlformats.org/drawingml/2006/main" w="0">
+            <a:noFill/>
+            <a:prstDash val="solid"/>
+          </a:ln>
+        </p:spPr>
+      </p:sp>
+      <p:sp>
+        <p:nvSpPr>
+          <p:cNvPr id="10" name="role-tag-1">
+            <a:extLst xmlns:a="http://schemas.openxmlformats.org/drawingml/2006/main">
+              <a:ext uri="{FF2B5EF4-FFF2-40B4-BE49-F238E27FC236}">
+                <a16:creationId xmlns:a16="http://schemas.microsoft.com/office/drawing/2014/main" id="{ED144154-3D5F-4682-8405-2DDCBBC92644}"/>
+              </a:ext>
+            </a:extLst>
+          </p:cNvPr>
+          <p:cNvSpPr>
+            <a:spLocks xmlns:a="http://schemas.openxmlformats.org/drawingml/2006/main" noGrp="1"/>
+          </p:cNvSpPr>
+          <p:nvPr/>
+        </p:nvSpPr>
+        <p:spPr>
+          <a:xfrm xmlns:a="http://schemas.openxmlformats.org/drawingml/2006/main">
+            <a:off x="3581400" y="3086100"/>
+            <a:ext cx="1905000" cy="266700"/>
+          </a:xfrm>
+          <a:prstGeom xmlns:a="http://schemas.openxmlformats.org/drawingml/2006/main" prst="rect">
+            <a:avLst/>
+          </a:prstGeom>
+          <a:noFill xmlns:a="http://schemas.openxmlformats.org/drawingml/2006/main"/>
+          <a:ln xmlns:a="http://schemas.openxmlformats.org/drawingml/2006/main" w="0">
+            <a:noFill/>
+            <a:prstDash val="solid"/>
+          </a:ln>
+        </p:spPr>
+        <p:txBody>
+          <a:bodyPr xmlns:a="http://schemas.openxmlformats.org/drawingml/2006/main" anchor="ctr"/>
+          <a:lstStyle xmlns:a="http://schemas.openxmlformats.org/drawingml/2006/main"/>
+          <a:p xmlns:a="http://schemas.openxmlformats.org/drawingml/2006/main">
+            <a:pPr algn="l">
+              <a:defRPr sz="825" b="1" i="0">
+                <a:solidFill>
+                  <a:srgbClr val="D5B879"/>
+                </a:solidFill>
+                <a:latin typeface="Inter"/>
+                <a:ea typeface="Inter"/>
+                <a:cs typeface="Inter"/>
+              </a:defRPr>
+            </a:pPr>
+            <a:r>
+              <a:rPr sz="825" b="1" i="0">
+                <a:solidFill>
+                  <a:srgbClr val="D5B879"/>
+                </a:solidFill>
+                <a:latin typeface="Inter"/>
+                <a:ea typeface="Inter"/>
+                <a:cs typeface="Inter"/>
+              </a:rPr>
+              <a:t>MARCA</a:t>
+            </a:r>
+          </a:p>
+        </p:txBody>
+      </p:sp>
+      <p:sp>
+        <p:nvSpPr>
+          <p:cNvPr id="11" name="role-name-1">
+            <a:extLst xmlns:a="http://schemas.openxmlformats.org/drawingml/2006/main">
+              <a:ext uri="{FF2B5EF4-FFF2-40B4-BE49-F238E27FC236}">
+                <a16:creationId xmlns:a16="http://schemas.microsoft.com/office/drawing/2014/main" id="{AC53F036-71C6-477A-8130-A7E0B6C69D05}"/>
+              </a:ext>
+            </a:extLst>
+          </p:cNvPr>
+          <p:cNvSpPr>
+            <a:spLocks xmlns:a="http://schemas.openxmlformats.org/drawingml/2006/main" noGrp="1"/>
+          </p:cNvSpPr>
+          <p:nvPr/>
+        </p:nvSpPr>
+        <p:spPr>
+          <a:xfrm xmlns:a="http://schemas.openxmlformats.org/drawingml/2006/main">
+            <a:off x="3581400" y="3638550"/>
+            <a:ext cx="1905000" cy="495300"/>
+          </a:xfrm>
+          <a:prstGeom xmlns:a="http://schemas.openxmlformats.org/drawingml/2006/main" prst="rect">
+            <a:avLst/>
+          </a:prstGeom>
+          <a:noFill xmlns:a="http://schemas.openxmlformats.org/drawingml/2006/main"/>
+          <a:ln xmlns:a="http://schemas.openxmlformats.org/drawingml/2006/main" w="0">
+            <a:noFill/>
+            <a:prstDash val="solid"/>
+          </a:ln>
+        </p:spPr>
+        <p:txBody>
+          <a:bodyPr xmlns:a="http://schemas.openxmlformats.org/drawingml/2006/main" anchor="ctr"/>
+          <a:lstStyle xmlns:a="http://schemas.openxmlformats.org/drawingml/2006/main"/>
+          <a:p xmlns:a="http://schemas.openxmlformats.org/drawingml/2006/main">
+            <a:pPr algn="l">
+              <a:defRPr sz="1800" b="1" i="0">
+                <a:solidFill>
+                  <a:srgbClr val="F3EEE6"/>
+                </a:solidFill>
+                <a:latin typeface="Adobe Garamond Pro"/>
+                <a:ea typeface="Adobe Garamond Pro"/>
+                <a:cs typeface="Adobe Garamond Pro"/>
+              </a:defRPr>
+            </a:pPr>
+            <a:r>
+              <a:rPr sz="1800" b="1" i="0">
+                <a:solidFill>
+                  <a:srgbClr val="F3EEE6"/>
+                </a:solidFill>
+                <a:latin typeface="Adobe Garamond Pro"/>
+                <a:ea typeface="Adobe Garamond Pro"/>
+                <a:cs typeface="Adobe Garamond Pro"/>
+              </a:rPr>
+              <a:t>Nombre / rol</a:t>
+            </a:r>
+          </a:p>
+        </p:txBody>
+      </p:sp>
+      <p:sp>
+        <p:nvSpPr>
+          <p:cNvPr id="12" name="role-job-1">
+            <a:extLst xmlns:a="http://schemas.openxmlformats.org/drawingml/2006/main">
+              <a:ext uri="{FF2B5EF4-FFF2-40B4-BE49-F238E27FC236}">
+                <a16:creationId xmlns:a16="http://schemas.microsoft.com/office/drawing/2014/main" id="{8BBFBCAB-ACBE-4040-9810-CBC8A41687E2}"/>
+              </a:ext>
+            </a:extLst>
+          </p:cNvPr>
+          <p:cNvSpPr>
+            <a:spLocks xmlns:a="http://schemas.openxmlformats.org/drawingml/2006/main" noGrp="1"/>
+          </p:cNvSpPr>
+          <p:nvPr/>
+        </p:nvSpPr>
+        <p:spPr>
+          <a:xfrm xmlns:a="http://schemas.openxmlformats.org/drawingml/2006/main">
+            <a:off x="3581400" y="4400550"/>
+            <a:ext cx="1905000" cy="514350"/>
+          </a:xfrm>
+          <a:prstGeom xmlns:a="http://schemas.openxmlformats.org/drawingml/2006/main" prst="rect">
+            <a:avLst/>
+          </a:prstGeom>
+          <a:noFill xmlns:a="http://schemas.openxmlformats.org/drawingml/2006/main"/>
+          <a:ln xmlns:a="http://schemas.openxmlformats.org/drawingml/2006/main" w="0">
+            <a:noFill/>
+            <a:prstDash val="solid"/>
+          </a:ln>
+        </p:spPr>
+        <p:txBody>
+          <a:bodyPr xmlns:a="http://schemas.openxmlformats.org/drawingml/2006/main" anchor="ctr"/>
+          <a:lstStyle xmlns:a="http://schemas.openxmlformats.org/drawingml/2006/main"/>
+          <a:p xmlns:a="http://schemas.openxmlformats.org/drawingml/2006/main">
+            <a:pPr algn="l">
+              <a:defRPr sz="1125" b="0" i="0">
+                <a:solidFill>
+                  <a:srgbClr val="FFFFFF">
+                    <a:alpha val="60000"/>
+                  </a:srgbClr>
+                </a:solidFill>
+                <a:latin typeface="Inter"/>
+                <a:ea typeface="Inter"/>
+                <a:cs typeface="Inter"/>
+              </a:defRPr>
+            </a:pPr>
+            <a:r>
+              <a:rPr sz="1125" b="0" i="0">
+                <a:solidFill>
+                  <a:srgbClr val="FFFFFF">
+                    <a:alpha val="60000"/>
+                  </a:srgbClr>
+                </a:solidFill>
+                <a:latin typeface="Inter"/>
+                <a:ea typeface="Inter"/>
+                <a:cs typeface="Inter"/>
+              </a:rPr>
+              <a:t>Protege el sistema</a:t>
+            </a:r>
+          </a:p>
+        </p:txBody>
+      </p:sp>
+      <p:sp>
+        <p:nvSpPr>
+          <p:cNvPr id="13" name="role-2">
+            <a:extLst xmlns:a="http://schemas.openxmlformats.org/drawingml/2006/main">
+              <a:ext uri="{FF2B5EF4-FFF2-40B4-BE49-F238E27FC236}">
+                <a16:creationId xmlns:a16="http://schemas.microsoft.com/office/drawing/2014/main" id="{8DE16B6D-3150-4E03-9D5C-790D64EA24C5}"/>
+              </a:ext>
+            </a:extLst>
+          </p:cNvPr>
+          <p:cNvSpPr>
+            <a:spLocks xmlns:a="http://schemas.openxmlformats.org/drawingml/2006/main" noGrp="1"/>
+          </p:cNvSpPr>
+          <p:nvPr/>
+        </p:nvSpPr>
+        <p:spPr>
+          <a:xfrm xmlns:a="http://schemas.openxmlformats.org/drawingml/2006/main">
+            <a:off x="6019800" y="2857500"/>
+            <a:ext cx="2381250" cy="2381250"/>
+          </a:xfrm>
+          <a:prstGeom xmlns:a="http://schemas.openxmlformats.org/drawingml/2006/main" prst="rect">
+            <a:avLst/>
+          </a:prstGeom>
+          <a:solidFill xmlns:a="http://schemas.openxmlformats.org/drawingml/2006/main">
+            <a:srgbClr val="F3EEE6"/>
+          </a:solidFill>
+          <a:ln xmlns:a="http://schemas.openxmlformats.org/drawingml/2006/main" w="9525">
+            <a:solidFill>
+              <a:srgbClr val="D8CEC3"/>
+            </a:solidFill>
+            <a:prstDash val="solid"/>
+          </a:ln>
+        </p:spPr>
+      </p:sp>
+      <p:sp>
+        <p:nvSpPr>
+          <p:cNvPr id="14" name="role-tag-2">
+            <a:extLst xmlns:a="http://schemas.openxmlformats.org/drawingml/2006/main">
+              <a:ext uri="{FF2B5EF4-FFF2-40B4-BE49-F238E27FC236}">
+                <a16:creationId xmlns:a16="http://schemas.microsoft.com/office/drawing/2014/main" id="{C9E68496-EA1B-423B-91EC-85D85C749249}"/>
+              </a:ext>
+            </a:extLst>
+          </p:cNvPr>
+          <p:cNvSpPr>
+            <a:spLocks xmlns:a="http://schemas.openxmlformats.org/drawingml/2006/main" noGrp="1"/>
+          </p:cNvSpPr>
+          <p:nvPr/>
+        </p:nvSpPr>
+        <p:spPr>
+          <a:xfrm xmlns:a="http://schemas.openxmlformats.org/drawingml/2006/main">
+            <a:off x="6248400" y="3086100"/>
+            <a:ext cx="1905000" cy="266700"/>
+          </a:xfrm>
+          <a:prstGeom xmlns:a="http://schemas.openxmlformats.org/drawingml/2006/main" prst="rect">
+            <a:avLst/>
+          </a:prstGeom>
+          <a:noFill xmlns:a="http://schemas.openxmlformats.org/drawingml/2006/main"/>
+          <a:ln xmlns:a="http://schemas.openxmlformats.org/drawingml/2006/main" w="0">
+            <a:noFill/>
+            <a:prstDash val="solid"/>
+          </a:ln>
+        </p:spPr>
+        <p:txBody>
+          <a:bodyPr xmlns:a="http://schemas.openxmlformats.org/drawingml/2006/main" anchor="ctr"/>
+          <a:lstStyle xmlns:a="http://schemas.openxmlformats.org/drawingml/2006/main"/>
+          <a:p xmlns:a="http://schemas.openxmlformats.org/drawingml/2006/main">
+            <a:pPr algn="l">
+              <a:defRPr sz="825" b="1" i="0">
+                <a:solidFill>
+                  <a:srgbClr val="A88650"/>
+                </a:solidFill>
+                <a:latin typeface="Inter"/>
+                <a:ea typeface="Inter"/>
+                <a:cs typeface="Inter"/>
+              </a:defRPr>
+            </a:pPr>
+            <a:r>
+              <a:rPr sz="825" b="1" i="0">
+                <a:solidFill>
+                  <a:srgbClr val="A88650"/>
+                </a:solidFill>
+                <a:latin typeface="Inter"/>
+                <a:ea typeface="Inter"/>
+                <a:cs typeface="Inter"/>
+              </a:rPr>
+              <a:t>EJECUCIÓN</a:t>
+            </a:r>
+          </a:p>
+        </p:txBody>
+      </p:sp>
+      <p:sp>
+        <p:nvSpPr>
+          <p:cNvPr id="15" name="role-name-2">
+            <a:extLst xmlns:a="http://schemas.openxmlformats.org/drawingml/2006/main">
+              <a:ext uri="{FF2B5EF4-FFF2-40B4-BE49-F238E27FC236}">
+                <a16:creationId xmlns:a16="http://schemas.microsoft.com/office/drawing/2014/main" id="{44E8D484-5DC5-435F-B1F3-D29E11E00EBC}"/>
+              </a:ext>
+            </a:extLst>
+          </p:cNvPr>
+          <p:cNvSpPr>
+            <a:spLocks xmlns:a="http://schemas.openxmlformats.org/drawingml/2006/main" noGrp="1"/>
+          </p:cNvSpPr>
+          <p:nvPr/>
+        </p:nvSpPr>
+        <p:spPr>
+          <a:xfrm xmlns:a="http://schemas.openxmlformats.org/drawingml/2006/main">
+            <a:off x="6248400" y="3638550"/>
+            <a:ext cx="1905000" cy="495300"/>
+          </a:xfrm>
+          <a:prstGeom xmlns:a="http://schemas.openxmlformats.org/drawingml/2006/main" prst="rect">
+            <a:avLst/>
+          </a:prstGeom>
+          <a:noFill xmlns:a="http://schemas.openxmlformats.org/drawingml/2006/main"/>
+          <a:ln xmlns:a="http://schemas.openxmlformats.org/drawingml/2006/main" w="0">
+            <a:noFill/>
+            <a:prstDash val="solid"/>
+          </a:ln>
+        </p:spPr>
+        <p:txBody>
+          <a:bodyPr xmlns:a="http://schemas.openxmlformats.org/drawingml/2006/main" anchor="ctr"/>
+          <a:lstStyle xmlns:a="http://schemas.openxmlformats.org/drawingml/2006/main"/>
+          <a:p xmlns:a="http://schemas.openxmlformats.org/drawingml/2006/main">
+            <a:pPr algn="l">
+              <a:defRPr sz="1800" b="1" i="0">
+                <a:solidFill>
+                  <a:srgbClr val="100C0A"/>
+                </a:solidFill>
+                <a:latin typeface="Adobe Garamond Pro"/>
+                <a:ea typeface="Adobe Garamond Pro"/>
+                <a:cs typeface="Adobe Garamond Pro"/>
+              </a:defRPr>
+            </a:pPr>
+            <a:r>
+              <a:rPr sz="1800" b="1" i="0">
+                <a:solidFill>
+                  <a:srgbClr val="100C0A"/>
+                </a:solidFill>
+                <a:latin typeface="Adobe Garamond Pro"/>
+                <a:ea typeface="Adobe Garamond Pro"/>
+                <a:cs typeface="Adobe Garamond Pro"/>
+              </a:rPr>
+              <a:t>Nombre / rol</a:t>
+            </a:r>
+          </a:p>
+        </p:txBody>
+      </p:sp>
+      <p:sp>
+        <p:nvSpPr>
+          <p:cNvPr id="16" name="role-job-2">
+            <a:extLst xmlns:a="http://schemas.openxmlformats.org/drawingml/2006/main">
+              <a:ext uri="{FF2B5EF4-FFF2-40B4-BE49-F238E27FC236}">
+                <a16:creationId xmlns:a16="http://schemas.microsoft.com/office/drawing/2014/main" id="{FEEA3E24-1BC3-4173-B656-ADFC36EC8375}"/>
+              </a:ext>
+            </a:extLst>
+          </p:cNvPr>
+          <p:cNvSpPr>
+            <a:spLocks xmlns:a="http://schemas.openxmlformats.org/drawingml/2006/main" noGrp="1"/>
+          </p:cNvSpPr>
+          <p:nvPr/>
+        </p:nvSpPr>
+        <p:spPr>
+          <a:xfrm xmlns:a="http://schemas.openxmlformats.org/drawingml/2006/main">
+            <a:off x="6248400" y="4400550"/>
+            <a:ext cx="1905000" cy="514350"/>
+          </a:xfrm>
+          <a:prstGeom xmlns:a="http://schemas.openxmlformats.org/drawingml/2006/main" prst="rect">
+            <a:avLst/>
+          </a:prstGeom>
+          <a:noFill xmlns:a="http://schemas.openxmlformats.org/drawingml/2006/main"/>
+          <a:ln xmlns:a="http://schemas.openxmlformats.org/drawingml/2006/main" w="0">
+            <a:noFill/>
+            <a:prstDash val="solid"/>
+          </a:ln>
+        </p:spPr>
+        <p:txBody>
+          <a:bodyPr xmlns:a="http://schemas.openxmlformats.org/drawingml/2006/main" anchor="ctr"/>
+          <a:lstStyle xmlns:a="http://schemas.openxmlformats.org/drawingml/2006/main"/>
+          <a:p xmlns:a="http://schemas.openxmlformats.org/drawingml/2006/main">
+            <a:pPr algn="l">
+              <a:defRPr sz="1125" b="0" i="0">
+                <a:solidFill>
+                  <a:srgbClr val="706862"/>
+                </a:solidFill>
+                <a:latin typeface="Inter"/>
+                <a:ea typeface="Inter"/>
+                <a:cs typeface="Inter"/>
+              </a:defRPr>
+            </a:pPr>
+            <a:r>
+              <a:rPr sz="1125" b="0" i="0">
+                <a:solidFill>
+                  <a:srgbClr val="706862"/>
+                </a:solidFill>
+                <a:latin typeface="Inter"/>
+                <a:ea typeface="Inter"/>
+                <a:cs typeface="Inter"/>
+              </a:rPr>
+              <a:t>Convierte en entregables</a:t>
+            </a:r>
+          </a:p>
+        </p:txBody>
+      </p:sp>
+      <p:sp>
+        <p:nvSpPr>
+          <p:cNvPr id="17" name="role-3">
+            <a:extLst xmlns:a="http://schemas.openxmlformats.org/drawingml/2006/main">
+              <a:ext uri="{FF2B5EF4-FFF2-40B4-BE49-F238E27FC236}">
+                <a16:creationId xmlns:a16="http://schemas.microsoft.com/office/drawing/2014/main" id="{07906759-B8E4-409A-B8F0-D91B3051032B}"/>
+              </a:ext>
+            </a:extLst>
+          </p:cNvPr>
+          <p:cNvSpPr>
+            <a:spLocks xmlns:a="http://schemas.openxmlformats.org/drawingml/2006/main" noGrp="1"/>
+          </p:cNvSpPr>
+          <p:nvPr/>
+        </p:nvSpPr>
+        <p:spPr>
+          <a:xfrm xmlns:a="http://schemas.openxmlformats.org/drawingml/2006/main">
+            <a:off x="8686800" y="2857500"/>
+            <a:ext cx="2381250" cy="2381250"/>
+          </a:xfrm>
+          <a:prstGeom xmlns:a="http://schemas.openxmlformats.org/drawingml/2006/main" prst="rect">
+            <a:avLst/>
+          </a:prstGeom>
+          <a:solidFill xmlns:a="http://schemas.openxmlformats.org/drawingml/2006/main">
+            <a:srgbClr val="F3EEE6"/>
+          </a:solidFill>
+          <a:ln xmlns:a="http://schemas.openxmlformats.org/drawingml/2006/main" w="9525">
+            <a:solidFill>
+              <a:srgbClr val="D8CEC3"/>
+            </a:solidFill>
+            <a:prstDash val="solid"/>
+          </a:ln>
+        </p:spPr>
+      </p:sp>
+      <p:sp>
+        <p:nvSpPr>
+          <p:cNvPr id="18" name="role-tag-3">
+            <a:extLst xmlns:a="http://schemas.openxmlformats.org/drawingml/2006/main">
+              <a:ext uri="{FF2B5EF4-FFF2-40B4-BE49-F238E27FC236}">
+                <a16:creationId xmlns:a16="http://schemas.microsoft.com/office/drawing/2014/main" id="{07F3ABC3-1133-456B-B036-742BD1587C45}"/>
+              </a:ext>
+            </a:extLst>
+          </p:cNvPr>
+          <p:cNvSpPr>
+            <a:spLocks xmlns:a="http://schemas.openxmlformats.org/drawingml/2006/main" noGrp="1"/>
+          </p:cNvSpPr>
+          <p:nvPr/>
+        </p:nvSpPr>
+        <p:spPr>
+          <a:xfrm xmlns:a="http://schemas.openxmlformats.org/drawingml/2006/main">
+            <a:off x="8915400" y="3086100"/>
+            <a:ext cx="1905000" cy="266700"/>
+          </a:xfrm>
+          <a:prstGeom xmlns:a="http://schemas.openxmlformats.org/drawingml/2006/main" prst="rect">
+            <a:avLst/>
+          </a:prstGeom>
+          <a:noFill xmlns:a="http://schemas.openxmlformats.org/drawingml/2006/main"/>
+          <a:ln xmlns:a="http://schemas.openxmlformats.org/drawingml/2006/main" w="0">
+            <a:noFill/>
+            <a:prstDash val="solid"/>
+          </a:ln>
+        </p:spPr>
+        <p:txBody>
+          <a:bodyPr xmlns:a="http://schemas.openxmlformats.org/drawingml/2006/main" anchor="ctr"/>
+          <a:lstStyle xmlns:a="http://schemas.openxmlformats.org/drawingml/2006/main"/>
+          <a:p xmlns:a="http://schemas.openxmlformats.org/drawingml/2006/main">
+            <a:pPr algn="l">
+              <a:defRPr sz="825" b="1" i="0">
+                <a:solidFill>
+                  <a:srgbClr val="A88650"/>
+                </a:solidFill>
+                <a:latin typeface="Inter"/>
+                <a:ea typeface="Inter"/>
+                <a:cs typeface="Inter"/>
+              </a:defRPr>
+            </a:pPr>
+            <a:r>
+              <a:rPr sz="825" b="1" i="0">
+                <a:solidFill>
+                  <a:srgbClr val="A88650"/>
+                </a:solidFill>
+                <a:latin typeface="Inter"/>
+                <a:ea typeface="Inter"/>
+                <a:cs typeface="Inter"/>
+              </a:rPr>
+              <a:t>MEDICIÓN</a:t>
+            </a:r>
+          </a:p>
+        </p:txBody>
+      </p:sp>
+      <p:sp>
+        <p:nvSpPr>
+          <p:cNvPr id="19" name="role-name-3">
+            <a:extLst xmlns:a="http://schemas.openxmlformats.org/drawingml/2006/main">
+              <a:ext uri="{FF2B5EF4-FFF2-40B4-BE49-F238E27FC236}">
+                <a16:creationId xmlns:a16="http://schemas.microsoft.com/office/drawing/2014/main" id="{17BF3411-4B86-40E1-8E94-B320F56764E8}"/>
+              </a:ext>
+            </a:extLst>
+          </p:cNvPr>
+          <p:cNvSpPr>
+            <a:spLocks xmlns:a="http://schemas.openxmlformats.org/drawingml/2006/main" noGrp="1"/>
+          </p:cNvSpPr>
+          <p:nvPr/>
+        </p:nvSpPr>
+        <p:spPr>
+          <a:xfrm xmlns:a="http://schemas.openxmlformats.org/drawingml/2006/main">
+            <a:off x="8915400" y="3638550"/>
+            <a:ext cx="1905000" cy="495300"/>
+          </a:xfrm>
+          <a:prstGeom xmlns:a="http://schemas.openxmlformats.org/drawingml/2006/main" prst="rect">
+            <a:avLst/>
+          </a:prstGeom>
+          <a:noFill xmlns:a="http://schemas.openxmlformats.org/drawingml/2006/main"/>
+          <a:ln xmlns:a="http://schemas.openxmlformats.org/drawingml/2006/main" w="0">
+            <a:noFill/>
+            <a:prstDash val="solid"/>
+          </a:ln>
+        </p:spPr>
+        <p:txBody>
+          <a:bodyPr xmlns:a="http://schemas.openxmlformats.org/drawingml/2006/main" anchor="ctr"/>
+          <a:lstStyle xmlns:a="http://schemas.openxmlformats.org/drawingml/2006/main"/>
+          <a:p xmlns:a="http://schemas.openxmlformats.org/drawingml/2006/main">
+            <a:pPr algn="l">
+              <a:defRPr sz="1800" b="1" i="0">
+                <a:solidFill>
+                  <a:srgbClr val="100C0A"/>
+                </a:solidFill>
+                <a:latin typeface="Adobe Garamond Pro"/>
+                <a:ea typeface="Adobe Garamond Pro"/>
+                <a:cs typeface="Adobe Garamond Pro"/>
+              </a:defRPr>
+            </a:pPr>
+            <a:r>
+              <a:rPr sz="1800" b="1" i="0">
+                <a:solidFill>
+                  <a:srgbClr val="100C0A"/>
+                </a:solidFill>
+                <a:latin typeface="Adobe Garamond Pro"/>
+                <a:ea typeface="Adobe Garamond Pro"/>
+                <a:cs typeface="Adobe Garamond Pro"/>
+              </a:rPr>
+              <a:t>Nombre / rol</a:t>
+            </a:r>
+          </a:p>
+        </p:txBody>
+      </p:sp>
+      <p:sp>
+        <p:nvSpPr>
+          <p:cNvPr id="20" name="role-job-3">
+            <a:extLst xmlns:a="http://schemas.openxmlformats.org/drawingml/2006/main">
+              <a:ext uri="{FF2B5EF4-FFF2-40B4-BE49-F238E27FC236}">
+                <a16:creationId xmlns:a16="http://schemas.microsoft.com/office/drawing/2014/main" id="{99D1E5E3-A1E8-47CB-893F-370B53ED751F}"/>
+              </a:ext>
+            </a:extLst>
+          </p:cNvPr>
+          <p:cNvSpPr>
+            <a:spLocks xmlns:a="http://schemas.openxmlformats.org/drawingml/2006/main" noGrp="1"/>
+          </p:cNvSpPr>
+          <p:nvPr/>
+        </p:nvSpPr>
+        <p:spPr>
+          <a:xfrm xmlns:a="http://schemas.openxmlformats.org/drawingml/2006/main">
+            <a:off x="8915400" y="4400550"/>
+            <a:ext cx="1905000" cy="514350"/>
+          </a:xfrm>
+          <a:prstGeom xmlns:a="http://schemas.openxmlformats.org/drawingml/2006/main" prst="rect">
+            <a:avLst/>
+          </a:prstGeom>
+          <a:noFill xmlns:a="http://schemas.openxmlformats.org/drawingml/2006/main"/>
+          <a:ln xmlns:a="http://schemas.openxmlformats.org/drawingml/2006/main" w="0">
+            <a:noFill/>
+            <a:prstDash val="solid"/>
+          </a:ln>
+        </p:spPr>
+        <p:txBody>
+          <a:bodyPr xmlns:a="http://schemas.openxmlformats.org/drawingml/2006/main" anchor="ctr"/>
+          <a:lstStyle xmlns:a="http://schemas.openxmlformats.org/drawingml/2006/main"/>
+          <a:p xmlns:a="http://schemas.openxmlformats.org/drawingml/2006/main">
+            <a:pPr algn="l">
+              <a:defRPr sz="1125" b="0" i="0">
+                <a:solidFill>
+                  <a:srgbClr val="706862"/>
+                </a:solidFill>
+                <a:latin typeface="Inter"/>
+                <a:ea typeface="Inter"/>
+                <a:cs typeface="Inter"/>
+              </a:defRPr>
+            </a:pPr>
+            <a:r>
+              <a:rPr sz="1125" b="0" i="0">
+                <a:solidFill>
+                  <a:srgbClr val="706862"/>
+                </a:solidFill>
+                <a:latin typeface="Inter"/>
+                <a:ea typeface="Inter"/>
+                <a:cs typeface="Inter"/>
+              </a:rPr>
+              <a:t>Documenta el aprendizaje</a:t>
+            </a:r>
+          </a:p>
+        </p:txBody>
+      </p:sp>
+    </p:spTree>
+    <p:extLst>
+      <p:ext uri="{BB962C8B-B14F-4D97-AF65-F5344CB8AC3E}">
+        <p14:creationId xmlns:p14="http://schemas.microsoft.com/office/powerpoint/2010/main" val="680416244"/>
+      </p:ext>
+    </p:extLst>
+  </p:cSld>
+</p:sld>
+</file>
+
+<file path=ppt/slides/slide24.xml><?xml version="1.0" encoding="utf-8"?>
+<p:sld xmlns:p="http://schemas.openxmlformats.org/presentationml/2006/main">
+  <p:cSld>
+    <p:bg>
+      <p:bgPr>
+        <a:solidFill xmlns:a="http://schemas.openxmlformats.org/drawingml/2006/main">
+          <a:srgbClr val="100C0A"/>
+        </a:solidFill>
+      </p:bgPr>
+    </p:bg>
+    <p:spTree>
+      <p:nvGrpSpPr>
+        <p:cNvPr id="1" name=""/>
+        <p:cNvGrpSpPr/>
+        <p:nvPr/>
+      </p:nvGrpSpPr>
+      <p:grpSpPr>
+        <a:xfrm xmlns:a="http://schemas.openxmlformats.org/drawingml/2006/main"/>
+      </p:grpSpPr>
+      <p:sp>
+        <p:nvSpPr>
           <p:cNvPr id="7" name="eyebrow">
             <a:extLst xmlns:a="http://schemas.openxmlformats.org/drawingml/2006/main">
               <a:ext uri="{FF2B5EF4-FFF2-40B4-BE49-F238E27FC236}">
-                <a16:creationId xmlns:a16="http://schemas.microsoft.com/office/drawing/2014/main" id="{85B4E4BA-B91C-410D-B1B6-5E4BC3E337B1}"/>
+                <a16:creationId xmlns:a16="http://schemas.microsoft.com/office/drawing/2014/main" id="{CE95A566-AC9B-4388-8F51-CFC20BF8A4E6}"/>
               </a:ext>
             </a:extLst>
           </p:cNvPr>
@@ -11188,6 +15411,9 @@
                 <a:solidFill>
                   <a:srgbClr val="D5B879"/>
                 </a:solidFill>
+                <a:latin typeface="Inter"/>
+                <a:ea typeface="Inter"/>
+                <a:cs typeface="Inter"/>
               </a:defRPr>
             </a:pPr>
             <a:r>
@@ -11195,6 +15421,9 @@
                 <a:solidFill>
                   <a:srgbClr val="D5B879"/>
                 </a:solidFill>
+                <a:latin typeface="Inter"/>
+                <a:ea typeface="Inter"/>
+                <a:cs typeface="Inter"/>
               </a:rPr>
               <a:t>CIERRE / LLAMADO A LA ACCIÓN</a:t>
             </a:r>
@@ -11206,7 +15435,7 @@
           <p:cNvPr id="2" name="title">
             <a:extLst xmlns:a="http://schemas.openxmlformats.org/drawingml/2006/main">
               <a:ext uri="{FF2B5EF4-FFF2-40B4-BE49-F238E27FC236}">
-                <a16:creationId xmlns:a16="http://schemas.microsoft.com/office/drawing/2014/main" id="{9CCA9830-BAC3-49BB-B99D-D7484F22E37F}"/>
+                <a16:creationId xmlns:a16="http://schemas.microsoft.com/office/drawing/2014/main" id="{C3B94DAF-76AF-41C6-B1C2-2AC3FC39D002}"/>
               </a:ext>
             </a:extLst>
           </p:cNvPr>
@@ -11238,6 +15467,9 @@
                 <a:solidFill>
                   <a:srgbClr val="F3EEE6"/>
                 </a:solidFill>
+                <a:latin typeface="Adobe Garamond Pro"/>
+                <a:ea typeface="Adobe Garamond Pro"/>
+                <a:cs typeface="Adobe Garamond Pro"/>
               </a:defRPr>
             </a:pPr>
             <a:r>
@@ -11245,6 +15477,9 @@
                 <a:solidFill>
                   <a:srgbClr val="F3EEE6"/>
                 </a:solidFill>
+                <a:latin typeface="Adobe Garamond Pro"/>
+                <a:ea typeface="Adobe Garamond Pro"/>
+                <a:cs typeface="Adobe Garamond Pro"/>
               </a:rPr>
               <a:t>Lleve la marca</a:t>
             </a:r>
@@ -11255,6 +15490,9 @@
                 <a:solidFill>
                   <a:srgbClr val="F3EEE6"/>
                 </a:solidFill>
+                <a:latin typeface="Adobe Garamond Pro"/>
+                <a:ea typeface="Adobe Garamond Pro"/>
+                <a:cs typeface="Adobe Garamond Pro"/>
               </a:defRPr>
             </a:pPr>
             <a:r>
@@ -11262,6 +15500,9 @@
                 <a:solidFill>
                   <a:srgbClr val="F3EEE6"/>
                 </a:solidFill>
+                <a:latin typeface="Adobe Garamond Pro"/>
+                <a:ea typeface="Adobe Garamond Pro"/>
+                <a:cs typeface="Adobe Garamond Pro"/>
               </a:rPr>
               <a:t>a Otro Nivel.</a:t>
             </a:r>
@@ -11273,7 +15514,7 @@
           <p:cNvPr id="3" name="body">
             <a:extLst xmlns:a="http://schemas.openxmlformats.org/drawingml/2006/main">
               <a:ext uri="{FF2B5EF4-FFF2-40B4-BE49-F238E27FC236}">
-                <a16:creationId xmlns:a16="http://schemas.microsoft.com/office/drawing/2014/main" id="{A3D52703-8D52-4285-88ED-62EB68D4C416}"/>
+                <a16:creationId xmlns:a16="http://schemas.microsoft.com/office/drawing/2014/main" id="{B10F46D0-4F59-4808-A4C7-596F657F3D91}"/>
               </a:ext>
             </a:extLst>
           </p:cNvPr>
@@ -11307,6 +15548,9 @@
                     <a:alpha val="60392"/>
                   </a:srgbClr>
                 </a:solidFill>
+                <a:latin typeface="Inter"/>
+                <a:ea typeface="Inter"/>
+                <a:cs typeface="Inter"/>
               </a:defRPr>
             </a:pPr>
             <a:r>
@@ -11316,6 +15560,9 @@
                     <a:alpha val="60392"/>
                   </a:srgbClr>
                 </a:solidFill>
+                <a:latin typeface="Inter"/>
+                <a:ea typeface="Inter"/>
+                <a:cs typeface="Inter"/>
               </a:rPr>
               <a:t>Cierre con una decisión, una invitación o el siguiente paso concreto.</a:t>
             </a:r>
@@ -11331,7 +15578,7 @@
           <p:nvPr/>
         </p:nvPicPr>
         <p:blipFill>
-          <a:blip xmlns:r="http://schemas.openxmlformats.org/officeDocument/2006/relationships" xmlns:a="http://schemas.openxmlformats.org/drawingml/2006/main" r:embed="R27d102be2d2d49b0"/>
+          <a:blip xmlns:r="http://schemas.openxmlformats.org/officeDocument/2006/relationships" xmlns:a="http://schemas.openxmlformats.org/drawingml/2006/main" r:embed="R4c04f0a336f24bfc"/>
           <a:stretch xmlns:a="http://schemas.openxmlformats.org/drawingml/2006/main"/>
         </p:blipFill>
         <p:spPr>
@@ -11349,7 +15596,7 @@
           <p:cNvPr id="5" name="line">
             <a:extLst xmlns:a="http://schemas.openxmlformats.org/drawingml/2006/main">
               <a:ext uri="{FF2B5EF4-FFF2-40B4-BE49-F238E27FC236}">
-                <a16:creationId xmlns:a16="http://schemas.microsoft.com/office/drawing/2014/main" id="{835838FD-7EFE-4652-8D66-877299DC6CAF}"/>
+                <a16:creationId xmlns:a16="http://schemas.microsoft.com/office/drawing/2014/main" id="{6D3B13A2-A53D-46E8-BAD3-E85A2D0887DC}"/>
               </a:ext>
             </a:extLst>
           </p:cNvPr>
@@ -11382,7 +15629,7 @@
           <p:cNvPr id="6" name="url">
             <a:extLst xmlns:a="http://schemas.openxmlformats.org/drawingml/2006/main">
               <a:ext uri="{FF2B5EF4-FFF2-40B4-BE49-F238E27FC236}">
-                <a16:creationId xmlns:a16="http://schemas.microsoft.com/office/drawing/2014/main" id="{AFA7D34D-9B6F-49EE-AA9D-7CF482739153}"/>
+                <a16:creationId xmlns:a16="http://schemas.microsoft.com/office/drawing/2014/main" id="{8763319E-6986-4F4F-BE32-42BF6C5CCBEB}"/>
               </a:ext>
             </a:extLst>
           </p:cNvPr>
@@ -11414,6 +15661,9 @@
                 <a:solidFill>
                   <a:srgbClr val="D5B879"/>
                 </a:solidFill>
+                <a:latin typeface="Inter"/>
+                <a:ea typeface="Inter"/>
+                <a:cs typeface="Inter"/>
               </a:defRPr>
             </a:pPr>
             <a:r>
@@ -11421,6 +15671,9 @@
                 <a:solidFill>
                   <a:srgbClr val="D5B879"/>
                 </a:solidFill>
+                <a:latin typeface="Inter"/>
+                <a:ea typeface="Inter"/>
+                <a:cs typeface="Inter"/>
               </a:rPr>
               <a:t>roncarupano.com</a:t>
             </a:r>
@@ -11430,7 +15683,7 @@
     </p:spTree>
     <p:extLst>
       <p:ext uri="{BB962C8B-B14F-4D97-AF65-F5344CB8AC3E}">
-        <p14:creationId xmlns:p14="http://schemas.microsoft.com/office/powerpoint/2010/main" val="1449501536"/>
+        <p14:creationId xmlns:p14="http://schemas.microsoft.com/office/powerpoint/2010/main" val="637115648"/>
       </p:ext>
     </p:extLst>
   </p:cSld>
@@ -11461,7 +15714,7 @@
           <p:cNvPr id="8" name="brand">
             <a:extLst xmlns:a="http://schemas.openxmlformats.org/drawingml/2006/main">
               <a:ext uri="{FF2B5EF4-FFF2-40B4-BE49-F238E27FC236}">
-                <a16:creationId xmlns:a16="http://schemas.microsoft.com/office/drawing/2014/main" id="{C7C9A91C-2382-4C63-BDEE-BA8833A11545}"/>
+                <a16:creationId xmlns:a16="http://schemas.microsoft.com/office/drawing/2014/main" id="{F49B4030-080B-4A12-99DD-D0C428A6417F}"/>
               </a:ext>
             </a:extLst>
           </p:cNvPr>
@@ -11493,6 +15746,9 @@
                 <a:solidFill>
                   <a:srgbClr val="A88650"/>
                 </a:solidFill>
+                <a:latin typeface="Inter"/>
+                <a:ea typeface="Inter"/>
+                <a:cs typeface="Inter"/>
               </a:defRPr>
             </a:pPr>
             <a:r>
@@ -11500,6 +15756,9 @@
                 <a:solidFill>
                   <a:srgbClr val="A88650"/>
                 </a:solidFill>
+                <a:latin typeface="Inter"/>
+                <a:ea typeface="Inter"/>
+                <a:cs typeface="Inter"/>
               </a:rPr>
               <a:t>RON CARÚPANO</a:t>
             </a:r>
@@ -11511,7 +15770,7 @@
           <p:cNvPr id="2" name="page">
             <a:extLst xmlns:a="http://schemas.openxmlformats.org/drawingml/2006/main">
               <a:ext uri="{FF2B5EF4-FFF2-40B4-BE49-F238E27FC236}">
-                <a16:creationId xmlns:a16="http://schemas.microsoft.com/office/drawing/2014/main" id="{491D1555-A65A-4C01-B804-C9E51E89C60B}"/>
+                <a16:creationId xmlns:a16="http://schemas.microsoft.com/office/drawing/2014/main" id="{9C7B3E33-8D59-4ACC-BAF9-5F33D6523DB1}"/>
               </a:ext>
             </a:extLst>
           </p:cNvPr>
@@ -11543,6 +15802,9 @@
                 <a:solidFill>
                   <a:srgbClr val="706862"/>
                 </a:solidFill>
+                <a:latin typeface="Inter"/>
+                <a:ea typeface="Inter"/>
+                <a:cs typeface="Inter"/>
               </a:defRPr>
             </a:pPr>
             <a:r>
@@ -11550,6 +15812,9 @@
                 <a:solidFill>
                   <a:srgbClr val="706862"/>
                 </a:solidFill>
+                <a:latin typeface="Inter"/>
+                <a:ea typeface="Inter"/>
+                <a:cs typeface="Inter"/>
               </a:rPr>
               <a:t>03</a:t>
             </a:r>
@@ -11561,7 +15826,7 @@
           <p:cNvPr id="3" name="eyebrow">
             <a:extLst xmlns:a="http://schemas.openxmlformats.org/drawingml/2006/main">
               <a:ext uri="{FF2B5EF4-FFF2-40B4-BE49-F238E27FC236}">
-                <a16:creationId xmlns:a16="http://schemas.microsoft.com/office/drawing/2014/main" id="{FBB077BE-4581-4870-AA70-D87A7AC72C85}"/>
+                <a16:creationId xmlns:a16="http://schemas.microsoft.com/office/drawing/2014/main" id="{FF36F4AB-CBDA-43BA-B50E-6B74B50DB14C}"/>
               </a:ext>
             </a:extLst>
           </p:cNvPr>
@@ -11593,6 +15858,9 @@
                 <a:solidFill>
                   <a:srgbClr val="A88650"/>
                 </a:solidFill>
+                <a:latin typeface="Inter"/>
+                <a:ea typeface="Inter"/>
+                <a:cs typeface="Inter"/>
               </a:defRPr>
             </a:pPr>
             <a:r>
@@ -11600,6 +15868,9 @@
                 <a:solidFill>
                   <a:srgbClr val="A88650"/>
                 </a:solidFill>
+                <a:latin typeface="Inter"/>
+                <a:ea typeface="Inter"/>
+                <a:cs typeface="Inter"/>
               </a:rPr>
               <a:t>PORTADA CLARA</a:t>
             </a:r>
@@ -11611,7 +15882,7 @@
           <p:cNvPr id="4" name="title">
             <a:extLst xmlns:a="http://schemas.openxmlformats.org/drawingml/2006/main">
               <a:ext uri="{FF2B5EF4-FFF2-40B4-BE49-F238E27FC236}">
-                <a16:creationId xmlns:a16="http://schemas.microsoft.com/office/drawing/2014/main" id="{D32E1AA8-7FC1-4AF1-8116-8A2CD2275949}"/>
+                <a16:creationId xmlns:a16="http://schemas.microsoft.com/office/drawing/2014/main" id="{36305439-C31C-4331-B33A-0BCACADCACFE}"/>
               </a:ext>
             </a:extLst>
           </p:cNvPr>
@@ -11643,6 +15914,9 @@
                 <a:solidFill>
                   <a:srgbClr val="100C0A"/>
                 </a:solidFill>
+                <a:latin typeface="Adobe Garamond Pro"/>
+                <a:ea typeface="Adobe Garamond Pro"/>
+                <a:cs typeface="Adobe Garamond Pro"/>
               </a:defRPr>
             </a:pPr>
             <a:r>
@@ -11650,6 +15924,9 @@
                 <a:solidFill>
                   <a:srgbClr val="100C0A"/>
                 </a:solidFill>
+                <a:latin typeface="Adobe Garamond Pro"/>
+                <a:ea typeface="Adobe Garamond Pro"/>
+                <a:cs typeface="Adobe Garamond Pro"/>
               </a:rPr>
               <a:t>Una historia que</a:t>
             </a:r>
@@ -11660,6 +15937,9 @@
                 <a:solidFill>
                   <a:srgbClr val="100C0A"/>
                 </a:solidFill>
+                <a:latin typeface="Adobe Garamond Pro"/>
+                <a:ea typeface="Adobe Garamond Pro"/>
+                <a:cs typeface="Adobe Garamond Pro"/>
               </a:defRPr>
             </a:pPr>
             <a:r>
@@ -11667,6 +15947,9 @@
                 <a:solidFill>
                   <a:srgbClr val="100C0A"/>
                 </a:solidFill>
+                <a:latin typeface="Adobe Garamond Pro"/>
+                <a:ea typeface="Adobe Garamond Pro"/>
+                <a:cs typeface="Adobe Garamond Pro"/>
               </a:rPr>
               <a:t>sigue avanzando.</a:t>
             </a:r>
@@ -11678,7 +15961,7 @@
           <p:cNvPr id="5" name="sub">
             <a:extLst xmlns:a="http://schemas.openxmlformats.org/drawingml/2006/main">
               <a:ext uri="{FF2B5EF4-FFF2-40B4-BE49-F238E27FC236}">
-                <a16:creationId xmlns:a16="http://schemas.microsoft.com/office/drawing/2014/main" id="{395F5E55-E079-422D-9BC6-347585DBCD12}"/>
+                <a16:creationId xmlns:a16="http://schemas.microsoft.com/office/drawing/2014/main" id="{45F7E3BE-2029-4EAB-8982-8BF46A5F9C50}"/>
               </a:ext>
             </a:extLst>
           </p:cNvPr>
@@ -11710,6 +15993,9 @@
                 <a:solidFill>
                   <a:srgbClr val="706862"/>
                 </a:solidFill>
+                <a:latin typeface="Inter"/>
+                <a:ea typeface="Inter"/>
+                <a:cs typeface="Inter"/>
               </a:defRPr>
             </a:pPr>
             <a:r>
@@ -11717,6 +16003,9 @@
                 <a:solidFill>
                   <a:srgbClr val="706862"/>
                 </a:solidFill>
+                <a:latin typeface="Inter"/>
+                <a:ea typeface="Inter"/>
+                <a:cs typeface="Inter"/>
               </a:rPr>
               <a:t>Título de la presentación · Área o proyecto · Fecha</a:t>
             </a:r>
@@ -11732,13 +16021,13 @@
           <p:nvPr/>
         </p:nvPicPr>
         <p:blipFill>
-          <a:blip xmlns:r="http://schemas.openxmlformats.org/officeDocument/2006/relationships" xmlns:a="http://schemas.openxmlformats.org/drawingml/2006/main" r:embed="R65bdecfe2ab94345"/>
+          <a:blip xmlns:r="http://schemas.openxmlformats.org/officeDocument/2006/relationships" xmlns:a="http://schemas.openxmlformats.org/drawingml/2006/main" r:embed="R099c097a650c4ca0"/>
           <a:stretch xmlns:a="http://schemas.openxmlformats.org/drawingml/2006/main"/>
         </p:blipFill>
         <p:spPr>
           <a:xfrm xmlns:a="http://schemas.openxmlformats.org/drawingml/2006/main">
-            <a:off x="8191500" y="1703720"/>
-            <a:ext cx="2857500" cy="3660110"/>
+            <a:off x="8191500" y="1703348"/>
+            <a:ext cx="2857500" cy="3660854"/>
           </a:xfrm>
           <a:prstGeom xmlns:a="http://schemas.openxmlformats.org/drawingml/2006/main" prst="rect">
             <a:avLst/>
@@ -11750,7 +16039,7 @@
           <p:cNvPr id="7" name="accent">
             <a:extLst xmlns:a="http://schemas.openxmlformats.org/drawingml/2006/main">
               <a:ext uri="{FF2B5EF4-FFF2-40B4-BE49-F238E27FC236}">
-                <a16:creationId xmlns:a16="http://schemas.microsoft.com/office/drawing/2014/main" id="{124246B8-DCC2-48C0-8B46-1587A235B76B}"/>
+                <a16:creationId xmlns:a16="http://schemas.microsoft.com/office/drawing/2014/main" id="{37DE327C-C2A7-4EB3-900D-55D018EB66F0}"/>
               </a:ext>
             </a:extLst>
           </p:cNvPr>
@@ -11779,7 +16068,7 @@
     </p:spTree>
     <p:extLst>
       <p:ext uri="{BB962C8B-B14F-4D97-AF65-F5344CB8AC3E}">
-        <p14:creationId xmlns:p14="http://schemas.microsoft.com/office/powerpoint/2010/main" val="1219541927"/>
+        <p14:creationId xmlns:p14="http://schemas.microsoft.com/office/powerpoint/2010/main" val="1889652427"/>
       </p:ext>
     </p:extLst>
   </p:cSld>
@@ -11810,7 +16099,7 @@
           <p:cNvPr id="7" name="brand">
             <a:extLst xmlns:a="http://schemas.openxmlformats.org/drawingml/2006/main">
               <a:ext uri="{FF2B5EF4-FFF2-40B4-BE49-F238E27FC236}">
-                <a16:creationId xmlns:a16="http://schemas.microsoft.com/office/drawing/2014/main" id="{2B19A0C2-3763-4C67-A12E-B00A26D4AFEA}"/>
+                <a16:creationId xmlns:a16="http://schemas.microsoft.com/office/drawing/2014/main" id="{EF31EB86-4A42-438D-B595-E28BA284F735}"/>
               </a:ext>
             </a:extLst>
           </p:cNvPr>
@@ -11842,6 +16131,9 @@
                 <a:solidFill>
                   <a:srgbClr val="A88650"/>
                 </a:solidFill>
+                <a:latin typeface="Inter"/>
+                <a:ea typeface="Inter"/>
+                <a:cs typeface="Inter"/>
               </a:defRPr>
             </a:pPr>
             <a:r>
@@ -11849,6 +16141,9 @@
                 <a:solidFill>
                   <a:srgbClr val="A88650"/>
                 </a:solidFill>
+                <a:latin typeface="Inter"/>
+                <a:ea typeface="Inter"/>
+                <a:cs typeface="Inter"/>
               </a:rPr>
               <a:t>RON CARÚPANO</a:t>
             </a:r>
@@ -11860,7 +16155,7 @@
           <p:cNvPr id="2" name="page">
             <a:extLst xmlns:a="http://schemas.openxmlformats.org/drawingml/2006/main">
               <a:ext uri="{FF2B5EF4-FFF2-40B4-BE49-F238E27FC236}">
-                <a16:creationId xmlns:a16="http://schemas.microsoft.com/office/drawing/2014/main" id="{7D1CE407-949E-4A9F-A1A5-5922961DF02F}"/>
+                <a16:creationId xmlns:a16="http://schemas.microsoft.com/office/drawing/2014/main" id="{D3441D42-E99A-4964-9BDD-A2A7FEEF911B}"/>
               </a:ext>
             </a:extLst>
           </p:cNvPr>
@@ -11892,6 +16187,9 @@
                 <a:solidFill>
                   <a:srgbClr val="706862"/>
                 </a:solidFill>
+                <a:latin typeface="Inter"/>
+                <a:ea typeface="Inter"/>
+                <a:cs typeface="Inter"/>
               </a:defRPr>
             </a:pPr>
             <a:r>
@@ -11899,6 +16197,9 @@
                 <a:solidFill>
                   <a:srgbClr val="706862"/>
                 </a:solidFill>
+                <a:latin typeface="Inter"/>
+                <a:ea typeface="Inter"/>
+                <a:cs typeface="Inter"/>
               </a:rPr>
               <a:t>04</a:t>
             </a:r>
@@ -11910,7 +16211,7 @@
           <p:cNvPr id="3" name="section">
             <a:extLst xmlns:a="http://schemas.openxmlformats.org/drawingml/2006/main">
               <a:ext uri="{FF2B5EF4-FFF2-40B4-BE49-F238E27FC236}">
-                <a16:creationId xmlns:a16="http://schemas.microsoft.com/office/drawing/2014/main" id="{85BA6D4F-60CF-4A75-8A04-FAB874EFE76D}"/>
+                <a16:creationId xmlns:a16="http://schemas.microsoft.com/office/drawing/2014/main" id="{659FAF2B-C269-422D-B081-B6DA9BA79D50}"/>
               </a:ext>
             </a:extLst>
           </p:cNvPr>
@@ -11942,6 +16243,9 @@
                 <a:solidFill>
                   <a:srgbClr val="100C0A"/>
                 </a:solidFill>
+                <a:latin typeface="Adobe Garamond Pro"/>
+                <a:ea typeface="Adobe Garamond Pro"/>
+                <a:cs typeface="Adobe Garamond Pro"/>
               </a:defRPr>
             </a:pPr>
             <a:r>
@@ -11949,6 +16253,9 @@
                 <a:solidFill>
                   <a:srgbClr val="100C0A"/>
                 </a:solidFill>
+                <a:latin typeface="Adobe Garamond Pro"/>
+                <a:ea typeface="Adobe Garamond Pro"/>
+                <a:cs typeface="Adobe Garamond Pro"/>
               </a:rPr>
               <a:t>02</a:t>
             </a:r>
@@ -11960,7 +16267,7 @@
           <p:cNvPr id="4" name="title">
             <a:extLst xmlns:a="http://schemas.openxmlformats.org/drawingml/2006/main">
               <a:ext uri="{FF2B5EF4-FFF2-40B4-BE49-F238E27FC236}">
-                <a16:creationId xmlns:a16="http://schemas.microsoft.com/office/drawing/2014/main" id="{269EBC42-824D-4DB1-84D1-89B54F806850}"/>
+                <a16:creationId xmlns:a16="http://schemas.microsoft.com/office/drawing/2014/main" id="{4E299677-42EF-4356-A050-ED83C4D8FDF9}"/>
               </a:ext>
             </a:extLst>
           </p:cNvPr>
@@ -11992,6 +16299,9 @@
                 <a:solidFill>
                   <a:srgbClr val="100C0A"/>
                 </a:solidFill>
+                <a:latin typeface="Adobe Garamond Pro"/>
+                <a:ea typeface="Adobe Garamond Pro"/>
+                <a:cs typeface="Adobe Garamond Pro"/>
               </a:defRPr>
             </a:pPr>
             <a:r>
@@ -11999,6 +16309,9 @@
                 <a:solidFill>
                   <a:srgbClr val="100C0A"/>
                 </a:solidFill>
+                <a:latin typeface="Adobe Garamond Pro"/>
+                <a:ea typeface="Adobe Garamond Pro"/>
+                <a:cs typeface="Adobe Garamond Pro"/>
               </a:rPr>
               <a:t>La idea que abre</a:t>
             </a:r>
@@ -12009,6 +16322,9 @@
                 <a:solidFill>
                   <a:srgbClr val="100C0A"/>
                 </a:solidFill>
+                <a:latin typeface="Adobe Garamond Pro"/>
+                <a:ea typeface="Adobe Garamond Pro"/>
+                <a:cs typeface="Adobe Garamond Pro"/>
               </a:defRPr>
             </a:pPr>
             <a:r>
@@ -12016,6 +16332,9 @@
                 <a:solidFill>
                   <a:srgbClr val="100C0A"/>
                 </a:solidFill>
+                <a:latin typeface="Adobe Garamond Pro"/>
+                <a:ea typeface="Adobe Garamond Pro"/>
+                <a:cs typeface="Adobe Garamond Pro"/>
               </a:rPr>
               <a:t>el siguiente capítulo.</a:t>
             </a:r>
@@ -12027,7 +16346,7 @@
           <p:cNvPr id="5" name="copy">
             <a:extLst xmlns:a="http://schemas.openxmlformats.org/drawingml/2006/main">
               <a:ext uri="{FF2B5EF4-FFF2-40B4-BE49-F238E27FC236}">
-                <a16:creationId xmlns:a16="http://schemas.microsoft.com/office/drawing/2014/main" id="{94F80C8E-6762-4FC6-AFA2-1B6F04798F7A}"/>
+                <a16:creationId xmlns:a16="http://schemas.microsoft.com/office/drawing/2014/main" id="{EC1F17F1-8EEF-4EE8-9637-04212348ED1C}"/>
               </a:ext>
             </a:extLst>
           </p:cNvPr>
@@ -12059,6 +16378,9 @@
                 <a:solidFill>
                   <a:srgbClr val="34271F"/>
                 </a:solidFill>
+                <a:latin typeface="Inter"/>
+                <a:ea typeface="Inter"/>
+                <a:cs typeface="Inter"/>
               </a:defRPr>
             </a:pPr>
             <a:r>
@@ -12066,6 +16388,9 @@
                 <a:solidFill>
                   <a:srgbClr val="34271F"/>
                 </a:solidFill>
+                <a:latin typeface="Inter"/>
+                <a:ea typeface="Inter"/>
+                <a:cs typeface="Inter"/>
               </a:rPr>
               <a:t>Use una frase que cree dirección y prepare la conversación.</a:t>
             </a:r>
@@ -12077,7 +16402,7 @@
           <p:cNvPr id="6" name="rule">
             <a:extLst xmlns:a="http://schemas.openxmlformats.org/drawingml/2006/main">
               <a:ext uri="{FF2B5EF4-FFF2-40B4-BE49-F238E27FC236}">
-                <a16:creationId xmlns:a16="http://schemas.microsoft.com/office/drawing/2014/main" id="{F57258C3-79F0-41E1-A32B-E6709FD33A0C}"/>
+                <a16:creationId xmlns:a16="http://schemas.microsoft.com/office/drawing/2014/main" id="{FAC7A0CF-C1F3-4E46-B93F-2FC68516D6F3}"/>
               </a:ext>
             </a:extLst>
           </p:cNvPr>
@@ -12106,7 +16431,7 @@
     </p:spTree>
     <p:extLst>
       <p:ext uri="{BB962C8B-B14F-4D97-AF65-F5344CB8AC3E}">
-        <p14:creationId xmlns:p14="http://schemas.microsoft.com/office/powerpoint/2010/main" val="1184194792"/>
+        <p14:creationId xmlns:p14="http://schemas.microsoft.com/office/powerpoint/2010/main" val="1911566816"/>
       </p:ext>
     </p:extLst>
   </p:cSld>
@@ -12137,7 +16462,7 @@
           <p:cNvPr id="7" name="brand">
             <a:extLst xmlns:a="http://schemas.openxmlformats.org/drawingml/2006/main">
               <a:ext uri="{FF2B5EF4-FFF2-40B4-BE49-F238E27FC236}">
-                <a16:creationId xmlns:a16="http://schemas.microsoft.com/office/drawing/2014/main" id="{33987222-D3EF-4508-B7CF-2F0C5CDBF0C1}"/>
+                <a16:creationId xmlns:a16="http://schemas.microsoft.com/office/drawing/2014/main" id="{B7E5C8B2-9BF2-4656-806C-66578A42FF35}"/>
               </a:ext>
             </a:extLst>
           </p:cNvPr>
@@ -12169,6 +16494,9 @@
                 <a:solidFill>
                   <a:srgbClr val="D5B879"/>
                 </a:solidFill>
+                <a:latin typeface="Inter"/>
+                <a:ea typeface="Inter"/>
+                <a:cs typeface="Inter"/>
               </a:defRPr>
             </a:pPr>
             <a:r>
@@ -12176,6 +16504,9 @@
                 <a:solidFill>
                   <a:srgbClr val="D5B879"/>
                 </a:solidFill>
+                <a:latin typeface="Inter"/>
+                <a:ea typeface="Inter"/>
+                <a:cs typeface="Inter"/>
               </a:rPr>
               <a:t>RON CARÚPANO</a:t>
             </a:r>
@@ -12187,7 +16518,7 @@
           <p:cNvPr id="2" name="page">
             <a:extLst xmlns:a="http://schemas.openxmlformats.org/drawingml/2006/main">
               <a:ext uri="{FF2B5EF4-FFF2-40B4-BE49-F238E27FC236}">
-                <a16:creationId xmlns:a16="http://schemas.microsoft.com/office/drawing/2014/main" id="{6B1634C8-707F-4F9F-B849-B485417CD91F}"/>
+                <a16:creationId xmlns:a16="http://schemas.microsoft.com/office/drawing/2014/main" id="{80EA9932-7887-49CC-A2CB-AB0B40DF2983}"/>
               </a:ext>
             </a:extLst>
           </p:cNvPr>
@@ -12221,6 +16552,9 @@
                     <a:alpha val="43922"/>
                   </a:srgbClr>
                 </a:solidFill>
+                <a:latin typeface="Inter"/>
+                <a:ea typeface="Inter"/>
+                <a:cs typeface="Inter"/>
               </a:defRPr>
             </a:pPr>
             <a:r>
@@ -12230,6 +16564,9 @@
                     <a:alpha val="43922"/>
                   </a:srgbClr>
                 </a:solidFill>
+                <a:latin typeface="Inter"/>
+                <a:ea typeface="Inter"/>
+                <a:cs typeface="Inter"/>
               </a:rPr>
               <a:t>05</a:t>
             </a:r>
@@ -12241,7 +16578,7 @@
           <p:cNvPr id="3" name="eyebrow">
             <a:extLst xmlns:a="http://schemas.openxmlformats.org/drawingml/2006/main">
               <a:ext uri="{FF2B5EF4-FFF2-40B4-BE49-F238E27FC236}">
-                <a16:creationId xmlns:a16="http://schemas.microsoft.com/office/drawing/2014/main" id="{A9395932-ED08-4E1B-8D70-9699FB22A25E}"/>
+                <a16:creationId xmlns:a16="http://schemas.microsoft.com/office/drawing/2014/main" id="{4ADA3B28-6957-4BE8-A909-BBBCB9B5519C}"/>
               </a:ext>
             </a:extLst>
           </p:cNvPr>
@@ -12273,6 +16610,9 @@
                 <a:solidFill>
                   <a:srgbClr val="D5B879"/>
                 </a:solidFill>
+                <a:latin typeface="Inter"/>
+                <a:ea typeface="Inter"/>
+                <a:cs typeface="Inter"/>
               </a:defRPr>
             </a:pPr>
             <a:r>
@@ -12280,6 +16620,9 @@
                 <a:solidFill>
                   <a:srgbClr val="D5B879"/>
                 </a:solidFill>
+                <a:latin typeface="Inter"/>
+                <a:ea typeface="Inter"/>
+                <a:cs typeface="Inter"/>
               </a:rPr>
               <a:t>DECLARACIÓN</a:t>
             </a:r>
@@ -12291,7 +16634,7 @@
           <p:cNvPr id="4" name="title">
             <a:extLst xmlns:a="http://schemas.openxmlformats.org/drawingml/2006/main">
               <a:ext uri="{FF2B5EF4-FFF2-40B4-BE49-F238E27FC236}">
-                <a16:creationId xmlns:a16="http://schemas.microsoft.com/office/drawing/2014/main" id="{89FC4081-92A4-4186-A290-11A071FDFD23}"/>
+                <a16:creationId xmlns:a16="http://schemas.microsoft.com/office/drawing/2014/main" id="{5431E682-7854-4C06-8CC4-567846B35820}"/>
               </a:ext>
             </a:extLst>
           </p:cNvPr>
@@ -12323,6 +16666,9 @@
                 <a:solidFill>
                   <a:srgbClr val="F3EEE6"/>
                 </a:solidFill>
+                <a:latin typeface="Adobe Garamond Pro"/>
+                <a:ea typeface="Adobe Garamond Pro"/>
+                <a:cs typeface="Adobe Garamond Pro"/>
               </a:defRPr>
             </a:pPr>
             <a:r>
@@ -12330,6 +16676,9 @@
                 <a:solidFill>
                   <a:srgbClr val="F3EEE6"/>
                 </a:solidFill>
+                <a:latin typeface="Adobe Garamond Pro"/>
+                <a:ea typeface="Adobe Garamond Pro"/>
+                <a:cs typeface="Adobe Garamond Pro"/>
               </a:rPr>
               <a:t>El origen no es contexto.</a:t>
             </a:r>
@@ -12340,6 +16689,9 @@
                 <a:solidFill>
                   <a:srgbClr val="F3EEE6"/>
                 </a:solidFill>
+                <a:latin typeface="Adobe Garamond Pro"/>
+                <a:ea typeface="Adobe Garamond Pro"/>
+                <a:cs typeface="Adobe Garamond Pro"/>
               </a:defRPr>
             </a:pPr>
             <a:r>
@@ -12347,6 +16699,9 @@
                 <a:solidFill>
                   <a:srgbClr val="F3EEE6"/>
                 </a:solidFill>
+                <a:latin typeface="Adobe Garamond Pro"/>
+                <a:ea typeface="Adobe Garamond Pro"/>
+                <a:cs typeface="Adobe Garamond Pro"/>
               </a:rPr>
               <a:t>Es una ventaja.</a:t>
             </a:r>
@@ -12358,7 +16713,7 @@
           <p:cNvPr id="5" name="body">
             <a:extLst xmlns:a="http://schemas.openxmlformats.org/drawingml/2006/main">
               <a:ext uri="{FF2B5EF4-FFF2-40B4-BE49-F238E27FC236}">
-                <a16:creationId xmlns:a16="http://schemas.microsoft.com/office/drawing/2014/main" id="{9AD88A20-FD0F-49DA-8296-D3819F83F89E}"/>
+                <a16:creationId xmlns:a16="http://schemas.microsoft.com/office/drawing/2014/main" id="{CB336287-7472-4073-879B-DCA0A1A985F8}"/>
               </a:ext>
             </a:extLst>
           </p:cNvPr>
@@ -12392,6 +16747,9 @@
                     <a:alpha val="58824"/>
                   </a:srgbClr>
                 </a:solidFill>
+                <a:latin typeface="Inter"/>
+                <a:ea typeface="Inter"/>
+                <a:cs typeface="Inter"/>
               </a:defRPr>
             </a:pPr>
             <a:r>
@@ -12401,6 +16759,9 @@
                     <a:alpha val="58824"/>
                   </a:srgbClr>
                 </a:solidFill>
+                <a:latin typeface="Inter"/>
+                <a:ea typeface="Inter"/>
+                <a:cs typeface="Inter"/>
               </a:rPr>
               <a:t>Una slide para concentrar atención en una sola conclusión.</a:t>
             </a:r>
@@ -12412,7 +16773,7 @@
           <p:cNvPr id="6" name="mark">
             <a:extLst xmlns:a="http://schemas.openxmlformats.org/drawingml/2006/main">
               <a:ext uri="{FF2B5EF4-FFF2-40B4-BE49-F238E27FC236}">
-                <a16:creationId xmlns:a16="http://schemas.microsoft.com/office/drawing/2014/main" id="{9CE36268-FCCA-462B-9F12-241E375FA47D}"/>
+                <a16:creationId xmlns:a16="http://schemas.microsoft.com/office/drawing/2014/main" id="{3D6269BF-ACB1-4BCE-879F-DBD4E503AB9C}"/>
               </a:ext>
             </a:extLst>
           </p:cNvPr>
@@ -12444,6 +16805,9 @@
                 <a:solidFill>
                   <a:srgbClr val="D5B879"/>
                 </a:solidFill>
+                <a:latin typeface="Adobe Garamond Pro"/>
+                <a:ea typeface="Adobe Garamond Pro"/>
+                <a:cs typeface="Adobe Garamond Pro"/>
               </a:defRPr>
             </a:pPr>
             <a:r>
@@ -12451,6 +16815,9 @@
                 <a:solidFill>
                   <a:srgbClr val="D5B879"/>
                 </a:solidFill>
+                <a:latin typeface="Adobe Garamond Pro"/>
+                <a:ea typeface="Adobe Garamond Pro"/>
+                <a:cs typeface="Adobe Garamond Pro"/>
               </a:rPr>
               <a:t>1762</a:t>
             </a:r>
@@ -12460,7 +16827,7 @@
     </p:spTree>
     <p:extLst>
       <p:ext uri="{BB962C8B-B14F-4D97-AF65-F5344CB8AC3E}">
-        <p14:creationId xmlns:p14="http://schemas.microsoft.com/office/powerpoint/2010/main" val="364436791"/>
+        <p14:creationId xmlns:p14="http://schemas.microsoft.com/office/powerpoint/2010/main" val="1250464151"/>
       </p:ext>
     </p:extLst>
   </p:cSld>
@@ -12488,8 +16855,8 @@
           <p:nvPr/>
         </p:nvPicPr>
         <p:blipFill>
-          <a:blip xmlns:r="http://schemas.openxmlformats.org/officeDocument/2006/relationships" xmlns:a="http://schemas.openxmlformats.org/drawingml/2006/main" r:embed="Rf9adfd0eb7374589"/>
-          <a:srcRect xmlns:a="http://schemas.openxmlformats.org/drawingml/2006/main" l="0" t="25625" r="0" b="25625"/>
+          <a:blip xmlns:r="http://schemas.openxmlformats.org/officeDocument/2006/relationships" xmlns:a="http://schemas.openxmlformats.org/drawingml/2006/main" r:embed="R37affdc533294795"/>
+          <a:srcRect xmlns:a="http://schemas.openxmlformats.org/drawingml/2006/main" l="0" t="31211" r="0" b="31211"/>
           <a:stretch xmlns:a="http://schemas.openxmlformats.org/drawingml/2006/main">
             <a:fillRect l="0" t="0" r="0" b="0"/>
           </a:stretch>
@@ -12509,7 +16876,7 @@
           <p:cNvPr id="2" name="scrim">
             <a:extLst xmlns:a="http://schemas.openxmlformats.org/drawingml/2006/main">
               <a:ext uri="{FF2B5EF4-FFF2-40B4-BE49-F238E27FC236}">
-                <a16:creationId xmlns:a16="http://schemas.microsoft.com/office/drawing/2014/main" id="{DF4926B8-C19C-45C0-82B7-0C564ED0B375}"/>
+                <a16:creationId xmlns:a16="http://schemas.microsoft.com/office/drawing/2014/main" id="{B12309F0-6AF7-40E2-A88F-884F2EDC0634}"/>
               </a:ext>
             </a:extLst>
           </p:cNvPr>
@@ -12542,7 +16909,7 @@
           <p:cNvPr id="3" name="eyebrow">
             <a:extLst xmlns:a="http://schemas.openxmlformats.org/drawingml/2006/main">
               <a:ext uri="{FF2B5EF4-FFF2-40B4-BE49-F238E27FC236}">
-                <a16:creationId xmlns:a16="http://schemas.microsoft.com/office/drawing/2014/main" id="{AF03AD79-DFD4-473F-BD67-68A781A08614}"/>
+                <a16:creationId xmlns:a16="http://schemas.microsoft.com/office/drawing/2014/main" id="{DE2C22FB-D7B8-430C-A49C-386948B0FC4C}"/>
               </a:ext>
             </a:extLst>
           </p:cNvPr>
@@ -12574,6 +16941,9 @@
                 <a:solidFill>
                   <a:srgbClr val="D5B879"/>
                 </a:solidFill>
+                <a:latin typeface="Inter"/>
+                <a:ea typeface="Inter"/>
+                <a:cs typeface="Inter"/>
               </a:defRPr>
             </a:pPr>
             <a:r>
@@ -12581,6 +16951,9 @@
                 <a:solidFill>
                   <a:srgbClr val="D5B879"/>
                 </a:solidFill>
+                <a:latin typeface="Inter"/>
+                <a:ea typeface="Inter"/>
+                <a:cs typeface="Inter"/>
               </a:rPr>
               <a:t>EXPERIENCIA / RITUAL</a:t>
             </a:r>
@@ -12592,7 +16965,7 @@
           <p:cNvPr id="4" name="title">
             <a:extLst xmlns:a="http://schemas.openxmlformats.org/drawingml/2006/main">
               <a:ext uri="{FF2B5EF4-FFF2-40B4-BE49-F238E27FC236}">
-                <a16:creationId xmlns:a16="http://schemas.microsoft.com/office/drawing/2014/main" id="{75A49639-5E8A-44F0-919F-F0BC14FB1452}"/>
+                <a16:creationId xmlns:a16="http://schemas.microsoft.com/office/drawing/2014/main" id="{1BEFB048-FDBE-4C42-A3B2-3E282A399BC8}"/>
               </a:ext>
             </a:extLst>
           </p:cNvPr>
@@ -12624,6 +16997,9 @@
                 <a:solidFill>
                   <a:srgbClr val="F3EEE6"/>
                 </a:solidFill>
+                <a:latin typeface="Adobe Garamond Pro"/>
+                <a:ea typeface="Adobe Garamond Pro"/>
+                <a:cs typeface="Adobe Garamond Pro"/>
               </a:defRPr>
             </a:pPr>
             <a:r>
@@ -12631,6 +17007,9 @@
                 <a:solidFill>
                   <a:srgbClr val="F3EEE6"/>
                 </a:solidFill>
+                <a:latin typeface="Adobe Garamond Pro"/>
+                <a:ea typeface="Adobe Garamond Pro"/>
+                <a:cs typeface="Adobe Garamond Pro"/>
               </a:rPr>
               <a:t>Una copa.</a:t>
             </a:r>
@@ -12641,6 +17020,9 @@
                 <a:solidFill>
                   <a:srgbClr val="F3EEE6"/>
                 </a:solidFill>
+                <a:latin typeface="Adobe Garamond Pro"/>
+                <a:ea typeface="Adobe Garamond Pro"/>
+                <a:cs typeface="Adobe Garamond Pro"/>
               </a:defRPr>
             </a:pPr>
             <a:r>
@@ -12648,6 +17030,9 @@
                 <a:solidFill>
                   <a:srgbClr val="F3EEE6"/>
                 </a:solidFill>
+                <a:latin typeface="Adobe Garamond Pro"/>
+                <a:ea typeface="Adobe Garamond Pro"/>
+                <a:cs typeface="Adobe Garamond Pro"/>
               </a:rPr>
               <a:t>Otra dimensión.</a:t>
             </a:r>
@@ -12659,7 +17044,7 @@
           <p:cNvPr id="5" name="caption">
             <a:extLst xmlns:a="http://schemas.openxmlformats.org/drawingml/2006/main">
               <a:ext uri="{FF2B5EF4-FFF2-40B4-BE49-F238E27FC236}">
-                <a16:creationId xmlns:a16="http://schemas.microsoft.com/office/drawing/2014/main" id="{BBC0D685-BAA6-46E5-B515-6727EA7CDE0E}"/>
+                <a16:creationId xmlns:a16="http://schemas.microsoft.com/office/drawing/2014/main" id="{45022A51-325D-4A2A-9E4A-56CDD4EF69FA}"/>
               </a:ext>
             </a:extLst>
           </p:cNvPr>
@@ -12693,6 +17078,9 @@
                     <a:alpha val="69020"/>
                   </a:srgbClr>
                 </a:solidFill>
+                <a:latin typeface="Inter"/>
+                <a:ea typeface="Inter"/>
+                <a:cs typeface="Inter"/>
               </a:defRPr>
             </a:pPr>
             <a:r>
@@ -12702,6 +17090,9 @@
                     <a:alpha val="69020"/>
                   </a:srgbClr>
                 </a:solidFill>
+                <a:latin typeface="Inter"/>
+                <a:ea typeface="Inter"/>
+                <a:cs typeface="Inter"/>
               </a:rPr>
               <a:t>Formato de imagen completa para campañas, cultura y aperturas emocionales.</a:t>
             </a:r>
@@ -12711,7 +17102,7 @@
     </p:spTree>
     <p:extLst>
       <p:ext uri="{BB962C8B-B14F-4D97-AF65-F5344CB8AC3E}">
-        <p14:creationId xmlns:p14="http://schemas.microsoft.com/office/powerpoint/2010/main" val="1700821355"/>
+        <p14:creationId xmlns:p14="http://schemas.microsoft.com/office/powerpoint/2010/main" val="1771672228"/>
       </p:ext>
     </p:extLst>
   </p:cSld>
@@ -12746,8 +17137,8 @@
           <p:nvPr/>
         </p:nvPicPr>
         <p:blipFill>
-          <a:blip xmlns:r="http://schemas.openxmlformats.org/officeDocument/2006/relationships" xmlns:a="http://schemas.openxmlformats.org/drawingml/2006/main" r:embed="Rfb42f5347b764b88"/>
-          <a:srcRect xmlns:a="http://schemas.openxmlformats.org/drawingml/2006/main" l="4327" t="0" r="4327" b="0"/>
+          <a:blip xmlns:r="http://schemas.openxmlformats.org/officeDocument/2006/relationships" xmlns:a="http://schemas.openxmlformats.org/drawingml/2006/main" r:embed="R12694a917ea34f52"/>
+          <a:srcRect xmlns:a="http://schemas.openxmlformats.org/drawingml/2006/main" l="0" t="7807" r="0" b="7807"/>
           <a:stretch xmlns:a="http://schemas.openxmlformats.org/drawingml/2006/main">
             <a:fillRect l="0" t="0" r="0" b="0"/>
           </a:stretch>
@@ -12767,7 +17158,7 @@
           <p:cNvPr id="2" name="brand">
             <a:extLst xmlns:a="http://schemas.openxmlformats.org/drawingml/2006/main">
               <a:ext uri="{FF2B5EF4-FFF2-40B4-BE49-F238E27FC236}">
-                <a16:creationId xmlns:a16="http://schemas.microsoft.com/office/drawing/2014/main" id="{DD79C5FB-2DCB-489B-A5ED-AC33E3CD7F2C}"/>
+                <a16:creationId xmlns:a16="http://schemas.microsoft.com/office/drawing/2014/main" id="{E9370CF8-9541-44CF-8500-32274622BE62}"/>
               </a:ext>
             </a:extLst>
           </p:cNvPr>
@@ -12799,6 +17190,9 @@
                 <a:solidFill>
                   <a:srgbClr val="A88650"/>
                 </a:solidFill>
+                <a:latin typeface="Inter"/>
+                <a:ea typeface="Inter"/>
+                <a:cs typeface="Inter"/>
               </a:defRPr>
             </a:pPr>
             <a:r>
@@ -12806,6 +17200,9 @@
                 <a:solidFill>
                   <a:srgbClr val="A88650"/>
                 </a:solidFill>
+                <a:latin typeface="Inter"/>
+                <a:ea typeface="Inter"/>
+                <a:cs typeface="Inter"/>
               </a:rPr>
               <a:t>RON CARÚPANO</a:t>
             </a:r>
@@ -12817,7 +17214,7 @@
           <p:cNvPr id="3" name="page">
             <a:extLst xmlns:a="http://schemas.openxmlformats.org/drawingml/2006/main">
               <a:ext uri="{FF2B5EF4-FFF2-40B4-BE49-F238E27FC236}">
-                <a16:creationId xmlns:a16="http://schemas.microsoft.com/office/drawing/2014/main" id="{B302E3E9-F0B9-48D1-8784-B24A04220C5B}"/>
+                <a16:creationId xmlns:a16="http://schemas.microsoft.com/office/drawing/2014/main" id="{C29806B0-EAE3-476B-A681-74F95F917151}"/>
               </a:ext>
             </a:extLst>
           </p:cNvPr>
@@ -12849,6 +17246,9 @@
                 <a:solidFill>
                   <a:srgbClr val="706862"/>
                 </a:solidFill>
+                <a:latin typeface="Inter"/>
+                <a:ea typeface="Inter"/>
+                <a:cs typeface="Inter"/>
               </a:defRPr>
             </a:pPr>
             <a:r>
@@ -12856,6 +17256,9 @@
                 <a:solidFill>
                   <a:srgbClr val="706862"/>
                 </a:solidFill>
+                <a:latin typeface="Inter"/>
+                <a:ea typeface="Inter"/>
+                <a:cs typeface="Inter"/>
               </a:rPr>
               <a:t>07</a:t>
             </a:r>
@@ -12867,7 +17270,7 @@
           <p:cNvPr id="4" name="eyebrow">
             <a:extLst xmlns:a="http://schemas.openxmlformats.org/drawingml/2006/main">
               <a:ext uri="{FF2B5EF4-FFF2-40B4-BE49-F238E27FC236}">
-                <a16:creationId xmlns:a16="http://schemas.microsoft.com/office/drawing/2014/main" id="{73F3C580-D5A6-44CE-9F48-C24811DE1F61}"/>
+                <a16:creationId xmlns:a16="http://schemas.microsoft.com/office/drawing/2014/main" id="{77B91F29-F8F6-4117-9EF7-5EC759729EB7}"/>
               </a:ext>
             </a:extLst>
           </p:cNvPr>
@@ -12899,6 +17302,9 @@
                 <a:solidFill>
                   <a:srgbClr val="A88650"/>
                 </a:solidFill>
+                <a:latin typeface="Inter"/>
+                <a:ea typeface="Inter"/>
+                <a:cs typeface="Inter"/>
               </a:defRPr>
             </a:pPr>
             <a:r>
@@ -12906,6 +17312,9 @@
                 <a:solidFill>
                   <a:srgbClr val="A88650"/>
                 </a:solidFill>
+                <a:latin typeface="Inter"/>
+                <a:ea typeface="Inter"/>
+                <a:cs typeface="Inter"/>
               </a:rPr>
               <a:t>HISTORIA / CONTEXTO</a:t>
             </a:r>
@@ -12917,7 +17326,7 @@
           <p:cNvPr id="5" name="title">
             <a:extLst xmlns:a="http://schemas.openxmlformats.org/drawingml/2006/main">
               <a:ext uri="{FF2B5EF4-FFF2-40B4-BE49-F238E27FC236}">
-                <a16:creationId xmlns:a16="http://schemas.microsoft.com/office/drawing/2014/main" id="{778CA23E-0DCC-4CE3-8658-F43C07E0E0AD}"/>
+                <a16:creationId xmlns:a16="http://schemas.microsoft.com/office/drawing/2014/main" id="{ECFFCCE0-E7B7-4E8C-B8BC-2B2176891087}"/>
               </a:ext>
             </a:extLst>
           </p:cNvPr>
@@ -12949,6 +17358,9 @@
                 <a:solidFill>
                   <a:srgbClr val="100C0A"/>
                 </a:solidFill>
+                <a:latin typeface="Adobe Garamond Pro"/>
+                <a:ea typeface="Adobe Garamond Pro"/>
+                <a:cs typeface="Adobe Garamond Pro"/>
               </a:defRPr>
             </a:pPr>
             <a:r>
@@ -12956,6 +17368,9 @@
                 <a:solidFill>
                   <a:srgbClr val="100C0A"/>
                 </a:solidFill>
+                <a:latin typeface="Adobe Garamond Pro"/>
+                <a:ea typeface="Adobe Garamond Pro"/>
+                <a:cs typeface="Adobe Garamond Pro"/>
               </a:rPr>
               <a:t>El momento importa</a:t>
             </a:r>
@@ -12966,6 +17381,9 @@
                 <a:solidFill>
                   <a:srgbClr val="100C0A"/>
                 </a:solidFill>
+                <a:latin typeface="Adobe Garamond Pro"/>
+                <a:ea typeface="Adobe Garamond Pro"/>
+                <a:cs typeface="Adobe Garamond Pro"/>
               </a:defRPr>
             </a:pPr>
             <a:r>
@@ -12973,6 +17391,9 @@
                 <a:solidFill>
                   <a:srgbClr val="100C0A"/>
                 </a:solidFill>
+                <a:latin typeface="Adobe Garamond Pro"/>
+                <a:ea typeface="Adobe Garamond Pro"/>
+                <a:cs typeface="Adobe Garamond Pro"/>
               </a:rPr>
               <a:t>tanto como la copa.</a:t>
             </a:r>
@@ -12984,7 +17405,7 @@
           <p:cNvPr id="6" name="body">
             <a:extLst xmlns:a="http://schemas.openxmlformats.org/drawingml/2006/main">
               <a:ext uri="{FF2B5EF4-FFF2-40B4-BE49-F238E27FC236}">
-                <a16:creationId xmlns:a16="http://schemas.microsoft.com/office/drawing/2014/main" id="{99D2AB5B-13B8-466B-84D9-328E3EB3A2A3}"/>
+                <a16:creationId xmlns:a16="http://schemas.microsoft.com/office/drawing/2014/main" id="{F1B0DFA8-7711-4603-8E7E-06D01C2A40AC}"/>
               </a:ext>
             </a:extLst>
           </p:cNvPr>
@@ -13016,6 +17437,9 @@
                 <a:solidFill>
                   <a:srgbClr val="706862"/>
                 </a:solidFill>
+                <a:latin typeface="Inter"/>
+                <a:ea typeface="Inter"/>
+                <a:cs typeface="Inter"/>
               </a:defRPr>
             </a:pPr>
             <a:r>
@@ -13023,6 +17447,9 @@
                 <a:solidFill>
                   <a:srgbClr val="706862"/>
                 </a:solidFill>
+                <a:latin typeface="Inter"/>
+                <a:ea typeface="Inter"/>
+                <a:cs typeface="Inter"/>
               </a:rPr>
               <a:t>Use este formato cuando la fotografía aporte contexto humano, sensorial o cultural. El texto debe explicar por qué esa escena es relevante para la audiencia.</a:t>
             </a:r>
@@ -13034,7 +17461,7 @@
           <p:cNvPr id="7" name="rule">
             <a:extLst xmlns:a="http://schemas.openxmlformats.org/drawingml/2006/main">
               <a:ext uri="{FF2B5EF4-FFF2-40B4-BE49-F238E27FC236}">
-                <a16:creationId xmlns:a16="http://schemas.microsoft.com/office/drawing/2014/main" id="{C8450025-0C08-4B72-B838-09A8C3AFD219}"/>
+                <a16:creationId xmlns:a16="http://schemas.microsoft.com/office/drawing/2014/main" id="{A6BB3952-73DD-4152-94DE-F86C7A679A8E}"/>
               </a:ext>
             </a:extLst>
           </p:cNvPr>
@@ -13063,7 +17490,7 @@
     </p:spTree>
     <p:extLst>
       <p:ext uri="{BB962C8B-B14F-4D97-AF65-F5344CB8AC3E}">
-        <p14:creationId xmlns:p14="http://schemas.microsoft.com/office/powerpoint/2010/main" val="227579130"/>
+        <p14:creationId xmlns:p14="http://schemas.microsoft.com/office/powerpoint/2010/main" val="1932994975"/>
       </p:ext>
     </p:extLst>
   </p:cSld>
@@ -13094,7 +17521,7 @@
           <p:cNvPr id="12" name="brand">
             <a:extLst xmlns:a="http://schemas.openxmlformats.org/drawingml/2006/main">
               <a:ext uri="{FF2B5EF4-FFF2-40B4-BE49-F238E27FC236}">
-                <a16:creationId xmlns:a16="http://schemas.microsoft.com/office/drawing/2014/main" id="{AB4FA553-C0B1-44A9-BB73-ACE7805E0829}"/>
+                <a16:creationId xmlns:a16="http://schemas.microsoft.com/office/drawing/2014/main" id="{1A104F37-5ED9-48DA-B9C0-2A0DD4EFF84E}"/>
               </a:ext>
             </a:extLst>
           </p:cNvPr>
@@ -13126,6 +17553,9 @@
                 <a:solidFill>
                   <a:srgbClr val="D5B879"/>
                 </a:solidFill>
+                <a:latin typeface="Inter"/>
+                <a:ea typeface="Inter"/>
+                <a:cs typeface="Inter"/>
               </a:defRPr>
             </a:pPr>
             <a:r>
@@ -13133,6 +17563,9 @@
                 <a:solidFill>
                   <a:srgbClr val="D5B879"/>
                 </a:solidFill>
+                <a:latin typeface="Inter"/>
+                <a:ea typeface="Inter"/>
+                <a:cs typeface="Inter"/>
               </a:rPr>
               <a:t>RON CARÚPANO</a:t>
             </a:r>
@@ -13144,7 +17577,7 @@
           <p:cNvPr id="2" name="page">
             <a:extLst xmlns:a="http://schemas.openxmlformats.org/drawingml/2006/main">
               <a:ext uri="{FF2B5EF4-FFF2-40B4-BE49-F238E27FC236}">
-                <a16:creationId xmlns:a16="http://schemas.microsoft.com/office/drawing/2014/main" id="{5E22945D-C632-439A-827B-5F6F60CA1F5C}"/>
+                <a16:creationId xmlns:a16="http://schemas.microsoft.com/office/drawing/2014/main" id="{116C5070-1A9C-4105-B977-16FD175B32FB}"/>
               </a:ext>
             </a:extLst>
           </p:cNvPr>
@@ -13178,6 +17611,9 @@
                     <a:alpha val="43922"/>
                   </a:srgbClr>
                 </a:solidFill>
+                <a:latin typeface="Inter"/>
+                <a:ea typeface="Inter"/>
+                <a:cs typeface="Inter"/>
               </a:defRPr>
             </a:pPr>
             <a:r>
@@ -13187,6 +17623,9 @@
                     <a:alpha val="43922"/>
                   </a:srgbClr>
                 </a:solidFill>
+                <a:latin typeface="Inter"/>
+                <a:ea typeface="Inter"/>
+                <a:cs typeface="Inter"/>
               </a:rPr>
               <a:t>08</a:t>
             </a:r>
@@ -13198,7 +17637,7 @@
           <p:cNvPr id="3" name="frame">
             <a:extLst xmlns:a="http://schemas.openxmlformats.org/drawingml/2006/main">
               <a:ext uri="{FF2B5EF4-FFF2-40B4-BE49-F238E27FC236}">
-                <a16:creationId xmlns:a16="http://schemas.microsoft.com/office/drawing/2014/main" id="{6BA63DB8-04FF-4AA9-BECD-48EE5B519DA7}"/>
+                <a16:creationId xmlns:a16="http://schemas.microsoft.com/office/drawing/2014/main" id="{3B02C71E-9BE6-463A-84F3-FDDA56BBBE1A}"/>
               </a:ext>
             </a:extLst>
           </p:cNvPr>
@@ -13237,13 +17676,13 @@
           <p:nvPr/>
         </p:nvPicPr>
         <p:blipFill>
-          <a:blip xmlns:r="http://schemas.openxmlformats.org/officeDocument/2006/relationships" xmlns:a="http://schemas.openxmlformats.org/drawingml/2006/main" r:embed="R97d2e8ddd2294978"/>
+          <a:blip xmlns:r="http://schemas.openxmlformats.org/officeDocument/2006/relationships" xmlns:a="http://schemas.openxmlformats.org/drawingml/2006/main" r:embed="Rafa921176fc541a6"/>
           <a:stretch xmlns:a="http://schemas.openxmlformats.org/drawingml/2006/main"/>
         </p:blipFill>
         <p:spPr>
           <a:xfrm xmlns:a="http://schemas.openxmlformats.org/drawingml/2006/main">
-            <a:off x="1066800" y="1121366"/>
-            <a:ext cx="3714750" cy="4758143"/>
+            <a:off x="1066800" y="1120882"/>
+            <a:ext cx="3714750" cy="4759110"/>
           </a:xfrm>
           <a:prstGeom xmlns:a="http://schemas.openxmlformats.org/drawingml/2006/main" prst="rect">
             <a:avLst/>
@@ -13255,7 +17694,7 @@
           <p:cNvPr id="5" name="eyebrow">
             <a:extLst xmlns:a="http://schemas.openxmlformats.org/drawingml/2006/main">
               <a:ext uri="{FF2B5EF4-FFF2-40B4-BE49-F238E27FC236}">
-                <a16:creationId xmlns:a16="http://schemas.microsoft.com/office/drawing/2014/main" id="{70CAA82B-298D-4D02-B19D-544BA6B3956E}"/>
+                <a16:creationId xmlns:a16="http://schemas.microsoft.com/office/drawing/2014/main" id="{3204EA26-F8DA-413E-8806-4183D55B317C}"/>
               </a:ext>
             </a:extLst>
           </p:cNvPr>
@@ -13287,6 +17726,9 @@
                 <a:solidFill>
                   <a:srgbClr val="D5B879"/>
                 </a:solidFill>
+                <a:latin typeface="Inter"/>
+                <a:ea typeface="Inter"/>
+                <a:cs typeface="Inter"/>
               </a:defRPr>
             </a:pPr>
             <a:r>
@@ -13294,6 +17736,9 @@
                 <a:solidFill>
                   <a:srgbClr val="D5B879"/>
                 </a:solidFill>
+                <a:latin typeface="Inter"/>
+                <a:ea typeface="Inter"/>
+                <a:cs typeface="Inter"/>
               </a:rPr>
               <a:t>ULTRA-PREMIUM</a:t>
             </a:r>
@@ -13305,7 +17750,7 @@
           <p:cNvPr id="6" name="title">
             <a:extLst xmlns:a="http://schemas.openxmlformats.org/drawingml/2006/main">
               <a:ext uri="{FF2B5EF4-FFF2-40B4-BE49-F238E27FC236}">
-                <a16:creationId xmlns:a16="http://schemas.microsoft.com/office/drawing/2014/main" id="{FAD33D50-1A9D-4F73-BCA6-37010B341C0C}"/>
+                <a16:creationId xmlns:a16="http://schemas.microsoft.com/office/drawing/2014/main" id="{29788BB6-D02F-42D3-B24E-1C903B653E4E}"/>
               </a:ext>
             </a:extLst>
           </p:cNvPr>
@@ -13337,6 +17782,9 @@
                 <a:solidFill>
                   <a:srgbClr val="F3EEE6"/>
                 </a:solidFill>
+                <a:latin typeface="Adobe Garamond Pro"/>
+                <a:ea typeface="Adobe Garamond Pro"/>
+                <a:cs typeface="Adobe Garamond Pro"/>
               </a:defRPr>
             </a:pPr>
             <a:r>
@@ -13344,6 +17792,9 @@
                 <a:solidFill>
                   <a:srgbClr val="F3EEE6"/>
                 </a:solidFill>
+                <a:latin typeface="Adobe Garamond Pro"/>
+                <a:ea typeface="Adobe Garamond Pro"/>
+                <a:cs typeface="Adobe Garamond Pro"/>
               </a:rPr>
               <a:t>Carúpano 21</a:t>
             </a:r>
@@ -13355,7 +17806,7 @@
           <p:cNvPr id="7" name="role">
             <a:extLst xmlns:a="http://schemas.openxmlformats.org/drawingml/2006/main">
               <a:ext uri="{FF2B5EF4-FFF2-40B4-BE49-F238E27FC236}">
-                <a16:creationId xmlns:a16="http://schemas.microsoft.com/office/drawing/2014/main" id="{F8A35362-7609-400A-9077-C428DC77721E}"/>
+                <a16:creationId xmlns:a16="http://schemas.microsoft.com/office/drawing/2014/main" id="{0E12DC4D-9F35-4094-AFB6-16D4A0A5C94D}"/>
               </a:ext>
             </a:extLst>
           </p:cNvPr>
@@ -13389,6 +17840,9 @@
                     <a:alpha val="69020"/>
                   </a:srgbClr>
                 </a:solidFill>
+                <a:latin typeface="Inter"/>
+                <a:ea typeface="Inter"/>
+                <a:cs typeface="Inter"/>
               </a:defRPr>
             </a:pPr>
             <a:r>
@@ -13398,6 +17852,9 @@
                     <a:alpha val="69020"/>
                   </a:srgbClr>
                 </a:solidFill>
+                <a:latin typeface="Inter"/>
+                <a:ea typeface="Inter"/>
+                <a:cs typeface="Inter"/>
               </a:rPr>
               <a:t>Complejidad, equilibrio y una entrada natural al lujo de alta gama.</a:t>
             </a:r>
@@ -13409,7 +17866,7 @@
           <p:cNvPr id="8" name="line">
             <a:extLst xmlns:a="http://schemas.openxmlformats.org/drawingml/2006/main">
               <a:ext uri="{FF2B5EF4-FFF2-40B4-BE49-F238E27FC236}">
-                <a16:creationId xmlns:a16="http://schemas.microsoft.com/office/drawing/2014/main" id="{5C9F4AA5-04D5-4978-85A7-04C08DA0F639}"/>
+                <a16:creationId xmlns:a16="http://schemas.microsoft.com/office/drawing/2014/main" id="{89230ED1-7E35-4DF2-A4AB-BE1AEB9CD2B0}"/>
               </a:ext>
             </a:extLst>
           </p:cNvPr>
@@ -13442,7 +17899,7 @@
           <p:cNvPr id="9" name="age">
             <a:extLst xmlns:a="http://schemas.openxmlformats.org/drawingml/2006/main">
               <a:ext uri="{FF2B5EF4-FFF2-40B4-BE49-F238E27FC236}">
-                <a16:creationId xmlns:a16="http://schemas.microsoft.com/office/drawing/2014/main" id="{3544FBB3-3B11-4D01-9A92-72D33E123B59}"/>
+                <a16:creationId xmlns:a16="http://schemas.microsoft.com/office/drawing/2014/main" id="{42D1726D-09D3-42F1-AEF5-B75FFF2DB03A}"/>
               </a:ext>
             </a:extLst>
           </p:cNvPr>
@@ -13474,6 +17931,9 @@
                 <a:solidFill>
                   <a:srgbClr val="D5B879"/>
                 </a:solidFill>
+                <a:latin typeface="Inter"/>
+                <a:ea typeface="Inter"/>
+                <a:cs typeface="Inter"/>
               </a:defRPr>
             </a:pPr>
             <a:r>
@@ -13481,6 +17941,9 @@
                 <a:solidFill>
                   <a:srgbClr val="D5B879"/>
                 </a:solidFill>
+                <a:latin typeface="Inter"/>
+                <a:ea typeface="Inter"/>
+                <a:cs typeface="Inter"/>
               </a:rPr>
               <a:t>HASTA 21 AÑOS</a:t>
             </a:r>
@@ -13492,7 +17955,7 @@
           <p:cNvPr id="10" name="abv">
             <a:extLst xmlns:a="http://schemas.openxmlformats.org/drawingml/2006/main">
               <a:ext uri="{FF2B5EF4-FFF2-40B4-BE49-F238E27FC236}">
-                <a16:creationId xmlns:a16="http://schemas.microsoft.com/office/drawing/2014/main" id="{3A531EB2-221A-4DA3-BB21-02249AE9BFF9}"/>
+                <a16:creationId xmlns:a16="http://schemas.microsoft.com/office/drawing/2014/main" id="{A83ED8E3-3085-4A09-9BA3-03FDFF649E84}"/>
               </a:ext>
             </a:extLst>
           </p:cNvPr>
@@ -13524,6 +17987,9 @@
                 <a:solidFill>
                   <a:srgbClr val="D5B879"/>
                 </a:solidFill>
+                <a:latin typeface="Inter"/>
+                <a:ea typeface="Inter"/>
+                <a:cs typeface="Inter"/>
               </a:defRPr>
             </a:pPr>
             <a:r>
@@ -13531,6 +17997,9 @@
                 <a:solidFill>
                   <a:srgbClr val="D5B879"/>
                 </a:solidFill>
+                <a:latin typeface="Inter"/>
+                <a:ea typeface="Inter"/>
+                <a:cs typeface="Inter"/>
               </a:rPr>
               <a:t>40° G.L.</a:t>
             </a:r>
@@ -13542,7 +18011,7 @@
           <p:cNvPr id="11" name="notes">
             <a:extLst xmlns:a="http://schemas.openxmlformats.org/drawingml/2006/main">
               <a:ext uri="{FF2B5EF4-FFF2-40B4-BE49-F238E27FC236}">
-                <a16:creationId xmlns:a16="http://schemas.microsoft.com/office/drawing/2014/main" id="{97BF3645-BB59-406E-A647-66DB87D8A19B}"/>
+                <a16:creationId xmlns:a16="http://schemas.microsoft.com/office/drawing/2014/main" id="{85B7C02A-913D-4812-98B7-39CA6E44DDE2}"/>
               </a:ext>
             </a:extLst>
           </p:cNvPr>
@@ -13576,6 +18045,9 @@
                     <a:alpha val="56078"/>
                   </a:srgbClr>
                 </a:solidFill>
+                <a:latin typeface="Inter"/>
+                <a:ea typeface="Inter"/>
+                <a:cs typeface="Inter"/>
               </a:defRPr>
             </a:pPr>
             <a:r>
@@ -13585,6 +18057,9 @@
                     <a:alpha val="56078"/>
                   </a:srgbClr>
                 </a:solidFill>
+                <a:latin typeface="Inter"/>
+                <a:ea typeface="Inter"/>
+                <a:cs typeface="Inter"/>
               </a:rPr>
               <a:t>Frutos rojos · sarrapia · madera · café · chocolate negro</a:t>
             </a:r>
@@ -13594,7 +18069,7 @@
     </p:spTree>
     <p:extLst>
       <p:ext uri="{BB962C8B-B14F-4D97-AF65-F5344CB8AC3E}">
-        <p14:creationId xmlns:p14="http://schemas.microsoft.com/office/powerpoint/2010/main" val="187774407"/>
+        <p14:creationId xmlns:p14="http://schemas.microsoft.com/office/powerpoint/2010/main" val="1514558593"/>
       </p:ext>
     </p:extLst>
   </p:cSld>
@@ -13625,7 +18100,7 @@
           <p:cNvPr id="18" name="brand">
             <a:extLst xmlns:a="http://schemas.openxmlformats.org/drawingml/2006/main">
               <a:ext uri="{FF2B5EF4-FFF2-40B4-BE49-F238E27FC236}">
-                <a16:creationId xmlns:a16="http://schemas.microsoft.com/office/drawing/2014/main" id="{BDBB3B08-CB2D-4FA5-A5DD-9A63CC5BD4C7}"/>
+                <a16:creationId xmlns:a16="http://schemas.microsoft.com/office/drawing/2014/main" id="{08A2C21A-26E4-4566-9E0D-CE9C9A7063DD}"/>
               </a:ext>
             </a:extLst>
           </p:cNvPr>
@@ -13657,6 +18132,9 @@
                 <a:solidFill>
                   <a:srgbClr val="A88650"/>
                 </a:solidFill>
+                <a:latin typeface="Inter"/>
+                <a:ea typeface="Inter"/>
+                <a:cs typeface="Inter"/>
               </a:defRPr>
             </a:pPr>
             <a:r>
@@ -13664,6 +18142,9 @@
                 <a:solidFill>
                   <a:srgbClr val="A88650"/>
                 </a:solidFill>
+                <a:latin typeface="Inter"/>
+                <a:ea typeface="Inter"/>
+                <a:cs typeface="Inter"/>
               </a:rPr>
               <a:t>RON CARÚPANO</a:t>
             </a:r>
@@ -13675,7 +18156,7 @@
           <p:cNvPr id="2" name="page">
             <a:extLst xmlns:a="http://schemas.openxmlformats.org/drawingml/2006/main">
               <a:ext uri="{FF2B5EF4-FFF2-40B4-BE49-F238E27FC236}">
-                <a16:creationId xmlns:a16="http://schemas.microsoft.com/office/drawing/2014/main" id="{F09FB52C-C354-42C7-9761-17B1AE5A5DE5}"/>
+                <a16:creationId xmlns:a16="http://schemas.microsoft.com/office/drawing/2014/main" id="{30A3C813-0B24-4FA1-BE1B-022648D3D801}"/>
               </a:ext>
             </a:extLst>
           </p:cNvPr>
@@ -13707,6 +18188,9 @@
                 <a:solidFill>
                   <a:srgbClr val="706862"/>
                 </a:solidFill>
+                <a:latin typeface="Inter"/>
+                <a:ea typeface="Inter"/>
+                <a:cs typeface="Inter"/>
               </a:defRPr>
             </a:pPr>
             <a:r>
@@ -13714,6 +18198,9 @@
                 <a:solidFill>
                   <a:srgbClr val="706862"/>
                 </a:solidFill>
+                <a:latin typeface="Inter"/>
+                <a:ea typeface="Inter"/>
+                <a:cs typeface="Inter"/>
               </a:rPr>
               <a:t>09</a:t>
             </a:r>
@@ -13725,7 +18212,7 @@
           <p:cNvPr id="3" name="eyebrow">
             <a:extLst xmlns:a="http://schemas.openxmlformats.org/drawingml/2006/main">
               <a:ext uri="{FF2B5EF4-FFF2-40B4-BE49-F238E27FC236}">
-                <a16:creationId xmlns:a16="http://schemas.microsoft.com/office/drawing/2014/main" id="{62E2CFBD-DA6C-424F-87C3-D7C7FD4B267E}"/>
+                <a16:creationId xmlns:a16="http://schemas.microsoft.com/office/drawing/2014/main" id="{1A73C3F6-6DFA-4BA9-A468-62BEF97FB152}"/>
               </a:ext>
             </a:extLst>
           </p:cNvPr>
@@ -13757,6 +18244,9 @@
                 <a:solidFill>
                   <a:srgbClr val="A88650"/>
                 </a:solidFill>
+                <a:latin typeface="Inter"/>
+                <a:ea typeface="Inter"/>
+                <a:cs typeface="Inter"/>
               </a:defRPr>
             </a:pPr>
             <a:r>
@@ -13764,6 +18254,9 @@
                 <a:solidFill>
                   <a:srgbClr val="A88650"/>
                 </a:solidFill>
+                <a:latin typeface="Inter"/>
+                <a:ea typeface="Inter"/>
+                <a:cs typeface="Inter"/>
               </a:rPr>
               <a:t>ARQUITECTURA DE PORTAFOLIO</a:t>
             </a:r>
@@ -13775,7 +18268,7 @@
           <p:cNvPr id="4" name="title">
             <a:extLst xmlns:a="http://schemas.openxmlformats.org/drawingml/2006/main">
               <a:ext uri="{FF2B5EF4-FFF2-40B4-BE49-F238E27FC236}">
-                <a16:creationId xmlns:a16="http://schemas.microsoft.com/office/drawing/2014/main" id="{B73876B0-2341-45FA-9276-99EC43E16B26}"/>
+                <a16:creationId xmlns:a16="http://schemas.microsoft.com/office/drawing/2014/main" id="{27CDBFC2-A344-4CCC-BF94-4D2463E4D7B1}"/>
               </a:ext>
             </a:extLst>
           </p:cNvPr>
@@ -13807,6 +18300,9 @@
                 <a:solidFill>
                   <a:srgbClr val="100C0A"/>
                 </a:solidFill>
+                <a:latin typeface="Adobe Garamond Pro"/>
+                <a:ea typeface="Adobe Garamond Pro"/>
+                <a:cs typeface="Adobe Garamond Pro"/>
               </a:defRPr>
             </a:pPr>
             <a:r>
@@ -13814,6 +18310,9 @@
                 <a:solidFill>
                   <a:srgbClr val="100C0A"/>
                 </a:solidFill>
+                <a:latin typeface="Adobe Garamond Pro"/>
+                <a:ea typeface="Adobe Garamond Pro"/>
+                <a:cs typeface="Adobe Garamond Pro"/>
               </a:rPr>
               <a:t>Cada expresión ocupa</a:t>
             </a:r>
@@ -13824,6 +18323,9 @@
                 <a:solidFill>
                   <a:srgbClr val="100C0A"/>
                 </a:solidFill>
+                <a:latin typeface="Adobe Garamond Pro"/>
+                <a:ea typeface="Adobe Garamond Pro"/>
+                <a:cs typeface="Adobe Garamond Pro"/>
               </a:defRPr>
             </a:pPr>
             <a:r>
@@ -13831,6 +18333,9 @@
                 <a:solidFill>
                   <a:srgbClr val="100C0A"/>
                 </a:solidFill>
+                <a:latin typeface="Adobe Garamond Pro"/>
+                <a:ea typeface="Adobe Garamond Pro"/>
+                <a:cs typeface="Adobe Garamond Pro"/>
               </a:rPr>
               <a:t>un lugar reconocible.</a:t>
             </a:r>
@@ -13846,13 +18351,13 @@
           <p:nvPr/>
         </p:nvPicPr>
         <p:blipFill>
-          <a:blip xmlns:r="http://schemas.openxmlformats.org/officeDocument/2006/relationships" xmlns:a="http://schemas.openxmlformats.org/drawingml/2006/main" r:embed="Rc2b5026ac63e481f"/>
+          <a:blip xmlns:r="http://schemas.openxmlformats.org/officeDocument/2006/relationships" xmlns:a="http://schemas.openxmlformats.org/drawingml/2006/main" r:embed="R8341632ed7d54294"/>
           <a:stretch xmlns:a="http://schemas.openxmlformats.org/drawingml/2006/main"/>
         </p:blipFill>
         <p:spPr>
           <a:xfrm xmlns:a="http://schemas.openxmlformats.org/drawingml/2006/main">
-            <a:off x="742950" y="2984340"/>
-            <a:ext cx="1809750" cy="2318070"/>
+            <a:off x="742950" y="2984105"/>
+            <a:ext cx="1809750" cy="2318541"/>
           </a:xfrm>
           <a:prstGeom xmlns:a="http://schemas.openxmlformats.org/drawingml/2006/main" prst="rect">
             <a:avLst/>
@@ -13864,7 +18369,7 @@
           <p:cNvPr id="6" name="age0">
             <a:extLst xmlns:a="http://schemas.openxmlformats.org/drawingml/2006/main">
               <a:ext uri="{FF2B5EF4-FFF2-40B4-BE49-F238E27FC236}">
-                <a16:creationId xmlns:a16="http://schemas.microsoft.com/office/drawing/2014/main" id="{D39EE12B-092B-48FE-A667-29FB9EE7EC64}"/>
+                <a16:creationId xmlns:a16="http://schemas.microsoft.com/office/drawing/2014/main" id="{C51A1281-FCAC-4DEE-928F-074CBD3CD8F7}"/>
               </a:ext>
             </a:extLst>
           </p:cNvPr>
@@ -13896,6 +18401,9 @@
                 <a:solidFill>
                   <a:srgbClr val="100C0A"/>
                 </a:solidFill>
+                <a:latin typeface="Adobe Garamond Pro"/>
+                <a:ea typeface="Adobe Garamond Pro"/>
+                <a:cs typeface="Adobe Garamond Pro"/>
               </a:defRPr>
             </a:pPr>
             <a:r>
@@ -13903,6 +18411,9 @@
                 <a:solidFill>
                   <a:srgbClr val="100C0A"/>
                 </a:solidFill>
+                <a:latin typeface="Adobe Garamond Pro"/>
+                <a:ea typeface="Adobe Garamond Pro"/>
+                <a:cs typeface="Adobe Garamond Pro"/>
               </a:rPr>
               <a:t>6</a:t>
             </a:r>
@@ -13914,7 +18425,7 @@
           <p:cNvPr id="7" name="tier0">
             <a:extLst xmlns:a="http://schemas.openxmlformats.org/drawingml/2006/main">
               <a:ext uri="{FF2B5EF4-FFF2-40B4-BE49-F238E27FC236}">
-                <a16:creationId xmlns:a16="http://schemas.microsoft.com/office/drawing/2014/main" id="{30F02DA7-046A-4AA5-A1FE-737303F91768}"/>
+                <a16:creationId xmlns:a16="http://schemas.microsoft.com/office/drawing/2014/main" id="{85A2D9C3-2CD1-4D7F-85B7-7613B7EF7A02}"/>
               </a:ext>
             </a:extLst>
           </p:cNvPr>
@@ -13946,6 +18457,9 @@
                 <a:solidFill>
                   <a:srgbClr val="706862"/>
                 </a:solidFill>
+                <a:latin typeface="Inter"/>
+                <a:ea typeface="Inter"/>
+                <a:cs typeface="Inter"/>
               </a:defRPr>
             </a:pPr>
             <a:r>
@@ -13953,6 +18467,9 @@
                 <a:solidFill>
                   <a:srgbClr val="706862"/>
                 </a:solidFill>
+                <a:latin typeface="Inter"/>
+                <a:ea typeface="Inter"/>
+                <a:cs typeface="Inter"/>
               </a:rPr>
               <a:t>Entrada</a:t>
             </a:r>
@@ -13968,13 +18485,13 @@
           <p:nvPr/>
         </p:nvPicPr>
         <p:blipFill>
-          <a:blip xmlns:r="http://schemas.openxmlformats.org/officeDocument/2006/relationships" xmlns:a="http://schemas.openxmlformats.org/drawingml/2006/main" r:embed="Rd13a5ea4d83041c3"/>
+          <a:blip xmlns:r="http://schemas.openxmlformats.org/officeDocument/2006/relationships" xmlns:a="http://schemas.openxmlformats.org/drawingml/2006/main" r:embed="R97f9cce4479c44c9"/>
           <a:stretch xmlns:a="http://schemas.openxmlformats.org/drawingml/2006/main"/>
         </p:blipFill>
         <p:spPr>
           <a:xfrm xmlns:a="http://schemas.openxmlformats.org/drawingml/2006/main">
-            <a:off x="3505200" y="2984340"/>
-            <a:ext cx="1809750" cy="2318070"/>
+            <a:off x="3505200" y="2984105"/>
+            <a:ext cx="1809750" cy="2318541"/>
           </a:xfrm>
           <a:prstGeom xmlns:a="http://schemas.openxmlformats.org/drawingml/2006/main" prst="rect">
             <a:avLst/>
@@ -13986,7 +18503,7 @@
           <p:cNvPr id="9" name="age1">
             <a:extLst xmlns:a="http://schemas.openxmlformats.org/drawingml/2006/main">
               <a:ext uri="{FF2B5EF4-FFF2-40B4-BE49-F238E27FC236}">
-                <a16:creationId xmlns:a16="http://schemas.microsoft.com/office/drawing/2014/main" id="{6900C7DA-7748-4013-8F1D-CA64FF95E1F1}"/>
+                <a16:creationId xmlns:a16="http://schemas.microsoft.com/office/drawing/2014/main" id="{5F8BEC11-E581-4CAF-942D-136A6BF5B165}"/>
               </a:ext>
             </a:extLst>
           </p:cNvPr>
@@ -14018,6 +18535,9 @@
                 <a:solidFill>
                   <a:srgbClr val="100C0A"/>
                 </a:solidFill>
+                <a:latin typeface="Adobe Garamond Pro"/>
+                <a:ea typeface="Adobe Garamond Pro"/>
+                <a:cs typeface="Adobe Garamond Pro"/>
               </a:defRPr>
             </a:pPr>
             <a:r>
@@ -14025,6 +18545,9 @@
                 <a:solidFill>
                   <a:srgbClr val="100C0A"/>
                 </a:solidFill>
+                <a:latin typeface="Adobe Garamond Pro"/>
+                <a:ea typeface="Adobe Garamond Pro"/>
+                <a:cs typeface="Adobe Garamond Pro"/>
               </a:rPr>
               <a:t>12</a:t>
             </a:r>
@@ -14036,7 +18559,7 @@
           <p:cNvPr id="10" name="tier1">
             <a:extLst xmlns:a="http://schemas.openxmlformats.org/drawingml/2006/main">
               <a:ext uri="{FF2B5EF4-FFF2-40B4-BE49-F238E27FC236}">
-                <a16:creationId xmlns:a16="http://schemas.microsoft.com/office/drawing/2014/main" id="{513F7808-9911-4192-BADC-4D0F0B1653B6}"/>
+                <a16:creationId xmlns:a16="http://schemas.microsoft.com/office/drawing/2014/main" id="{DF4182BB-32BE-4053-97C1-62A08511D8BC}"/>
               </a:ext>
             </a:extLst>
           </p:cNvPr>
@@ -14068,6 +18591,9 @@
                 <a:solidFill>
                   <a:srgbClr val="706862"/>
                 </a:solidFill>
+                <a:latin typeface="Inter"/>
+                <a:ea typeface="Inter"/>
+                <a:cs typeface="Inter"/>
               </a:defRPr>
             </a:pPr>
             <a:r>
@@ -14075,6 +18601,9 @@
                 <a:solidFill>
                   <a:srgbClr val="706862"/>
                 </a:solidFill>
+                <a:latin typeface="Inter"/>
+                <a:ea typeface="Inter"/>
+                <a:cs typeface="Inter"/>
               </a:rPr>
               <a:t>Premium</a:t>
             </a:r>
@@ -14090,13 +18619,13 @@
           <p:nvPr/>
         </p:nvPicPr>
         <p:blipFill>
-          <a:blip xmlns:r="http://schemas.openxmlformats.org/officeDocument/2006/relationships" xmlns:a="http://schemas.openxmlformats.org/drawingml/2006/main" r:embed="R9dbf7faf27764bef"/>
+          <a:blip xmlns:r="http://schemas.openxmlformats.org/officeDocument/2006/relationships" xmlns:a="http://schemas.openxmlformats.org/drawingml/2006/main" r:embed="R616e907ad1ac4de6"/>
           <a:stretch xmlns:a="http://schemas.openxmlformats.org/drawingml/2006/main"/>
         </p:blipFill>
         <p:spPr>
           <a:xfrm xmlns:a="http://schemas.openxmlformats.org/drawingml/2006/main">
-            <a:off x="6267450" y="2984340"/>
-            <a:ext cx="1809750" cy="2318070"/>
+            <a:off x="6267450" y="2984105"/>
+            <a:ext cx="1809750" cy="2318541"/>
           </a:xfrm>
           <a:prstGeom xmlns:a="http://schemas.openxmlformats.org/drawingml/2006/main" prst="rect">
             <a:avLst/>
@@ -14108,7 +18637,7 @@
           <p:cNvPr id="12" name="age2">
             <a:extLst xmlns:a="http://schemas.openxmlformats.org/drawingml/2006/main">
               <a:ext uri="{FF2B5EF4-FFF2-40B4-BE49-F238E27FC236}">
-                <a16:creationId xmlns:a16="http://schemas.microsoft.com/office/drawing/2014/main" id="{E54245FE-FBF2-4E5D-A24B-ADDABD204757}"/>
+                <a16:creationId xmlns:a16="http://schemas.microsoft.com/office/drawing/2014/main" id="{0F49FE81-4613-410C-94BF-2348DA953AA3}"/>
               </a:ext>
             </a:extLst>
           </p:cNvPr>
@@ -14140,6 +18669,9 @@
                 <a:solidFill>
                   <a:srgbClr val="100C0A"/>
                 </a:solidFill>
+                <a:latin typeface="Adobe Garamond Pro"/>
+                <a:ea typeface="Adobe Garamond Pro"/>
+                <a:cs typeface="Adobe Garamond Pro"/>
               </a:defRPr>
             </a:pPr>
             <a:r>
@@ -14147,6 +18679,9 @@
                 <a:solidFill>
                   <a:srgbClr val="100C0A"/>
                 </a:solidFill>
+                <a:latin typeface="Adobe Garamond Pro"/>
+                <a:ea typeface="Adobe Garamond Pro"/>
+                <a:cs typeface="Adobe Garamond Pro"/>
               </a:rPr>
               <a:t>18</a:t>
             </a:r>
@@ -14158,7 +18693,7 @@
           <p:cNvPr id="13" name="tier2">
             <a:extLst xmlns:a="http://schemas.openxmlformats.org/drawingml/2006/main">
               <a:ext uri="{FF2B5EF4-FFF2-40B4-BE49-F238E27FC236}">
-                <a16:creationId xmlns:a16="http://schemas.microsoft.com/office/drawing/2014/main" id="{0AD2062F-1D22-4930-A533-A8DC5DBA4B05}"/>
+                <a16:creationId xmlns:a16="http://schemas.microsoft.com/office/drawing/2014/main" id="{A60DA52D-75D2-41E4-BB30-D2D7B62A6188}"/>
               </a:ext>
             </a:extLst>
           </p:cNvPr>
@@ -14190,6 +18725,9 @@
                 <a:solidFill>
                   <a:srgbClr val="706862"/>
                 </a:solidFill>
+                <a:latin typeface="Inter"/>
+                <a:ea typeface="Inter"/>
+                <a:cs typeface="Inter"/>
               </a:defRPr>
             </a:pPr>
             <a:r>
@@ -14197,6 +18735,9 @@
                 <a:solidFill>
                   <a:srgbClr val="706862"/>
                 </a:solidFill>
+                <a:latin typeface="Inter"/>
+                <a:ea typeface="Inter"/>
+                <a:cs typeface="Inter"/>
               </a:rPr>
               <a:t>Súper-premium</a:t>
             </a:r>
@@ -14212,13 +18753,13 @@
           <p:nvPr/>
         </p:nvPicPr>
         <p:blipFill>
-          <a:blip xmlns:r="http://schemas.openxmlformats.org/officeDocument/2006/relationships" xmlns:a="http://schemas.openxmlformats.org/drawingml/2006/main" r:embed="R7596e84afbd24fea"/>
+          <a:blip xmlns:r="http://schemas.openxmlformats.org/officeDocument/2006/relationships" xmlns:a="http://schemas.openxmlformats.org/drawingml/2006/main" r:embed="R3b56cb048bc447b0"/>
           <a:stretch xmlns:a="http://schemas.openxmlformats.org/drawingml/2006/main"/>
         </p:blipFill>
         <p:spPr>
           <a:xfrm xmlns:a="http://schemas.openxmlformats.org/drawingml/2006/main">
-            <a:off x="9029700" y="2984340"/>
-            <a:ext cx="1809750" cy="2318070"/>
+            <a:off x="9029700" y="2984105"/>
+            <a:ext cx="1809750" cy="2318541"/>
           </a:xfrm>
           <a:prstGeom xmlns:a="http://schemas.openxmlformats.org/drawingml/2006/main" prst="rect">
             <a:avLst/>
@@ -14230,7 +18771,7 @@
           <p:cNvPr id="15" name="age3">
             <a:extLst xmlns:a="http://schemas.openxmlformats.org/drawingml/2006/main">
               <a:ext uri="{FF2B5EF4-FFF2-40B4-BE49-F238E27FC236}">
-                <a16:creationId xmlns:a16="http://schemas.microsoft.com/office/drawing/2014/main" id="{00BE3B25-1C85-4AD7-AA36-78E92556EE9F}"/>
+                <a16:creationId xmlns:a16="http://schemas.microsoft.com/office/drawing/2014/main" id="{827C8657-0226-4F1F-BE24-A805A8FBABA5}"/>
               </a:ext>
             </a:extLst>
           </p:cNvPr>
@@ -14262,6 +18803,9 @@
                 <a:solidFill>
                   <a:srgbClr val="100C0A"/>
                 </a:solidFill>
+                <a:latin typeface="Adobe Garamond Pro"/>
+                <a:ea typeface="Adobe Garamond Pro"/>
+                <a:cs typeface="Adobe Garamond Pro"/>
               </a:defRPr>
             </a:pPr>
             <a:r>
@@ -14269,6 +18813,9 @@
                 <a:solidFill>
                   <a:srgbClr val="100C0A"/>
                 </a:solidFill>
+                <a:latin typeface="Adobe Garamond Pro"/>
+                <a:ea typeface="Adobe Garamond Pro"/>
+                <a:cs typeface="Adobe Garamond Pro"/>
               </a:rPr>
               <a:t>21</a:t>
             </a:r>
@@ -14280,7 +18827,7 @@
           <p:cNvPr id="16" name="tier3">
             <a:extLst xmlns:a="http://schemas.openxmlformats.org/drawingml/2006/main">
               <a:ext uri="{FF2B5EF4-FFF2-40B4-BE49-F238E27FC236}">
-                <a16:creationId xmlns:a16="http://schemas.microsoft.com/office/drawing/2014/main" id="{074252AE-AD4C-4941-A597-052CAFDEBA2D}"/>
+                <a16:creationId xmlns:a16="http://schemas.microsoft.com/office/drawing/2014/main" id="{F7CA07AC-5D60-491D-B9A8-F66C592825FB}"/>
               </a:ext>
             </a:extLst>
           </p:cNvPr>
@@ -14312,6 +18859,9 @@
                 <a:solidFill>
                   <a:srgbClr val="706862"/>
                 </a:solidFill>
+                <a:latin typeface="Inter"/>
+                <a:ea typeface="Inter"/>
+                <a:cs typeface="Inter"/>
               </a:defRPr>
             </a:pPr>
             <a:r>
@@ -14319,6 +18869,9 @@
                 <a:solidFill>
                   <a:srgbClr val="706862"/>
                 </a:solidFill>
+                <a:latin typeface="Inter"/>
+                <a:ea typeface="Inter"/>
+                <a:cs typeface="Inter"/>
               </a:rPr>
               <a:t>Ultra-premium</a:t>
             </a:r>
@@ -14330,7 +18883,7 @@
           <p:cNvPr id="17" name="scale">
             <a:extLst xmlns:a="http://schemas.openxmlformats.org/drawingml/2006/main">
               <a:ext uri="{FF2B5EF4-FFF2-40B4-BE49-F238E27FC236}">
-                <a16:creationId xmlns:a16="http://schemas.microsoft.com/office/drawing/2014/main" id="{89A18BC5-85A4-45BB-80B8-9E7F1936F6A3}"/>
+                <a16:creationId xmlns:a16="http://schemas.microsoft.com/office/drawing/2014/main" id="{DF7D6B90-6D25-416D-A892-EE39C1ADF488}"/>
               </a:ext>
             </a:extLst>
           </p:cNvPr>
@@ -14359,7 +18912,7 @@
     </p:spTree>
     <p:extLst>
       <p:ext uri="{BB962C8B-B14F-4D97-AF65-F5344CB8AC3E}">
-        <p14:creationId xmlns:p14="http://schemas.microsoft.com/office/powerpoint/2010/main" val="1943747562"/>
+        <p14:creationId xmlns:p14="http://schemas.microsoft.com/office/powerpoint/2010/main" val="908155198"/>
       </p:ext>
     </p:extLst>
   </p:cSld>
